--- a/lesson_10-navigation/lesson_10-navigation.pptx
+++ b/lesson_10-navigation/lesson_10-navigation.pptx
@@ -5,7 +5,7 @@
     <p:sldMasterId id="2147483648" r:id="rId1"/>
   </p:sldMasterIdLst>
   <p:notesMasterIdLst>
-    <p:notesMasterId r:id="rId46"/>
+    <p:notesMasterId r:id="rId47"/>
   </p:notesMasterIdLst>
   <p:sldIdLst>
     <p:sldId id="259" r:id="rId2"/>
@@ -43,15 +43,16 @@
     <p:sldId id="374" r:id="rId34"/>
     <p:sldId id="376" r:id="rId35"/>
     <p:sldId id="401" r:id="rId36"/>
-    <p:sldId id="383" r:id="rId37"/>
-    <p:sldId id="400" r:id="rId38"/>
-    <p:sldId id="349" r:id="rId39"/>
-    <p:sldId id="361" r:id="rId40"/>
-    <p:sldId id="377" r:id="rId41"/>
-    <p:sldId id="385" r:id="rId42"/>
-    <p:sldId id="303" r:id="rId43"/>
-    <p:sldId id="386" r:id="rId44"/>
-    <p:sldId id="309" r:id="rId45"/>
+    <p:sldId id="402" r:id="rId37"/>
+    <p:sldId id="383" r:id="rId38"/>
+    <p:sldId id="400" r:id="rId39"/>
+    <p:sldId id="349" r:id="rId40"/>
+    <p:sldId id="361" r:id="rId41"/>
+    <p:sldId id="377" r:id="rId42"/>
+    <p:sldId id="385" r:id="rId43"/>
+    <p:sldId id="303" r:id="rId44"/>
+    <p:sldId id="386" r:id="rId45"/>
+    <p:sldId id="309" r:id="rId46"/>
   </p:sldIdLst>
   <p:sldSz cx="12192000" cy="6858000"/>
   <p:notesSz cx="6858000" cy="9144000"/>
@@ -240,7 +241,7 @@
           <a:p>
             <a:fld id="{81C4B3FE-0320-8142-8396-5C3025C019EC}" type="datetimeFigureOut">
               <a:rPr lang="en-IT" smtClean="0"/>
-              <a:t>2/10/26</a:t>
+              <a:t>2/19/26</a:t>
             </a:fld>
             <a:endParaRPr lang="en-IT"/>
           </a:p>
@@ -835,6 +836,114 @@
     <p:extLst>
       <p:ext uri="{BB962C8B-B14F-4D97-AF65-F5344CB8AC3E}">
         <p14:creationId xmlns:p14="http://schemas.microsoft.com/office/powerpoint/2010/main" val="453310250"/>
+      </p:ext>
+    </p:extLst>
+  </p:cSld>
+  <p:clrMapOvr>
+    <a:masterClrMapping/>
+  </p:clrMapOvr>
+</p:notes>
+</file>
+
+<file path=ppt/notesSlides/notesSlide13.xml><?xml version="1.0" encoding="utf-8"?>
+<p:notes xmlns:a="http://schemas.openxmlformats.org/drawingml/2006/main" xmlns:r="http://schemas.openxmlformats.org/officeDocument/2006/relationships" xmlns:p="http://schemas.openxmlformats.org/presentationml/2006/main">
+  <p:cSld>
+    <p:spTree>
+      <p:nvGrpSpPr>
+        <p:cNvPr id="1" name="">
+          <a:extLst>
+            <a:ext uri="{FF2B5EF4-FFF2-40B4-BE49-F238E27FC236}">
+              <a16:creationId xmlns:a16="http://schemas.microsoft.com/office/drawing/2014/main" id="{5E885610-68F2-0A6A-F3EF-2C403B7CABCB}"/>
+            </a:ext>
+          </a:extLst>
+        </p:cNvPr>
+        <p:cNvGrpSpPr/>
+        <p:nvPr/>
+      </p:nvGrpSpPr>
+      <p:grpSpPr>
+        <a:xfrm>
+          <a:off x="0" y="0"/>
+          <a:ext cx="0" cy="0"/>
+          <a:chOff x="0" y="0"/>
+          <a:chExt cx="0" cy="0"/>
+        </a:xfrm>
+      </p:grpSpPr>
+      <p:sp>
+        <p:nvSpPr>
+          <p:cNvPr id="2" name="Slide Image Placeholder 1">
+            <a:extLst>
+              <a:ext uri="{FF2B5EF4-FFF2-40B4-BE49-F238E27FC236}">
+                <a16:creationId xmlns:a16="http://schemas.microsoft.com/office/drawing/2014/main" id="{AB9A57F6-5865-A4DF-23D1-A5FE6916041E}"/>
+              </a:ext>
+            </a:extLst>
+          </p:cNvPr>
+          <p:cNvSpPr>
+            <a:spLocks noGrp="1" noRot="1" noChangeAspect="1"/>
+          </p:cNvSpPr>
+          <p:nvPr>
+            <p:ph type="sldImg"/>
+          </p:nvPr>
+        </p:nvSpPr>
+        <p:spPr/>
+      </p:sp>
+      <p:sp>
+        <p:nvSpPr>
+          <p:cNvPr id="3" name="Notes Placeholder 2">
+            <a:extLst>
+              <a:ext uri="{FF2B5EF4-FFF2-40B4-BE49-F238E27FC236}">
+                <a16:creationId xmlns:a16="http://schemas.microsoft.com/office/drawing/2014/main" id="{15E925A0-9DEA-2DB6-C3FA-19EBE391DD39}"/>
+              </a:ext>
+            </a:extLst>
+          </p:cNvPr>
+          <p:cNvSpPr>
+            <a:spLocks noGrp="1"/>
+          </p:cNvSpPr>
+          <p:nvPr>
+            <p:ph type="body" idx="1"/>
+          </p:nvPr>
+        </p:nvSpPr>
+        <p:spPr/>
+        <p:txBody>
+          <a:bodyPr/>
+          <a:lstStyle/>
+          <a:p>
+            <a:endParaRPr lang="en-IT" dirty="0"/>
+          </a:p>
+        </p:txBody>
+      </p:sp>
+      <p:sp>
+        <p:nvSpPr>
+          <p:cNvPr id="4" name="Slide Number Placeholder 3">
+            <a:extLst>
+              <a:ext uri="{FF2B5EF4-FFF2-40B4-BE49-F238E27FC236}">
+                <a16:creationId xmlns:a16="http://schemas.microsoft.com/office/drawing/2014/main" id="{C02FE54D-AA29-43FA-E53F-6CC96227703C}"/>
+              </a:ext>
+            </a:extLst>
+          </p:cNvPr>
+          <p:cNvSpPr>
+            <a:spLocks noGrp="1"/>
+          </p:cNvSpPr>
+          <p:nvPr>
+            <p:ph type="sldNum" sz="quarter" idx="5"/>
+          </p:nvPr>
+        </p:nvSpPr>
+        <p:spPr/>
+        <p:txBody>
+          <a:bodyPr/>
+          <a:lstStyle/>
+          <a:p>
+            <a:fld id="{CC0F43FB-3F33-3F4B-9768-2FBED988F992}" type="slidenum">
+              <a:rPr lang="en-IT" smtClean="0"/>
+              <a:t>36</a:t>
+            </a:fld>
+            <a:endParaRPr lang="en-IT"/>
+          </a:p>
+        </p:txBody>
+      </p:sp>
+    </p:spTree>
+    <p:extLst>
+      <p:ext uri="{BB962C8B-B14F-4D97-AF65-F5344CB8AC3E}">
+        <p14:creationId xmlns:p14="http://schemas.microsoft.com/office/powerpoint/2010/main" val="2073367014"/>
       </p:ext>
     </p:extLst>
   </p:cSld>
@@ -3636,31 +3745,41 @@
             </a:pPr>
             <a:r>
               <a:rPr lang="en-GB" sz="2000" b="1" dirty="0">
-                <a:latin typeface="Courier" pitchFamily="2" charset="0"/>
+                <a:latin typeface="Menlo" panose="020B0609030804020204" pitchFamily="49" charset="0"/>
+                <a:ea typeface="Menlo" panose="020B0609030804020204" pitchFamily="49" charset="0"/>
+                <a:cs typeface="Menlo" panose="020B0609030804020204" pitchFamily="49" charset="0"/>
               </a:rPr>
               <a:t>Future&lt;void&gt; </a:t>
             </a:r>
             <a:r>
               <a:rPr lang="en-GB" sz="2000" dirty="0" err="1">
-                <a:latin typeface="Courier" pitchFamily="2" charset="0"/>
+                <a:latin typeface="Menlo" panose="020B0609030804020204" pitchFamily="49" charset="0"/>
+                <a:ea typeface="Menlo" panose="020B0609030804020204" pitchFamily="49" charset="0"/>
+                <a:cs typeface="Menlo" panose="020B0609030804020204" pitchFamily="49" charset="0"/>
               </a:rPr>
               <a:t>fetchUserOrder</a:t>
             </a:r>
             <a:r>
               <a:rPr lang="en-GB" sz="2000" dirty="0">
-                <a:latin typeface="Courier" pitchFamily="2" charset="0"/>
+                <a:latin typeface="Menlo" panose="020B0609030804020204" pitchFamily="49" charset="0"/>
+                <a:ea typeface="Menlo" panose="020B0609030804020204" pitchFamily="49" charset="0"/>
+                <a:cs typeface="Menlo" panose="020B0609030804020204" pitchFamily="49" charset="0"/>
               </a:rPr>
               <a:t>() </a:t>
             </a:r>
             <a:r>
               <a:rPr lang="en-GB" sz="2000" b="1" dirty="0">
-                <a:latin typeface="Courier" pitchFamily="2" charset="0"/>
+                <a:latin typeface="Menlo" panose="020B0609030804020204" pitchFamily="49" charset="0"/>
+                <a:ea typeface="Menlo" panose="020B0609030804020204" pitchFamily="49" charset="0"/>
+                <a:cs typeface="Menlo" panose="020B0609030804020204" pitchFamily="49" charset="0"/>
               </a:rPr>
               <a:t>async</a:t>
             </a:r>
             <a:r>
               <a:rPr lang="en-GB" sz="2000" dirty="0">
-                <a:latin typeface="Courier" pitchFamily="2" charset="0"/>
+                <a:latin typeface="Menlo" panose="020B0609030804020204" pitchFamily="49" charset="0"/>
+                <a:ea typeface="Menlo" panose="020B0609030804020204" pitchFamily="49" charset="0"/>
+                <a:cs typeface="Menlo" panose="020B0609030804020204" pitchFamily="49" charset="0"/>
               </a:rPr>
               <a:t> {</a:t>
             </a:r>
@@ -3671,49 +3790,65 @@
             </a:pPr>
             <a:r>
               <a:rPr lang="en-GB" sz="2000" dirty="0">
-                <a:latin typeface="Courier" pitchFamily="2" charset="0"/>
+                <a:latin typeface="Menlo" panose="020B0609030804020204" pitchFamily="49" charset="0"/>
+                <a:ea typeface="Menlo" panose="020B0609030804020204" pitchFamily="49" charset="0"/>
+                <a:cs typeface="Menlo" panose="020B0609030804020204" pitchFamily="49" charset="0"/>
               </a:rPr>
               <a:t>  </a:t>
             </a:r>
             <a:r>
               <a:rPr lang="en-GB" sz="2000" b="1" dirty="0">
-                <a:latin typeface="Courier" pitchFamily="2" charset="0"/>
+                <a:latin typeface="Menlo" panose="020B0609030804020204" pitchFamily="49" charset="0"/>
+                <a:ea typeface="Menlo" panose="020B0609030804020204" pitchFamily="49" charset="0"/>
+                <a:cs typeface="Menlo" panose="020B0609030804020204" pitchFamily="49" charset="0"/>
               </a:rPr>
               <a:t>await</a:t>
             </a:r>
             <a:r>
               <a:rPr lang="en-GB" sz="2000" dirty="0">
-                <a:latin typeface="Courier" pitchFamily="2" charset="0"/>
+                <a:latin typeface="Menlo" panose="020B0609030804020204" pitchFamily="49" charset="0"/>
+                <a:ea typeface="Menlo" panose="020B0609030804020204" pitchFamily="49" charset="0"/>
+                <a:cs typeface="Menlo" panose="020B0609030804020204" pitchFamily="49" charset="0"/>
               </a:rPr>
               <a:t> </a:t>
             </a:r>
             <a:r>
               <a:rPr lang="en-GB" sz="2000" b="1" dirty="0" err="1">
-                <a:latin typeface="Courier" pitchFamily="2" charset="0"/>
+                <a:latin typeface="Menlo" panose="020B0609030804020204" pitchFamily="49" charset="0"/>
+                <a:ea typeface="Menlo" panose="020B0609030804020204" pitchFamily="49" charset="0"/>
+                <a:cs typeface="Menlo" panose="020B0609030804020204" pitchFamily="49" charset="0"/>
               </a:rPr>
               <a:t>Future</a:t>
             </a:r>
             <a:r>
               <a:rPr lang="en-GB" sz="2000" dirty="0" err="1">
-                <a:latin typeface="Courier" pitchFamily="2" charset="0"/>
+                <a:latin typeface="Menlo" panose="020B0609030804020204" pitchFamily="49" charset="0"/>
+                <a:ea typeface="Menlo" panose="020B0609030804020204" pitchFamily="49" charset="0"/>
+                <a:cs typeface="Menlo" panose="020B0609030804020204" pitchFamily="49" charset="0"/>
               </a:rPr>
               <a:t>.delayed</a:t>
             </a:r>
             <a:r>
               <a:rPr lang="en-GB" sz="2000" dirty="0">
-                <a:latin typeface="Courier" pitchFamily="2" charset="0"/>
+                <a:latin typeface="Menlo" panose="020B0609030804020204" pitchFamily="49" charset="0"/>
+                <a:ea typeface="Menlo" panose="020B0609030804020204" pitchFamily="49" charset="0"/>
+                <a:cs typeface="Menlo" panose="020B0609030804020204" pitchFamily="49" charset="0"/>
               </a:rPr>
               <a:t>(</a:t>
             </a:r>
             <a:r>
               <a:rPr lang="en-GB" sz="2000" dirty="0" err="1">
-                <a:latin typeface="Courier" pitchFamily="2" charset="0"/>
+                <a:latin typeface="Menlo" panose="020B0609030804020204" pitchFamily="49" charset="0"/>
+                <a:ea typeface="Menlo" panose="020B0609030804020204" pitchFamily="49" charset="0"/>
+                <a:cs typeface="Menlo" panose="020B0609030804020204" pitchFamily="49" charset="0"/>
               </a:rPr>
               <a:t>const</a:t>
             </a:r>
             <a:r>
               <a:rPr lang="en-GB" sz="2000" dirty="0">
-                <a:latin typeface="Courier" pitchFamily="2" charset="0"/>
+                <a:latin typeface="Menlo" panose="020B0609030804020204" pitchFamily="49" charset="0"/>
+                <a:ea typeface="Menlo" panose="020B0609030804020204" pitchFamily="49" charset="0"/>
+                <a:cs typeface="Menlo" panose="020B0609030804020204" pitchFamily="49" charset="0"/>
               </a:rPr>
               <a:t> 	Duration(seconds: 2), () =&gt; 	print('Large Latte'));</a:t>
             </a:r>
@@ -3724,18 +3859,24 @@
             </a:pPr>
             <a:r>
               <a:rPr lang="en-GB" sz="2000" dirty="0">
-                <a:latin typeface="Courier" pitchFamily="2" charset="0"/>
+                <a:latin typeface="Menlo" panose="020B0609030804020204" pitchFamily="49" charset="0"/>
+                <a:ea typeface="Menlo" panose="020B0609030804020204" pitchFamily="49" charset="0"/>
+                <a:cs typeface="Menlo" panose="020B0609030804020204" pitchFamily="49" charset="0"/>
               </a:rPr>
               <a:t>}//</a:t>
             </a:r>
             <a:r>
               <a:rPr lang="en-GB" sz="2000" dirty="0" err="1">
-                <a:latin typeface="Courier" pitchFamily="2" charset="0"/>
+                <a:latin typeface="Menlo" panose="020B0609030804020204" pitchFamily="49" charset="0"/>
+                <a:ea typeface="Menlo" panose="020B0609030804020204" pitchFamily="49" charset="0"/>
+                <a:cs typeface="Menlo" panose="020B0609030804020204" pitchFamily="49" charset="0"/>
               </a:rPr>
               <a:t>fetchUserOrder</a:t>
             </a:r>
             <a:endParaRPr lang="en-GB" sz="2000" dirty="0">
-              <a:latin typeface="Courier" pitchFamily="2" charset="0"/>
+              <a:latin typeface="Menlo" panose="020B0609030804020204" pitchFamily="49" charset="0"/>
+              <a:ea typeface="Menlo" panose="020B0609030804020204" pitchFamily="49" charset="0"/>
+              <a:cs typeface="Menlo" panose="020B0609030804020204" pitchFamily="49" charset="0"/>
             </a:endParaRPr>
           </a:p>
           <a:p>
@@ -3744,30 +3885,40 @@
             </a:pPr>
             <a:br>
               <a:rPr lang="en-GB" sz="2000" dirty="0">
-                <a:latin typeface="Courier" pitchFamily="2" charset="0"/>
+                <a:latin typeface="Menlo" panose="020B0609030804020204" pitchFamily="49" charset="0"/>
+                <a:ea typeface="Menlo" panose="020B0609030804020204" pitchFamily="49" charset="0"/>
+                <a:cs typeface="Menlo" panose="020B0609030804020204" pitchFamily="49" charset="0"/>
               </a:rPr>
             </a:br>
             <a:r>
               <a:rPr lang="en-GB" sz="2000" b="1" dirty="0">
-                <a:latin typeface="Courier" pitchFamily="2" charset="0"/>
+                <a:latin typeface="Menlo" panose="020B0609030804020204" pitchFamily="49" charset="0"/>
+                <a:ea typeface="Menlo" panose="020B0609030804020204" pitchFamily="49" charset="0"/>
+                <a:cs typeface="Menlo" panose="020B0609030804020204" pitchFamily="49" charset="0"/>
               </a:rPr>
               <a:t>Future&lt;void&gt;</a:t>
             </a:r>
             <a:r>
               <a:rPr lang="en-GB" sz="2000" dirty="0">
-                <a:latin typeface="Courier" pitchFamily="2" charset="0"/>
+                <a:latin typeface="Menlo" panose="020B0609030804020204" pitchFamily="49" charset="0"/>
+                <a:ea typeface="Menlo" panose="020B0609030804020204" pitchFamily="49" charset="0"/>
+                <a:cs typeface="Menlo" panose="020B0609030804020204" pitchFamily="49" charset="0"/>
               </a:rPr>
               <a:t> main() </a:t>
             </a:r>
             <a:r>
               <a:rPr lang="en-GB" sz="2000" b="1" dirty="0">
-                <a:latin typeface="Courier" pitchFamily="2" charset="0"/>
+                <a:latin typeface="Menlo" panose="020B0609030804020204" pitchFamily="49" charset="0"/>
+                <a:ea typeface="Menlo" panose="020B0609030804020204" pitchFamily="49" charset="0"/>
+                <a:cs typeface="Menlo" panose="020B0609030804020204" pitchFamily="49" charset="0"/>
               </a:rPr>
               <a:t>async</a:t>
             </a:r>
             <a:r>
               <a:rPr lang="en-GB" sz="2000" dirty="0">
-                <a:latin typeface="Courier" pitchFamily="2" charset="0"/>
+                <a:latin typeface="Menlo" panose="020B0609030804020204" pitchFamily="49" charset="0"/>
+                <a:ea typeface="Menlo" panose="020B0609030804020204" pitchFamily="49" charset="0"/>
+                <a:cs typeface="Menlo" panose="020B0609030804020204" pitchFamily="49" charset="0"/>
               </a:rPr>
               <a:t>{</a:t>
             </a:r>
@@ -3778,12 +3929,16 @@
             </a:pPr>
             <a:br>
               <a:rPr lang="en-GB" sz="2000" dirty="0">
-                <a:latin typeface="Courier" pitchFamily="2" charset="0"/>
+                <a:latin typeface="Menlo" panose="020B0609030804020204" pitchFamily="49" charset="0"/>
+                <a:ea typeface="Menlo" panose="020B0609030804020204" pitchFamily="49" charset="0"/>
+                <a:cs typeface="Menlo" panose="020B0609030804020204" pitchFamily="49" charset="0"/>
               </a:rPr>
             </a:br>
             <a:r>
               <a:rPr lang="en-GB" sz="2000" dirty="0">
-                <a:latin typeface="Courier" pitchFamily="2" charset="0"/>
+                <a:latin typeface="Menlo" panose="020B0609030804020204" pitchFamily="49" charset="0"/>
+                <a:ea typeface="Menlo" panose="020B0609030804020204" pitchFamily="49" charset="0"/>
+                <a:cs typeface="Menlo" panose="020B0609030804020204" pitchFamily="49" charset="0"/>
               </a:rPr>
               <a:t>  print('Fetching user order...’);</a:t>
             </a:r>
@@ -3794,31 +3949,41 @@
             </a:pPr>
             <a:r>
               <a:rPr lang="en-GB" sz="2000" dirty="0">
-                <a:latin typeface="Courier" pitchFamily="2" charset="0"/>
+                <a:latin typeface="Menlo" panose="020B0609030804020204" pitchFamily="49" charset="0"/>
+                <a:ea typeface="Menlo" panose="020B0609030804020204" pitchFamily="49" charset="0"/>
+                <a:cs typeface="Menlo" panose="020B0609030804020204" pitchFamily="49" charset="0"/>
               </a:rPr>
               <a:t>  </a:t>
             </a:r>
             <a:r>
               <a:rPr lang="en-GB" sz="2000" b="1" dirty="0">
-                <a:latin typeface="Courier" pitchFamily="2" charset="0"/>
+                <a:latin typeface="Menlo" panose="020B0609030804020204" pitchFamily="49" charset="0"/>
+                <a:ea typeface="Menlo" panose="020B0609030804020204" pitchFamily="49" charset="0"/>
+                <a:cs typeface="Menlo" panose="020B0609030804020204" pitchFamily="49" charset="0"/>
               </a:rPr>
               <a:t>await</a:t>
             </a:r>
             <a:r>
               <a:rPr lang="en-GB" sz="2000" dirty="0">
-                <a:latin typeface="Courier" pitchFamily="2" charset="0"/>
+                <a:latin typeface="Menlo" panose="020B0609030804020204" pitchFamily="49" charset="0"/>
+                <a:ea typeface="Menlo" panose="020B0609030804020204" pitchFamily="49" charset="0"/>
+                <a:cs typeface="Menlo" panose="020B0609030804020204" pitchFamily="49" charset="0"/>
               </a:rPr>
               <a:t> </a:t>
             </a:r>
             <a:r>
               <a:rPr lang="en-GB" sz="2000" dirty="0" err="1">
-                <a:latin typeface="Courier" pitchFamily="2" charset="0"/>
+                <a:latin typeface="Menlo" panose="020B0609030804020204" pitchFamily="49" charset="0"/>
+                <a:ea typeface="Menlo" panose="020B0609030804020204" pitchFamily="49" charset="0"/>
+                <a:cs typeface="Menlo" panose="020B0609030804020204" pitchFamily="49" charset="0"/>
               </a:rPr>
               <a:t>fetchUserOrder</a:t>
             </a:r>
             <a:r>
               <a:rPr lang="en-GB" sz="2000" dirty="0">
-                <a:latin typeface="Courier" pitchFamily="2" charset="0"/>
+                <a:latin typeface="Menlo" panose="020B0609030804020204" pitchFamily="49" charset="0"/>
+                <a:ea typeface="Menlo" panose="020B0609030804020204" pitchFamily="49" charset="0"/>
+                <a:cs typeface="Menlo" panose="020B0609030804020204" pitchFamily="49" charset="0"/>
               </a:rPr>
               <a:t>();</a:t>
             </a:r>
@@ -3829,7 +3994,9 @@
             </a:pPr>
             <a:r>
               <a:rPr lang="en-GB" sz="2000" dirty="0">
-                <a:latin typeface="Courier" pitchFamily="2" charset="0"/>
+                <a:latin typeface="Menlo" panose="020B0609030804020204" pitchFamily="49" charset="0"/>
+                <a:ea typeface="Menlo" panose="020B0609030804020204" pitchFamily="49" charset="0"/>
+                <a:cs typeface="Menlo" panose="020B0609030804020204" pitchFamily="49" charset="0"/>
               </a:rPr>
               <a:t>  print('Done');</a:t>
             </a:r>
@@ -3840,12 +4007,16 @@
             </a:pPr>
             <a:br>
               <a:rPr lang="en-GB" sz="2000" dirty="0">
-                <a:latin typeface="Courier" pitchFamily="2" charset="0"/>
+                <a:latin typeface="Menlo" panose="020B0609030804020204" pitchFamily="49" charset="0"/>
+                <a:ea typeface="Menlo" panose="020B0609030804020204" pitchFamily="49" charset="0"/>
+                <a:cs typeface="Menlo" panose="020B0609030804020204" pitchFamily="49" charset="0"/>
               </a:rPr>
             </a:br>
             <a:r>
               <a:rPr lang="en-GB" sz="2000" dirty="0">
-                <a:latin typeface="Courier" pitchFamily="2" charset="0"/>
+                <a:latin typeface="Menlo" panose="020B0609030804020204" pitchFamily="49" charset="0"/>
+                <a:ea typeface="Menlo" panose="020B0609030804020204" pitchFamily="49" charset="0"/>
+                <a:cs typeface="Menlo" panose="020B0609030804020204" pitchFamily="49" charset="0"/>
               </a:rPr>
               <a:t>}//main</a:t>
             </a:r>
@@ -4597,7 +4768,9 @@
           <a:p>
             <a:r>
               <a:rPr lang="en-IT" dirty="0">
-                <a:latin typeface="Courier" pitchFamily="2" charset="0"/>
+                <a:latin typeface="Menlo" panose="020B0609030804020204" pitchFamily="49" charset="0"/>
+                <a:ea typeface="Menlo" panose="020B0609030804020204" pitchFamily="49" charset="0"/>
+                <a:cs typeface="Menlo" panose="020B0609030804020204" pitchFamily="49" charset="0"/>
               </a:rPr>
               <a:t>Navigator</a:t>
             </a:r>
@@ -5299,7 +5472,9 @@
           <a:p>
             <a:r>
               <a:rPr lang="en-IT" dirty="0">
-                <a:latin typeface="Courier" pitchFamily="2" charset="0"/>
+                <a:latin typeface="Menlo" panose="020B0609030804020204" pitchFamily="49" charset="0"/>
+                <a:ea typeface="Menlo" panose="020B0609030804020204" pitchFamily="49" charset="0"/>
+                <a:cs typeface="Menlo" panose="020B0609030804020204" pitchFamily="49" charset="0"/>
               </a:rPr>
               <a:t>Navigator</a:t>
             </a:r>
@@ -5311,17 +5486,27 @@
           <a:p>
             <a:r>
               <a:rPr lang="en-IT" dirty="0"/>
-              <a:t>To do so, </a:t>
+              <a:t>To do so</a:t>
+            </a:r>
+            <a:r>
+              <a:rPr lang="en-IT"/>
+              <a:t>, </a:t>
             </a:r>
             <a:r>
               <a:rPr lang="en-IT" dirty="0">
-                <a:latin typeface="Courier" pitchFamily="2" charset="0"/>
+                <a:latin typeface="Menlo" panose="020B0609030804020204" pitchFamily="49" charset="0"/>
+                <a:ea typeface="Menlo" panose="020B0609030804020204" pitchFamily="49" charset="0"/>
+                <a:cs typeface="Menlo" panose="020B0609030804020204" pitchFamily="49" charset="0"/>
               </a:rPr>
               <a:t>Navigator</a:t>
             </a:r>
             <a:r>
+              <a:rPr lang="en-IT"/>
+              <a:t> </a:t>
+            </a:r>
+            <a:r>
               <a:rPr lang="en-IT" dirty="0"/>
-              <a:t> uses a </a:t>
+              <a:t>uses a </a:t>
             </a:r>
             <a:r>
               <a:rPr lang="en-IT" b="1" dirty="0"/>
@@ -5349,15 +5534,25 @@
           <a:p>
             <a:r>
               <a:rPr lang="en-IT" dirty="0"/>
-              <a:t>When you go back, you are “popping” the route out of the </a:t>
-            </a:r>
-            <a:r>
-              <a:rPr lang="en-IT" dirty="0">
-                <a:latin typeface="Courier" pitchFamily="2" charset="0"/>
+              <a:t>When you go back, you are “popping” the route out of </a:t>
+            </a:r>
+            <a:r>
+              <a:rPr lang="en-IT"/>
+              <a:t>the </a:t>
+            </a:r>
+            <a:r>
+              <a:rPr lang="en-IT">
+                <a:latin typeface="Menlo" panose="020B0609030804020204" pitchFamily="49" charset="0"/>
+                <a:ea typeface="Menlo" panose="020B0609030804020204" pitchFamily="49" charset="0"/>
+                <a:cs typeface="Menlo" panose="020B0609030804020204" pitchFamily="49" charset="0"/>
               </a:rPr>
               <a:t>Navigator</a:t>
             </a:r>
-            <a:endParaRPr lang="en-IT" dirty="0"/>
+            <a:endParaRPr lang="en-IT" dirty="0">
+              <a:latin typeface="Menlo" panose="020B0609030804020204" pitchFamily="49" charset="0"/>
+              <a:ea typeface="Menlo" panose="020B0609030804020204" pitchFamily="49" charset="0"/>
+              <a:cs typeface="Menlo" panose="020B0609030804020204" pitchFamily="49" charset="0"/>
+            </a:endParaRPr>
           </a:p>
           <a:p>
             <a:endParaRPr lang="en-IT" dirty="0"/>
@@ -5407,7 +5602,9 @@
             <a:pPr algn="ctr"/>
             <a:r>
               <a:rPr lang="en-IT" dirty="0">
-                <a:latin typeface="Courier" pitchFamily="2" charset="0"/>
+                <a:latin typeface="Menlo" panose="020B0609030804020204" pitchFamily="49" charset="0"/>
+                <a:ea typeface="Menlo" panose="020B0609030804020204" pitchFamily="49" charset="0"/>
+                <a:cs typeface="Menlo" panose="020B0609030804020204" pitchFamily="49" charset="0"/>
               </a:rPr>
               <a:t>HomePage</a:t>
             </a:r>
@@ -5457,7 +5654,9 @@
             <a:pPr algn="ctr"/>
             <a:r>
               <a:rPr lang="en-IT" dirty="0">
-                <a:latin typeface="Courier" pitchFamily="2" charset="0"/>
+                <a:latin typeface="Menlo" panose="020B0609030804020204" pitchFamily="49" charset="0"/>
+                <a:ea typeface="Menlo" panose="020B0609030804020204" pitchFamily="49" charset="0"/>
+                <a:cs typeface="Menlo" panose="020B0609030804020204" pitchFamily="49" charset="0"/>
               </a:rPr>
               <a:t>ProfilePage</a:t>
             </a:r>
@@ -5507,7 +5706,9 @@
             <a:pPr algn="ctr"/>
             <a:r>
               <a:rPr lang="en-IT" dirty="0">
-                <a:latin typeface="Courier" pitchFamily="2" charset="0"/>
+                <a:latin typeface="Menlo" panose="020B0609030804020204" pitchFamily="49" charset="0"/>
+                <a:ea typeface="Menlo" panose="020B0609030804020204" pitchFamily="49" charset="0"/>
+                <a:cs typeface="Menlo" panose="020B0609030804020204" pitchFamily="49" charset="0"/>
               </a:rPr>
               <a:t>HomePage</a:t>
             </a:r>
@@ -5643,7 +5844,9 @@
             <a:pPr algn="ctr"/>
             <a:r>
               <a:rPr lang="en-IT" dirty="0">
-                <a:latin typeface="Courier" pitchFamily="2" charset="0"/>
+                <a:latin typeface="Menlo" panose="020B0609030804020204" pitchFamily="49" charset="0"/>
+                <a:ea typeface="Menlo" panose="020B0609030804020204" pitchFamily="49" charset="0"/>
+                <a:cs typeface="Menlo" panose="020B0609030804020204" pitchFamily="49" charset="0"/>
               </a:rPr>
               <a:t>HomePage</a:t>
             </a:r>
@@ -5693,7 +5896,9 @@
             <a:pPr algn="ctr"/>
             <a:r>
               <a:rPr lang="en-IT" dirty="0">
-                <a:latin typeface="Courier" pitchFamily="2" charset="0"/>
+                <a:latin typeface="Menlo" panose="020B0609030804020204" pitchFamily="49" charset="0"/>
+                <a:ea typeface="Menlo" panose="020B0609030804020204" pitchFamily="49" charset="0"/>
+                <a:cs typeface="Menlo" panose="020B0609030804020204" pitchFamily="49" charset="0"/>
               </a:rPr>
               <a:t>HomePage</a:t>
             </a:r>
@@ -5743,7 +5948,9 @@
             <a:pPr algn="ctr"/>
             <a:r>
               <a:rPr lang="en-IT" dirty="0">
-                <a:latin typeface="Courier" pitchFamily="2" charset="0"/>
+                <a:latin typeface="Menlo" panose="020B0609030804020204" pitchFamily="49" charset="0"/>
+                <a:ea typeface="Menlo" panose="020B0609030804020204" pitchFamily="49" charset="0"/>
+                <a:cs typeface="Menlo" panose="020B0609030804020204" pitchFamily="49" charset="0"/>
               </a:rPr>
               <a:t>ProfilePage</a:t>
             </a:r>
@@ -5793,7 +6000,9 @@
             <a:pPr algn="ctr"/>
             <a:r>
               <a:rPr lang="en-IT" dirty="0">
-                <a:latin typeface="Courier" pitchFamily="2" charset="0"/>
+                <a:latin typeface="Menlo" panose="020B0609030804020204" pitchFamily="49" charset="0"/>
+                <a:ea typeface="Menlo" panose="020B0609030804020204" pitchFamily="49" charset="0"/>
+                <a:cs typeface="Menlo" panose="020B0609030804020204" pitchFamily="49" charset="0"/>
               </a:rPr>
               <a:t>HomePage</a:t>
             </a:r>
@@ -5964,8 +6173,8 @@
         </p:nvSpPr>
         <p:spPr>
           <a:xfrm>
-            <a:off x="2774895" y="5805457"/>
-            <a:ext cx="1932004" cy="369332"/>
+            <a:off x="2652688" y="5760091"/>
+            <a:ext cx="2349169" cy="369332"/>
           </a:xfrm>
           <a:prstGeom prst="rect">
             <a:avLst/>
@@ -5981,7 +6190,21 @@
               <a:rPr lang="en-IT" dirty="0">
                 <a:latin typeface="Aptos" panose="020B0004020202020204" pitchFamily="34" charset="0"/>
               </a:rPr>
-              <a:t>Go to ProfilePage </a:t>
+              <a:t>Go to </a:t>
+            </a:r>
+            <a:r>
+              <a:rPr lang="en-IT" dirty="0">
+                <a:latin typeface="Menlo" panose="020B0609030804020204" pitchFamily="49" charset="0"/>
+                <a:ea typeface="Menlo" panose="020B0609030804020204" pitchFamily="49" charset="0"/>
+                <a:cs typeface="Menlo" panose="020B0609030804020204" pitchFamily="49" charset="0"/>
+              </a:rPr>
+              <a:t>ProfilePage</a:t>
+            </a:r>
+            <a:r>
+              <a:rPr lang="en-IT" dirty="0">
+                <a:latin typeface="Aptos" panose="020B0004020202020204" pitchFamily="34" charset="0"/>
+              </a:rPr>
+              <a:t> </a:t>
             </a:r>
           </a:p>
         </p:txBody>
@@ -6000,8 +6223,8 @@
         </p:nvSpPr>
         <p:spPr>
           <a:xfrm>
-            <a:off x="7169248" y="5805457"/>
-            <a:ext cx="1905330" cy="369332"/>
+            <a:off x="7123623" y="5754062"/>
+            <a:ext cx="1930785" cy="369332"/>
           </a:xfrm>
           <a:prstGeom prst="rect">
             <a:avLst/>
@@ -6017,7 +6240,21 @@
               <a:rPr lang="en-IT" dirty="0">
                 <a:latin typeface="Aptos" panose="020B0004020202020204" pitchFamily="34" charset="0"/>
               </a:rPr>
-              <a:t>Go to HomePage </a:t>
+              <a:t>Go to </a:t>
+            </a:r>
+            <a:r>
+              <a:rPr lang="en-IT" dirty="0">
+                <a:latin typeface="Menlo" panose="020B0609030804020204" pitchFamily="49" charset="0"/>
+                <a:ea typeface="Menlo" panose="020B0609030804020204" pitchFamily="49" charset="0"/>
+                <a:cs typeface="Menlo" panose="020B0609030804020204" pitchFamily="49" charset="0"/>
+              </a:rPr>
+              <a:t>HomePage</a:t>
+            </a:r>
+            <a:r>
+              <a:rPr lang="en-IT" dirty="0">
+                <a:latin typeface="Aptos" panose="020B0004020202020204" pitchFamily="34" charset="0"/>
+              </a:rPr>
+              <a:t> </a:t>
             </a:r>
           </a:p>
         </p:txBody>
@@ -6341,31 +6578,41 @@
             </a:pPr>
             <a:r>
               <a:rPr lang="en-GB" sz="1600" dirty="0">
-                <a:latin typeface="Courier" pitchFamily="2" charset="0"/>
+                <a:latin typeface="Menlo" panose="020B0609030804020204" pitchFamily="49" charset="0"/>
+                <a:ea typeface="Menlo" panose="020B0609030804020204" pitchFamily="49" charset="0"/>
+                <a:cs typeface="Menlo" panose="020B0609030804020204" pitchFamily="49" charset="0"/>
               </a:rPr>
               <a:t>import '</a:t>
             </a:r>
             <a:r>
               <a:rPr lang="en-GB" sz="1600" dirty="0" err="1">
-                <a:latin typeface="Courier" pitchFamily="2" charset="0"/>
+                <a:latin typeface="Menlo" panose="020B0609030804020204" pitchFamily="49" charset="0"/>
+                <a:ea typeface="Menlo" panose="020B0609030804020204" pitchFamily="49" charset="0"/>
+                <a:cs typeface="Menlo" panose="020B0609030804020204" pitchFamily="49" charset="0"/>
               </a:rPr>
               <a:t>package:flutter</a:t>
             </a:r>
             <a:r>
               <a:rPr lang="en-GB" sz="1600" dirty="0">
-                <a:latin typeface="Courier" pitchFamily="2" charset="0"/>
+                <a:latin typeface="Menlo" panose="020B0609030804020204" pitchFamily="49" charset="0"/>
+                <a:ea typeface="Menlo" panose="020B0609030804020204" pitchFamily="49" charset="0"/>
+                <a:cs typeface="Menlo" panose="020B0609030804020204" pitchFamily="49" charset="0"/>
               </a:rPr>
               <a:t>/</a:t>
             </a:r>
             <a:r>
               <a:rPr lang="en-GB" sz="1600" dirty="0" err="1">
-                <a:latin typeface="Courier" pitchFamily="2" charset="0"/>
+                <a:latin typeface="Menlo" panose="020B0609030804020204" pitchFamily="49" charset="0"/>
+                <a:ea typeface="Menlo" panose="020B0609030804020204" pitchFamily="49" charset="0"/>
+                <a:cs typeface="Menlo" panose="020B0609030804020204" pitchFamily="49" charset="0"/>
               </a:rPr>
               <a:t>material.dart</a:t>
             </a:r>
             <a:r>
               <a:rPr lang="en-GB" sz="1600" dirty="0">
-                <a:latin typeface="Courier" pitchFamily="2" charset="0"/>
+                <a:latin typeface="Menlo" panose="020B0609030804020204" pitchFamily="49" charset="0"/>
+                <a:ea typeface="Menlo" panose="020B0609030804020204" pitchFamily="49" charset="0"/>
+                <a:cs typeface="Menlo" panose="020B0609030804020204" pitchFamily="49" charset="0"/>
               </a:rPr>
               <a:t>';</a:t>
             </a:r>
@@ -6376,31 +6623,41 @@
             </a:pPr>
             <a:r>
               <a:rPr lang="en-GB" sz="1600" dirty="0">
-                <a:latin typeface="Courier" pitchFamily="2" charset="0"/>
+                <a:latin typeface="Menlo" panose="020B0609030804020204" pitchFamily="49" charset="0"/>
+                <a:ea typeface="Menlo" panose="020B0609030804020204" pitchFamily="49" charset="0"/>
+                <a:cs typeface="Menlo" panose="020B0609030804020204" pitchFamily="49" charset="0"/>
               </a:rPr>
               <a:t>class </a:t>
             </a:r>
             <a:r>
               <a:rPr lang="en-GB" sz="1600" dirty="0" err="1">
-                <a:latin typeface="Courier" pitchFamily="2" charset="0"/>
+                <a:latin typeface="Menlo" panose="020B0609030804020204" pitchFamily="49" charset="0"/>
+                <a:ea typeface="Menlo" panose="020B0609030804020204" pitchFamily="49" charset="0"/>
+                <a:cs typeface="Menlo" panose="020B0609030804020204" pitchFamily="49" charset="0"/>
               </a:rPr>
               <a:t>HomePage</a:t>
             </a:r>
             <a:r>
               <a:rPr lang="en-GB" sz="1600" dirty="0">
-                <a:latin typeface="Courier" pitchFamily="2" charset="0"/>
+                <a:latin typeface="Menlo" panose="020B0609030804020204" pitchFamily="49" charset="0"/>
+                <a:ea typeface="Menlo" panose="020B0609030804020204" pitchFamily="49" charset="0"/>
+                <a:cs typeface="Menlo" panose="020B0609030804020204" pitchFamily="49" charset="0"/>
               </a:rPr>
               <a:t> extends </a:t>
             </a:r>
             <a:r>
               <a:rPr lang="en-GB" sz="1600" dirty="0" err="1">
-                <a:latin typeface="Courier" pitchFamily="2" charset="0"/>
+                <a:latin typeface="Menlo" panose="020B0609030804020204" pitchFamily="49" charset="0"/>
+                <a:ea typeface="Menlo" panose="020B0609030804020204" pitchFamily="49" charset="0"/>
+                <a:cs typeface="Menlo" panose="020B0609030804020204" pitchFamily="49" charset="0"/>
               </a:rPr>
               <a:t>StatelessWidget</a:t>
             </a:r>
             <a:r>
               <a:rPr lang="en-GB" sz="1600" dirty="0">
-                <a:latin typeface="Courier" pitchFamily="2" charset="0"/>
+                <a:latin typeface="Menlo" panose="020B0609030804020204" pitchFamily="49" charset="0"/>
+                <a:ea typeface="Menlo" panose="020B0609030804020204" pitchFamily="49" charset="0"/>
+                <a:cs typeface="Menlo" panose="020B0609030804020204" pitchFamily="49" charset="0"/>
               </a:rPr>
               <a:t> {</a:t>
             </a:r>
@@ -6411,31 +6668,41 @@
             </a:pPr>
             <a:r>
               <a:rPr lang="en-GB" sz="1600" dirty="0">
-                <a:latin typeface="Courier" pitchFamily="2" charset="0"/>
+                <a:latin typeface="Menlo" panose="020B0609030804020204" pitchFamily="49" charset="0"/>
+                <a:ea typeface="Menlo" panose="020B0609030804020204" pitchFamily="49" charset="0"/>
+                <a:cs typeface="Menlo" panose="020B0609030804020204" pitchFamily="49" charset="0"/>
               </a:rPr>
               <a:t>  </a:t>
             </a:r>
             <a:r>
               <a:rPr lang="en-GB" sz="1600" dirty="0" err="1">
-                <a:latin typeface="Courier" pitchFamily="2" charset="0"/>
+                <a:latin typeface="Menlo" panose="020B0609030804020204" pitchFamily="49" charset="0"/>
+                <a:ea typeface="Menlo" panose="020B0609030804020204" pitchFamily="49" charset="0"/>
+                <a:cs typeface="Menlo" panose="020B0609030804020204" pitchFamily="49" charset="0"/>
               </a:rPr>
               <a:t>const</a:t>
             </a:r>
             <a:r>
               <a:rPr lang="en-GB" sz="1600" dirty="0">
-                <a:latin typeface="Courier" pitchFamily="2" charset="0"/>
+                <a:latin typeface="Menlo" panose="020B0609030804020204" pitchFamily="49" charset="0"/>
+                <a:ea typeface="Menlo" panose="020B0609030804020204" pitchFamily="49" charset="0"/>
+                <a:cs typeface="Menlo" panose="020B0609030804020204" pitchFamily="49" charset="0"/>
               </a:rPr>
               <a:t> </a:t>
             </a:r>
             <a:r>
               <a:rPr lang="en-GB" sz="1600" dirty="0" err="1">
-                <a:latin typeface="Courier" pitchFamily="2" charset="0"/>
+                <a:latin typeface="Menlo" panose="020B0609030804020204" pitchFamily="49" charset="0"/>
+                <a:ea typeface="Menlo" panose="020B0609030804020204" pitchFamily="49" charset="0"/>
+                <a:cs typeface="Menlo" panose="020B0609030804020204" pitchFamily="49" charset="0"/>
               </a:rPr>
               <a:t>HomePage</a:t>
             </a:r>
             <a:r>
               <a:rPr lang="en-GB" sz="1600" dirty="0">
-                <a:latin typeface="Courier" pitchFamily="2" charset="0"/>
+                <a:latin typeface="Menlo" panose="020B0609030804020204" pitchFamily="49" charset="0"/>
+                <a:ea typeface="Menlo" panose="020B0609030804020204" pitchFamily="49" charset="0"/>
+                <a:cs typeface="Menlo" panose="020B0609030804020204" pitchFamily="49" charset="0"/>
               </a:rPr>
               <a:t>({Key? key}) : super(key: key);</a:t>
             </a:r>
@@ -6446,31 +6713,41 @@
             </a:pPr>
             <a:r>
               <a:rPr lang="en-GB" sz="1600" dirty="0">
-                <a:latin typeface="Courier" pitchFamily="2" charset="0"/>
+                <a:latin typeface="Menlo" panose="020B0609030804020204" pitchFamily="49" charset="0"/>
+                <a:ea typeface="Menlo" panose="020B0609030804020204" pitchFamily="49" charset="0"/>
+                <a:cs typeface="Menlo" panose="020B0609030804020204" pitchFamily="49" charset="0"/>
               </a:rPr>
               <a:t>  static </a:t>
             </a:r>
             <a:r>
               <a:rPr lang="en-GB" sz="1600" dirty="0" err="1">
-                <a:latin typeface="Courier" pitchFamily="2" charset="0"/>
+                <a:latin typeface="Menlo" panose="020B0609030804020204" pitchFamily="49" charset="0"/>
+                <a:ea typeface="Menlo" panose="020B0609030804020204" pitchFamily="49" charset="0"/>
+                <a:cs typeface="Menlo" panose="020B0609030804020204" pitchFamily="49" charset="0"/>
               </a:rPr>
               <a:t>const</a:t>
             </a:r>
             <a:r>
               <a:rPr lang="en-GB" sz="1600" dirty="0">
-                <a:latin typeface="Courier" pitchFamily="2" charset="0"/>
+                <a:latin typeface="Menlo" panose="020B0609030804020204" pitchFamily="49" charset="0"/>
+                <a:ea typeface="Menlo" panose="020B0609030804020204" pitchFamily="49" charset="0"/>
+                <a:cs typeface="Menlo" panose="020B0609030804020204" pitchFamily="49" charset="0"/>
               </a:rPr>
               <a:t> </a:t>
             </a:r>
             <a:r>
               <a:rPr lang="en-GB" sz="1600" dirty="0" err="1">
-                <a:latin typeface="Courier" pitchFamily="2" charset="0"/>
+                <a:latin typeface="Menlo" panose="020B0609030804020204" pitchFamily="49" charset="0"/>
+                <a:ea typeface="Menlo" panose="020B0609030804020204" pitchFamily="49" charset="0"/>
+                <a:cs typeface="Menlo" panose="020B0609030804020204" pitchFamily="49" charset="0"/>
               </a:rPr>
               <a:t>routename</a:t>
             </a:r>
             <a:r>
               <a:rPr lang="en-GB" sz="1600" dirty="0">
-                <a:latin typeface="Courier" pitchFamily="2" charset="0"/>
+                <a:latin typeface="Menlo" panose="020B0609030804020204" pitchFamily="49" charset="0"/>
+                <a:ea typeface="Menlo" panose="020B0609030804020204" pitchFamily="49" charset="0"/>
+                <a:cs typeface="Menlo" panose="020B0609030804020204" pitchFamily="49" charset="0"/>
               </a:rPr>
               <a:t> = 'Homepage';</a:t>
             </a:r>
@@ -6481,7 +6758,9 @@
             </a:pPr>
             <a:r>
               <a:rPr lang="en-GB" sz="1600" dirty="0">
-                <a:latin typeface="Courier" pitchFamily="2" charset="0"/>
+                <a:latin typeface="Menlo" panose="020B0609030804020204" pitchFamily="49" charset="0"/>
+                <a:ea typeface="Menlo" panose="020B0609030804020204" pitchFamily="49" charset="0"/>
+                <a:cs typeface="Menlo" panose="020B0609030804020204" pitchFamily="49" charset="0"/>
               </a:rPr>
               <a:t>  @override</a:t>
             </a:r>
@@ -6492,19 +6771,25 @@
             </a:pPr>
             <a:r>
               <a:rPr lang="en-GB" sz="1600" dirty="0">
-                <a:latin typeface="Courier" pitchFamily="2" charset="0"/>
+                <a:latin typeface="Menlo" panose="020B0609030804020204" pitchFamily="49" charset="0"/>
+                <a:ea typeface="Menlo" panose="020B0609030804020204" pitchFamily="49" charset="0"/>
+                <a:cs typeface="Menlo" panose="020B0609030804020204" pitchFamily="49" charset="0"/>
               </a:rPr>
               <a:t>  Widget build(</a:t>
             </a:r>
             <a:r>
               <a:rPr lang="en-GB" sz="1600" dirty="0" err="1">
-                <a:latin typeface="Courier" pitchFamily="2" charset="0"/>
+                <a:latin typeface="Menlo" panose="020B0609030804020204" pitchFamily="49" charset="0"/>
+                <a:ea typeface="Menlo" panose="020B0609030804020204" pitchFamily="49" charset="0"/>
+                <a:cs typeface="Menlo" panose="020B0609030804020204" pitchFamily="49" charset="0"/>
               </a:rPr>
               <a:t>BuildContext</a:t>
             </a:r>
             <a:r>
               <a:rPr lang="en-GB" sz="1600" dirty="0">
-                <a:latin typeface="Courier" pitchFamily="2" charset="0"/>
+                <a:latin typeface="Menlo" panose="020B0609030804020204" pitchFamily="49" charset="0"/>
+                <a:ea typeface="Menlo" panose="020B0609030804020204" pitchFamily="49" charset="0"/>
+                <a:cs typeface="Menlo" panose="020B0609030804020204" pitchFamily="49" charset="0"/>
               </a:rPr>
               <a:t> context) {</a:t>
             </a:r>
@@ -6515,7 +6800,9 @@
             </a:pPr>
             <a:r>
               <a:rPr lang="en-GB" sz="1600" dirty="0">
-                <a:latin typeface="Courier" pitchFamily="2" charset="0"/>
+                <a:latin typeface="Menlo" panose="020B0609030804020204" pitchFamily="49" charset="0"/>
+                <a:ea typeface="Menlo" panose="020B0609030804020204" pitchFamily="49" charset="0"/>
+                <a:cs typeface="Menlo" panose="020B0609030804020204" pitchFamily="49" charset="0"/>
               </a:rPr>
               <a:t>    return Scaffold(</a:t>
             </a:r>
@@ -6526,31 +6813,41 @@
             </a:pPr>
             <a:r>
               <a:rPr lang="en-GB" sz="1600" dirty="0">
-                <a:latin typeface="Courier" pitchFamily="2" charset="0"/>
+                <a:latin typeface="Menlo" panose="020B0609030804020204" pitchFamily="49" charset="0"/>
+                <a:ea typeface="Menlo" panose="020B0609030804020204" pitchFamily="49" charset="0"/>
+                <a:cs typeface="Menlo" panose="020B0609030804020204" pitchFamily="49" charset="0"/>
               </a:rPr>
               <a:t>      </a:t>
             </a:r>
             <a:r>
               <a:rPr lang="en-GB" sz="1600" dirty="0" err="1">
-                <a:latin typeface="Courier" pitchFamily="2" charset="0"/>
+                <a:latin typeface="Menlo" panose="020B0609030804020204" pitchFamily="49" charset="0"/>
+                <a:ea typeface="Menlo" panose="020B0609030804020204" pitchFamily="49" charset="0"/>
+                <a:cs typeface="Menlo" panose="020B0609030804020204" pitchFamily="49" charset="0"/>
               </a:rPr>
               <a:t>appBar</a:t>
             </a:r>
             <a:r>
               <a:rPr lang="en-GB" sz="1600" dirty="0">
-                <a:latin typeface="Courier" pitchFamily="2" charset="0"/>
+                <a:latin typeface="Menlo" panose="020B0609030804020204" pitchFamily="49" charset="0"/>
+                <a:ea typeface="Menlo" panose="020B0609030804020204" pitchFamily="49" charset="0"/>
+                <a:cs typeface="Menlo" panose="020B0609030804020204" pitchFamily="49" charset="0"/>
               </a:rPr>
               <a:t>: </a:t>
             </a:r>
             <a:r>
               <a:rPr lang="en-GB" sz="1600" dirty="0" err="1">
-                <a:latin typeface="Courier" pitchFamily="2" charset="0"/>
+                <a:latin typeface="Menlo" panose="020B0609030804020204" pitchFamily="49" charset="0"/>
+                <a:ea typeface="Menlo" panose="020B0609030804020204" pitchFamily="49" charset="0"/>
+                <a:cs typeface="Menlo" panose="020B0609030804020204" pitchFamily="49" charset="0"/>
               </a:rPr>
               <a:t>AppBar</a:t>
             </a:r>
             <a:r>
               <a:rPr lang="en-GB" sz="1600" dirty="0">
-                <a:latin typeface="Courier" pitchFamily="2" charset="0"/>
+                <a:latin typeface="Menlo" panose="020B0609030804020204" pitchFamily="49" charset="0"/>
+                <a:ea typeface="Menlo" panose="020B0609030804020204" pitchFamily="49" charset="0"/>
+                <a:cs typeface="Menlo" panose="020B0609030804020204" pitchFamily="49" charset="0"/>
               </a:rPr>
               <a:t>(</a:t>
             </a:r>
@@ -6561,19 +6858,25 @@
             </a:pPr>
             <a:r>
               <a:rPr lang="en-GB" sz="1600" dirty="0">
-                <a:latin typeface="Courier" pitchFamily="2" charset="0"/>
+                <a:latin typeface="Menlo" panose="020B0609030804020204" pitchFamily="49" charset="0"/>
+                <a:ea typeface="Menlo" panose="020B0609030804020204" pitchFamily="49" charset="0"/>
+                <a:cs typeface="Menlo" panose="020B0609030804020204" pitchFamily="49" charset="0"/>
               </a:rPr>
               <a:t>        title: Text(</a:t>
             </a:r>
             <a:r>
               <a:rPr lang="en-GB" sz="1600" dirty="0" err="1">
-                <a:latin typeface="Courier" pitchFamily="2" charset="0"/>
+                <a:latin typeface="Menlo" panose="020B0609030804020204" pitchFamily="49" charset="0"/>
+                <a:ea typeface="Menlo" panose="020B0609030804020204" pitchFamily="49" charset="0"/>
+                <a:cs typeface="Menlo" panose="020B0609030804020204" pitchFamily="49" charset="0"/>
               </a:rPr>
               <a:t>HomePage.routename</a:t>
             </a:r>
             <a:r>
               <a:rPr lang="en-GB" sz="1600" dirty="0">
-                <a:latin typeface="Courier" pitchFamily="2" charset="0"/>
+                <a:latin typeface="Menlo" panose="020B0609030804020204" pitchFamily="49" charset="0"/>
+                <a:ea typeface="Menlo" panose="020B0609030804020204" pitchFamily="49" charset="0"/>
+                <a:cs typeface="Menlo" panose="020B0609030804020204" pitchFamily="49" charset="0"/>
               </a:rPr>
               <a:t>),</a:t>
             </a:r>
@@ -6584,7 +6887,9 @@
             </a:pPr>
             <a:r>
               <a:rPr lang="en-GB" sz="1600" dirty="0">
-                <a:latin typeface="Courier" pitchFamily="2" charset="0"/>
+                <a:latin typeface="Menlo" panose="020B0609030804020204" pitchFamily="49" charset="0"/>
+                <a:ea typeface="Menlo" panose="020B0609030804020204" pitchFamily="49" charset="0"/>
+                <a:cs typeface="Menlo" panose="020B0609030804020204" pitchFamily="49" charset="0"/>
               </a:rPr>
               <a:t>      ),</a:t>
             </a:r>
@@ -6595,12 +6900,16 @@
             </a:pPr>
             <a:r>
               <a:rPr lang="en-GB" sz="1600" dirty="0">
-                <a:latin typeface="Courier" pitchFamily="2" charset="0"/>
+                <a:latin typeface="Menlo" panose="020B0609030804020204" pitchFamily="49" charset="0"/>
+                <a:ea typeface="Menlo" panose="020B0609030804020204" pitchFamily="49" charset="0"/>
+                <a:cs typeface="Menlo" panose="020B0609030804020204" pitchFamily="49" charset="0"/>
               </a:rPr>
               <a:t>      ...</a:t>
             </a:r>
             <a:endParaRPr lang="en-IT" sz="1600" dirty="0">
-              <a:latin typeface="Courier" pitchFamily="2" charset="0"/>
+              <a:latin typeface="Menlo" panose="020B0609030804020204" pitchFamily="49" charset="0"/>
+              <a:ea typeface="Menlo" panose="020B0609030804020204" pitchFamily="49" charset="0"/>
+              <a:cs typeface="Menlo" panose="020B0609030804020204" pitchFamily="49" charset="0"/>
             </a:endParaRPr>
           </a:p>
         </p:txBody>
@@ -6818,7 +7127,9 @@
             </a:pPr>
             <a:r>
               <a:rPr lang="en-GB" sz="1600" dirty="0">
-                <a:latin typeface="Courier" pitchFamily="2" charset="0"/>
+                <a:latin typeface="Menlo" panose="020B0609030804020204" pitchFamily="49" charset="0"/>
+                <a:ea typeface="Menlo" panose="020B0609030804020204" pitchFamily="49" charset="0"/>
+                <a:cs typeface="Menlo" panose="020B0609030804020204" pitchFamily="49" charset="0"/>
               </a:rPr>
               <a:t>...</a:t>
             </a:r>
@@ -6830,19 +7141,25 @@
             </a:pPr>
             <a:r>
               <a:rPr lang="en-GB" sz="1600" dirty="0">
-                <a:latin typeface="Courier" pitchFamily="2" charset="0"/>
+                <a:latin typeface="Menlo" panose="020B0609030804020204" pitchFamily="49" charset="0"/>
+                <a:ea typeface="Menlo" panose="020B0609030804020204" pitchFamily="49" charset="0"/>
+                <a:cs typeface="Menlo" panose="020B0609030804020204" pitchFamily="49" charset="0"/>
               </a:rPr>
               <a:t>body: </a:t>
             </a:r>
             <a:r>
               <a:rPr lang="en-GB" sz="1600" dirty="0" err="1">
-                <a:latin typeface="Courier" pitchFamily="2" charset="0"/>
+                <a:latin typeface="Menlo" panose="020B0609030804020204" pitchFamily="49" charset="0"/>
+                <a:ea typeface="Menlo" panose="020B0609030804020204" pitchFamily="49" charset="0"/>
+                <a:cs typeface="Menlo" panose="020B0609030804020204" pitchFamily="49" charset="0"/>
               </a:rPr>
               <a:t>Center</a:t>
             </a:r>
             <a:r>
               <a:rPr lang="en-GB" sz="1600" dirty="0">
-                <a:latin typeface="Courier" pitchFamily="2" charset="0"/>
+                <a:latin typeface="Menlo" panose="020B0609030804020204" pitchFamily="49" charset="0"/>
+                <a:ea typeface="Menlo" panose="020B0609030804020204" pitchFamily="49" charset="0"/>
+                <a:cs typeface="Menlo" panose="020B0609030804020204" pitchFamily="49" charset="0"/>
               </a:rPr>
               <a:t>(</a:t>
             </a:r>
@@ -6854,19 +7171,25 @@
             </a:pPr>
             <a:r>
               <a:rPr lang="en-GB" sz="1600" dirty="0">
-                <a:latin typeface="Courier" pitchFamily="2" charset="0"/>
+                <a:latin typeface="Menlo" panose="020B0609030804020204" pitchFamily="49" charset="0"/>
+                <a:ea typeface="Menlo" panose="020B0609030804020204" pitchFamily="49" charset="0"/>
+                <a:cs typeface="Menlo" panose="020B0609030804020204" pitchFamily="49" charset="0"/>
               </a:rPr>
               <a:t>        child: </a:t>
             </a:r>
             <a:r>
               <a:rPr lang="en-GB" sz="1600" dirty="0" err="1">
-                <a:latin typeface="Courier" pitchFamily="2" charset="0"/>
+                <a:latin typeface="Menlo" panose="020B0609030804020204" pitchFamily="49" charset="0"/>
+                <a:ea typeface="Menlo" panose="020B0609030804020204" pitchFamily="49" charset="0"/>
+                <a:cs typeface="Menlo" panose="020B0609030804020204" pitchFamily="49" charset="0"/>
               </a:rPr>
               <a:t>ElevatedButton</a:t>
             </a:r>
             <a:r>
               <a:rPr lang="en-GB" sz="1600" dirty="0">
-                <a:latin typeface="Courier" pitchFamily="2" charset="0"/>
+                <a:latin typeface="Menlo" panose="020B0609030804020204" pitchFamily="49" charset="0"/>
+                <a:ea typeface="Menlo" panose="020B0609030804020204" pitchFamily="49" charset="0"/>
+                <a:cs typeface="Menlo" panose="020B0609030804020204" pitchFamily="49" charset="0"/>
               </a:rPr>
               <a:t>(</a:t>
             </a:r>
@@ -6878,7 +7201,9 @@
             </a:pPr>
             <a:r>
               <a:rPr lang="en-GB" sz="1600" dirty="0">
-                <a:latin typeface="Courier" pitchFamily="2" charset="0"/>
+                <a:latin typeface="Menlo" panose="020B0609030804020204" pitchFamily="49" charset="0"/>
+                <a:ea typeface="Menlo" panose="020B0609030804020204" pitchFamily="49" charset="0"/>
+                <a:cs typeface="Menlo" panose="020B0609030804020204" pitchFamily="49" charset="0"/>
               </a:rPr>
               <a:t>          child: Text('To the profile'),</a:t>
             </a:r>
@@ -6890,19 +7215,25 @@
             </a:pPr>
             <a:r>
               <a:rPr lang="en-GB" sz="1600" dirty="0">
-                <a:latin typeface="Courier" pitchFamily="2" charset="0"/>
+                <a:latin typeface="Menlo" panose="020B0609030804020204" pitchFamily="49" charset="0"/>
+                <a:ea typeface="Menlo" panose="020B0609030804020204" pitchFamily="49" charset="0"/>
+                <a:cs typeface="Menlo" panose="020B0609030804020204" pitchFamily="49" charset="0"/>
               </a:rPr>
               <a:t>          </a:t>
             </a:r>
             <a:r>
               <a:rPr lang="en-GB" sz="1600" dirty="0" err="1">
-                <a:latin typeface="Courier" pitchFamily="2" charset="0"/>
+                <a:latin typeface="Menlo" panose="020B0609030804020204" pitchFamily="49" charset="0"/>
+                <a:ea typeface="Menlo" panose="020B0609030804020204" pitchFamily="49" charset="0"/>
+                <a:cs typeface="Menlo" panose="020B0609030804020204" pitchFamily="49" charset="0"/>
               </a:rPr>
               <a:t>onPressed</a:t>
             </a:r>
             <a:r>
               <a:rPr lang="en-GB" sz="1600" dirty="0">
-                <a:latin typeface="Courier" pitchFamily="2" charset="0"/>
+                <a:latin typeface="Menlo" panose="020B0609030804020204" pitchFamily="49" charset="0"/>
+                <a:ea typeface="Menlo" panose="020B0609030804020204" pitchFamily="49" charset="0"/>
+                <a:cs typeface="Menlo" panose="020B0609030804020204" pitchFamily="49" charset="0"/>
               </a:rPr>
               <a:t>: () {</a:t>
             </a:r>
@@ -6914,7 +7245,9 @@
             </a:pPr>
             <a:r>
               <a:rPr lang="en-GB" sz="1600" dirty="0">
-                <a:latin typeface="Courier" pitchFamily="2" charset="0"/>
+                <a:latin typeface="Menlo" panose="020B0609030804020204" pitchFamily="49" charset="0"/>
+                <a:ea typeface="Menlo" panose="020B0609030804020204" pitchFamily="49" charset="0"/>
+                <a:cs typeface="Menlo" panose="020B0609030804020204" pitchFamily="49" charset="0"/>
               </a:rPr>
               <a:t>            </a:t>
             </a:r>
@@ -6923,7 +7256,9 @@
                 <a:highlight>
                   <a:srgbClr val="FFFF00"/>
                 </a:highlight>
-                <a:latin typeface="Courier" pitchFamily="2" charset="0"/>
+                <a:latin typeface="Menlo" panose="020B0609030804020204" pitchFamily="49" charset="0"/>
+                <a:ea typeface="Menlo" panose="020B0609030804020204" pitchFamily="49" charset="0"/>
+                <a:cs typeface="Menlo" panose="020B0609030804020204" pitchFamily="49" charset="0"/>
               </a:rPr>
               <a:t>//TODO: implement the navigation</a:t>
             </a:r>
@@ -6935,7 +7270,9 @@
             </a:pPr>
             <a:r>
               <a:rPr lang="en-GB" sz="1600" dirty="0">
-                <a:latin typeface="Courier" pitchFamily="2" charset="0"/>
+                <a:latin typeface="Menlo" panose="020B0609030804020204" pitchFamily="49" charset="0"/>
+                <a:ea typeface="Menlo" panose="020B0609030804020204" pitchFamily="49" charset="0"/>
+                <a:cs typeface="Menlo" panose="020B0609030804020204" pitchFamily="49" charset="0"/>
               </a:rPr>
               <a:t>          },</a:t>
             </a:r>
@@ -6947,7 +7284,9 @@
             </a:pPr>
             <a:r>
               <a:rPr lang="en-GB" sz="1600" dirty="0">
-                <a:latin typeface="Courier" pitchFamily="2" charset="0"/>
+                <a:latin typeface="Menlo" panose="020B0609030804020204" pitchFamily="49" charset="0"/>
+                <a:ea typeface="Menlo" panose="020B0609030804020204" pitchFamily="49" charset="0"/>
+                <a:cs typeface="Menlo" panose="020B0609030804020204" pitchFamily="49" charset="0"/>
               </a:rPr>
               <a:t>        ),</a:t>
             </a:r>
@@ -6959,7 +7298,9 @@
             </a:pPr>
             <a:r>
               <a:rPr lang="en-GB" sz="1600" dirty="0">
-                <a:latin typeface="Courier" pitchFamily="2" charset="0"/>
+                <a:latin typeface="Menlo" panose="020B0609030804020204" pitchFamily="49" charset="0"/>
+                <a:ea typeface="Menlo" panose="020B0609030804020204" pitchFamily="49" charset="0"/>
+                <a:cs typeface="Menlo" panose="020B0609030804020204" pitchFamily="49" charset="0"/>
               </a:rPr>
               <a:t>      ),</a:t>
             </a:r>
@@ -6971,7 +7312,9 @@
             </a:pPr>
             <a:r>
               <a:rPr lang="en-GB" sz="1600" dirty="0">
-                <a:latin typeface="Courier" pitchFamily="2" charset="0"/>
+                <a:latin typeface="Menlo" panose="020B0609030804020204" pitchFamily="49" charset="0"/>
+                <a:ea typeface="Menlo" panose="020B0609030804020204" pitchFamily="49" charset="0"/>
+                <a:cs typeface="Menlo" panose="020B0609030804020204" pitchFamily="49" charset="0"/>
               </a:rPr>
               <a:t>    );</a:t>
             </a:r>
@@ -6983,7 +7326,9 @@
             </a:pPr>
             <a:r>
               <a:rPr lang="en-GB" sz="1600" dirty="0">
-                <a:latin typeface="Courier" pitchFamily="2" charset="0"/>
+                <a:latin typeface="Menlo" panose="020B0609030804020204" pitchFamily="49" charset="0"/>
+                <a:ea typeface="Menlo" panose="020B0609030804020204" pitchFamily="49" charset="0"/>
+                <a:cs typeface="Menlo" panose="020B0609030804020204" pitchFamily="49" charset="0"/>
               </a:rPr>
               <a:t>  } //build</a:t>
             </a:r>
@@ -6995,18 +7340,24 @@
             </a:pPr>
             <a:r>
               <a:rPr lang="en-GB" sz="1600" dirty="0">
-                <a:latin typeface="Courier" pitchFamily="2" charset="0"/>
+                <a:latin typeface="Menlo" panose="020B0609030804020204" pitchFamily="49" charset="0"/>
+                <a:ea typeface="Menlo" panose="020B0609030804020204" pitchFamily="49" charset="0"/>
+                <a:cs typeface="Menlo" panose="020B0609030804020204" pitchFamily="49" charset="0"/>
               </a:rPr>
               <a:t>} //</a:t>
             </a:r>
             <a:r>
               <a:rPr lang="en-GB" sz="1600" dirty="0" err="1">
-                <a:latin typeface="Courier" pitchFamily="2" charset="0"/>
+                <a:latin typeface="Menlo" panose="020B0609030804020204" pitchFamily="49" charset="0"/>
+                <a:ea typeface="Menlo" panose="020B0609030804020204" pitchFamily="49" charset="0"/>
+                <a:cs typeface="Menlo" panose="020B0609030804020204" pitchFamily="49" charset="0"/>
               </a:rPr>
               <a:t>HomePage</a:t>
             </a:r>
             <a:endParaRPr lang="en-IT" sz="1600" dirty="0">
-              <a:latin typeface="Courier" pitchFamily="2" charset="0"/>
+              <a:latin typeface="Menlo" panose="020B0609030804020204" pitchFamily="49" charset="0"/>
+              <a:ea typeface="Menlo" panose="020B0609030804020204" pitchFamily="49" charset="0"/>
+              <a:cs typeface="Menlo" panose="020B0609030804020204" pitchFamily="49" charset="0"/>
             </a:endParaRPr>
           </a:p>
         </p:txBody>
@@ -7131,31 +7482,41 @@
             </a:pPr>
             <a:r>
               <a:rPr lang="en-GB" sz="1600" dirty="0">
-                <a:latin typeface="Courier" pitchFamily="2" charset="0"/>
+                <a:latin typeface="Menlo" panose="020B0609030804020204" pitchFamily="49" charset="0"/>
+                <a:ea typeface="Menlo" panose="020B0609030804020204" pitchFamily="49" charset="0"/>
+                <a:cs typeface="Menlo" panose="020B0609030804020204" pitchFamily="49" charset="0"/>
               </a:rPr>
               <a:t>import '</a:t>
             </a:r>
             <a:r>
               <a:rPr lang="en-GB" sz="1600" dirty="0" err="1">
-                <a:latin typeface="Courier" pitchFamily="2" charset="0"/>
+                <a:latin typeface="Menlo" panose="020B0609030804020204" pitchFamily="49" charset="0"/>
+                <a:ea typeface="Menlo" panose="020B0609030804020204" pitchFamily="49" charset="0"/>
+                <a:cs typeface="Menlo" panose="020B0609030804020204" pitchFamily="49" charset="0"/>
               </a:rPr>
               <a:t>package:flutter</a:t>
             </a:r>
             <a:r>
               <a:rPr lang="en-GB" sz="1600" dirty="0">
-                <a:latin typeface="Courier" pitchFamily="2" charset="0"/>
+                <a:latin typeface="Menlo" panose="020B0609030804020204" pitchFamily="49" charset="0"/>
+                <a:ea typeface="Menlo" panose="020B0609030804020204" pitchFamily="49" charset="0"/>
+                <a:cs typeface="Menlo" panose="020B0609030804020204" pitchFamily="49" charset="0"/>
               </a:rPr>
               <a:t>/</a:t>
             </a:r>
             <a:r>
               <a:rPr lang="en-GB" sz="1600" dirty="0" err="1">
-                <a:latin typeface="Courier" pitchFamily="2" charset="0"/>
+                <a:latin typeface="Menlo" panose="020B0609030804020204" pitchFamily="49" charset="0"/>
+                <a:ea typeface="Menlo" panose="020B0609030804020204" pitchFamily="49" charset="0"/>
+                <a:cs typeface="Menlo" panose="020B0609030804020204" pitchFamily="49" charset="0"/>
               </a:rPr>
               <a:t>material.dart</a:t>
             </a:r>
             <a:r>
               <a:rPr lang="en-GB" sz="1600" dirty="0">
-                <a:latin typeface="Courier" pitchFamily="2" charset="0"/>
+                <a:latin typeface="Menlo" panose="020B0609030804020204" pitchFamily="49" charset="0"/>
+                <a:ea typeface="Menlo" panose="020B0609030804020204" pitchFamily="49" charset="0"/>
+                <a:cs typeface="Menlo" panose="020B0609030804020204" pitchFamily="49" charset="0"/>
               </a:rPr>
               <a:t>';</a:t>
             </a:r>
@@ -7166,31 +7527,41 @@
             </a:pPr>
             <a:r>
               <a:rPr lang="en-GB" sz="1600" dirty="0">
-                <a:latin typeface="Courier" pitchFamily="2" charset="0"/>
+                <a:latin typeface="Menlo" panose="020B0609030804020204" pitchFamily="49" charset="0"/>
+                <a:ea typeface="Menlo" panose="020B0609030804020204" pitchFamily="49" charset="0"/>
+                <a:cs typeface="Menlo" panose="020B0609030804020204" pitchFamily="49" charset="0"/>
               </a:rPr>
               <a:t>class </a:t>
             </a:r>
             <a:r>
               <a:rPr lang="en-GB" sz="1600" dirty="0" err="1">
-                <a:latin typeface="Courier" pitchFamily="2" charset="0"/>
+                <a:latin typeface="Menlo" panose="020B0609030804020204" pitchFamily="49" charset="0"/>
+                <a:ea typeface="Menlo" panose="020B0609030804020204" pitchFamily="49" charset="0"/>
+                <a:cs typeface="Menlo" panose="020B0609030804020204" pitchFamily="49" charset="0"/>
               </a:rPr>
               <a:t>ProfilePage</a:t>
             </a:r>
             <a:r>
               <a:rPr lang="en-GB" sz="1600" dirty="0">
-                <a:latin typeface="Courier" pitchFamily="2" charset="0"/>
+                <a:latin typeface="Menlo" panose="020B0609030804020204" pitchFamily="49" charset="0"/>
+                <a:ea typeface="Menlo" panose="020B0609030804020204" pitchFamily="49" charset="0"/>
+                <a:cs typeface="Menlo" panose="020B0609030804020204" pitchFamily="49" charset="0"/>
               </a:rPr>
               <a:t> extends </a:t>
             </a:r>
             <a:r>
               <a:rPr lang="en-GB" sz="1600" dirty="0" err="1">
-                <a:latin typeface="Courier" pitchFamily="2" charset="0"/>
+                <a:latin typeface="Menlo" panose="020B0609030804020204" pitchFamily="49" charset="0"/>
+                <a:ea typeface="Menlo" panose="020B0609030804020204" pitchFamily="49" charset="0"/>
+                <a:cs typeface="Menlo" panose="020B0609030804020204" pitchFamily="49" charset="0"/>
               </a:rPr>
               <a:t>StatelessWidget</a:t>
             </a:r>
             <a:r>
               <a:rPr lang="en-GB" sz="1600" dirty="0">
-                <a:latin typeface="Courier" pitchFamily="2" charset="0"/>
+                <a:latin typeface="Menlo" panose="020B0609030804020204" pitchFamily="49" charset="0"/>
+                <a:ea typeface="Menlo" panose="020B0609030804020204" pitchFamily="49" charset="0"/>
+                <a:cs typeface="Menlo" panose="020B0609030804020204" pitchFamily="49" charset="0"/>
               </a:rPr>
               <a:t> {</a:t>
             </a:r>
@@ -7201,31 +7572,41 @@
             </a:pPr>
             <a:r>
               <a:rPr lang="en-GB" sz="1600" dirty="0">
-                <a:latin typeface="Courier" pitchFamily="2" charset="0"/>
+                <a:latin typeface="Menlo" panose="020B0609030804020204" pitchFamily="49" charset="0"/>
+                <a:ea typeface="Menlo" panose="020B0609030804020204" pitchFamily="49" charset="0"/>
+                <a:cs typeface="Menlo" panose="020B0609030804020204" pitchFamily="49" charset="0"/>
               </a:rPr>
               <a:t>  </a:t>
             </a:r>
             <a:r>
               <a:rPr lang="en-GB" sz="1600" dirty="0" err="1">
-                <a:latin typeface="Courier" pitchFamily="2" charset="0"/>
+                <a:latin typeface="Menlo" panose="020B0609030804020204" pitchFamily="49" charset="0"/>
+                <a:ea typeface="Menlo" panose="020B0609030804020204" pitchFamily="49" charset="0"/>
+                <a:cs typeface="Menlo" panose="020B0609030804020204" pitchFamily="49" charset="0"/>
               </a:rPr>
               <a:t>const</a:t>
             </a:r>
             <a:r>
               <a:rPr lang="en-GB" sz="1600" dirty="0">
-                <a:latin typeface="Courier" pitchFamily="2" charset="0"/>
+                <a:latin typeface="Menlo" panose="020B0609030804020204" pitchFamily="49" charset="0"/>
+                <a:ea typeface="Menlo" panose="020B0609030804020204" pitchFamily="49" charset="0"/>
+                <a:cs typeface="Menlo" panose="020B0609030804020204" pitchFamily="49" charset="0"/>
               </a:rPr>
               <a:t> </a:t>
             </a:r>
             <a:r>
               <a:rPr lang="en-GB" sz="1600" dirty="0" err="1">
-                <a:latin typeface="Courier" pitchFamily="2" charset="0"/>
+                <a:latin typeface="Menlo" panose="020B0609030804020204" pitchFamily="49" charset="0"/>
+                <a:ea typeface="Menlo" panose="020B0609030804020204" pitchFamily="49" charset="0"/>
+                <a:cs typeface="Menlo" panose="020B0609030804020204" pitchFamily="49" charset="0"/>
               </a:rPr>
               <a:t>ProfilePage</a:t>
             </a:r>
             <a:r>
               <a:rPr lang="en-GB" sz="1600" dirty="0">
-                <a:latin typeface="Courier" pitchFamily="2" charset="0"/>
+                <a:latin typeface="Menlo" panose="020B0609030804020204" pitchFamily="49" charset="0"/>
+                <a:ea typeface="Menlo" panose="020B0609030804020204" pitchFamily="49" charset="0"/>
+                <a:cs typeface="Menlo" panose="020B0609030804020204" pitchFamily="49" charset="0"/>
               </a:rPr>
               <a:t>({Key? key}) : super(key: key);</a:t>
             </a:r>
@@ -7236,43 +7617,57 @@
             </a:pPr>
             <a:r>
               <a:rPr lang="en-GB" sz="1600" dirty="0">
-                <a:latin typeface="Courier" pitchFamily="2" charset="0"/>
+                <a:latin typeface="Menlo" panose="020B0609030804020204" pitchFamily="49" charset="0"/>
+                <a:ea typeface="Menlo" panose="020B0609030804020204" pitchFamily="49" charset="0"/>
+                <a:cs typeface="Menlo" panose="020B0609030804020204" pitchFamily="49" charset="0"/>
               </a:rPr>
               <a:t>  static </a:t>
             </a:r>
             <a:r>
               <a:rPr lang="en-GB" sz="1600" dirty="0" err="1">
-                <a:latin typeface="Courier" pitchFamily="2" charset="0"/>
+                <a:latin typeface="Menlo" panose="020B0609030804020204" pitchFamily="49" charset="0"/>
+                <a:ea typeface="Menlo" panose="020B0609030804020204" pitchFamily="49" charset="0"/>
+                <a:cs typeface="Menlo" panose="020B0609030804020204" pitchFamily="49" charset="0"/>
               </a:rPr>
               <a:t>const</a:t>
             </a:r>
             <a:r>
               <a:rPr lang="en-GB" sz="1600" dirty="0">
-                <a:latin typeface="Courier" pitchFamily="2" charset="0"/>
+                <a:latin typeface="Menlo" panose="020B0609030804020204" pitchFamily="49" charset="0"/>
+                <a:ea typeface="Menlo" panose="020B0609030804020204" pitchFamily="49" charset="0"/>
+                <a:cs typeface="Menlo" panose="020B0609030804020204" pitchFamily="49" charset="0"/>
               </a:rPr>
               <a:t> </a:t>
             </a:r>
             <a:r>
               <a:rPr lang="en-GB" sz="1600" dirty="0" err="1">
-                <a:latin typeface="Courier" pitchFamily="2" charset="0"/>
+                <a:latin typeface="Menlo" panose="020B0609030804020204" pitchFamily="49" charset="0"/>
+                <a:ea typeface="Menlo" panose="020B0609030804020204" pitchFamily="49" charset="0"/>
+                <a:cs typeface="Menlo" panose="020B0609030804020204" pitchFamily="49" charset="0"/>
               </a:rPr>
               <a:t>routename</a:t>
             </a:r>
             <a:r>
               <a:rPr lang="en-GB" sz="1600" dirty="0">
-                <a:latin typeface="Courier" pitchFamily="2" charset="0"/>
+                <a:latin typeface="Menlo" panose="020B0609030804020204" pitchFamily="49" charset="0"/>
+                <a:ea typeface="Menlo" panose="020B0609030804020204" pitchFamily="49" charset="0"/>
+                <a:cs typeface="Menlo" panose="020B0609030804020204" pitchFamily="49" charset="0"/>
               </a:rPr>
               <a:t> = '</a:t>
             </a:r>
             <a:r>
               <a:rPr lang="en-GB" sz="1600" dirty="0" err="1">
-                <a:latin typeface="Courier" pitchFamily="2" charset="0"/>
+                <a:latin typeface="Menlo" panose="020B0609030804020204" pitchFamily="49" charset="0"/>
+                <a:ea typeface="Menlo" panose="020B0609030804020204" pitchFamily="49" charset="0"/>
+                <a:cs typeface="Menlo" panose="020B0609030804020204" pitchFamily="49" charset="0"/>
               </a:rPr>
               <a:t>ProfilePage</a:t>
             </a:r>
             <a:r>
               <a:rPr lang="en-GB" sz="1600" dirty="0">
-                <a:latin typeface="Courier" pitchFamily="2" charset="0"/>
+                <a:latin typeface="Menlo" panose="020B0609030804020204" pitchFamily="49" charset="0"/>
+                <a:ea typeface="Menlo" panose="020B0609030804020204" pitchFamily="49" charset="0"/>
+                <a:cs typeface="Menlo" panose="020B0609030804020204" pitchFamily="49" charset="0"/>
               </a:rPr>
               <a:t>';</a:t>
             </a:r>
@@ -7283,7 +7678,9 @@
             </a:pPr>
             <a:r>
               <a:rPr lang="en-GB" sz="1600" dirty="0">
-                <a:latin typeface="Courier" pitchFamily="2" charset="0"/>
+                <a:latin typeface="Menlo" panose="020B0609030804020204" pitchFamily="49" charset="0"/>
+                <a:ea typeface="Menlo" panose="020B0609030804020204" pitchFamily="49" charset="0"/>
+                <a:cs typeface="Menlo" panose="020B0609030804020204" pitchFamily="49" charset="0"/>
               </a:rPr>
               <a:t>  @override</a:t>
             </a:r>
@@ -7294,19 +7691,25 @@
             </a:pPr>
             <a:r>
               <a:rPr lang="en-GB" sz="1600" dirty="0">
-                <a:latin typeface="Courier" pitchFamily="2" charset="0"/>
+                <a:latin typeface="Menlo" panose="020B0609030804020204" pitchFamily="49" charset="0"/>
+                <a:ea typeface="Menlo" panose="020B0609030804020204" pitchFamily="49" charset="0"/>
+                <a:cs typeface="Menlo" panose="020B0609030804020204" pitchFamily="49" charset="0"/>
               </a:rPr>
               <a:t>  Widget build(</a:t>
             </a:r>
             <a:r>
               <a:rPr lang="en-GB" sz="1600" dirty="0" err="1">
-                <a:latin typeface="Courier" pitchFamily="2" charset="0"/>
+                <a:latin typeface="Menlo" panose="020B0609030804020204" pitchFamily="49" charset="0"/>
+                <a:ea typeface="Menlo" panose="020B0609030804020204" pitchFamily="49" charset="0"/>
+                <a:cs typeface="Menlo" panose="020B0609030804020204" pitchFamily="49" charset="0"/>
               </a:rPr>
               <a:t>BuildContext</a:t>
             </a:r>
             <a:r>
               <a:rPr lang="en-GB" sz="1600" dirty="0">
-                <a:latin typeface="Courier" pitchFamily="2" charset="0"/>
+                <a:latin typeface="Menlo" panose="020B0609030804020204" pitchFamily="49" charset="0"/>
+                <a:ea typeface="Menlo" panose="020B0609030804020204" pitchFamily="49" charset="0"/>
+                <a:cs typeface="Menlo" panose="020B0609030804020204" pitchFamily="49" charset="0"/>
               </a:rPr>
               <a:t> context) {</a:t>
             </a:r>
@@ -7317,7 +7720,9 @@
             </a:pPr>
             <a:r>
               <a:rPr lang="en-GB" sz="1600" dirty="0">
-                <a:latin typeface="Courier" pitchFamily="2" charset="0"/>
+                <a:latin typeface="Menlo" panose="020B0609030804020204" pitchFamily="49" charset="0"/>
+                <a:ea typeface="Menlo" panose="020B0609030804020204" pitchFamily="49" charset="0"/>
+                <a:cs typeface="Menlo" panose="020B0609030804020204" pitchFamily="49" charset="0"/>
               </a:rPr>
               <a:t>    return Scaffold(</a:t>
             </a:r>
@@ -7328,31 +7733,41 @@
             </a:pPr>
             <a:r>
               <a:rPr lang="en-GB" sz="1600" dirty="0">
-                <a:latin typeface="Courier" pitchFamily="2" charset="0"/>
+                <a:latin typeface="Menlo" panose="020B0609030804020204" pitchFamily="49" charset="0"/>
+                <a:ea typeface="Menlo" panose="020B0609030804020204" pitchFamily="49" charset="0"/>
+                <a:cs typeface="Menlo" panose="020B0609030804020204" pitchFamily="49" charset="0"/>
               </a:rPr>
               <a:t>      </a:t>
             </a:r>
             <a:r>
               <a:rPr lang="en-GB" sz="1600" dirty="0" err="1">
-                <a:latin typeface="Courier" pitchFamily="2" charset="0"/>
+                <a:latin typeface="Menlo" panose="020B0609030804020204" pitchFamily="49" charset="0"/>
+                <a:ea typeface="Menlo" panose="020B0609030804020204" pitchFamily="49" charset="0"/>
+                <a:cs typeface="Menlo" panose="020B0609030804020204" pitchFamily="49" charset="0"/>
               </a:rPr>
               <a:t>appBar</a:t>
             </a:r>
             <a:r>
               <a:rPr lang="en-GB" sz="1600" dirty="0">
-                <a:latin typeface="Courier" pitchFamily="2" charset="0"/>
+                <a:latin typeface="Menlo" panose="020B0609030804020204" pitchFamily="49" charset="0"/>
+                <a:ea typeface="Menlo" panose="020B0609030804020204" pitchFamily="49" charset="0"/>
+                <a:cs typeface="Menlo" panose="020B0609030804020204" pitchFamily="49" charset="0"/>
               </a:rPr>
               <a:t>: </a:t>
             </a:r>
             <a:r>
               <a:rPr lang="en-GB" sz="1600" dirty="0" err="1">
-                <a:latin typeface="Courier" pitchFamily="2" charset="0"/>
+                <a:latin typeface="Menlo" panose="020B0609030804020204" pitchFamily="49" charset="0"/>
+                <a:ea typeface="Menlo" panose="020B0609030804020204" pitchFamily="49" charset="0"/>
+                <a:cs typeface="Menlo" panose="020B0609030804020204" pitchFamily="49" charset="0"/>
               </a:rPr>
               <a:t>AppBar</a:t>
             </a:r>
             <a:r>
               <a:rPr lang="en-GB" sz="1600" dirty="0">
-                <a:latin typeface="Courier" pitchFamily="2" charset="0"/>
+                <a:latin typeface="Menlo" panose="020B0609030804020204" pitchFamily="49" charset="0"/>
+                <a:ea typeface="Menlo" panose="020B0609030804020204" pitchFamily="49" charset="0"/>
+                <a:cs typeface="Menlo" panose="020B0609030804020204" pitchFamily="49" charset="0"/>
               </a:rPr>
               <a:t>(</a:t>
             </a:r>
@@ -7363,19 +7778,25 @@
             </a:pPr>
             <a:r>
               <a:rPr lang="en-GB" sz="1600" dirty="0">
-                <a:latin typeface="Courier" pitchFamily="2" charset="0"/>
+                <a:latin typeface="Menlo" panose="020B0609030804020204" pitchFamily="49" charset="0"/>
+                <a:ea typeface="Menlo" panose="020B0609030804020204" pitchFamily="49" charset="0"/>
+                <a:cs typeface="Menlo" panose="020B0609030804020204" pitchFamily="49" charset="0"/>
               </a:rPr>
               <a:t>        title: Text(</a:t>
             </a:r>
             <a:r>
               <a:rPr lang="en-GB" sz="1600" dirty="0" err="1">
-                <a:latin typeface="Courier" pitchFamily="2" charset="0"/>
+                <a:latin typeface="Menlo" panose="020B0609030804020204" pitchFamily="49" charset="0"/>
+                <a:ea typeface="Menlo" panose="020B0609030804020204" pitchFamily="49" charset="0"/>
+                <a:cs typeface="Menlo" panose="020B0609030804020204" pitchFamily="49" charset="0"/>
               </a:rPr>
               <a:t>HomePage.routename</a:t>
             </a:r>
             <a:r>
               <a:rPr lang="en-GB" sz="1600" dirty="0">
-                <a:latin typeface="Courier" pitchFamily="2" charset="0"/>
+                <a:latin typeface="Menlo" panose="020B0609030804020204" pitchFamily="49" charset="0"/>
+                <a:ea typeface="Menlo" panose="020B0609030804020204" pitchFamily="49" charset="0"/>
+                <a:cs typeface="Menlo" panose="020B0609030804020204" pitchFamily="49" charset="0"/>
               </a:rPr>
               <a:t>),</a:t>
             </a:r>
@@ -7386,7 +7807,9 @@
             </a:pPr>
             <a:r>
               <a:rPr lang="en-GB" sz="1600" dirty="0">
-                <a:latin typeface="Courier" pitchFamily="2" charset="0"/>
+                <a:latin typeface="Menlo" panose="020B0609030804020204" pitchFamily="49" charset="0"/>
+                <a:ea typeface="Menlo" panose="020B0609030804020204" pitchFamily="49" charset="0"/>
+                <a:cs typeface="Menlo" panose="020B0609030804020204" pitchFamily="49" charset="0"/>
               </a:rPr>
               <a:t>      ),</a:t>
             </a:r>
@@ -7397,12 +7820,16 @@
             </a:pPr>
             <a:r>
               <a:rPr lang="en-GB" sz="1600" dirty="0">
-                <a:latin typeface="Courier" pitchFamily="2" charset="0"/>
+                <a:latin typeface="Menlo" panose="020B0609030804020204" pitchFamily="49" charset="0"/>
+                <a:ea typeface="Menlo" panose="020B0609030804020204" pitchFamily="49" charset="0"/>
+                <a:cs typeface="Menlo" panose="020B0609030804020204" pitchFamily="49" charset="0"/>
               </a:rPr>
               <a:t>      ...</a:t>
             </a:r>
             <a:endParaRPr lang="en-IT" sz="1600" dirty="0">
-              <a:latin typeface="Courier" pitchFamily="2" charset="0"/>
+              <a:latin typeface="Menlo" panose="020B0609030804020204" pitchFamily="49" charset="0"/>
+              <a:ea typeface="Menlo" panose="020B0609030804020204" pitchFamily="49" charset="0"/>
+              <a:cs typeface="Menlo" panose="020B0609030804020204" pitchFamily="49" charset="0"/>
             </a:endParaRPr>
           </a:p>
         </p:txBody>
@@ -7620,7 +8047,9 @@
             </a:pPr>
             <a:r>
               <a:rPr lang="en-GB" sz="1600" dirty="0">
-                <a:latin typeface="Courier" pitchFamily="2" charset="0"/>
+                <a:latin typeface="Menlo" panose="020B0609030804020204" pitchFamily="49" charset="0"/>
+                <a:ea typeface="Menlo" panose="020B0609030804020204" pitchFamily="49" charset="0"/>
+                <a:cs typeface="Menlo" panose="020B0609030804020204" pitchFamily="49" charset="0"/>
               </a:rPr>
               <a:t>...</a:t>
             </a:r>
@@ -7632,19 +8061,25 @@
             </a:pPr>
             <a:r>
               <a:rPr lang="en-GB" sz="1600" dirty="0">
-                <a:latin typeface="Courier" pitchFamily="2" charset="0"/>
+                <a:latin typeface="Menlo" panose="020B0609030804020204" pitchFamily="49" charset="0"/>
+                <a:ea typeface="Menlo" panose="020B0609030804020204" pitchFamily="49" charset="0"/>
+                <a:cs typeface="Menlo" panose="020B0609030804020204" pitchFamily="49" charset="0"/>
               </a:rPr>
               <a:t>body: </a:t>
             </a:r>
             <a:r>
               <a:rPr lang="en-GB" sz="1600" dirty="0" err="1">
-                <a:latin typeface="Courier" pitchFamily="2" charset="0"/>
+                <a:latin typeface="Menlo" panose="020B0609030804020204" pitchFamily="49" charset="0"/>
+                <a:ea typeface="Menlo" panose="020B0609030804020204" pitchFamily="49" charset="0"/>
+                <a:cs typeface="Menlo" panose="020B0609030804020204" pitchFamily="49" charset="0"/>
               </a:rPr>
               <a:t>Center</a:t>
             </a:r>
             <a:r>
               <a:rPr lang="en-GB" sz="1600" dirty="0">
-                <a:latin typeface="Courier" pitchFamily="2" charset="0"/>
+                <a:latin typeface="Menlo" panose="020B0609030804020204" pitchFamily="49" charset="0"/>
+                <a:ea typeface="Menlo" panose="020B0609030804020204" pitchFamily="49" charset="0"/>
+                <a:cs typeface="Menlo" panose="020B0609030804020204" pitchFamily="49" charset="0"/>
               </a:rPr>
               <a:t>(</a:t>
             </a:r>
@@ -7656,19 +8091,25 @@
             </a:pPr>
             <a:r>
               <a:rPr lang="en-GB" sz="1600" dirty="0">
-                <a:latin typeface="Courier" pitchFamily="2" charset="0"/>
+                <a:latin typeface="Menlo" panose="020B0609030804020204" pitchFamily="49" charset="0"/>
+                <a:ea typeface="Menlo" panose="020B0609030804020204" pitchFamily="49" charset="0"/>
+                <a:cs typeface="Menlo" panose="020B0609030804020204" pitchFamily="49" charset="0"/>
               </a:rPr>
               <a:t>        child: </a:t>
             </a:r>
             <a:r>
               <a:rPr lang="en-GB" sz="1600" dirty="0" err="1">
-                <a:latin typeface="Courier" pitchFamily="2" charset="0"/>
+                <a:latin typeface="Menlo" panose="020B0609030804020204" pitchFamily="49" charset="0"/>
+                <a:ea typeface="Menlo" panose="020B0609030804020204" pitchFamily="49" charset="0"/>
+                <a:cs typeface="Menlo" panose="020B0609030804020204" pitchFamily="49" charset="0"/>
               </a:rPr>
               <a:t>ElevatedButton</a:t>
             </a:r>
             <a:r>
               <a:rPr lang="en-GB" sz="1600" dirty="0">
-                <a:latin typeface="Courier" pitchFamily="2" charset="0"/>
+                <a:latin typeface="Menlo" panose="020B0609030804020204" pitchFamily="49" charset="0"/>
+                <a:ea typeface="Menlo" panose="020B0609030804020204" pitchFamily="49" charset="0"/>
+                <a:cs typeface="Menlo" panose="020B0609030804020204" pitchFamily="49" charset="0"/>
               </a:rPr>
               <a:t>(</a:t>
             </a:r>
@@ -7680,7 +8121,9 @@
             </a:pPr>
             <a:r>
               <a:rPr lang="en-GB" sz="1600" dirty="0">
-                <a:latin typeface="Courier" pitchFamily="2" charset="0"/>
+                <a:latin typeface="Menlo" panose="020B0609030804020204" pitchFamily="49" charset="0"/>
+                <a:ea typeface="Menlo" panose="020B0609030804020204" pitchFamily="49" charset="0"/>
+                <a:cs typeface="Menlo" panose="020B0609030804020204" pitchFamily="49" charset="0"/>
               </a:rPr>
               <a:t>          child: Text('To the home'),</a:t>
             </a:r>
@@ -7692,19 +8135,25 @@
             </a:pPr>
             <a:r>
               <a:rPr lang="en-GB" sz="1600" dirty="0">
-                <a:latin typeface="Courier" pitchFamily="2" charset="0"/>
+                <a:latin typeface="Menlo" panose="020B0609030804020204" pitchFamily="49" charset="0"/>
+                <a:ea typeface="Menlo" panose="020B0609030804020204" pitchFamily="49" charset="0"/>
+                <a:cs typeface="Menlo" panose="020B0609030804020204" pitchFamily="49" charset="0"/>
               </a:rPr>
               <a:t>          </a:t>
             </a:r>
             <a:r>
               <a:rPr lang="en-GB" sz="1600" dirty="0" err="1">
-                <a:latin typeface="Courier" pitchFamily="2" charset="0"/>
+                <a:latin typeface="Menlo" panose="020B0609030804020204" pitchFamily="49" charset="0"/>
+                <a:ea typeface="Menlo" panose="020B0609030804020204" pitchFamily="49" charset="0"/>
+                <a:cs typeface="Menlo" panose="020B0609030804020204" pitchFamily="49" charset="0"/>
               </a:rPr>
               <a:t>onPressed</a:t>
             </a:r>
             <a:r>
               <a:rPr lang="en-GB" sz="1600" dirty="0">
-                <a:latin typeface="Courier" pitchFamily="2" charset="0"/>
+                <a:latin typeface="Menlo" panose="020B0609030804020204" pitchFamily="49" charset="0"/>
+                <a:ea typeface="Menlo" panose="020B0609030804020204" pitchFamily="49" charset="0"/>
+                <a:cs typeface="Menlo" panose="020B0609030804020204" pitchFamily="49" charset="0"/>
               </a:rPr>
               <a:t>: () {</a:t>
             </a:r>
@@ -7716,7 +8165,9 @@
             </a:pPr>
             <a:r>
               <a:rPr lang="en-GB" sz="1600" dirty="0">
-                <a:latin typeface="Courier" pitchFamily="2" charset="0"/>
+                <a:latin typeface="Menlo" panose="020B0609030804020204" pitchFamily="49" charset="0"/>
+                <a:ea typeface="Menlo" panose="020B0609030804020204" pitchFamily="49" charset="0"/>
+                <a:cs typeface="Menlo" panose="020B0609030804020204" pitchFamily="49" charset="0"/>
               </a:rPr>
               <a:t>            </a:t>
             </a:r>
@@ -7725,7 +8176,9 @@
                 <a:highlight>
                   <a:srgbClr val="FFFF00"/>
                 </a:highlight>
-                <a:latin typeface="Courier" pitchFamily="2" charset="0"/>
+                <a:latin typeface="Menlo" panose="020B0609030804020204" pitchFamily="49" charset="0"/>
+                <a:ea typeface="Menlo" panose="020B0609030804020204" pitchFamily="49" charset="0"/>
+                <a:cs typeface="Menlo" panose="020B0609030804020204" pitchFamily="49" charset="0"/>
               </a:rPr>
               <a:t>//TODO: implement the navigation</a:t>
             </a:r>
@@ -7737,7 +8190,9 @@
             </a:pPr>
             <a:r>
               <a:rPr lang="en-GB" sz="1600" dirty="0">
-                <a:latin typeface="Courier" pitchFamily="2" charset="0"/>
+                <a:latin typeface="Menlo" panose="020B0609030804020204" pitchFamily="49" charset="0"/>
+                <a:ea typeface="Menlo" panose="020B0609030804020204" pitchFamily="49" charset="0"/>
+                <a:cs typeface="Menlo" panose="020B0609030804020204" pitchFamily="49" charset="0"/>
               </a:rPr>
               <a:t>          },</a:t>
             </a:r>
@@ -7749,7 +8204,9 @@
             </a:pPr>
             <a:r>
               <a:rPr lang="en-GB" sz="1600" dirty="0">
-                <a:latin typeface="Courier" pitchFamily="2" charset="0"/>
+                <a:latin typeface="Menlo" panose="020B0609030804020204" pitchFamily="49" charset="0"/>
+                <a:ea typeface="Menlo" panose="020B0609030804020204" pitchFamily="49" charset="0"/>
+                <a:cs typeface="Menlo" panose="020B0609030804020204" pitchFamily="49" charset="0"/>
               </a:rPr>
               <a:t>        ),</a:t>
             </a:r>
@@ -7761,7 +8218,9 @@
             </a:pPr>
             <a:r>
               <a:rPr lang="en-GB" sz="1600" dirty="0">
-                <a:latin typeface="Courier" pitchFamily="2" charset="0"/>
+                <a:latin typeface="Menlo" panose="020B0609030804020204" pitchFamily="49" charset="0"/>
+                <a:ea typeface="Menlo" panose="020B0609030804020204" pitchFamily="49" charset="0"/>
+                <a:cs typeface="Menlo" panose="020B0609030804020204" pitchFamily="49" charset="0"/>
               </a:rPr>
               <a:t>      ),</a:t>
             </a:r>
@@ -7773,7 +8232,9 @@
             </a:pPr>
             <a:r>
               <a:rPr lang="en-GB" sz="1600" dirty="0">
-                <a:latin typeface="Courier" pitchFamily="2" charset="0"/>
+                <a:latin typeface="Menlo" panose="020B0609030804020204" pitchFamily="49" charset="0"/>
+                <a:ea typeface="Menlo" panose="020B0609030804020204" pitchFamily="49" charset="0"/>
+                <a:cs typeface="Menlo" panose="020B0609030804020204" pitchFamily="49" charset="0"/>
               </a:rPr>
               <a:t>    );</a:t>
             </a:r>
@@ -7785,7 +8246,9 @@
             </a:pPr>
             <a:r>
               <a:rPr lang="en-GB" sz="1600" dirty="0">
-                <a:latin typeface="Courier" pitchFamily="2" charset="0"/>
+                <a:latin typeface="Menlo" panose="020B0609030804020204" pitchFamily="49" charset="0"/>
+                <a:ea typeface="Menlo" panose="020B0609030804020204" pitchFamily="49" charset="0"/>
+                <a:cs typeface="Menlo" panose="020B0609030804020204" pitchFamily="49" charset="0"/>
               </a:rPr>
               <a:t>  } //build</a:t>
             </a:r>
@@ -7797,18 +8260,24 @@
             </a:pPr>
             <a:r>
               <a:rPr lang="en-GB" sz="1600" dirty="0">
-                <a:latin typeface="Courier" pitchFamily="2" charset="0"/>
+                <a:latin typeface="Menlo" panose="020B0609030804020204" pitchFamily="49" charset="0"/>
+                <a:ea typeface="Menlo" panose="020B0609030804020204" pitchFamily="49" charset="0"/>
+                <a:cs typeface="Menlo" panose="020B0609030804020204" pitchFamily="49" charset="0"/>
               </a:rPr>
               <a:t>} //</a:t>
             </a:r>
             <a:r>
               <a:rPr lang="en-GB" sz="1600" dirty="0" err="1">
-                <a:latin typeface="Courier" pitchFamily="2" charset="0"/>
+                <a:latin typeface="Menlo" panose="020B0609030804020204" pitchFamily="49" charset="0"/>
+                <a:ea typeface="Menlo" panose="020B0609030804020204" pitchFamily="49" charset="0"/>
+                <a:cs typeface="Menlo" panose="020B0609030804020204" pitchFamily="49" charset="0"/>
               </a:rPr>
               <a:t>ProfilePage</a:t>
             </a:r>
             <a:endParaRPr lang="en-IT" sz="1600" dirty="0">
-              <a:latin typeface="Courier" pitchFamily="2" charset="0"/>
+              <a:latin typeface="Menlo" panose="020B0609030804020204" pitchFamily="49" charset="0"/>
+              <a:ea typeface="Menlo" panose="020B0609030804020204" pitchFamily="49" charset="0"/>
+              <a:cs typeface="Menlo" panose="020B0609030804020204" pitchFamily="49" charset="0"/>
             </a:endParaRPr>
           </a:p>
         </p:txBody>
@@ -7933,31 +8402,41 @@
             </a:pPr>
             <a:r>
               <a:rPr lang="en-GB" sz="1600" dirty="0">
-                <a:latin typeface="Courier" pitchFamily="2" charset="0"/>
+                <a:latin typeface="Menlo" panose="020B0609030804020204" pitchFamily="49" charset="0"/>
+                <a:ea typeface="Menlo" panose="020B0609030804020204" pitchFamily="49" charset="0"/>
+                <a:cs typeface="Menlo" panose="020B0609030804020204" pitchFamily="49" charset="0"/>
               </a:rPr>
               <a:t>import '</a:t>
             </a:r>
             <a:r>
               <a:rPr lang="en-GB" sz="1600" dirty="0" err="1">
-                <a:latin typeface="Courier" pitchFamily="2" charset="0"/>
+                <a:latin typeface="Menlo" panose="020B0609030804020204" pitchFamily="49" charset="0"/>
+                <a:ea typeface="Menlo" panose="020B0609030804020204" pitchFamily="49" charset="0"/>
+                <a:cs typeface="Menlo" panose="020B0609030804020204" pitchFamily="49" charset="0"/>
               </a:rPr>
               <a:t>package:flutter</a:t>
             </a:r>
             <a:r>
               <a:rPr lang="en-GB" sz="1600" dirty="0">
-                <a:latin typeface="Courier" pitchFamily="2" charset="0"/>
+                <a:latin typeface="Menlo" panose="020B0609030804020204" pitchFamily="49" charset="0"/>
+                <a:ea typeface="Menlo" panose="020B0609030804020204" pitchFamily="49" charset="0"/>
+                <a:cs typeface="Menlo" panose="020B0609030804020204" pitchFamily="49" charset="0"/>
               </a:rPr>
               <a:t>/</a:t>
             </a:r>
             <a:r>
               <a:rPr lang="en-GB" sz="1600" dirty="0" err="1">
-                <a:latin typeface="Courier" pitchFamily="2" charset="0"/>
+                <a:latin typeface="Menlo" panose="020B0609030804020204" pitchFamily="49" charset="0"/>
+                <a:ea typeface="Menlo" panose="020B0609030804020204" pitchFamily="49" charset="0"/>
+                <a:cs typeface="Menlo" panose="020B0609030804020204" pitchFamily="49" charset="0"/>
               </a:rPr>
               <a:t>material.dart</a:t>
             </a:r>
             <a:r>
               <a:rPr lang="en-GB" sz="1600" dirty="0">
-                <a:latin typeface="Courier" pitchFamily="2" charset="0"/>
+                <a:latin typeface="Menlo" panose="020B0609030804020204" pitchFamily="49" charset="0"/>
+                <a:ea typeface="Menlo" panose="020B0609030804020204" pitchFamily="49" charset="0"/>
+                <a:cs typeface="Menlo" panose="020B0609030804020204" pitchFamily="49" charset="0"/>
               </a:rPr>
               <a:t>';</a:t>
             </a:r>
@@ -7968,31 +8447,41 @@
             </a:pPr>
             <a:r>
               <a:rPr lang="en-GB" sz="1600" dirty="0">
-                <a:latin typeface="Courier" pitchFamily="2" charset="0"/>
+                <a:latin typeface="Menlo" panose="020B0609030804020204" pitchFamily="49" charset="0"/>
+                <a:ea typeface="Menlo" panose="020B0609030804020204" pitchFamily="49" charset="0"/>
+                <a:cs typeface="Menlo" panose="020B0609030804020204" pitchFamily="49" charset="0"/>
               </a:rPr>
               <a:t>import '</a:t>
             </a:r>
             <a:r>
               <a:rPr lang="en-GB" sz="1600" dirty="0" err="1">
-                <a:latin typeface="Courier" pitchFamily="2" charset="0"/>
+                <a:latin typeface="Menlo" panose="020B0609030804020204" pitchFamily="49" charset="0"/>
+                <a:ea typeface="Menlo" panose="020B0609030804020204" pitchFamily="49" charset="0"/>
+                <a:cs typeface="Menlo" panose="020B0609030804020204" pitchFamily="49" charset="0"/>
               </a:rPr>
               <a:t>package:there_and_back_again</a:t>
             </a:r>
             <a:r>
               <a:rPr lang="en-GB" sz="1600" dirty="0">
-                <a:latin typeface="Courier" pitchFamily="2" charset="0"/>
+                <a:latin typeface="Menlo" panose="020B0609030804020204" pitchFamily="49" charset="0"/>
+                <a:ea typeface="Menlo" panose="020B0609030804020204" pitchFamily="49" charset="0"/>
+                <a:cs typeface="Menlo" panose="020B0609030804020204" pitchFamily="49" charset="0"/>
               </a:rPr>
               <a:t>/screens/</a:t>
             </a:r>
             <a:r>
               <a:rPr lang="en-GB" sz="1600" dirty="0" err="1">
-                <a:latin typeface="Courier" pitchFamily="2" charset="0"/>
+                <a:latin typeface="Menlo" panose="020B0609030804020204" pitchFamily="49" charset="0"/>
+                <a:ea typeface="Menlo" panose="020B0609030804020204" pitchFamily="49" charset="0"/>
+                <a:cs typeface="Menlo" panose="020B0609030804020204" pitchFamily="49" charset="0"/>
               </a:rPr>
               <a:t>homepage.dart</a:t>
             </a:r>
             <a:r>
               <a:rPr lang="en-GB" sz="1600" dirty="0">
-                <a:latin typeface="Courier" pitchFamily="2" charset="0"/>
+                <a:latin typeface="Menlo" panose="020B0609030804020204" pitchFamily="49" charset="0"/>
+                <a:ea typeface="Menlo" panose="020B0609030804020204" pitchFamily="49" charset="0"/>
+                <a:cs typeface="Menlo" panose="020B0609030804020204" pitchFamily="49" charset="0"/>
               </a:rPr>
               <a:t>';</a:t>
             </a:r>
@@ -8002,7 +8491,9 @@
               <a:buNone/>
             </a:pPr>
             <a:endParaRPr lang="en-GB" sz="1600" dirty="0">
-              <a:latin typeface="Courier" pitchFamily="2" charset="0"/>
+              <a:latin typeface="Menlo" panose="020B0609030804020204" pitchFamily="49" charset="0"/>
+              <a:ea typeface="Menlo" panose="020B0609030804020204" pitchFamily="49" charset="0"/>
+              <a:cs typeface="Menlo" panose="020B0609030804020204" pitchFamily="49" charset="0"/>
             </a:endParaRPr>
           </a:p>
           <a:p>
@@ -8011,7 +8502,9 @@
             </a:pPr>
             <a:r>
               <a:rPr lang="en-GB" sz="1600" dirty="0">
-                <a:latin typeface="Courier" pitchFamily="2" charset="0"/>
+                <a:latin typeface="Menlo" panose="020B0609030804020204" pitchFamily="49" charset="0"/>
+                <a:ea typeface="Menlo" panose="020B0609030804020204" pitchFamily="49" charset="0"/>
+                <a:cs typeface="Menlo" panose="020B0609030804020204" pitchFamily="49" charset="0"/>
               </a:rPr>
               <a:t>void main() {</a:t>
             </a:r>
@@ -8022,43 +8515,57 @@
             </a:pPr>
             <a:r>
               <a:rPr lang="en-GB" sz="1600" dirty="0">
-                <a:latin typeface="Courier" pitchFamily="2" charset="0"/>
+                <a:latin typeface="Menlo" panose="020B0609030804020204" pitchFamily="49" charset="0"/>
+                <a:ea typeface="Menlo" panose="020B0609030804020204" pitchFamily="49" charset="0"/>
+                <a:cs typeface="Menlo" panose="020B0609030804020204" pitchFamily="49" charset="0"/>
               </a:rPr>
               <a:t>  </a:t>
             </a:r>
             <a:r>
               <a:rPr lang="en-GB" sz="1600" dirty="0" err="1">
-                <a:latin typeface="Courier" pitchFamily="2" charset="0"/>
+                <a:latin typeface="Menlo" panose="020B0609030804020204" pitchFamily="49" charset="0"/>
+                <a:ea typeface="Menlo" panose="020B0609030804020204" pitchFamily="49" charset="0"/>
+                <a:cs typeface="Menlo" panose="020B0609030804020204" pitchFamily="49" charset="0"/>
               </a:rPr>
               <a:t>runApp</a:t>
             </a:r>
             <a:r>
               <a:rPr lang="en-GB" sz="1600" dirty="0">
-                <a:latin typeface="Courier" pitchFamily="2" charset="0"/>
+                <a:latin typeface="Menlo" panose="020B0609030804020204" pitchFamily="49" charset="0"/>
+                <a:ea typeface="Menlo" panose="020B0609030804020204" pitchFamily="49" charset="0"/>
+                <a:cs typeface="Menlo" panose="020B0609030804020204" pitchFamily="49" charset="0"/>
               </a:rPr>
               <a:t>(</a:t>
             </a:r>
             <a:r>
               <a:rPr lang="en-GB" sz="1600" dirty="0" err="1">
-                <a:latin typeface="Courier" pitchFamily="2" charset="0"/>
+                <a:latin typeface="Menlo" panose="020B0609030804020204" pitchFamily="49" charset="0"/>
+                <a:ea typeface="Menlo" panose="020B0609030804020204" pitchFamily="49" charset="0"/>
+                <a:cs typeface="Menlo" panose="020B0609030804020204" pitchFamily="49" charset="0"/>
               </a:rPr>
               <a:t>const</a:t>
             </a:r>
             <a:r>
               <a:rPr lang="en-GB" sz="1600" dirty="0">
-                <a:latin typeface="Courier" pitchFamily="2" charset="0"/>
+                <a:latin typeface="Menlo" panose="020B0609030804020204" pitchFamily="49" charset="0"/>
+                <a:ea typeface="Menlo" panose="020B0609030804020204" pitchFamily="49" charset="0"/>
+                <a:cs typeface="Menlo" panose="020B0609030804020204" pitchFamily="49" charset="0"/>
               </a:rPr>
               <a:t> </a:t>
             </a:r>
             <a:r>
               <a:rPr lang="en-GB" sz="1600" dirty="0" err="1">
-                <a:latin typeface="Courier" pitchFamily="2" charset="0"/>
+                <a:latin typeface="Menlo" panose="020B0609030804020204" pitchFamily="49" charset="0"/>
+                <a:ea typeface="Menlo" panose="020B0609030804020204" pitchFamily="49" charset="0"/>
+                <a:cs typeface="Menlo" panose="020B0609030804020204" pitchFamily="49" charset="0"/>
               </a:rPr>
               <a:t>MyApp</a:t>
             </a:r>
             <a:r>
               <a:rPr lang="en-GB" sz="1600" dirty="0">
-                <a:latin typeface="Courier" pitchFamily="2" charset="0"/>
+                <a:latin typeface="Menlo" panose="020B0609030804020204" pitchFamily="49" charset="0"/>
+                <a:ea typeface="Menlo" panose="020B0609030804020204" pitchFamily="49" charset="0"/>
+                <a:cs typeface="Menlo" panose="020B0609030804020204" pitchFamily="49" charset="0"/>
               </a:rPr>
               <a:t>());</a:t>
             </a:r>
@@ -8069,7 +8576,9 @@
             </a:pPr>
             <a:r>
               <a:rPr lang="en-GB" sz="1600" dirty="0">
-                <a:latin typeface="Courier" pitchFamily="2" charset="0"/>
+                <a:latin typeface="Menlo" panose="020B0609030804020204" pitchFamily="49" charset="0"/>
+                <a:ea typeface="Menlo" panose="020B0609030804020204" pitchFamily="49" charset="0"/>
+                <a:cs typeface="Menlo" panose="020B0609030804020204" pitchFamily="49" charset="0"/>
               </a:rPr>
               <a:t>} //main</a:t>
             </a:r>
@@ -8079,7 +8588,9 @@
               <a:buNone/>
             </a:pPr>
             <a:endParaRPr lang="en-GB" sz="1600" dirty="0">
-              <a:latin typeface="Courier" pitchFamily="2" charset="0"/>
+              <a:latin typeface="Menlo" panose="020B0609030804020204" pitchFamily="49" charset="0"/>
+              <a:ea typeface="Menlo" panose="020B0609030804020204" pitchFamily="49" charset="0"/>
+              <a:cs typeface="Menlo" panose="020B0609030804020204" pitchFamily="49" charset="0"/>
             </a:endParaRPr>
           </a:p>
           <a:p>
@@ -8088,31 +8599,41 @@
             </a:pPr>
             <a:r>
               <a:rPr lang="en-GB" sz="1600" dirty="0">
-                <a:latin typeface="Courier" pitchFamily="2" charset="0"/>
+                <a:latin typeface="Menlo" panose="020B0609030804020204" pitchFamily="49" charset="0"/>
+                <a:ea typeface="Menlo" panose="020B0609030804020204" pitchFamily="49" charset="0"/>
+                <a:cs typeface="Menlo" panose="020B0609030804020204" pitchFamily="49" charset="0"/>
               </a:rPr>
               <a:t>class </a:t>
             </a:r>
             <a:r>
               <a:rPr lang="en-GB" sz="1600" dirty="0" err="1">
-                <a:latin typeface="Courier" pitchFamily="2" charset="0"/>
+                <a:latin typeface="Menlo" panose="020B0609030804020204" pitchFamily="49" charset="0"/>
+                <a:ea typeface="Menlo" panose="020B0609030804020204" pitchFamily="49" charset="0"/>
+                <a:cs typeface="Menlo" panose="020B0609030804020204" pitchFamily="49" charset="0"/>
               </a:rPr>
               <a:t>MyApp</a:t>
             </a:r>
             <a:r>
               <a:rPr lang="en-GB" sz="1600" dirty="0">
-                <a:latin typeface="Courier" pitchFamily="2" charset="0"/>
+                <a:latin typeface="Menlo" panose="020B0609030804020204" pitchFamily="49" charset="0"/>
+                <a:ea typeface="Menlo" panose="020B0609030804020204" pitchFamily="49" charset="0"/>
+                <a:cs typeface="Menlo" panose="020B0609030804020204" pitchFamily="49" charset="0"/>
               </a:rPr>
               <a:t> extends </a:t>
             </a:r>
             <a:r>
               <a:rPr lang="en-GB" sz="1600" dirty="0" err="1">
-                <a:latin typeface="Courier" pitchFamily="2" charset="0"/>
+                <a:latin typeface="Menlo" panose="020B0609030804020204" pitchFamily="49" charset="0"/>
+                <a:ea typeface="Menlo" panose="020B0609030804020204" pitchFamily="49" charset="0"/>
+                <a:cs typeface="Menlo" panose="020B0609030804020204" pitchFamily="49" charset="0"/>
               </a:rPr>
               <a:t>StatelessWidget</a:t>
             </a:r>
             <a:r>
               <a:rPr lang="en-GB" sz="1600" dirty="0">
-                <a:latin typeface="Courier" pitchFamily="2" charset="0"/>
+                <a:latin typeface="Menlo" panose="020B0609030804020204" pitchFamily="49" charset="0"/>
+                <a:ea typeface="Menlo" panose="020B0609030804020204" pitchFamily="49" charset="0"/>
+                <a:cs typeface="Menlo" panose="020B0609030804020204" pitchFamily="49" charset="0"/>
               </a:rPr>
               <a:t> {</a:t>
             </a:r>
@@ -8123,31 +8644,41 @@
             </a:pPr>
             <a:r>
               <a:rPr lang="en-GB" sz="1600" dirty="0">
-                <a:latin typeface="Courier" pitchFamily="2" charset="0"/>
+                <a:latin typeface="Menlo" panose="020B0609030804020204" pitchFamily="49" charset="0"/>
+                <a:ea typeface="Menlo" panose="020B0609030804020204" pitchFamily="49" charset="0"/>
+                <a:cs typeface="Menlo" panose="020B0609030804020204" pitchFamily="49" charset="0"/>
               </a:rPr>
               <a:t>  </a:t>
             </a:r>
             <a:r>
               <a:rPr lang="en-GB" sz="1600" dirty="0" err="1">
-                <a:latin typeface="Courier" pitchFamily="2" charset="0"/>
+                <a:latin typeface="Menlo" panose="020B0609030804020204" pitchFamily="49" charset="0"/>
+                <a:ea typeface="Menlo" panose="020B0609030804020204" pitchFamily="49" charset="0"/>
+                <a:cs typeface="Menlo" panose="020B0609030804020204" pitchFamily="49" charset="0"/>
               </a:rPr>
               <a:t>const</a:t>
             </a:r>
             <a:r>
               <a:rPr lang="en-GB" sz="1600" dirty="0">
-                <a:latin typeface="Courier" pitchFamily="2" charset="0"/>
+                <a:latin typeface="Menlo" panose="020B0609030804020204" pitchFamily="49" charset="0"/>
+                <a:ea typeface="Menlo" panose="020B0609030804020204" pitchFamily="49" charset="0"/>
+                <a:cs typeface="Menlo" panose="020B0609030804020204" pitchFamily="49" charset="0"/>
               </a:rPr>
               <a:t> </a:t>
             </a:r>
             <a:r>
               <a:rPr lang="en-GB" sz="1600" dirty="0" err="1">
-                <a:latin typeface="Courier" pitchFamily="2" charset="0"/>
+                <a:latin typeface="Menlo" panose="020B0609030804020204" pitchFamily="49" charset="0"/>
+                <a:ea typeface="Menlo" panose="020B0609030804020204" pitchFamily="49" charset="0"/>
+                <a:cs typeface="Menlo" panose="020B0609030804020204" pitchFamily="49" charset="0"/>
               </a:rPr>
               <a:t>MyApp</a:t>
             </a:r>
             <a:r>
               <a:rPr lang="en-GB" sz="1600" dirty="0">
-                <a:latin typeface="Courier" pitchFamily="2" charset="0"/>
+                <a:latin typeface="Menlo" panose="020B0609030804020204" pitchFamily="49" charset="0"/>
+                <a:ea typeface="Menlo" panose="020B0609030804020204" pitchFamily="49" charset="0"/>
+                <a:cs typeface="Menlo" panose="020B0609030804020204" pitchFamily="49" charset="0"/>
               </a:rPr>
               <a:t>({Key? key}) : super(key: key);</a:t>
             </a:r>
@@ -8158,7 +8689,9 @@
             </a:pPr>
             <a:r>
               <a:rPr lang="en-GB" sz="1600" dirty="0">
-                <a:latin typeface="Courier" pitchFamily="2" charset="0"/>
+                <a:latin typeface="Menlo" panose="020B0609030804020204" pitchFamily="49" charset="0"/>
+                <a:ea typeface="Menlo" panose="020B0609030804020204" pitchFamily="49" charset="0"/>
+                <a:cs typeface="Menlo" panose="020B0609030804020204" pitchFamily="49" charset="0"/>
               </a:rPr>
               <a:t>  @override</a:t>
             </a:r>
@@ -8169,19 +8702,25 @@
             </a:pPr>
             <a:r>
               <a:rPr lang="en-GB" sz="1600" dirty="0">
-                <a:latin typeface="Courier" pitchFamily="2" charset="0"/>
+                <a:latin typeface="Menlo" panose="020B0609030804020204" pitchFamily="49" charset="0"/>
+                <a:ea typeface="Menlo" panose="020B0609030804020204" pitchFamily="49" charset="0"/>
+                <a:cs typeface="Menlo" panose="020B0609030804020204" pitchFamily="49" charset="0"/>
               </a:rPr>
               <a:t>  Widget build(</a:t>
             </a:r>
             <a:r>
               <a:rPr lang="en-GB" sz="1600" dirty="0" err="1">
-                <a:latin typeface="Courier" pitchFamily="2" charset="0"/>
+                <a:latin typeface="Menlo" panose="020B0609030804020204" pitchFamily="49" charset="0"/>
+                <a:ea typeface="Menlo" panose="020B0609030804020204" pitchFamily="49" charset="0"/>
+                <a:cs typeface="Menlo" panose="020B0609030804020204" pitchFamily="49" charset="0"/>
               </a:rPr>
               <a:t>BuildContext</a:t>
             </a:r>
             <a:r>
               <a:rPr lang="en-GB" sz="1600" dirty="0">
-                <a:latin typeface="Courier" pitchFamily="2" charset="0"/>
+                <a:latin typeface="Menlo" panose="020B0609030804020204" pitchFamily="49" charset="0"/>
+                <a:ea typeface="Menlo" panose="020B0609030804020204" pitchFamily="49" charset="0"/>
+                <a:cs typeface="Menlo" panose="020B0609030804020204" pitchFamily="49" charset="0"/>
               </a:rPr>
               <a:t> context) {</a:t>
             </a:r>
@@ -8192,19 +8731,25 @@
             </a:pPr>
             <a:r>
               <a:rPr lang="en-GB" sz="1600" dirty="0">
-                <a:latin typeface="Courier" pitchFamily="2" charset="0"/>
+                <a:latin typeface="Menlo" panose="020B0609030804020204" pitchFamily="49" charset="0"/>
+                <a:ea typeface="Menlo" panose="020B0609030804020204" pitchFamily="49" charset="0"/>
+                <a:cs typeface="Menlo" panose="020B0609030804020204" pitchFamily="49" charset="0"/>
               </a:rPr>
               <a:t>    return </a:t>
             </a:r>
             <a:r>
               <a:rPr lang="en-GB" sz="1600" dirty="0" err="1">
-                <a:latin typeface="Courier" pitchFamily="2" charset="0"/>
+                <a:latin typeface="Menlo" panose="020B0609030804020204" pitchFamily="49" charset="0"/>
+                <a:ea typeface="Menlo" panose="020B0609030804020204" pitchFamily="49" charset="0"/>
+                <a:cs typeface="Menlo" panose="020B0609030804020204" pitchFamily="49" charset="0"/>
               </a:rPr>
               <a:t>MaterialApp</a:t>
             </a:r>
             <a:r>
               <a:rPr lang="en-GB" sz="1600" dirty="0">
-                <a:latin typeface="Courier" pitchFamily="2" charset="0"/>
+                <a:latin typeface="Menlo" panose="020B0609030804020204" pitchFamily="49" charset="0"/>
+                <a:ea typeface="Menlo" panose="020B0609030804020204" pitchFamily="49" charset="0"/>
+                <a:cs typeface="Menlo" panose="020B0609030804020204" pitchFamily="49" charset="0"/>
               </a:rPr>
               <a:t>(</a:t>
             </a:r>
@@ -8215,7 +8760,9 @@
             </a:pPr>
             <a:r>
               <a:rPr lang="en-GB" sz="1600" dirty="0">
-                <a:latin typeface="Courier" pitchFamily="2" charset="0"/>
+                <a:latin typeface="Menlo" panose="020B0609030804020204" pitchFamily="49" charset="0"/>
+                <a:ea typeface="Menlo" panose="020B0609030804020204" pitchFamily="49" charset="0"/>
+                <a:cs typeface="Menlo" panose="020B0609030804020204" pitchFamily="49" charset="0"/>
               </a:rPr>
               <a:t>      home: </a:t>
             </a:r>
@@ -8224,7 +8771,9 @@
                 <a:highlight>
                   <a:srgbClr val="FFFF00"/>
                 </a:highlight>
-                <a:latin typeface="Courier" pitchFamily="2" charset="0"/>
+                <a:latin typeface="Menlo" panose="020B0609030804020204" pitchFamily="49" charset="0"/>
+                <a:ea typeface="Menlo" panose="020B0609030804020204" pitchFamily="49" charset="0"/>
+                <a:cs typeface="Menlo" panose="020B0609030804020204" pitchFamily="49" charset="0"/>
               </a:rPr>
               <a:t>HomePage</a:t>
             </a:r>
@@ -8233,13 +8782,17 @@
                 <a:highlight>
                   <a:srgbClr val="FFFF00"/>
                 </a:highlight>
-                <a:latin typeface="Courier" pitchFamily="2" charset="0"/>
+                <a:latin typeface="Menlo" panose="020B0609030804020204" pitchFamily="49" charset="0"/>
+                <a:ea typeface="Menlo" panose="020B0609030804020204" pitchFamily="49" charset="0"/>
+                <a:cs typeface="Menlo" panose="020B0609030804020204" pitchFamily="49" charset="0"/>
               </a:rPr>
               <a:t>()</a:t>
             </a:r>
             <a:r>
               <a:rPr lang="en-GB" sz="1600" b="1" dirty="0">
-                <a:latin typeface="Courier" pitchFamily="2" charset="0"/>
+                <a:latin typeface="Menlo" panose="020B0609030804020204" pitchFamily="49" charset="0"/>
+                <a:ea typeface="Menlo" panose="020B0609030804020204" pitchFamily="49" charset="0"/>
+                <a:cs typeface="Menlo" panose="020B0609030804020204" pitchFamily="49" charset="0"/>
               </a:rPr>
               <a:t>,</a:t>
             </a:r>
@@ -8250,7 +8803,9 @@
             </a:pPr>
             <a:r>
               <a:rPr lang="en-GB" sz="1600" dirty="0">
-                <a:latin typeface="Courier" pitchFamily="2" charset="0"/>
+                <a:latin typeface="Menlo" panose="020B0609030804020204" pitchFamily="49" charset="0"/>
+                <a:ea typeface="Menlo" panose="020B0609030804020204" pitchFamily="49" charset="0"/>
+                <a:cs typeface="Menlo" panose="020B0609030804020204" pitchFamily="49" charset="0"/>
               </a:rPr>
               <a:t>    );</a:t>
             </a:r>
@@ -8261,7 +8816,9 @@
             </a:pPr>
             <a:r>
               <a:rPr lang="en-GB" sz="1600" dirty="0">
-                <a:latin typeface="Courier" pitchFamily="2" charset="0"/>
+                <a:latin typeface="Menlo" panose="020B0609030804020204" pitchFamily="49" charset="0"/>
+                <a:ea typeface="Menlo" panose="020B0609030804020204" pitchFamily="49" charset="0"/>
+                <a:cs typeface="Menlo" panose="020B0609030804020204" pitchFamily="49" charset="0"/>
               </a:rPr>
               <a:t>  } //build</a:t>
             </a:r>
@@ -8272,18 +8829,24 @@
             </a:pPr>
             <a:r>
               <a:rPr lang="en-GB" sz="1600" dirty="0">
-                <a:latin typeface="Courier" pitchFamily="2" charset="0"/>
+                <a:latin typeface="Menlo" panose="020B0609030804020204" pitchFamily="49" charset="0"/>
+                <a:ea typeface="Menlo" panose="020B0609030804020204" pitchFamily="49" charset="0"/>
+                <a:cs typeface="Menlo" panose="020B0609030804020204" pitchFamily="49" charset="0"/>
               </a:rPr>
               <a:t>}//</a:t>
             </a:r>
             <a:r>
               <a:rPr lang="en-GB" sz="1600" dirty="0" err="1">
-                <a:latin typeface="Courier" pitchFamily="2" charset="0"/>
+                <a:latin typeface="Menlo" panose="020B0609030804020204" pitchFamily="49" charset="0"/>
+                <a:ea typeface="Menlo" panose="020B0609030804020204" pitchFamily="49" charset="0"/>
+                <a:cs typeface="Menlo" panose="020B0609030804020204" pitchFamily="49" charset="0"/>
               </a:rPr>
               <a:t>MyApp</a:t>
             </a:r>
             <a:endParaRPr lang="en-GB" sz="1600" dirty="0">
-              <a:latin typeface="Courier" pitchFamily="2" charset="0"/>
+              <a:latin typeface="Menlo" panose="020B0609030804020204" pitchFamily="49" charset="0"/>
+              <a:ea typeface="Menlo" panose="020B0609030804020204" pitchFamily="49" charset="0"/>
+              <a:cs typeface="Menlo" panose="020B0609030804020204" pitchFamily="49" charset="0"/>
             </a:endParaRPr>
           </a:p>
         </p:txBody>
@@ -8818,7 +9381,9 @@
             </a:pPr>
             <a:r>
               <a:rPr lang="en-GB" sz="1600" dirty="0">
-                <a:latin typeface="Courier" pitchFamily="2" charset="0"/>
+                <a:latin typeface="Menlo" panose="020B0609030804020204" pitchFamily="49" charset="0"/>
+                <a:ea typeface="Menlo" panose="020B0609030804020204" pitchFamily="49" charset="0"/>
+                <a:cs typeface="Menlo" panose="020B0609030804020204" pitchFamily="49" charset="0"/>
               </a:rPr>
               <a:t>...</a:t>
             </a:r>
@@ -8830,13 +9395,17 @@
             </a:pPr>
             <a:r>
               <a:rPr lang="en-GB" sz="1600" dirty="0" err="1">
-                <a:latin typeface="Courier" pitchFamily="2" charset="0"/>
+                <a:latin typeface="Menlo" panose="020B0609030804020204" pitchFamily="49" charset="0"/>
+                <a:ea typeface="Menlo" panose="020B0609030804020204" pitchFamily="49" charset="0"/>
+                <a:cs typeface="Menlo" panose="020B0609030804020204" pitchFamily="49" charset="0"/>
               </a:rPr>
               <a:t>onPressed</a:t>
             </a:r>
             <a:r>
               <a:rPr lang="en-GB" sz="1600" dirty="0">
-                <a:latin typeface="Courier" pitchFamily="2" charset="0"/>
+                <a:latin typeface="Menlo" panose="020B0609030804020204" pitchFamily="49" charset="0"/>
+                <a:ea typeface="Menlo" panose="020B0609030804020204" pitchFamily="49" charset="0"/>
+                <a:cs typeface="Menlo" panose="020B0609030804020204" pitchFamily="49" charset="0"/>
               </a:rPr>
               <a:t>: () {</a:t>
             </a:r>
@@ -8847,19 +9416,25 @@
             </a:pPr>
             <a:r>
               <a:rPr lang="en-GB" sz="1600" b="1" dirty="0">
-                <a:latin typeface="Courier" pitchFamily="2" charset="0"/>
+                <a:latin typeface="Menlo" panose="020B0609030804020204" pitchFamily="49" charset="0"/>
+                <a:ea typeface="Menlo" panose="020B0609030804020204" pitchFamily="49" charset="0"/>
+                <a:cs typeface="Menlo" panose="020B0609030804020204" pitchFamily="49" charset="0"/>
               </a:rPr>
               <a:t>  </a:t>
             </a:r>
             <a:r>
               <a:rPr lang="en-GB" sz="1600" b="1" dirty="0" err="1">
-                <a:latin typeface="Courier" pitchFamily="2" charset="0"/>
+                <a:latin typeface="Menlo" panose="020B0609030804020204" pitchFamily="49" charset="0"/>
+                <a:ea typeface="Menlo" panose="020B0609030804020204" pitchFamily="49" charset="0"/>
+                <a:cs typeface="Menlo" panose="020B0609030804020204" pitchFamily="49" charset="0"/>
               </a:rPr>
               <a:t>Navigator.pop</a:t>
             </a:r>
             <a:r>
               <a:rPr lang="en-GB" sz="1600" b="1" dirty="0">
-                <a:latin typeface="Courier" pitchFamily="2" charset="0"/>
+                <a:latin typeface="Menlo" panose="020B0609030804020204" pitchFamily="49" charset="0"/>
+                <a:ea typeface="Menlo" panose="020B0609030804020204" pitchFamily="49" charset="0"/>
+                <a:cs typeface="Menlo" panose="020B0609030804020204" pitchFamily="49" charset="0"/>
               </a:rPr>
               <a:t>();</a:t>
             </a:r>
@@ -8871,7 +9446,9 @@
             </a:pPr>
             <a:r>
               <a:rPr lang="en-GB" sz="1600" dirty="0">
-                <a:latin typeface="Courier" pitchFamily="2" charset="0"/>
+                <a:latin typeface="Menlo" panose="020B0609030804020204" pitchFamily="49" charset="0"/>
+                <a:ea typeface="Menlo" panose="020B0609030804020204" pitchFamily="49" charset="0"/>
+                <a:cs typeface="Menlo" panose="020B0609030804020204" pitchFamily="49" charset="0"/>
               </a:rPr>
               <a:t>},</a:t>
             </a:r>
@@ -8883,7 +9460,9 @@
             </a:pPr>
             <a:r>
               <a:rPr lang="en-GB" sz="1600" dirty="0">
-                <a:latin typeface="Courier" pitchFamily="2" charset="0"/>
+                <a:latin typeface="Menlo" panose="020B0609030804020204" pitchFamily="49" charset="0"/>
+                <a:ea typeface="Menlo" panose="020B0609030804020204" pitchFamily="49" charset="0"/>
+                <a:cs typeface="Menlo" panose="020B0609030804020204" pitchFamily="49" charset="0"/>
               </a:rPr>
               <a:t>...</a:t>
             </a:r>
@@ -8922,7 +9501,9 @@
             </a:r>
             <a:r>
               <a:rPr lang="en-IT" dirty="0">
-                <a:latin typeface="Courier" pitchFamily="2" charset="0"/>
+                <a:latin typeface="Menlo" panose="020B0609030804020204" pitchFamily="49" charset="0"/>
+                <a:ea typeface="Menlo" panose="020B0609030804020204" pitchFamily="49" charset="0"/>
+                <a:cs typeface="Menlo" panose="020B0609030804020204" pitchFamily="49" charset="0"/>
               </a:rPr>
               <a:t>Navigator.push()</a:t>
             </a:r>
@@ -9015,7 +9596,9 @@
             </a:r>
             <a:r>
               <a:rPr lang="en-IT" dirty="0">
-                <a:latin typeface="Courier" pitchFamily="2" charset="0"/>
+                <a:latin typeface="Menlo" panose="020B0609030804020204" pitchFamily="49" charset="0"/>
+                <a:ea typeface="Menlo" panose="020B0609030804020204" pitchFamily="49" charset="0"/>
+                <a:cs typeface="Menlo" panose="020B0609030804020204" pitchFamily="49" charset="0"/>
               </a:rPr>
               <a:t>BuildContext</a:t>
             </a:r>
@@ -9057,7 +9640,9 @@
             </a:r>
             <a:r>
               <a:rPr lang="en-IT" dirty="0">
-                <a:latin typeface="Courier" pitchFamily="2" charset="0"/>
+                <a:latin typeface="Menlo" panose="020B0609030804020204" pitchFamily="49" charset="0"/>
+                <a:ea typeface="Menlo" panose="020B0609030804020204" pitchFamily="49" charset="0"/>
+                <a:cs typeface="Menlo" panose="020B0609030804020204" pitchFamily="49" charset="0"/>
               </a:rPr>
               <a:t>MaterialPageRoute</a:t>
             </a:r>
@@ -9332,7 +9917,9 @@
             </a:r>
             <a:r>
               <a:rPr lang="en-IT" dirty="0">
-                <a:latin typeface="Courier" pitchFamily="2" charset="0"/>
+                <a:latin typeface="Menlo" panose="020B0609030804020204" pitchFamily="49" charset="0"/>
+                <a:ea typeface="Menlo" panose="020B0609030804020204" pitchFamily="49" charset="0"/>
+                <a:cs typeface="Menlo" panose="020B0609030804020204" pitchFamily="49" charset="0"/>
               </a:rPr>
               <a:t>Navigator.pop()</a:t>
             </a:r>
@@ -9556,7 +10143,9 @@
             </a:pPr>
             <a:r>
               <a:rPr lang="en-GB" sz="1600" dirty="0">
-                <a:latin typeface="Courier" pitchFamily="2" charset="0"/>
+                <a:latin typeface="Menlo" panose="020B0609030804020204" pitchFamily="49" charset="0"/>
+                <a:ea typeface="Menlo" panose="020B0609030804020204" pitchFamily="49" charset="0"/>
+                <a:cs typeface="Menlo" panose="020B0609030804020204" pitchFamily="49" charset="0"/>
               </a:rPr>
               <a:t>...</a:t>
             </a:r>
@@ -9568,13 +10157,17 @@
             </a:pPr>
             <a:r>
               <a:rPr lang="en-GB" sz="1600" dirty="0" err="1">
-                <a:latin typeface="Courier" pitchFamily="2" charset="0"/>
+                <a:latin typeface="Menlo" panose="020B0609030804020204" pitchFamily="49" charset="0"/>
+                <a:ea typeface="Menlo" panose="020B0609030804020204" pitchFamily="49" charset="0"/>
+                <a:cs typeface="Menlo" panose="020B0609030804020204" pitchFamily="49" charset="0"/>
               </a:rPr>
               <a:t>onPressed</a:t>
             </a:r>
             <a:r>
               <a:rPr lang="en-GB" sz="1600" dirty="0">
-                <a:latin typeface="Courier" pitchFamily="2" charset="0"/>
+                <a:latin typeface="Menlo" panose="020B0609030804020204" pitchFamily="49" charset="0"/>
+                <a:ea typeface="Menlo" panose="020B0609030804020204" pitchFamily="49" charset="0"/>
+                <a:cs typeface="Menlo" panose="020B0609030804020204" pitchFamily="49" charset="0"/>
               </a:rPr>
               <a:t>: () {</a:t>
             </a:r>
@@ -9585,43 +10178,57 @@
             </a:pPr>
             <a:r>
               <a:rPr lang="en-GB" sz="1600" b="1" dirty="0">
-                <a:latin typeface="Courier" pitchFamily="2" charset="0"/>
+                <a:latin typeface="Menlo" panose="020B0609030804020204" pitchFamily="49" charset="0"/>
+                <a:ea typeface="Menlo" panose="020B0609030804020204" pitchFamily="49" charset="0"/>
+                <a:cs typeface="Menlo" panose="020B0609030804020204" pitchFamily="49" charset="0"/>
               </a:rPr>
               <a:t>  </a:t>
             </a:r>
             <a:r>
               <a:rPr lang="en-GB" sz="1600" b="1" dirty="0" err="1">
-                <a:latin typeface="Courier" pitchFamily="2" charset="0"/>
+                <a:latin typeface="Menlo" panose="020B0609030804020204" pitchFamily="49" charset="0"/>
+                <a:ea typeface="Menlo" panose="020B0609030804020204" pitchFamily="49" charset="0"/>
+                <a:cs typeface="Menlo" panose="020B0609030804020204" pitchFamily="49" charset="0"/>
               </a:rPr>
               <a:t>Navigator.push</a:t>
             </a:r>
             <a:r>
               <a:rPr lang="en-GB" sz="1600" b="1" dirty="0">
-                <a:latin typeface="Courier" pitchFamily="2" charset="0"/>
+                <a:latin typeface="Menlo" panose="020B0609030804020204" pitchFamily="49" charset="0"/>
+                <a:ea typeface="Menlo" panose="020B0609030804020204" pitchFamily="49" charset="0"/>
+                <a:cs typeface="Menlo" panose="020B0609030804020204" pitchFamily="49" charset="0"/>
               </a:rPr>
               <a:t>(context, </a:t>
             </a:r>
             <a:r>
               <a:rPr lang="en-GB" sz="1600" b="1" dirty="0" err="1">
-                <a:latin typeface="Courier" pitchFamily="2" charset="0"/>
+                <a:latin typeface="Menlo" panose="020B0609030804020204" pitchFamily="49" charset="0"/>
+                <a:ea typeface="Menlo" panose="020B0609030804020204" pitchFamily="49" charset="0"/>
+                <a:cs typeface="Menlo" panose="020B0609030804020204" pitchFamily="49" charset="0"/>
               </a:rPr>
               <a:t>MaterialPageRoute</a:t>
             </a:r>
             <a:r>
               <a:rPr lang="en-GB" sz="1600" b="1" dirty="0">
-                <a:latin typeface="Courier" pitchFamily="2" charset="0"/>
+                <a:latin typeface="Menlo" panose="020B0609030804020204" pitchFamily="49" charset="0"/>
+                <a:ea typeface="Menlo" panose="020B0609030804020204" pitchFamily="49" charset="0"/>
+                <a:cs typeface="Menlo" panose="020B0609030804020204" pitchFamily="49" charset="0"/>
               </a:rPr>
               <a:t>(builder: (context) =&gt; </a:t>
             </a:r>
             <a:r>
               <a:rPr lang="en-GB" sz="1600" b="1" dirty="0" err="1">
-                <a:latin typeface="Courier" pitchFamily="2" charset="0"/>
+                <a:latin typeface="Menlo" panose="020B0609030804020204" pitchFamily="49" charset="0"/>
+                <a:ea typeface="Menlo" panose="020B0609030804020204" pitchFamily="49" charset="0"/>
+                <a:cs typeface="Menlo" panose="020B0609030804020204" pitchFamily="49" charset="0"/>
               </a:rPr>
               <a:t>ProfilePage</a:t>
             </a:r>
             <a:r>
               <a:rPr lang="en-GB" sz="1600" b="1" dirty="0">
-                <a:latin typeface="Courier" pitchFamily="2" charset="0"/>
+                <a:latin typeface="Menlo" panose="020B0609030804020204" pitchFamily="49" charset="0"/>
+                <a:ea typeface="Menlo" panose="020B0609030804020204" pitchFamily="49" charset="0"/>
+                <a:cs typeface="Menlo" panose="020B0609030804020204" pitchFamily="49" charset="0"/>
               </a:rPr>
               <a:t>()));</a:t>
             </a:r>
@@ -9633,7 +10240,9 @@
             </a:pPr>
             <a:r>
               <a:rPr lang="en-GB" sz="1600" dirty="0">
-                <a:latin typeface="Courier" pitchFamily="2" charset="0"/>
+                <a:latin typeface="Menlo" panose="020B0609030804020204" pitchFamily="49" charset="0"/>
+                <a:ea typeface="Menlo" panose="020B0609030804020204" pitchFamily="49" charset="0"/>
+                <a:cs typeface="Menlo" panose="020B0609030804020204" pitchFamily="49" charset="0"/>
               </a:rPr>
               <a:t>},</a:t>
             </a:r>
@@ -9645,7 +10254,9 @@
             </a:pPr>
             <a:r>
               <a:rPr lang="en-GB" sz="1600" dirty="0">
-                <a:latin typeface="Courier" pitchFamily="2" charset="0"/>
+                <a:latin typeface="Menlo" panose="020B0609030804020204" pitchFamily="49" charset="0"/>
+                <a:ea typeface="Menlo" panose="020B0609030804020204" pitchFamily="49" charset="0"/>
+                <a:cs typeface="Menlo" panose="020B0609030804020204" pitchFamily="49" charset="0"/>
               </a:rPr>
               <a:t>...</a:t>
             </a:r>
@@ -9695,7 +10306,9 @@
             <a:pPr algn="ctr"/>
             <a:r>
               <a:rPr lang="en-IT" dirty="0">
-                <a:latin typeface="Courier" pitchFamily="2" charset="0"/>
+                <a:latin typeface="Menlo" panose="020B0609030804020204" pitchFamily="49" charset="0"/>
+                <a:ea typeface="Menlo" panose="020B0609030804020204" pitchFamily="49" charset="0"/>
+                <a:cs typeface="Menlo" panose="020B0609030804020204" pitchFamily="49" charset="0"/>
               </a:rPr>
               <a:t>HomePage</a:t>
             </a:r>
@@ -9745,7 +10358,9 @@
             <a:pPr algn="ctr"/>
             <a:r>
               <a:rPr lang="en-IT" dirty="0">
-                <a:latin typeface="Courier" pitchFamily="2" charset="0"/>
+                <a:latin typeface="Menlo" panose="020B0609030804020204" pitchFamily="49" charset="0"/>
+                <a:ea typeface="Menlo" panose="020B0609030804020204" pitchFamily="49" charset="0"/>
+                <a:cs typeface="Menlo" panose="020B0609030804020204" pitchFamily="49" charset="0"/>
               </a:rPr>
               <a:t>HomePage</a:t>
             </a:r>
@@ -9795,7 +10410,9 @@
             <a:pPr algn="ctr"/>
             <a:r>
               <a:rPr lang="en-IT" dirty="0">
-                <a:latin typeface="Courier" pitchFamily="2" charset="0"/>
+                <a:latin typeface="Menlo" panose="020B0609030804020204" pitchFamily="49" charset="0"/>
+                <a:ea typeface="Menlo" panose="020B0609030804020204" pitchFamily="49" charset="0"/>
+                <a:cs typeface="Menlo" panose="020B0609030804020204" pitchFamily="49" charset="0"/>
               </a:rPr>
               <a:t>ProfilePage</a:t>
             </a:r>
@@ -9845,7 +10462,9 @@
             <a:pPr algn="ctr"/>
             <a:r>
               <a:rPr lang="en-IT" dirty="0">
-                <a:latin typeface="Courier" pitchFamily="2" charset="0"/>
+                <a:latin typeface="Menlo" panose="020B0609030804020204" pitchFamily="49" charset="0"/>
+                <a:ea typeface="Menlo" panose="020B0609030804020204" pitchFamily="49" charset="0"/>
+                <a:cs typeface="Menlo" panose="020B0609030804020204" pitchFamily="49" charset="0"/>
               </a:rPr>
               <a:t>HomePage</a:t>
             </a:r>
@@ -10117,11 +10736,12 @@
           <a:p>
             <a:r>
               <a:rPr lang="en-IT" sz="1100" dirty="0">
-                <a:latin typeface="Courier" pitchFamily="2" charset="0"/>
+                <a:latin typeface="Menlo" panose="020B0609030804020204" pitchFamily="49" charset="0"/>
+                <a:ea typeface="Menlo" panose="020B0609030804020204" pitchFamily="49" charset="0"/>
+                <a:cs typeface="Menlo" panose="020B0609030804020204" pitchFamily="49" charset="0"/>
               </a:rPr>
               <a:t>Navigator.pop()</a:t>
             </a:r>
-            <a:endParaRPr lang="en-IT" sz="1100" dirty="0"/>
           </a:p>
         </p:txBody>
       </p:sp>
@@ -10154,11 +10774,12 @@
           <a:p>
             <a:r>
               <a:rPr lang="en-IT" sz="1100" dirty="0">
-                <a:latin typeface="Courier" pitchFamily="2" charset="0"/>
+                <a:latin typeface="Menlo" panose="020B0609030804020204" pitchFamily="49" charset="0"/>
+                <a:ea typeface="Menlo" panose="020B0609030804020204" pitchFamily="49" charset="0"/>
+                <a:cs typeface="Menlo" panose="020B0609030804020204" pitchFamily="49" charset="0"/>
               </a:rPr>
               <a:t>Navigator.push()</a:t>
             </a:r>
-            <a:endParaRPr lang="en-IT" sz="1100" dirty="0"/>
           </a:p>
         </p:txBody>
       </p:sp>
@@ -10283,7 +10904,9 @@
             </a:r>
             <a:r>
               <a:rPr lang="en-IT" dirty="0">
-                <a:latin typeface="Courier" pitchFamily="2" charset="0"/>
+                <a:latin typeface="Menlo" panose="020B0609030804020204" pitchFamily="49" charset="0"/>
+                <a:ea typeface="Menlo" panose="020B0609030804020204" pitchFamily="49" charset="0"/>
+                <a:cs typeface="Menlo" panose="020B0609030804020204" pitchFamily="49" charset="0"/>
               </a:rPr>
               <a:t>Navigator.push()</a:t>
             </a:r>
@@ -10293,7 +10916,9 @@
             </a:r>
             <a:r>
               <a:rPr lang="en-IT" dirty="0">
-                <a:latin typeface="Courier" pitchFamily="2" charset="0"/>
+                <a:latin typeface="Menlo" panose="020B0609030804020204" pitchFamily="49" charset="0"/>
+                <a:ea typeface="Menlo" panose="020B0609030804020204" pitchFamily="49" charset="0"/>
+                <a:cs typeface="Menlo" panose="020B0609030804020204" pitchFamily="49" charset="0"/>
               </a:rPr>
               <a:t>HomePage</a:t>
             </a:r>
@@ -10388,7 +11013,9 @@
             <a:pPr algn="ctr"/>
             <a:r>
               <a:rPr lang="en-IT" dirty="0">
-                <a:latin typeface="Courier" pitchFamily="2" charset="0"/>
+                <a:latin typeface="Menlo" panose="020B0609030804020204" pitchFamily="49" charset="0"/>
+                <a:ea typeface="Menlo" panose="020B0609030804020204" pitchFamily="49" charset="0"/>
+                <a:cs typeface="Menlo" panose="020B0609030804020204" pitchFamily="49" charset="0"/>
               </a:rPr>
               <a:t>HomePage</a:t>
             </a:r>
@@ -10438,7 +11065,9 @@
             <a:pPr algn="ctr"/>
             <a:r>
               <a:rPr lang="en-IT" dirty="0">
-                <a:latin typeface="Courier" pitchFamily="2" charset="0"/>
+                <a:latin typeface="Menlo" panose="020B0609030804020204" pitchFamily="49" charset="0"/>
+                <a:ea typeface="Menlo" panose="020B0609030804020204" pitchFamily="49" charset="0"/>
+                <a:cs typeface="Menlo" panose="020B0609030804020204" pitchFamily="49" charset="0"/>
               </a:rPr>
               <a:t>HomePage</a:t>
             </a:r>
@@ -10488,7 +11117,9 @@
             <a:pPr algn="ctr"/>
             <a:r>
               <a:rPr lang="en-IT" dirty="0">
-                <a:latin typeface="Courier" pitchFamily="2" charset="0"/>
+                <a:latin typeface="Menlo" panose="020B0609030804020204" pitchFamily="49" charset="0"/>
+                <a:ea typeface="Menlo" panose="020B0609030804020204" pitchFamily="49" charset="0"/>
+                <a:cs typeface="Menlo" panose="020B0609030804020204" pitchFamily="49" charset="0"/>
               </a:rPr>
               <a:t>ProfilePage</a:t>
             </a:r>
@@ -10538,7 +11169,9 @@
             <a:pPr algn="ctr"/>
             <a:r>
               <a:rPr lang="en-IT" dirty="0">
-                <a:latin typeface="Courier" pitchFamily="2" charset="0"/>
+                <a:latin typeface="Menlo" panose="020B0609030804020204" pitchFamily="49" charset="0"/>
+                <a:ea typeface="Menlo" panose="020B0609030804020204" pitchFamily="49" charset="0"/>
+                <a:cs typeface="Menlo" panose="020B0609030804020204" pitchFamily="49" charset="0"/>
               </a:rPr>
               <a:t>HomePage</a:t>
             </a:r>
@@ -10810,11 +11443,12 @@
           <a:p>
             <a:r>
               <a:rPr lang="en-IT" sz="1100" dirty="0">
-                <a:latin typeface="Courier" pitchFamily="2" charset="0"/>
+                <a:latin typeface="Menlo" panose="020B0609030804020204" pitchFamily="49" charset="0"/>
+                <a:ea typeface="Menlo" panose="020B0609030804020204" pitchFamily="49" charset="0"/>
+                <a:cs typeface="Menlo" panose="020B0609030804020204" pitchFamily="49" charset="0"/>
               </a:rPr>
               <a:t>Navigator.push()</a:t>
             </a:r>
-            <a:endParaRPr lang="en-IT" sz="1100" dirty="0"/>
           </a:p>
         </p:txBody>
       </p:sp>
@@ -10847,11 +11481,12 @@
           <a:p>
             <a:r>
               <a:rPr lang="en-IT" sz="1100" dirty="0">
-                <a:latin typeface="Courier" pitchFamily="2" charset="0"/>
+                <a:latin typeface="Menlo" panose="020B0609030804020204" pitchFamily="49" charset="0"/>
+                <a:ea typeface="Menlo" panose="020B0609030804020204" pitchFamily="49" charset="0"/>
+                <a:cs typeface="Menlo" panose="020B0609030804020204" pitchFamily="49" charset="0"/>
               </a:rPr>
               <a:t>Navigator.push()</a:t>
             </a:r>
-            <a:endParaRPr lang="en-IT" sz="1100" dirty="0"/>
           </a:p>
         </p:txBody>
       </p:sp>
@@ -10898,7 +11533,9 @@
             <a:pPr algn="ctr"/>
             <a:r>
               <a:rPr lang="en-IT" dirty="0">
-                <a:latin typeface="Courier" pitchFamily="2" charset="0"/>
+                <a:latin typeface="Menlo" panose="020B0609030804020204" pitchFamily="49" charset="0"/>
+                <a:ea typeface="Menlo" panose="020B0609030804020204" pitchFamily="49" charset="0"/>
+                <a:cs typeface="Menlo" panose="020B0609030804020204" pitchFamily="49" charset="0"/>
               </a:rPr>
               <a:t>ProfilePage</a:t>
             </a:r>
@@ -10948,7 +11585,9 @@
             <a:pPr algn="ctr"/>
             <a:r>
               <a:rPr lang="en-IT" dirty="0">
-                <a:latin typeface="Courier" pitchFamily="2" charset="0"/>
+                <a:latin typeface="Menlo" panose="020B0609030804020204" pitchFamily="49" charset="0"/>
+                <a:ea typeface="Menlo" panose="020B0609030804020204" pitchFamily="49" charset="0"/>
+                <a:cs typeface="Menlo" panose="020B0609030804020204" pitchFamily="49" charset="0"/>
               </a:rPr>
               <a:t>HomePage</a:t>
             </a:r>
@@ -11306,13 +11945,17 @@
             </a:r>
             <a:r>
               <a:rPr lang="en-GB" dirty="0" err="1">
-                <a:latin typeface="Courier" pitchFamily="2" charset="0"/>
+                <a:latin typeface="Menlo" panose="020B0609030804020204" pitchFamily="49" charset="0"/>
+                <a:ea typeface="Menlo" panose="020B0609030804020204" pitchFamily="49" charset="0"/>
+                <a:cs typeface="Menlo" panose="020B0609030804020204" pitchFamily="49" charset="0"/>
               </a:rPr>
               <a:t>Navigator.push</a:t>
             </a:r>
             <a:r>
               <a:rPr lang="en-GB" dirty="0">
-                <a:latin typeface="Courier" pitchFamily="2" charset="0"/>
+                <a:latin typeface="Menlo" panose="020B0609030804020204" pitchFamily="49" charset="0"/>
+                <a:ea typeface="Menlo" panose="020B0609030804020204" pitchFamily="49" charset="0"/>
+                <a:cs typeface="Menlo" panose="020B0609030804020204" pitchFamily="49" charset="0"/>
               </a:rPr>
               <a:t>()</a:t>
             </a:r>
@@ -11322,13 +11965,17 @@
             </a:r>
             <a:r>
               <a:rPr lang="en-GB" dirty="0" err="1">
-                <a:latin typeface="Courier" pitchFamily="2" charset="0"/>
+                <a:latin typeface="Menlo" panose="020B0609030804020204" pitchFamily="49" charset="0"/>
+                <a:ea typeface="Menlo" panose="020B0609030804020204" pitchFamily="49" charset="0"/>
+                <a:cs typeface="Menlo" panose="020B0609030804020204" pitchFamily="49" charset="0"/>
               </a:rPr>
               <a:t>Navigator.pushNamed</a:t>
             </a:r>
             <a:r>
               <a:rPr lang="en-GB" dirty="0">
-                <a:latin typeface="Courier" pitchFamily="2" charset="0"/>
+                <a:latin typeface="Menlo" panose="020B0609030804020204" pitchFamily="49" charset="0"/>
+                <a:ea typeface="Menlo" panose="020B0609030804020204" pitchFamily="49" charset="0"/>
+                <a:cs typeface="Menlo" panose="020B0609030804020204" pitchFamily="49" charset="0"/>
               </a:rPr>
               <a:t>()</a:t>
             </a:r>
@@ -11548,7 +12195,9 @@
             </a:r>
             <a:r>
               <a:rPr lang="en-GB" dirty="0" err="1">
-                <a:latin typeface="Courier" pitchFamily="2" charset="0"/>
+                <a:latin typeface="Menlo" panose="020B0609030804020204" pitchFamily="49" charset="0"/>
+                <a:ea typeface="Menlo" panose="020B0609030804020204" pitchFamily="49" charset="0"/>
+                <a:cs typeface="Menlo" panose="020B0609030804020204" pitchFamily="49" charset="0"/>
               </a:rPr>
               <a:t>initialRoute</a:t>
             </a:r>
@@ -11558,7 +12207,9 @@
             </a:r>
             <a:r>
               <a:rPr lang="en-GB" dirty="0">
-                <a:latin typeface="Courier" pitchFamily="2" charset="0"/>
+                <a:latin typeface="Menlo" panose="020B0609030804020204" pitchFamily="49" charset="0"/>
+                <a:ea typeface="Menlo" panose="020B0609030804020204" pitchFamily="49" charset="0"/>
+                <a:cs typeface="Menlo" panose="020B0609030804020204" pitchFamily="49" charset="0"/>
               </a:rPr>
               <a:t>routes</a:t>
             </a:r>
@@ -11568,7 +12219,9 @@
             </a:r>
             <a:r>
               <a:rPr lang="en-GB" dirty="0" err="1">
-                <a:latin typeface="Courier" pitchFamily="2" charset="0"/>
+                <a:latin typeface="Menlo" panose="020B0609030804020204" pitchFamily="49" charset="0"/>
+                <a:ea typeface="Menlo" panose="020B0609030804020204" pitchFamily="49" charset="0"/>
+                <a:cs typeface="Menlo" panose="020B0609030804020204" pitchFamily="49" charset="0"/>
               </a:rPr>
               <a:t>MaterialApp</a:t>
             </a:r>
@@ -11586,13 +12239,17 @@
             </a:pPr>
             <a:r>
               <a:rPr lang="en-GB" dirty="0" err="1">
-                <a:latin typeface="Courier" pitchFamily="2" charset="0"/>
+                <a:latin typeface="Menlo" panose="020B0609030804020204" pitchFamily="49" charset="0"/>
+                <a:ea typeface="Menlo" panose="020B0609030804020204" pitchFamily="49" charset="0"/>
+                <a:cs typeface="Menlo" panose="020B0609030804020204" pitchFamily="49" charset="0"/>
               </a:rPr>
               <a:t>MaterialApp</a:t>
             </a:r>
             <a:r>
               <a:rPr lang="en-GB" dirty="0">
-                <a:latin typeface="Courier" pitchFamily="2" charset="0"/>
+                <a:latin typeface="Menlo" panose="020B0609030804020204" pitchFamily="49" charset="0"/>
+                <a:ea typeface="Menlo" panose="020B0609030804020204" pitchFamily="49" charset="0"/>
+                <a:cs typeface="Menlo" panose="020B0609030804020204" pitchFamily="49" charset="0"/>
               </a:rPr>
               <a:t>(</a:t>
             </a:r>
@@ -11603,19 +12260,25 @@
             </a:pPr>
             <a:r>
               <a:rPr lang="en-GB" b="1" dirty="0">
-                <a:latin typeface="Courier" pitchFamily="2" charset="0"/>
+                <a:latin typeface="Menlo" panose="020B0609030804020204" pitchFamily="49" charset="0"/>
+                <a:ea typeface="Menlo" panose="020B0609030804020204" pitchFamily="49" charset="0"/>
+                <a:cs typeface="Menlo" panose="020B0609030804020204" pitchFamily="49" charset="0"/>
               </a:rPr>
               <a:t>  </a:t>
             </a:r>
             <a:r>
               <a:rPr lang="en-GB" b="1" dirty="0" err="1">
-                <a:latin typeface="Courier" pitchFamily="2" charset="0"/>
+                <a:latin typeface="Menlo" panose="020B0609030804020204" pitchFamily="49" charset="0"/>
+                <a:ea typeface="Menlo" panose="020B0609030804020204" pitchFamily="49" charset="0"/>
+                <a:cs typeface="Menlo" panose="020B0609030804020204" pitchFamily="49" charset="0"/>
               </a:rPr>
               <a:t>initialRoute</a:t>
             </a:r>
             <a:r>
               <a:rPr lang="en-GB" dirty="0">
-                <a:latin typeface="Courier" pitchFamily="2" charset="0"/>
+                <a:latin typeface="Menlo" panose="020B0609030804020204" pitchFamily="49" charset="0"/>
+                <a:ea typeface="Menlo" panose="020B0609030804020204" pitchFamily="49" charset="0"/>
+                <a:cs typeface="Menlo" panose="020B0609030804020204" pitchFamily="49" charset="0"/>
               </a:rPr>
               <a:t>: '/’,</a:t>
             </a:r>
@@ -11626,13 +12289,17 @@
             </a:pPr>
             <a:r>
               <a:rPr lang="en-GB" b="1" dirty="0">
-                <a:latin typeface="Courier" pitchFamily="2" charset="0"/>
+                <a:latin typeface="Menlo" panose="020B0609030804020204" pitchFamily="49" charset="0"/>
+                <a:ea typeface="Menlo" panose="020B0609030804020204" pitchFamily="49" charset="0"/>
+                <a:cs typeface="Menlo" panose="020B0609030804020204" pitchFamily="49" charset="0"/>
               </a:rPr>
               <a:t>  routes</a:t>
             </a:r>
             <a:r>
               <a:rPr lang="en-GB" dirty="0">
-                <a:latin typeface="Courier" pitchFamily="2" charset="0"/>
+                <a:latin typeface="Menlo" panose="020B0609030804020204" pitchFamily="49" charset="0"/>
+                <a:ea typeface="Menlo" panose="020B0609030804020204" pitchFamily="49" charset="0"/>
+                <a:cs typeface="Menlo" panose="020B0609030804020204" pitchFamily="49" charset="0"/>
               </a:rPr>
               <a:t>: {</a:t>
             </a:r>
@@ -11643,19 +12310,25 @@
             </a:pPr>
             <a:r>
               <a:rPr lang="en-GB" dirty="0">
-                <a:latin typeface="Courier" pitchFamily="2" charset="0"/>
+                <a:latin typeface="Menlo" panose="020B0609030804020204" pitchFamily="49" charset="0"/>
+                <a:ea typeface="Menlo" panose="020B0609030804020204" pitchFamily="49" charset="0"/>
+                <a:cs typeface="Menlo" panose="020B0609030804020204" pitchFamily="49" charset="0"/>
               </a:rPr>
               <a:t>    '/' : (context) =&gt; </a:t>
             </a:r>
             <a:r>
               <a:rPr lang="en-GB" dirty="0" err="1">
-                <a:latin typeface="Courier" pitchFamily="2" charset="0"/>
+                <a:latin typeface="Menlo" panose="020B0609030804020204" pitchFamily="49" charset="0"/>
+                <a:ea typeface="Menlo" panose="020B0609030804020204" pitchFamily="49" charset="0"/>
+                <a:cs typeface="Menlo" panose="020B0609030804020204" pitchFamily="49" charset="0"/>
               </a:rPr>
               <a:t>HomePage</a:t>
             </a:r>
             <a:r>
               <a:rPr lang="en-GB" dirty="0">
-                <a:latin typeface="Courier" pitchFamily="2" charset="0"/>
+                <a:latin typeface="Menlo" panose="020B0609030804020204" pitchFamily="49" charset="0"/>
+                <a:ea typeface="Menlo" panose="020B0609030804020204" pitchFamily="49" charset="0"/>
+                <a:cs typeface="Menlo" panose="020B0609030804020204" pitchFamily="49" charset="0"/>
               </a:rPr>
               <a:t>(),</a:t>
             </a:r>
@@ -11666,19 +12339,25 @@
             </a:pPr>
             <a:r>
               <a:rPr lang="en-GB" dirty="0">
-                <a:latin typeface="Courier" pitchFamily="2" charset="0"/>
+                <a:latin typeface="Menlo" panose="020B0609030804020204" pitchFamily="49" charset="0"/>
+                <a:ea typeface="Menlo" panose="020B0609030804020204" pitchFamily="49" charset="0"/>
+                <a:cs typeface="Menlo" panose="020B0609030804020204" pitchFamily="49" charset="0"/>
               </a:rPr>
               <a:t>    '/profile/': (context) =&gt; </a:t>
             </a:r>
             <a:r>
               <a:rPr lang="en-GB" dirty="0" err="1">
-                <a:latin typeface="Courier" pitchFamily="2" charset="0"/>
+                <a:latin typeface="Menlo" panose="020B0609030804020204" pitchFamily="49" charset="0"/>
+                <a:ea typeface="Menlo" panose="020B0609030804020204" pitchFamily="49" charset="0"/>
+                <a:cs typeface="Menlo" panose="020B0609030804020204" pitchFamily="49" charset="0"/>
               </a:rPr>
               <a:t>ProfilePage</a:t>
             </a:r>
             <a:r>
               <a:rPr lang="en-GB" dirty="0">
-                <a:latin typeface="Courier" pitchFamily="2" charset="0"/>
+                <a:latin typeface="Menlo" panose="020B0609030804020204" pitchFamily="49" charset="0"/>
+                <a:ea typeface="Menlo" panose="020B0609030804020204" pitchFamily="49" charset="0"/>
+                <a:cs typeface="Menlo" panose="020B0609030804020204" pitchFamily="49" charset="0"/>
               </a:rPr>
               <a:t>(), </a:t>
             </a:r>
@@ -11689,7 +12368,9 @@
             </a:pPr>
             <a:r>
               <a:rPr lang="en-GB" dirty="0">
-                <a:latin typeface="Courier" pitchFamily="2" charset="0"/>
+                <a:latin typeface="Menlo" panose="020B0609030804020204" pitchFamily="49" charset="0"/>
+                <a:ea typeface="Menlo" panose="020B0609030804020204" pitchFamily="49" charset="0"/>
+                <a:cs typeface="Menlo" panose="020B0609030804020204" pitchFamily="49" charset="0"/>
               </a:rPr>
               <a:t>  },</a:t>
             </a:r>
@@ -11700,7 +12381,9 @@
             </a:pPr>
             <a:r>
               <a:rPr lang="en-GB" dirty="0">
-                <a:latin typeface="Courier" pitchFamily="2" charset="0"/>
+                <a:latin typeface="Menlo" panose="020B0609030804020204" pitchFamily="49" charset="0"/>
+                <a:ea typeface="Menlo" panose="020B0609030804020204" pitchFamily="49" charset="0"/>
+                <a:cs typeface="Menlo" panose="020B0609030804020204" pitchFamily="49" charset="0"/>
               </a:rPr>
               <a:t>);</a:t>
             </a:r>
@@ -12029,7 +12712,7 @@
         <p:spPr>
           <a:xfrm>
             <a:off x="428171" y="4913260"/>
-            <a:ext cx="11110202" cy="2414332"/>
+            <a:ext cx="2765968" cy="2414332"/>
           </a:xfrm>
           <a:prstGeom prst="rect">
             <a:avLst/>
@@ -12225,7 +12908,9 @@
             </a:pPr>
             <a:r>
               <a:rPr lang="en-GB" sz="1600" dirty="0">
-                <a:latin typeface="Courier" pitchFamily="2" charset="0"/>
+                <a:latin typeface="Menlo" panose="020B0609030804020204" pitchFamily="49" charset="0"/>
+                <a:ea typeface="Menlo" panose="020B0609030804020204" pitchFamily="49" charset="0"/>
+                <a:cs typeface="Menlo" panose="020B0609030804020204" pitchFamily="49" charset="0"/>
               </a:rPr>
               <a:t>...</a:t>
             </a:r>
@@ -12237,13 +12922,17 @@
             </a:pPr>
             <a:r>
               <a:rPr lang="en-GB" sz="1600" dirty="0" err="1">
-                <a:latin typeface="Courier" pitchFamily="2" charset="0"/>
+                <a:latin typeface="Menlo" panose="020B0609030804020204" pitchFamily="49" charset="0"/>
+                <a:ea typeface="Menlo" panose="020B0609030804020204" pitchFamily="49" charset="0"/>
+                <a:cs typeface="Menlo" panose="020B0609030804020204" pitchFamily="49" charset="0"/>
               </a:rPr>
               <a:t>onPressed</a:t>
             </a:r>
             <a:r>
               <a:rPr lang="en-GB" sz="1600" dirty="0">
-                <a:latin typeface="Courier" pitchFamily="2" charset="0"/>
+                <a:latin typeface="Menlo" panose="020B0609030804020204" pitchFamily="49" charset="0"/>
+                <a:ea typeface="Menlo" panose="020B0609030804020204" pitchFamily="49" charset="0"/>
+                <a:cs typeface="Menlo" panose="020B0609030804020204" pitchFamily="49" charset="0"/>
               </a:rPr>
               <a:t>: () {</a:t>
             </a:r>
@@ -12254,19 +12943,25 @@
             </a:pPr>
             <a:r>
               <a:rPr lang="en-GB" sz="1600" b="1" dirty="0">
-                <a:latin typeface="Courier" pitchFamily="2" charset="0"/>
+                <a:latin typeface="Menlo" panose="020B0609030804020204" pitchFamily="49" charset="0"/>
+                <a:ea typeface="Menlo" panose="020B0609030804020204" pitchFamily="49" charset="0"/>
+                <a:cs typeface="Menlo" panose="020B0609030804020204" pitchFamily="49" charset="0"/>
               </a:rPr>
               <a:t>  </a:t>
             </a:r>
             <a:r>
               <a:rPr lang="en-GB" sz="1600" b="1" dirty="0" err="1">
-                <a:latin typeface="Courier" pitchFamily="2" charset="0"/>
+                <a:latin typeface="Menlo" panose="020B0609030804020204" pitchFamily="49" charset="0"/>
+                <a:ea typeface="Menlo" panose="020B0609030804020204" pitchFamily="49" charset="0"/>
+                <a:cs typeface="Menlo" panose="020B0609030804020204" pitchFamily="49" charset="0"/>
               </a:rPr>
               <a:t>Navigator.pop</a:t>
             </a:r>
             <a:r>
               <a:rPr lang="en-GB" sz="1600" b="1" dirty="0">
-                <a:latin typeface="Courier" pitchFamily="2" charset="0"/>
+                <a:latin typeface="Menlo" panose="020B0609030804020204" pitchFamily="49" charset="0"/>
+                <a:ea typeface="Menlo" panose="020B0609030804020204" pitchFamily="49" charset="0"/>
+                <a:cs typeface="Menlo" panose="020B0609030804020204" pitchFamily="49" charset="0"/>
               </a:rPr>
               <a:t>();</a:t>
             </a:r>
@@ -12278,7 +12973,9 @@
             </a:pPr>
             <a:r>
               <a:rPr lang="en-GB" sz="1600" dirty="0">
-                <a:latin typeface="Courier" pitchFamily="2" charset="0"/>
+                <a:latin typeface="Menlo" panose="020B0609030804020204" pitchFamily="49" charset="0"/>
+                <a:ea typeface="Menlo" panose="020B0609030804020204" pitchFamily="49" charset="0"/>
+                <a:cs typeface="Menlo" panose="020B0609030804020204" pitchFamily="49" charset="0"/>
               </a:rPr>
               <a:t>},</a:t>
             </a:r>
@@ -12290,7 +12987,9 @@
             </a:pPr>
             <a:r>
               <a:rPr lang="en-GB" sz="1600" dirty="0">
-                <a:latin typeface="Courier" pitchFamily="2" charset="0"/>
+                <a:latin typeface="Menlo" panose="020B0609030804020204" pitchFamily="49" charset="0"/>
+                <a:ea typeface="Menlo" panose="020B0609030804020204" pitchFamily="49" charset="0"/>
+                <a:cs typeface="Menlo" panose="020B0609030804020204" pitchFamily="49" charset="0"/>
               </a:rPr>
               <a:t>...</a:t>
             </a:r>
@@ -12331,7 +13030,9 @@
             </a:r>
             <a:r>
               <a:rPr lang="en-IT" dirty="0">
-                <a:latin typeface="Courier" pitchFamily="2" charset="0"/>
+                <a:latin typeface="Menlo" panose="020B0609030804020204" pitchFamily="49" charset="0"/>
+                <a:ea typeface="Menlo" panose="020B0609030804020204" pitchFamily="49" charset="0"/>
+                <a:cs typeface="Menlo" panose="020B0609030804020204" pitchFamily="49" charset="0"/>
               </a:rPr>
               <a:t>ProfilePage</a:t>
             </a:r>
@@ -12341,7 +13042,9 @@
             </a:r>
             <a:r>
               <a:rPr lang="en-IT" dirty="0">
-                <a:latin typeface="Courier" pitchFamily="2" charset="0"/>
+                <a:latin typeface="Menlo" panose="020B0609030804020204" pitchFamily="49" charset="0"/>
+                <a:ea typeface="Menlo" panose="020B0609030804020204" pitchFamily="49" charset="0"/>
+                <a:cs typeface="Menlo" panose="020B0609030804020204" pitchFamily="49" charset="0"/>
               </a:rPr>
               <a:t>Navigator.pushNamed()</a:t>
             </a:r>
@@ -12422,13 +13125,21 @@
           <a:p>
             <a:r>
               <a:rPr lang="en-IT" dirty="0">
+                <a:latin typeface="Aptos" panose="020B0004020202020204" pitchFamily="34" charset="0"/>
+              </a:rPr>
+              <a:t>Current</a:t>
+            </a:r>
+            <a:r>
+              <a:rPr lang="en-IT" dirty="0">
                 <a:latin typeface="Palatino Linotype" panose="02040502050505030304" pitchFamily="18" charset="0"/>
               </a:rPr>
-              <a:t>Current </a:t>
+              <a:t> </a:t>
             </a:r>
             <a:r>
               <a:rPr lang="en-IT" dirty="0">
-                <a:latin typeface="Courier" pitchFamily="2" charset="0"/>
+                <a:latin typeface="Menlo" panose="020B0609030804020204" pitchFamily="49" charset="0"/>
+                <a:ea typeface="Menlo" panose="020B0609030804020204" pitchFamily="49" charset="0"/>
+                <a:cs typeface="Menlo" panose="020B0609030804020204" pitchFamily="49" charset="0"/>
               </a:rPr>
               <a:t>BuildContext</a:t>
             </a:r>
@@ -12464,9 +13175,21 @@
           <a:p>
             <a:r>
               <a:rPr lang="en-IT" dirty="0">
-                <a:latin typeface="Palatino Linotype" panose="02040502050505030304" pitchFamily="18" charset="0"/>
-              </a:rPr>
-              <a:t>The name of the route to be pushed into the stack</a:t>
+                <a:latin typeface="Aptos" panose="020B0004020202020204" pitchFamily="34" charset="0"/>
+              </a:rPr>
+              <a:t>The</a:t>
+            </a:r>
+            <a:r>
+              <a:rPr lang="en-IT">
+                <a:latin typeface="Aptos" panose="020B0004020202020204" pitchFamily="34" charset="0"/>
+              </a:rPr>
+              <a:t> </a:t>
+            </a:r>
+            <a:r>
+              <a:rPr lang="en-IT" dirty="0">
+                <a:latin typeface="Aptos" panose="020B0004020202020204" pitchFamily="34" charset="0"/>
+              </a:rPr>
+              <a:t>name of the route to be pushed into the stack</a:t>
             </a:r>
           </a:p>
         </p:txBody>
@@ -12724,11 +13447,19 @@
               <a:rPr lang="en-IT" dirty="0">
                 <a:latin typeface="Aptos" panose="020B0004020202020204" pitchFamily="34" charset="0"/>
               </a:rPr>
-              <a:t>To pop the </a:t>
+              <a:t>To pop </a:t>
             </a:r>
             <a:r>
               <a:rPr lang="en-IT">
-                <a:latin typeface="Courier" pitchFamily="2" charset="0"/>
+                <a:latin typeface="Aptos" panose="020B0004020202020204" pitchFamily="34" charset="0"/>
+              </a:rPr>
+              <a:t>the </a:t>
+            </a:r>
+            <a:r>
+              <a:rPr lang="en-IT" sz="2200">
+                <a:latin typeface="Menlo" panose="020B0609030804020204" pitchFamily="49" charset="0"/>
+                <a:ea typeface="Menlo" panose="020B0609030804020204" pitchFamily="49" charset="0"/>
+                <a:cs typeface="Menlo" panose="020B0609030804020204" pitchFamily="49" charset="0"/>
               </a:rPr>
               <a:t>ProfilePage</a:t>
             </a:r>
@@ -12740,24 +13471,35 @@
               <a:rPr lang="en-IT" dirty="0">
                 <a:latin typeface="Aptos" panose="020B0004020202020204" pitchFamily="34" charset="0"/>
               </a:rPr>
-              <a:t>route, you can still use </a:t>
+              <a:t>route, you can still </a:t>
             </a:r>
             <a:r>
               <a:rPr lang="en-IT">
-                <a:latin typeface="Courier" pitchFamily="2" charset="0"/>
+                <a:latin typeface="Aptos" panose="020B0004020202020204" pitchFamily="34" charset="0"/>
+              </a:rPr>
+              <a:t>use </a:t>
+            </a:r>
+            <a:r>
+              <a:rPr lang="en-IT" sz="2200">
+                <a:latin typeface="Menlo" panose="020B0609030804020204" pitchFamily="49" charset="0"/>
+                <a:ea typeface="Menlo" panose="020B0609030804020204" pitchFamily="49" charset="0"/>
+                <a:cs typeface="Menlo" panose="020B0609030804020204" pitchFamily="49" charset="0"/>
               </a:rPr>
               <a:t>Navigator</a:t>
             </a:r>
             <a:r>
-              <a:rPr lang="en-IT" dirty="0">
-                <a:latin typeface="Courier" pitchFamily="2" charset="0"/>
+              <a:rPr lang="en-IT" sz="2200" dirty="0">
+                <a:latin typeface="Menlo" panose="020B0609030804020204" pitchFamily="49" charset="0"/>
+                <a:ea typeface="Menlo" panose="020B0609030804020204" pitchFamily="49" charset="0"/>
+                <a:cs typeface="Menlo" panose="020B0609030804020204" pitchFamily="49" charset="0"/>
               </a:rPr>
               <a:t>.pop()</a:t>
             </a:r>
             <a:r>
-              <a:rPr lang="en-IT" dirty="0"/>
+              <a:rPr lang="en-IT"/>
               <a:t>:</a:t>
             </a:r>
+            <a:endParaRPr lang="en-IT" dirty="0"/>
           </a:p>
         </p:txBody>
       </p:sp>
@@ -12974,7 +13716,9 @@
             </a:pPr>
             <a:r>
               <a:rPr lang="en-GB" sz="1600" dirty="0">
-                <a:latin typeface="Courier" pitchFamily="2" charset="0"/>
+                <a:latin typeface="Menlo" panose="020B0609030804020204" pitchFamily="49" charset="0"/>
+                <a:ea typeface="Menlo" panose="020B0609030804020204" pitchFamily="49" charset="0"/>
+                <a:cs typeface="Menlo" panose="020B0609030804020204" pitchFamily="49" charset="0"/>
               </a:rPr>
               <a:t>...</a:t>
             </a:r>
@@ -12986,13 +13730,17 @@
             </a:pPr>
             <a:r>
               <a:rPr lang="en-GB" sz="1600" dirty="0" err="1">
-                <a:latin typeface="Courier" pitchFamily="2" charset="0"/>
+                <a:latin typeface="Menlo" panose="020B0609030804020204" pitchFamily="49" charset="0"/>
+                <a:ea typeface="Menlo" panose="020B0609030804020204" pitchFamily="49" charset="0"/>
+                <a:cs typeface="Menlo" panose="020B0609030804020204" pitchFamily="49" charset="0"/>
               </a:rPr>
               <a:t>onPressed</a:t>
             </a:r>
             <a:r>
               <a:rPr lang="en-GB" sz="1600" dirty="0">
-                <a:latin typeface="Courier" pitchFamily="2" charset="0"/>
+                <a:latin typeface="Menlo" panose="020B0609030804020204" pitchFamily="49" charset="0"/>
+                <a:ea typeface="Menlo" panose="020B0609030804020204" pitchFamily="49" charset="0"/>
+                <a:cs typeface="Menlo" panose="020B0609030804020204" pitchFamily="49" charset="0"/>
               </a:rPr>
               <a:t>: () {</a:t>
             </a:r>
@@ -13003,19 +13751,25 @@
             </a:pPr>
             <a:r>
               <a:rPr lang="en-GB" sz="1600" b="1" dirty="0">
-                <a:latin typeface="Courier" pitchFamily="2" charset="0"/>
+                <a:latin typeface="Menlo" panose="020B0609030804020204" pitchFamily="49" charset="0"/>
+                <a:ea typeface="Menlo" panose="020B0609030804020204" pitchFamily="49" charset="0"/>
+                <a:cs typeface="Menlo" panose="020B0609030804020204" pitchFamily="49" charset="0"/>
               </a:rPr>
               <a:t>  </a:t>
             </a:r>
             <a:r>
               <a:rPr lang="en-GB" sz="1600" b="1" dirty="0" err="1">
-                <a:latin typeface="Courier" pitchFamily="2" charset="0"/>
+                <a:latin typeface="Menlo" panose="020B0609030804020204" pitchFamily="49" charset="0"/>
+                <a:ea typeface="Menlo" panose="020B0609030804020204" pitchFamily="49" charset="0"/>
+                <a:cs typeface="Menlo" panose="020B0609030804020204" pitchFamily="49" charset="0"/>
               </a:rPr>
               <a:t>Navigator.pushNamed</a:t>
             </a:r>
             <a:r>
               <a:rPr lang="en-GB" sz="1600" b="1" dirty="0">
-                <a:latin typeface="Courier" pitchFamily="2" charset="0"/>
+                <a:latin typeface="Menlo" panose="020B0609030804020204" pitchFamily="49" charset="0"/>
+                <a:ea typeface="Menlo" panose="020B0609030804020204" pitchFamily="49" charset="0"/>
+                <a:cs typeface="Menlo" panose="020B0609030804020204" pitchFamily="49" charset="0"/>
               </a:rPr>
               <a:t>(context,’/profile/’);</a:t>
             </a:r>
@@ -13027,7 +13781,9 @@
             </a:pPr>
             <a:r>
               <a:rPr lang="en-GB" sz="1600" dirty="0">
-                <a:latin typeface="Courier" pitchFamily="2" charset="0"/>
+                <a:latin typeface="Menlo" panose="020B0609030804020204" pitchFamily="49" charset="0"/>
+                <a:ea typeface="Menlo" panose="020B0609030804020204" pitchFamily="49" charset="0"/>
+                <a:cs typeface="Menlo" panose="020B0609030804020204" pitchFamily="49" charset="0"/>
               </a:rPr>
               <a:t>},</a:t>
             </a:r>
@@ -13039,7 +13795,9 @@
             </a:pPr>
             <a:r>
               <a:rPr lang="en-GB" sz="1600" dirty="0">
-                <a:latin typeface="Courier" pitchFamily="2" charset="0"/>
+                <a:latin typeface="Menlo" panose="020B0609030804020204" pitchFamily="49" charset="0"/>
+                <a:ea typeface="Menlo" panose="020B0609030804020204" pitchFamily="49" charset="0"/>
+                <a:cs typeface="Menlo" panose="020B0609030804020204" pitchFamily="49" charset="0"/>
               </a:rPr>
               <a:t>...</a:t>
             </a:r>
@@ -13089,7 +13847,9 @@
             <a:pPr algn="ctr"/>
             <a:r>
               <a:rPr lang="en-IT" dirty="0">
-                <a:latin typeface="Courier" pitchFamily="2" charset="0"/>
+                <a:latin typeface="Menlo" panose="020B0609030804020204" pitchFamily="49" charset="0"/>
+                <a:ea typeface="Menlo" panose="020B0609030804020204" pitchFamily="49" charset="0"/>
+                <a:cs typeface="Menlo" panose="020B0609030804020204" pitchFamily="49" charset="0"/>
               </a:rPr>
               <a:t>HomePage</a:t>
             </a:r>
@@ -13139,7 +13899,9 @@
             <a:pPr algn="ctr"/>
             <a:r>
               <a:rPr lang="en-IT" dirty="0">
-                <a:latin typeface="Courier" pitchFamily="2" charset="0"/>
+                <a:latin typeface="Menlo" panose="020B0609030804020204" pitchFamily="49" charset="0"/>
+                <a:ea typeface="Menlo" panose="020B0609030804020204" pitchFamily="49" charset="0"/>
+                <a:cs typeface="Menlo" panose="020B0609030804020204" pitchFamily="49" charset="0"/>
               </a:rPr>
               <a:t>HomePage</a:t>
             </a:r>
@@ -13189,7 +13951,9 @@
             <a:pPr algn="ctr"/>
             <a:r>
               <a:rPr lang="en-IT" dirty="0">
-                <a:latin typeface="Courier" pitchFamily="2" charset="0"/>
+                <a:latin typeface="Menlo" panose="020B0609030804020204" pitchFamily="49" charset="0"/>
+                <a:ea typeface="Menlo" panose="020B0609030804020204" pitchFamily="49" charset="0"/>
+                <a:cs typeface="Menlo" panose="020B0609030804020204" pitchFamily="49" charset="0"/>
               </a:rPr>
               <a:t>ProfilePage</a:t>
             </a:r>
@@ -13239,7 +14003,9 @@
             <a:pPr algn="ctr"/>
             <a:r>
               <a:rPr lang="en-IT" dirty="0">
-                <a:latin typeface="Courier" pitchFamily="2" charset="0"/>
+                <a:latin typeface="Menlo" panose="020B0609030804020204" pitchFamily="49" charset="0"/>
+                <a:ea typeface="Menlo" panose="020B0609030804020204" pitchFamily="49" charset="0"/>
+                <a:cs typeface="Menlo" panose="020B0609030804020204" pitchFamily="49" charset="0"/>
               </a:rPr>
               <a:t>HomePage</a:t>
             </a:r>
@@ -13511,11 +14277,12 @@
           <a:p>
             <a:r>
               <a:rPr lang="en-IT" sz="1100" dirty="0">
-                <a:latin typeface="Courier" pitchFamily="2" charset="0"/>
+                <a:latin typeface="Menlo" panose="020B0609030804020204" pitchFamily="49" charset="0"/>
+                <a:ea typeface="Menlo" panose="020B0609030804020204" pitchFamily="49" charset="0"/>
+                <a:cs typeface="Menlo" panose="020B0609030804020204" pitchFamily="49" charset="0"/>
               </a:rPr>
               <a:t>Navigator.pop()</a:t>
             </a:r>
-            <a:endParaRPr lang="en-IT" sz="1100" dirty="0"/>
           </a:p>
         </p:txBody>
       </p:sp>
@@ -13548,11 +14315,12 @@
           <a:p>
             <a:r>
               <a:rPr lang="en-IT" sz="1100" dirty="0">
-                <a:latin typeface="Courier" pitchFamily="2" charset="0"/>
+                <a:latin typeface="Menlo" panose="020B0609030804020204" pitchFamily="49" charset="0"/>
+                <a:ea typeface="Menlo" panose="020B0609030804020204" pitchFamily="49" charset="0"/>
+                <a:cs typeface="Menlo" panose="020B0609030804020204" pitchFamily="49" charset="0"/>
               </a:rPr>
               <a:t>Navigator.pushNamed()</a:t>
             </a:r>
-            <a:endParaRPr lang="en-IT" sz="1100" dirty="0"/>
           </a:p>
         </p:txBody>
       </p:sp>
@@ -14042,19 +14810,33 @@
             </a:r>
             <a:r>
               <a:rPr lang="en-IT" dirty="0">
+                <a:latin typeface="Menlo" panose="020B0609030804020204" pitchFamily="49" charset="0"/>
+                <a:ea typeface="Menlo" panose="020B0609030804020204" pitchFamily="49" charset="0"/>
+                <a:cs typeface="Menlo" panose="020B0609030804020204" pitchFamily="49" charset="0"/>
+              </a:rPr>
+              <a:t>MessagePage</a:t>
+            </a:r>
+            <a:r>
+              <a:rPr lang="en-IT" dirty="0"/>
+              <a:t> that will get an argument from </a:t>
+            </a:r>
+            <a:r>
+              <a:rPr lang="en-IT"/>
+              <a:t>the </a:t>
+            </a:r>
+            <a:r>
+              <a:rPr lang="en-IT" dirty="0">
+                <a:latin typeface="Menlo" panose="020B0609030804020204" pitchFamily="49" charset="0"/>
+                <a:ea typeface="Menlo" panose="020B0609030804020204" pitchFamily="49" charset="0"/>
+                <a:cs typeface="Menlo" panose="020B0609030804020204" pitchFamily="49" charset="0"/>
+              </a:rPr>
+              <a:t>HomePage</a:t>
+            </a:r>
+            <a:r>
+              <a:rPr lang="en-IT">
                 <a:latin typeface="Courier" pitchFamily="2" charset="0"/>
               </a:rPr>
-              <a:t>MessagePage</a:t>
-            </a:r>
-            <a:r>
-              <a:rPr lang="en-IT" dirty="0"/>
-              <a:t> that will get an argument from the </a:t>
-            </a:r>
-            <a:r>
-              <a:rPr lang="en-IT" dirty="0">
-                <a:latin typeface="Courier" pitchFamily="2" charset="0"/>
-              </a:rPr>
-              <a:t>HomePage </a:t>
+              <a:t> </a:t>
             </a:r>
             <a:r>
               <a:rPr lang="en-IT" dirty="0"/>
@@ -14306,31 +15088,41 @@
             </a:pPr>
             <a:r>
               <a:rPr lang="en-GB" sz="1600" dirty="0">
-                <a:latin typeface="Courier" pitchFamily="2" charset="0"/>
+                <a:latin typeface="Menlo" panose="020B0609030804020204" pitchFamily="49" charset="0"/>
+                <a:ea typeface="Menlo" panose="020B0609030804020204" pitchFamily="49" charset="0"/>
+                <a:cs typeface="Menlo" panose="020B0609030804020204" pitchFamily="49" charset="0"/>
               </a:rPr>
               <a:t>import '</a:t>
             </a:r>
             <a:r>
               <a:rPr lang="en-GB" sz="1600" dirty="0" err="1">
-                <a:latin typeface="Courier" pitchFamily="2" charset="0"/>
+                <a:latin typeface="Menlo" panose="020B0609030804020204" pitchFamily="49" charset="0"/>
+                <a:ea typeface="Menlo" panose="020B0609030804020204" pitchFamily="49" charset="0"/>
+                <a:cs typeface="Menlo" panose="020B0609030804020204" pitchFamily="49" charset="0"/>
               </a:rPr>
               <a:t>package:flutter</a:t>
             </a:r>
             <a:r>
               <a:rPr lang="en-GB" sz="1600" dirty="0">
-                <a:latin typeface="Courier" pitchFamily="2" charset="0"/>
+                <a:latin typeface="Menlo" panose="020B0609030804020204" pitchFamily="49" charset="0"/>
+                <a:ea typeface="Menlo" panose="020B0609030804020204" pitchFamily="49" charset="0"/>
+                <a:cs typeface="Menlo" panose="020B0609030804020204" pitchFamily="49" charset="0"/>
               </a:rPr>
               <a:t>/</a:t>
             </a:r>
             <a:r>
               <a:rPr lang="en-GB" sz="1600" dirty="0" err="1">
-                <a:latin typeface="Courier" pitchFamily="2" charset="0"/>
+                <a:latin typeface="Menlo" panose="020B0609030804020204" pitchFamily="49" charset="0"/>
+                <a:ea typeface="Menlo" panose="020B0609030804020204" pitchFamily="49" charset="0"/>
+                <a:cs typeface="Menlo" panose="020B0609030804020204" pitchFamily="49" charset="0"/>
               </a:rPr>
               <a:t>material.dart</a:t>
             </a:r>
             <a:r>
               <a:rPr lang="en-GB" sz="1600" dirty="0">
-                <a:latin typeface="Courier" pitchFamily="2" charset="0"/>
+                <a:latin typeface="Menlo" panose="020B0609030804020204" pitchFamily="49" charset="0"/>
+                <a:ea typeface="Menlo" panose="020B0609030804020204" pitchFamily="49" charset="0"/>
+                <a:cs typeface="Menlo" panose="020B0609030804020204" pitchFamily="49" charset="0"/>
               </a:rPr>
               <a:t>';</a:t>
             </a:r>
@@ -14341,31 +15133,41 @@
             </a:pPr>
             <a:r>
               <a:rPr lang="en-GB" sz="1600" dirty="0">
-                <a:latin typeface="Courier" pitchFamily="2" charset="0"/>
+                <a:latin typeface="Menlo" panose="020B0609030804020204" pitchFamily="49" charset="0"/>
+                <a:ea typeface="Menlo" panose="020B0609030804020204" pitchFamily="49" charset="0"/>
+                <a:cs typeface="Menlo" panose="020B0609030804020204" pitchFamily="49" charset="0"/>
               </a:rPr>
               <a:t>class </a:t>
             </a:r>
             <a:r>
               <a:rPr lang="en-GB" sz="1600" dirty="0" err="1">
-                <a:latin typeface="Courier" pitchFamily="2" charset="0"/>
+                <a:latin typeface="Menlo" panose="020B0609030804020204" pitchFamily="49" charset="0"/>
+                <a:ea typeface="Menlo" panose="020B0609030804020204" pitchFamily="49" charset="0"/>
+                <a:cs typeface="Menlo" panose="020B0609030804020204" pitchFamily="49" charset="0"/>
               </a:rPr>
               <a:t>MessagePage</a:t>
             </a:r>
             <a:r>
               <a:rPr lang="en-GB" sz="1600" dirty="0">
-                <a:latin typeface="Courier" pitchFamily="2" charset="0"/>
+                <a:latin typeface="Menlo" panose="020B0609030804020204" pitchFamily="49" charset="0"/>
+                <a:ea typeface="Menlo" panose="020B0609030804020204" pitchFamily="49" charset="0"/>
+                <a:cs typeface="Menlo" panose="020B0609030804020204" pitchFamily="49" charset="0"/>
               </a:rPr>
               <a:t> extends </a:t>
             </a:r>
             <a:r>
               <a:rPr lang="en-GB" sz="1600" dirty="0" err="1">
-                <a:latin typeface="Courier" pitchFamily="2" charset="0"/>
+                <a:latin typeface="Menlo" panose="020B0609030804020204" pitchFamily="49" charset="0"/>
+                <a:ea typeface="Menlo" panose="020B0609030804020204" pitchFamily="49" charset="0"/>
+                <a:cs typeface="Menlo" panose="020B0609030804020204" pitchFamily="49" charset="0"/>
               </a:rPr>
               <a:t>StatelessWidget</a:t>
             </a:r>
             <a:r>
               <a:rPr lang="en-GB" sz="1600" dirty="0">
-                <a:latin typeface="Courier" pitchFamily="2" charset="0"/>
+                <a:latin typeface="Menlo" panose="020B0609030804020204" pitchFamily="49" charset="0"/>
+                <a:ea typeface="Menlo" panose="020B0609030804020204" pitchFamily="49" charset="0"/>
+                <a:cs typeface="Menlo" panose="020B0609030804020204" pitchFamily="49" charset="0"/>
               </a:rPr>
               <a:t> {</a:t>
             </a:r>
@@ -14376,19 +15178,25 @@
             </a:pPr>
             <a:r>
               <a:rPr lang="en-GB" sz="1600" dirty="0">
-                <a:latin typeface="Courier" pitchFamily="2" charset="0"/>
+                <a:latin typeface="Menlo" panose="020B0609030804020204" pitchFamily="49" charset="0"/>
+                <a:ea typeface="Menlo" panose="020B0609030804020204" pitchFamily="49" charset="0"/>
+                <a:cs typeface="Menlo" panose="020B0609030804020204" pitchFamily="49" charset="0"/>
               </a:rPr>
               <a:t>   </a:t>
             </a:r>
             <a:r>
               <a:rPr lang="en-GB" sz="1600" dirty="0" err="1">
-                <a:latin typeface="Courier" pitchFamily="2" charset="0"/>
+                <a:latin typeface="Menlo" panose="020B0609030804020204" pitchFamily="49" charset="0"/>
+                <a:ea typeface="Menlo" panose="020B0609030804020204" pitchFamily="49" charset="0"/>
+                <a:cs typeface="Menlo" panose="020B0609030804020204" pitchFamily="49" charset="0"/>
               </a:rPr>
               <a:t>MessagePage</a:t>
             </a:r>
             <a:r>
               <a:rPr lang="en-GB" sz="1600" dirty="0">
-                <a:latin typeface="Courier" pitchFamily="2" charset="0"/>
+                <a:latin typeface="Menlo" panose="020B0609030804020204" pitchFamily="49" charset="0"/>
+                <a:ea typeface="Menlo" panose="020B0609030804020204" pitchFamily="49" charset="0"/>
+                <a:cs typeface="Menlo" panose="020B0609030804020204" pitchFamily="49" charset="0"/>
               </a:rPr>
               <a:t>({Key? key}) : super(key: key);</a:t>
             </a:r>
@@ -14399,43 +15207,57 @@
             </a:pPr>
             <a:r>
               <a:rPr lang="en-GB" sz="1600" dirty="0">
-                <a:latin typeface="Courier" pitchFamily="2" charset="0"/>
+                <a:latin typeface="Menlo" panose="020B0609030804020204" pitchFamily="49" charset="0"/>
+                <a:ea typeface="Menlo" panose="020B0609030804020204" pitchFamily="49" charset="0"/>
+                <a:cs typeface="Menlo" panose="020B0609030804020204" pitchFamily="49" charset="0"/>
               </a:rPr>
               <a:t>  static </a:t>
             </a:r>
             <a:r>
               <a:rPr lang="en-GB" sz="1600" dirty="0" err="1">
-                <a:latin typeface="Courier" pitchFamily="2" charset="0"/>
+                <a:latin typeface="Menlo" panose="020B0609030804020204" pitchFamily="49" charset="0"/>
+                <a:ea typeface="Menlo" panose="020B0609030804020204" pitchFamily="49" charset="0"/>
+                <a:cs typeface="Menlo" panose="020B0609030804020204" pitchFamily="49" charset="0"/>
               </a:rPr>
               <a:t>const</a:t>
             </a:r>
             <a:r>
               <a:rPr lang="en-GB" sz="1600" dirty="0">
-                <a:latin typeface="Courier" pitchFamily="2" charset="0"/>
+                <a:latin typeface="Menlo" panose="020B0609030804020204" pitchFamily="49" charset="0"/>
+                <a:ea typeface="Menlo" panose="020B0609030804020204" pitchFamily="49" charset="0"/>
+                <a:cs typeface="Menlo" panose="020B0609030804020204" pitchFamily="49" charset="0"/>
               </a:rPr>
               <a:t> </a:t>
             </a:r>
             <a:r>
               <a:rPr lang="en-GB" sz="1600" dirty="0" err="1">
-                <a:latin typeface="Courier" pitchFamily="2" charset="0"/>
+                <a:latin typeface="Menlo" panose="020B0609030804020204" pitchFamily="49" charset="0"/>
+                <a:ea typeface="Menlo" panose="020B0609030804020204" pitchFamily="49" charset="0"/>
+                <a:cs typeface="Menlo" panose="020B0609030804020204" pitchFamily="49" charset="0"/>
               </a:rPr>
               <a:t>routename</a:t>
             </a:r>
             <a:r>
               <a:rPr lang="en-GB" sz="1600" dirty="0">
-                <a:latin typeface="Courier" pitchFamily="2" charset="0"/>
+                <a:latin typeface="Menlo" panose="020B0609030804020204" pitchFamily="49" charset="0"/>
+                <a:ea typeface="Menlo" panose="020B0609030804020204" pitchFamily="49" charset="0"/>
+                <a:cs typeface="Menlo" panose="020B0609030804020204" pitchFamily="49" charset="0"/>
               </a:rPr>
               <a:t> = '</a:t>
             </a:r>
             <a:r>
               <a:rPr lang="en-GB" sz="1600" dirty="0" err="1">
-                <a:latin typeface="Courier" pitchFamily="2" charset="0"/>
+                <a:latin typeface="Menlo" panose="020B0609030804020204" pitchFamily="49" charset="0"/>
+                <a:ea typeface="Menlo" panose="020B0609030804020204" pitchFamily="49" charset="0"/>
+                <a:cs typeface="Menlo" panose="020B0609030804020204" pitchFamily="49" charset="0"/>
               </a:rPr>
               <a:t>MessagePage</a:t>
             </a:r>
             <a:r>
               <a:rPr lang="en-GB" sz="1600" dirty="0">
-                <a:latin typeface="Courier" pitchFamily="2" charset="0"/>
+                <a:latin typeface="Menlo" panose="020B0609030804020204" pitchFamily="49" charset="0"/>
+                <a:ea typeface="Menlo" panose="020B0609030804020204" pitchFamily="49" charset="0"/>
+                <a:cs typeface="Menlo" panose="020B0609030804020204" pitchFamily="49" charset="0"/>
               </a:rPr>
               <a:t>';</a:t>
             </a:r>
@@ -14446,7 +15268,9 @@
             </a:pPr>
             <a:r>
               <a:rPr lang="en-GB" sz="1600" dirty="0">
-                <a:latin typeface="Courier" pitchFamily="2" charset="0"/>
+                <a:latin typeface="Menlo" panose="020B0609030804020204" pitchFamily="49" charset="0"/>
+                <a:ea typeface="Menlo" panose="020B0609030804020204" pitchFamily="49" charset="0"/>
+                <a:cs typeface="Menlo" panose="020B0609030804020204" pitchFamily="49" charset="0"/>
               </a:rPr>
               <a:t>  @override</a:t>
             </a:r>
@@ -14457,19 +15281,25 @@
             </a:pPr>
             <a:r>
               <a:rPr lang="en-GB" sz="1600" dirty="0">
-                <a:latin typeface="Courier" pitchFamily="2" charset="0"/>
+                <a:latin typeface="Menlo" panose="020B0609030804020204" pitchFamily="49" charset="0"/>
+                <a:ea typeface="Menlo" panose="020B0609030804020204" pitchFamily="49" charset="0"/>
+                <a:cs typeface="Menlo" panose="020B0609030804020204" pitchFamily="49" charset="0"/>
               </a:rPr>
               <a:t>  Widget build(</a:t>
             </a:r>
             <a:r>
               <a:rPr lang="en-GB" sz="1600" dirty="0" err="1">
-                <a:latin typeface="Courier" pitchFamily="2" charset="0"/>
+                <a:latin typeface="Menlo" panose="020B0609030804020204" pitchFamily="49" charset="0"/>
+                <a:ea typeface="Menlo" panose="020B0609030804020204" pitchFamily="49" charset="0"/>
+                <a:cs typeface="Menlo" panose="020B0609030804020204" pitchFamily="49" charset="0"/>
               </a:rPr>
               <a:t>BuildContext</a:t>
             </a:r>
             <a:r>
               <a:rPr lang="en-GB" sz="1600" dirty="0">
-                <a:latin typeface="Courier" pitchFamily="2" charset="0"/>
+                <a:latin typeface="Menlo" panose="020B0609030804020204" pitchFamily="49" charset="0"/>
+                <a:ea typeface="Menlo" panose="020B0609030804020204" pitchFamily="49" charset="0"/>
+                <a:cs typeface="Menlo" panose="020B0609030804020204" pitchFamily="49" charset="0"/>
               </a:rPr>
               <a:t> context) {</a:t>
             </a:r>
@@ -14483,7 +15313,9 @@
                 <a:highlight>
                   <a:srgbClr val="FFFF00"/>
                 </a:highlight>
-                <a:latin typeface="Courier" pitchFamily="2" charset="0"/>
+                <a:latin typeface="Menlo" panose="020B0609030804020204" pitchFamily="49" charset="0"/>
+                <a:ea typeface="Menlo" panose="020B0609030804020204" pitchFamily="49" charset="0"/>
+                <a:cs typeface="Menlo" panose="020B0609030804020204" pitchFamily="49" charset="0"/>
               </a:rPr>
               <a:t>    //TODO: get the message from </a:t>
             </a:r>
@@ -14492,7 +15324,9 @@
                 <a:highlight>
                   <a:srgbClr val="FFFF00"/>
                 </a:highlight>
-                <a:latin typeface="Courier" pitchFamily="2" charset="0"/>
+                <a:latin typeface="Menlo" panose="020B0609030804020204" pitchFamily="49" charset="0"/>
+                <a:ea typeface="Menlo" panose="020B0609030804020204" pitchFamily="49" charset="0"/>
+                <a:cs typeface="Menlo" panose="020B0609030804020204" pitchFamily="49" charset="0"/>
               </a:rPr>
               <a:t>HomePage</a:t>
             </a:r>
@@ -14500,7 +15334,9 @@
               <a:highlight>
                 <a:srgbClr val="FFFF00"/>
               </a:highlight>
-              <a:latin typeface="Courier" pitchFamily="2" charset="0"/>
+              <a:latin typeface="Menlo" panose="020B0609030804020204" pitchFamily="49" charset="0"/>
+              <a:ea typeface="Menlo" panose="020B0609030804020204" pitchFamily="49" charset="0"/>
+              <a:cs typeface="Menlo" panose="020B0609030804020204" pitchFamily="49" charset="0"/>
             </a:endParaRPr>
           </a:p>
           <a:p>
@@ -14509,7 +15345,9 @@
             </a:pPr>
             <a:r>
               <a:rPr lang="en-GB" sz="1600" dirty="0">
-                <a:latin typeface="Courier" pitchFamily="2" charset="0"/>
+                <a:latin typeface="Menlo" panose="020B0609030804020204" pitchFamily="49" charset="0"/>
+                <a:ea typeface="Menlo" panose="020B0609030804020204" pitchFamily="49" charset="0"/>
+                <a:cs typeface="Menlo" panose="020B0609030804020204" pitchFamily="49" charset="0"/>
               </a:rPr>
               <a:t>    return Scaffold(</a:t>
             </a:r>
@@ -14520,31 +15358,41 @@
             </a:pPr>
             <a:r>
               <a:rPr lang="en-GB" sz="1600" dirty="0">
-                <a:latin typeface="Courier" pitchFamily="2" charset="0"/>
+                <a:latin typeface="Menlo" panose="020B0609030804020204" pitchFamily="49" charset="0"/>
+                <a:ea typeface="Menlo" panose="020B0609030804020204" pitchFamily="49" charset="0"/>
+                <a:cs typeface="Menlo" panose="020B0609030804020204" pitchFamily="49" charset="0"/>
               </a:rPr>
               <a:t>      </a:t>
             </a:r>
             <a:r>
               <a:rPr lang="en-GB" sz="1600" dirty="0" err="1">
-                <a:latin typeface="Courier" pitchFamily="2" charset="0"/>
+                <a:latin typeface="Menlo" panose="020B0609030804020204" pitchFamily="49" charset="0"/>
+                <a:ea typeface="Menlo" panose="020B0609030804020204" pitchFamily="49" charset="0"/>
+                <a:cs typeface="Menlo" panose="020B0609030804020204" pitchFamily="49" charset="0"/>
               </a:rPr>
               <a:t>appBar</a:t>
             </a:r>
             <a:r>
               <a:rPr lang="en-GB" sz="1600" dirty="0">
-                <a:latin typeface="Courier" pitchFamily="2" charset="0"/>
+                <a:latin typeface="Menlo" panose="020B0609030804020204" pitchFamily="49" charset="0"/>
+                <a:ea typeface="Menlo" panose="020B0609030804020204" pitchFamily="49" charset="0"/>
+                <a:cs typeface="Menlo" panose="020B0609030804020204" pitchFamily="49" charset="0"/>
               </a:rPr>
               <a:t>: </a:t>
             </a:r>
             <a:r>
               <a:rPr lang="en-GB" sz="1600" dirty="0" err="1">
-                <a:latin typeface="Courier" pitchFamily="2" charset="0"/>
+                <a:latin typeface="Menlo" panose="020B0609030804020204" pitchFamily="49" charset="0"/>
+                <a:ea typeface="Menlo" panose="020B0609030804020204" pitchFamily="49" charset="0"/>
+                <a:cs typeface="Menlo" panose="020B0609030804020204" pitchFamily="49" charset="0"/>
               </a:rPr>
               <a:t>AppBar</a:t>
             </a:r>
             <a:r>
               <a:rPr lang="en-GB" sz="1600" dirty="0">
-                <a:latin typeface="Courier" pitchFamily="2" charset="0"/>
+                <a:latin typeface="Menlo" panose="020B0609030804020204" pitchFamily="49" charset="0"/>
+                <a:ea typeface="Menlo" panose="020B0609030804020204" pitchFamily="49" charset="0"/>
+                <a:cs typeface="Menlo" panose="020B0609030804020204" pitchFamily="49" charset="0"/>
               </a:rPr>
               <a:t>(</a:t>
             </a:r>
@@ -14555,19 +15403,25 @@
             </a:pPr>
             <a:r>
               <a:rPr lang="en-GB" sz="1600" dirty="0">
-                <a:latin typeface="Courier" pitchFamily="2" charset="0"/>
+                <a:latin typeface="Menlo" panose="020B0609030804020204" pitchFamily="49" charset="0"/>
+                <a:ea typeface="Menlo" panose="020B0609030804020204" pitchFamily="49" charset="0"/>
+                <a:cs typeface="Menlo" panose="020B0609030804020204" pitchFamily="49" charset="0"/>
               </a:rPr>
               <a:t>        title: Text(</a:t>
             </a:r>
             <a:r>
               <a:rPr lang="en-GB" sz="1600" dirty="0" err="1">
-                <a:latin typeface="Courier" pitchFamily="2" charset="0"/>
+                <a:latin typeface="Menlo" panose="020B0609030804020204" pitchFamily="49" charset="0"/>
+                <a:ea typeface="Menlo" panose="020B0609030804020204" pitchFamily="49" charset="0"/>
+                <a:cs typeface="Menlo" panose="020B0609030804020204" pitchFamily="49" charset="0"/>
               </a:rPr>
               <a:t>MessagePage.routename</a:t>
             </a:r>
             <a:r>
               <a:rPr lang="en-GB" sz="1600" dirty="0">
-                <a:latin typeface="Courier" pitchFamily="2" charset="0"/>
+                <a:latin typeface="Menlo" panose="020B0609030804020204" pitchFamily="49" charset="0"/>
+                <a:ea typeface="Menlo" panose="020B0609030804020204" pitchFamily="49" charset="0"/>
+                <a:cs typeface="Menlo" panose="020B0609030804020204" pitchFamily="49" charset="0"/>
               </a:rPr>
               <a:t>),</a:t>
             </a:r>
@@ -14578,7 +15432,9 @@
             </a:pPr>
             <a:r>
               <a:rPr lang="en-GB" sz="1600" dirty="0">
-                <a:latin typeface="Courier" pitchFamily="2" charset="0"/>
+                <a:latin typeface="Menlo" panose="020B0609030804020204" pitchFamily="49" charset="0"/>
+                <a:ea typeface="Menlo" panose="020B0609030804020204" pitchFamily="49" charset="0"/>
+                <a:cs typeface="Menlo" panose="020B0609030804020204" pitchFamily="49" charset="0"/>
               </a:rPr>
               <a:t>      ),</a:t>
             </a:r>
@@ -14589,12 +15445,16 @@
             </a:pPr>
             <a:r>
               <a:rPr lang="en-GB" sz="1600" dirty="0">
-                <a:latin typeface="Courier" pitchFamily="2" charset="0"/>
+                <a:latin typeface="Menlo" panose="020B0609030804020204" pitchFamily="49" charset="0"/>
+                <a:ea typeface="Menlo" panose="020B0609030804020204" pitchFamily="49" charset="0"/>
+                <a:cs typeface="Menlo" panose="020B0609030804020204" pitchFamily="49" charset="0"/>
               </a:rPr>
               <a:t>      ...</a:t>
             </a:r>
             <a:endParaRPr lang="en-IT" sz="1600" dirty="0">
-              <a:latin typeface="Courier" pitchFamily="2" charset="0"/>
+              <a:latin typeface="Menlo" panose="020B0609030804020204" pitchFamily="49" charset="0"/>
+              <a:ea typeface="Menlo" panose="020B0609030804020204" pitchFamily="49" charset="0"/>
+              <a:cs typeface="Menlo" panose="020B0609030804020204" pitchFamily="49" charset="0"/>
             </a:endParaRPr>
           </a:p>
         </p:txBody>
@@ -14812,7 +15672,9 @@
             </a:pPr>
             <a:r>
               <a:rPr lang="en-GB" sz="1600" dirty="0">
-                <a:latin typeface="Courier" pitchFamily="2" charset="0"/>
+                <a:latin typeface="Menlo" panose="020B0609030804020204" pitchFamily="49" charset="0"/>
+                <a:ea typeface="Menlo" panose="020B0609030804020204" pitchFamily="49" charset="0"/>
+                <a:cs typeface="Menlo" panose="020B0609030804020204" pitchFamily="49" charset="0"/>
               </a:rPr>
               <a:t>...</a:t>
             </a:r>
@@ -14823,19 +15685,25 @@
             </a:pPr>
             <a:r>
               <a:rPr lang="en-GB" sz="1600" dirty="0">
-                <a:latin typeface="Courier" pitchFamily="2" charset="0"/>
+                <a:latin typeface="Menlo" panose="020B0609030804020204" pitchFamily="49" charset="0"/>
+                <a:ea typeface="Menlo" panose="020B0609030804020204" pitchFamily="49" charset="0"/>
+                <a:cs typeface="Menlo" panose="020B0609030804020204" pitchFamily="49" charset="0"/>
               </a:rPr>
               <a:t>body: </a:t>
             </a:r>
             <a:r>
               <a:rPr lang="en-GB" sz="1600" dirty="0" err="1">
-                <a:latin typeface="Courier" pitchFamily="2" charset="0"/>
+                <a:latin typeface="Menlo" panose="020B0609030804020204" pitchFamily="49" charset="0"/>
+                <a:ea typeface="Menlo" panose="020B0609030804020204" pitchFamily="49" charset="0"/>
+                <a:cs typeface="Menlo" panose="020B0609030804020204" pitchFamily="49" charset="0"/>
               </a:rPr>
               <a:t>Center</a:t>
             </a:r>
             <a:r>
               <a:rPr lang="en-GB" sz="1600" dirty="0">
-                <a:latin typeface="Courier" pitchFamily="2" charset="0"/>
+                <a:latin typeface="Menlo" panose="020B0609030804020204" pitchFamily="49" charset="0"/>
+                <a:ea typeface="Menlo" panose="020B0609030804020204" pitchFamily="49" charset="0"/>
+                <a:cs typeface="Menlo" panose="020B0609030804020204" pitchFamily="49" charset="0"/>
               </a:rPr>
               <a:t>(</a:t>
             </a:r>
@@ -14846,7 +15714,9 @@
             </a:pPr>
             <a:r>
               <a:rPr lang="en-GB" sz="1600" dirty="0">
-                <a:latin typeface="Courier" pitchFamily="2" charset="0"/>
+                <a:latin typeface="Menlo" panose="020B0609030804020204" pitchFamily="49" charset="0"/>
+                <a:ea typeface="Menlo" panose="020B0609030804020204" pitchFamily="49" charset="0"/>
+                <a:cs typeface="Menlo" panose="020B0609030804020204" pitchFamily="49" charset="0"/>
               </a:rPr>
               <a:t>        child: Column(</a:t>
             </a:r>
@@ -14857,31 +15727,41 @@
             </a:pPr>
             <a:r>
               <a:rPr lang="en-GB" sz="1600" dirty="0">
-                <a:latin typeface="Courier" pitchFamily="2" charset="0"/>
+                <a:latin typeface="Menlo" panose="020B0609030804020204" pitchFamily="49" charset="0"/>
+                <a:ea typeface="Menlo" panose="020B0609030804020204" pitchFamily="49" charset="0"/>
+                <a:cs typeface="Menlo" panose="020B0609030804020204" pitchFamily="49" charset="0"/>
               </a:rPr>
               <a:t>          </a:t>
             </a:r>
             <a:r>
               <a:rPr lang="en-GB" sz="1600" dirty="0" err="1">
-                <a:latin typeface="Courier" pitchFamily="2" charset="0"/>
+                <a:latin typeface="Menlo" panose="020B0609030804020204" pitchFamily="49" charset="0"/>
+                <a:ea typeface="Menlo" panose="020B0609030804020204" pitchFamily="49" charset="0"/>
+                <a:cs typeface="Menlo" panose="020B0609030804020204" pitchFamily="49" charset="0"/>
               </a:rPr>
               <a:t>mainAxisAlignment</a:t>
             </a:r>
             <a:r>
               <a:rPr lang="en-GB" sz="1600" dirty="0">
-                <a:latin typeface="Courier" pitchFamily="2" charset="0"/>
+                <a:latin typeface="Menlo" panose="020B0609030804020204" pitchFamily="49" charset="0"/>
+                <a:ea typeface="Menlo" panose="020B0609030804020204" pitchFamily="49" charset="0"/>
+                <a:cs typeface="Menlo" panose="020B0609030804020204" pitchFamily="49" charset="0"/>
               </a:rPr>
               <a:t>: </a:t>
             </a:r>
             <a:r>
               <a:rPr lang="en-GB" sz="1600" dirty="0" err="1">
-                <a:latin typeface="Courier" pitchFamily="2" charset="0"/>
+                <a:latin typeface="Menlo" panose="020B0609030804020204" pitchFamily="49" charset="0"/>
+                <a:ea typeface="Menlo" panose="020B0609030804020204" pitchFamily="49" charset="0"/>
+                <a:cs typeface="Menlo" panose="020B0609030804020204" pitchFamily="49" charset="0"/>
               </a:rPr>
               <a:t>MainAxisAlignment.center</a:t>
             </a:r>
             <a:r>
               <a:rPr lang="en-GB" sz="1600" dirty="0">
-                <a:latin typeface="Courier" pitchFamily="2" charset="0"/>
+                <a:latin typeface="Menlo" panose="020B0609030804020204" pitchFamily="49" charset="0"/>
+                <a:ea typeface="Menlo" panose="020B0609030804020204" pitchFamily="49" charset="0"/>
+                <a:cs typeface="Menlo" panose="020B0609030804020204" pitchFamily="49" charset="0"/>
               </a:rPr>
               <a:t>,</a:t>
             </a:r>
@@ -14892,7 +15772,9 @@
             </a:pPr>
             <a:r>
               <a:rPr lang="en-GB" sz="1600" dirty="0">
-                <a:latin typeface="Courier" pitchFamily="2" charset="0"/>
+                <a:latin typeface="Menlo" panose="020B0609030804020204" pitchFamily="49" charset="0"/>
+                <a:ea typeface="Menlo" panose="020B0609030804020204" pitchFamily="49" charset="0"/>
+                <a:cs typeface="Menlo" panose="020B0609030804020204" pitchFamily="49" charset="0"/>
               </a:rPr>
               <a:t>          children: [</a:t>
             </a:r>
@@ -14903,13 +15785,17 @@
             </a:pPr>
             <a:r>
               <a:rPr lang="en-GB" sz="1600" dirty="0">
-                <a:latin typeface="Courier" pitchFamily="2" charset="0"/>
+                <a:latin typeface="Menlo" panose="020B0609030804020204" pitchFamily="49" charset="0"/>
+                <a:ea typeface="Menlo" panose="020B0609030804020204" pitchFamily="49" charset="0"/>
+                <a:cs typeface="Menlo" panose="020B0609030804020204" pitchFamily="49" charset="0"/>
               </a:rPr>
               <a:t>           </a:t>
             </a:r>
             <a:r>
               <a:rPr lang="en-GB" sz="1600" b="1" dirty="0">
-                <a:latin typeface="Courier" pitchFamily="2" charset="0"/>
+                <a:latin typeface="Menlo" panose="020B0609030804020204" pitchFamily="49" charset="0"/>
+                <a:ea typeface="Menlo" panose="020B0609030804020204" pitchFamily="49" charset="0"/>
+                <a:cs typeface="Menlo" panose="020B0609030804020204" pitchFamily="49" charset="0"/>
               </a:rPr>
               <a:t> </a:t>
             </a:r>
@@ -14918,7 +15804,9 @@
                 <a:highlight>
                   <a:srgbClr val="FFFF00"/>
                 </a:highlight>
-                <a:latin typeface="Courier" pitchFamily="2" charset="0"/>
+                <a:latin typeface="Menlo" panose="020B0609030804020204" pitchFamily="49" charset="0"/>
+                <a:ea typeface="Menlo" panose="020B0609030804020204" pitchFamily="49" charset="0"/>
+                <a:cs typeface="Menlo" panose="020B0609030804020204" pitchFamily="49" charset="0"/>
               </a:rPr>
               <a:t>Text(’’), //TODO: put the message inside the Text here</a:t>
             </a:r>
@@ -14929,19 +15817,25 @@
             </a:pPr>
             <a:r>
               <a:rPr lang="en-GB" sz="1600" dirty="0">
-                <a:latin typeface="Courier" pitchFamily="2" charset="0"/>
+                <a:latin typeface="Menlo" panose="020B0609030804020204" pitchFamily="49" charset="0"/>
+                <a:ea typeface="Menlo" panose="020B0609030804020204" pitchFamily="49" charset="0"/>
+                <a:cs typeface="Menlo" panose="020B0609030804020204" pitchFamily="49" charset="0"/>
               </a:rPr>
               <a:t>            </a:t>
             </a:r>
             <a:r>
               <a:rPr lang="en-GB" sz="1600" dirty="0" err="1">
-                <a:latin typeface="Courier" pitchFamily="2" charset="0"/>
+                <a:latin typeface="Menlo" panose="020B0609030804020204" pitchFamily="49" charset="0"/>
+                <a:ea typeface="Menlo" panose="020B0609030804020204" pitchFamily="49" charset="0"/>
+                <a:cs typeface="Menlo" panose="020B0609030804020204" pitchFamily="49" charset="0"/>
               </a:rPr>
               <a:t>ElevatedButton</a:t>
             </a:r>
             <a:r>
               <a:rPr lang="en-GB" sz="1600" dirty="0">
-                <a:latin typeface="Courier" pitchFamily="2" charset="0"/>
+                <a:latin typeface="Menlo" panose="020B0609030804020204" pitchFamily="49" charset="0"/>
+                <a:ea typeface="Menlo" panose="020B0609030804020204" pitchFamily="49" charset="0"/>
+                <a:cs typeface="Menlo" panose="020B0609030804020204" pitchFamily="49" charset="0"/>
               </a:rPr>
               <a:t>(</a:t>
             </a:r>
@@ -14952,7 +15846,9 @@
             </a:pPr>
             <a:r>
               <a:rPr lang="en-GB" sz="1600" dirty="0">
-                <a:latin typeface="Courier" pitchFamily="2" charset="0"/>
+                <a:latin typeface="Menlo" panose="020B0609030804020204" pitchFamily="49" charset="0"/>
+                <a:ea typeface="Menlo" panose="020B0609030804020204" pitchFamily="49" charset="0"/>
+                <a:cs typeface="Menlo" panose="020B0609030804020204" pitchFamily="49" charset="0"/>
               </a:rPr>
               <a:t>              child: Text('To the home'),</a:t>
             </a:r>
@@ -14963,19 +15859,25 @@
             </a:pPr>
             <a:r>
               <a:rPr lang="en-GB" sz="1600" dirty="0">
-                <a:latin typeface="Courier" pitchFamily="2" charset="0"/>
+                <a:latin typeface="Menlo" panose="020B0609030804020204" pitchFamily="49" charset="0"/>
+                <a:ea typeface="Menlo" panose="020B0609030804020204" pitchFamily="49" charset="0"/>
+                <a:cs typeface="Menlo" panose="020B0609030804020204" pitchFamily="49" charset="0"/>
               </a:rPr>
               <a:t>              </a:t>
             </a:r>
             <a:r>
               <a:rPr lang="en-GB" sz="1600" dirty="0" err="1">
-                <a:latin typeface="Courier" pitchFamily="2" charset="0"/>
+                <a:latin typeface="Menlo" panose="020B0609030804020204" pitchFamily="49" charset="0"/>
+                <a:ea typeface="Menlo" panose="020B0609030804020204" pitchFamily="49" charset="0"/>
+                <a:cs typeface="Menlo" panose="020B0609030804020204" pitchFamily="49" charset="0"/>
               </a:rPr>
               <a:t>onPressed</a:t>
             </a:r>
             <a:r>
               <a:rPr lang="en-GB" sz="1600" dirty="0">
-                <a:latin typeface="Courier" pitchFamily="2" charset="0"/>
+                <a:latin typeface="Menlo" panose="020B0609030804020204" pitchFamily="49" charset="0"/>
+                <a:ea typeface="Menlo" panose="020B0609030804020204" pitchFamily="49" charset="0"/>
+                <a:cs typeface="Menlo" panose="020B0609030804020204" pitchFamily="49" charset="0"/>
               </a:rPr>
               <a:t>: () {</a:t>
             </a:r>
@@ -14986,19 +15888,25 @@
             </a:pPr>
             <a:r>
               <a:rPr lang="en-GB" sz="1600" dirty="0">
-                <a:latin typeface="Courier" pitchFamily="2" charset="0"/>
+                <a:latin typeface="Menlo" panose="020B0609030804020204" pitchFamily="49" charset="0"/>
+                <a:ea typeface="Menlo" panose="020B0609030804020204" pitchFamily="49" charset="0"/>
+                <a:cs typeface="Menlo" panose="020B0609030804020204" pitchFamily="49" charset="0"/>
               </a:rPr>
               <a:t>                </a:t>
             </a:r>
             <a:r>
               <a:rPr lang="en-GB" sz="1600" dirty="0" err="1">
-                <a:latin typeface="Courier" pitchFamily="2" charset="0"/>
+                <a:latin typeface="Menlo" panose="020B0609030804020204" pitchFamily="49" charset="0"/>
+                <a:ea typeface="Menlo" panose="020B0609030804020204" pitchFamily="49" charset="0"/>
+                <a:cs typeface="Menlo" panose="020B0609030804020204" pitchFamily="49" charset="0"/>
               </a:rPr>
               <a:t>Navigator.pop</a:t>
             </a:r>
             <a:r>
               <a:rPr lang="en-GB" sz="1600" dirty="0">
-                <a:latin typeface="Courier" pitchFamily="2" charset="0"/>
+                <a:latin typeface="Menlo" panose="020B0609030804020204" pitchFamily="49" charset="0"/>
+                <a:ea typeface="Menlo" panose="020B0609030804020204" pitchFamily="49" charset="0"/>
+                <a:cs typeface="Menlo" panose="020B0609030804020204" pitchFamily="49" charset="0"/>
               </a:rPr>
               <a:t>(context);</a:t>
             </a:r>
@@ -15009,7 +15917,9 @@
             </a:pPr>
             <a:r>
               <a:rPr lang="en-GB" sz="1600" dirty="0">
-                <a:latin typeface="Courier" pitchFamily="2" charset="0"/>
+                <a:latin typeface="Menlo" panose="020B0609030804020204" pitchFamily="49" charset="0"/>
+                <a:ea typeface="Menlo" panose="020B0609030804020204" pitchFamily="49" charset="0"/>
+                <a:cs typeface="Menlo" panose="020B0609030804020204" pitchFamily="49" charset="0"/>
               </a:rPr>
               <a:t>              },</a:t>
             </a:r>
@@ -15020,7 +15930,9 @@
             </a:pPr>
             <a:r>
               <a:rPr lang="en-GB" sz="1600" dirty="0">
-                <a:latin typeface="Courier" pitchFamily="2" charset="0"/>
+                <a:latin typeface="Menlo" panose="020B0609030804020204" pitchFamily="49" charset="0"/>
+                <a:ea typeface="Menlo" panose="020B0609030804020204" pitchFamily="49" charset="0"/>
+                <a:cs typeface="Menlo" panose="020B0609030804020204" pitchFamily="49" charset="0"/>
               </a:rPr>
               <a:t>            ),</a:t>
             </a:r>
@@ -15031,7 +15943,9 @@
             </a:pPr>
             <a:r>
               <a:rPr lang="en-GB" sz="1600" dirty="0">
-                <a:latin typeface="Courier" pitchFamily="2" charset="0"/>
+                <a:latin typeface="Menlo" panose="020B0609030804020204" pitchFamily="49" charset="0"/>
+                <a:ea typeface="Menlo" panose="020B0609030804020204" pitchFamily="49" charset="0"/>
+                <a:cs typeface="Menlo" panose="020B0609030804020204" pitchFamily="49" charset="0"/>
               </a:rPr>
               <a:t>          ],</a:t>
             </a:r>
@@ -15042,7 +15956,9 @@
             </a:pPr>
             <a:r>
               <a:rPr lang="en-GB" sz="1600" dirty="0">
-                <a:latin typeface="Courier" pitchFamily="2" charset="0"/>
+                <a:latin typeface="Menlo" panose="020B0609030804020204" pitchFamily="49" charset="0"/>
+                <a:ea typeface="Menlo" panose="020B0609030804020204" pitchFamily="49" charset="0"/>
+                <a:cs typeface="Menlo" panose="020B0609030804020204" pitchFamily="49" charset="0"/>
               </a:rPr>
               <a:t>        ),</a:t>
             </a:r>
@@ -15053,7 +15969,9 @@
             </a:pPr>
             <a:r>
               <a:rPr lang="en-GB" sz="1600" dirty="0">
-                <a:latin typeface="Courier" pitchFamily="2" charset="0"/>
+                <a:latin typeface="Menlo" panose="020B0609030804020204" pitchFamily="49" charset="0"/>
+                <a:ea typeface="Menlo" panose="020B0609030804020204" pitchFamily="49" charset="0"/>
+                <a:cs typeface="Menlo" panose="020B0609030804020204" pitchFamily="49" charset="0"/>
               </a:rPr>
               <a:t>      ),</a:t>
             </a:r>
@@ -15065,7 +15983,9 @@
             </a:pPr>
             <a:r>
               <a:rPr lang="en-GB" sz="1600" dirty="0">
-                <a:latin typeface="Courier" pitchFamily="2" charset="0"/>
+                <a:latin typeface="Menlo" panose="020B0609030804020204" pitchFamily="49" charset="0"/>
+                <a:ea typeface="Menlo" panose="020B0609030804020204" pitchFamily="49" charset="0"/>
+                <a:cs typeface="Menlo" panose="020B0609030804020204" pitchFamily="49" charset="0"/>
               </a:rPr>
               <a:t>    );</a:t>
             </a:r>
@@ -15077,7 +15997,9 @@
             </a:pPr>
             <a:r>
               <a:rPr lang="en-GB" sz="1600" dirty="0">
-                <a:latin typeface="Courier" pitchFamily="2" charset="0"/>
+                <a:latin typeface="Menlo" panose="020B0609030804020204" pitchFamily="49" charset="0"/>
+                <a:ea typeface="Menlo" panose="020B0609030804020204" pitchFamily="49" charset="0"/>
+                <a:cs typeface="Menlo" panose="020B0609030804020204" pitchFamily="49" charset="0"/>
               </a:rPr>
               <a:t>  } //build</a:t>
             </a:r>
@@ -15088,18 +16010,24 @@
             </a:pPr>
             <a:r>
               <a:rPr lang="en-GB" sz="1600" dirty="0">
-                <a:latin typeface="Courier" pitchFamily="2" charset="0"/>
+                <a:latin typeface="Menlo" panose="020B0609030804020204" pitchFamily="49" charset="0"/>
+                <a:ea typeface="Menlo" panose="020B0609030804020204" pitchFamily="49" charset="0"/>
+                <a:cs typeface="Menlo" panose="020B0609030804020204" pitchFamily="49" charset="0"/>
               </a:rPr>
               <a:t>} // </a:t>
             </a:r>
             <a:r>
               <a:rPr lang="en-GB" sz="1600" dirty="0" err="1">
-                <a:latin typeface="Courier" pitchFamily="2" charset="0"/>
+                <a:latin typeface="Menlo" panose="020B0609030804020204" pitchFamily="49" charset="0"/>
+                <a:ea typeface="Menlo" panose="020B0609030804020204" pitchFamily="49" charset="0"/>
+                <a:cs typeface="Menlo" panose="020B0609030804020204" pitchFamily="49" charset="0"/>
               </a:rPr>
               <a:t>MessagePage</a:t>
             </a:r>
             <a:endParaRPr lang="en-IT" sz="1600" dirty="0">
-              <a:latin typeface="Courier" pitchFamily="2" charset="0"/>
+              <a:latin typeface="Menlo" panose="020B0609030804020204" pitchFamily="49" charset="0"/>
+              <a:ea typeface="Menlo" panose="020B0609030804020204" pitchFamily="49" charset="0"/>
+              <a:cs typeface="Menlo" panose="020B0609030804020204" pitchFamily="49" charset="0"/>
             </a:endParaRPr>
           </a:p>
         </p:txBody>
@@ -15225,23 +16153,51 @@
             </a:r>
             <a:r>
               <a:rPr lang="en-IT" dirty="0">
-                <a:latin typeface="Courier" pitchFamily="2" charset="0"/>
+                <a:latin typeface="Menlo" panose="020B0609030804020204" pitchFamily="49" charset="0"/>
+                <a:ea typeface="Menlo" panose="020B0609030804020204" pitchFamily="49" charset="0"/>
+                <a:cs typeface="Menlo" panose="020B0609030804020204" pitchFamily="49" charset="0"/>
               </a:rPr>
               <a:t>MessagePage</a:t>
             </a:r>
             <a:r>
               <a:rPr lang="en-IT" dirty="0"/>
-              <a:t> route, now you can invoke </a:t>
+              <a:t> route, now you can </a:t>
+            </a:r>
+            <a:r>
+              <a:rPr lang="en-IT"/>
+              <a:t>invoke </a:t>
             </a:r>
             <a:r>
               <a:rPr lang="en-IT" dirty="0">
-                <a:latin typeface="Courier" pitchFamily="2" charset="0"/>
-              </a:rPr>
-              <a:t>Navigator.pushNamed()</a:t>
+                <a:latin typeface="Menlo" panose="020B0609030804020204" pitchFamily="49" charset="0"/>
+                <a:ea typeface="Menlo" panose="020B0609030804020204" pitchFamily="49" charset="0"/>
+                <a:cs typeface="Menlo" panose="020B0609030804020204" pitchFamily="49" charset="0"/>
+              </a:rPr>
+              <a:t>Navigator.</a:t>
+            </a:r>
+            <a:r>
+              <a:rPr lang="en-IT">
+                <a:latin typeface="Menlo" panose="020B0609030804020204" pitchFamily="49" charset="0"/>
+                <a:ea typeface="Menlo" panose="020B0609030804020204" pitchFamily="49" charset="0"/>
+                <a:cs typeface="Menlo" panose="020B0609030804020204" pitchFamily="49" charset="0"/>
+              </a:rPr>
+              <a:t>pushNamed()</a:t>
+            </a:r>
+            <a:r>
+              <a:rPr lang="en-IT" dirty="0">
+                <a:latin typeface="Menlo" panose="020B0609030804020204" pitchFamily="49" charset="0"/>
+                <a:ea typeface="Menlo" panose="020B0609030804020204" pitchFamily="49" charset="0"/>
+                <a:cs typeface="Menlo" panose="020B0609030804020204" pitchFamily="49" charset="0"/>
+              </a:rPr>
+              <a:t> </a:t>
+            </a:r>
+            <a:r>
+              <a:rPr lang="en-IT"/>
+              <a:t>as</a:t>
             </a:r>
             <a:r>
               <a:rPr lang="en-IT" dirty="0"/>
-              <a:t> as:</a:t>
+              <a:t>:</a:t>
             </a:r>
           </a:p>
         </p:txBody>
@@ -15457,13 +16413,27 @@
               <a:rPr lang="en-IT" sz="2200" dirty="0">
                 <a:latin typeface="Aptos" panose="020B0004020202020204" pitchFamily="34" charset="0"/>
               </a:rPr>
-              <a:t>Note: to make this work we need to modify the constructor of </a:t>
-            </a:r>
-            <a:r>
-              <a:rPr lang="en-IT" sz="2000" dirty="0">
+              <a:t>Note: to make this work we need to modify the constructor </a:t>
+            </a:r>
+            <a:r>
+              <a:rPr lang="en-IT" sz="2200">
+                <a:latin typeface="Aptos" panose="020B0004020202020204" pitchFamily="34" charset="0"/>
+              </a:rPr>
+              <a:t>of </a:t>
+            </a:r>
+            <a:r>
+              <a:rPr lang="en-IT" sz="2200" dirty="0">
+                <a:latin typeface="Menlo" panose="020B0609030804020204" pitchFamily="49" charset="0"/>
+                <a:ea typeface="Menlo" panose="020B0609030804020204" pitchFamily="49" charset="0"/>
+                <a:cs typeface="Menlo" panose="020B0609030804020204" pitchFamily="49" charset="0"/>
+              </a:rPr>
+              <a:t>MessagePage</a:t>
+            </a:r>
+            <a:r>
+              <a:rPr lang="en-IT" sz="2000">
                 <a:latin typeface="Courier" pitchFamily="2" charset="0"/>
               </a:rPr>
-              <a:t>MessagePage:</a:t>
+              <a:t>:</a:t>
             </a:r>
             <a:endParaRPr lang="en-IT" sz="2200" dirty="0"/>
           </a:p>
@@ -15485,7 +16455,7 @@
         </p:nvSpPr>
         <p:spPr>
           <a:xfrm>
-            <a:off x="653626" y="1894421"/>
+            <a:off x="653626" y="1912215"/>
             <a:ext cx="11110202" cy="1726007"/>
           </a:xfrm>
           <a:prstGeom prst="rect">
@@ -15682,7 +16652,9 @@
             </a:pPr>
             <a:r>
               <a:rPr lang="en-GB" sz="1600" dirty="0">
-                <a:latin typeface="Courier" pitchFamily="2" charset="0"/>
+                <a:latin typeface="Menlo" panose="020B0609030804020204" pitchFamily="49" charset="0"/>
+                <a:ea typeface="Menlo" panose="020B0609030804020204" pitchFamily="49" charset="0"/>
+                <a:cs typeface="Menlo" panose="020B0609030804020204" pitchFamily="49" charset="0"/>
               </a:rPr>
               <a:t>...</a:t>
             </a:r>
@@ -15694,13 +16666,17 @@
             </a:pPr>
             <a:r>
               <a:rPr lang="en-GB" sz="1600" dirty="0" err="1">
-                <a:latin typeface="Courier" pitchFamily="2" charset="0"/>
+                <a:latin typeface="Menlo" panose="020B0609030804020204" pitchFamily="49" charset="0"/>
+                <a:ea typeface="Menlo" panose="020B0609030804020204" pitchFamily="49" charset="0"/>
+                <a:cs typeface="Menlo" panose="020B0609030804020204" pitchFamily="49" charset="0"/>
               </a:rPr>
               <a:t>onPressed</a:t>
             </a:r>
             <a:r>
               <a:rPr lang="en-GB" sz="1600" dirty="0">
-                <a:latin typeface="Courier" pitchFamily="2" charset="0"/>
+                <a:latin typeface="Menlo" panose="020B0609030804020204" pitchFamily="49" charset="0"/>
+                <a:ea typeface="Menlo" panose="020B0609030804020204" pitchFamily="49" charset="0"/>
+                <a:cs typeface="Menlo" panose="020B0609030804020204" pitchFamily="49" charset="0"/>
               </a:rPr>
               <a:t>: () {</a:t>
             </a:r>
@@ -15711,43 +16687,57 @@
             </a:pPr>
             <a:r>
               <a:rPr lang="en-GB" sz="1600" b="1" dirty="0">
-                <a:latin typeface="Courier" pitchFamily="2" charset="0"/>
+                <a:latin typeface="Menlo" panose="020B0609030804020204" pitchFamily="49" charset="0"/>
+                <a:ea typeface="Menlo" panose="020B0609030804020204" pitchFamily="49" charset="0"/>
+                <a:cs typeface="Menlo" panose="020B0609030804020204" pitchFamily="49" charset="0"/>
               </a:rPr>
               <a:t>  </a:t>
             </a:r>
             <a:r>
               <a:rPr lang="en-GB" sz="1600" b="1" dirty="0" err="1">
-                <a:latin typeface="Courier" pitchFamily="2" charset="0"/>
+                <a:latin typeface="Menlo" panose="020B0609030804020204" pitchFamily="49" charset="0"/>
+                <a:ea typeface="Menlo" panose="020B0609030804020204" pitchFamily="49" charset="0"/>
+                <a:cs typeface="Menlo" panose="020B0609030804020204" pitchFamily="49" charset="0"/>
               </a:rPr>
               <a:t>Navigator.push</a:t>
             </a:r>
             <a:r>
               <a:rPr lang="en-GB" sz="1600" b="1" dirty="0">
-                <a:latin typeface="Courier" pitchFamily="2" charset="0"/>
+                <a:latin typeface="Menlo" panose="020B0609030804020204" pitchFamily="49" charset="0"/>
+                <a:ea typeface="Menlo" panose="020B0609030804020204" pitchFamily="49" charset="0"/>
+                <a:cs typeface="Menlo" panose="020B0609030804020204" pitchFamily="49" charset="0"/>
               </a:rPr>
               <a:t>(context, </a:t>
             </a:r>
             <a:r>
               <a:rPr lang="en-GB" sz="1600" b="1" dirty="0" err="1">
-                <a:latin typeface="Courier" pitchFamily="2" charset="0"/>
+                <a:latin typeface="Menlo" panose="020B0609030804020204" pitchFamily="49" charset="0"/>
+                <a:ea typeface="Menlo" panose="020B0609030804020204" pitchFamily="49" charset="0"/>
+                <a:cs typeface="Menlo" panose="020B0609030804020204" pitchFamily="49" charset="0"/>
               </a:rPr>
               <a:t>MaterialPageRoute</a:t>
             </a:r>
             <a:r>
               <a:rPr lang="en-GB" sz="1600" b="1" dirty="0">
-                <a:latin typeface="Courier" pitchFamily="2" charset="0"/>
+                <a:latin typeface="Menlo" panose="020B0609030804020204" pitchFamily="49" charset="0"/>
+                <a:ea typeface="Menlo" panose="020B0609030804020204" pitchFamily="49" charset="0"/>
+                <a:cs typeface="Menlo" panose="020B0609030804020204" pitchFamily="49" charset="0"/>
               </a:rPr>
               <a:t>(builder: (context) =&gt; </a:t>
             </a:r>
             <a:r>
               <a:rPr lang="en-GB" sz="1600" b="1" dirty="0" err="1">
-                <a:latin typeface="Courier" pitchFamily="2" charset="0"/>
+                <a:latin typeface="Menlo" panose="020B0609030804020204" pitchFamily="49" charset="0"/>
+                <a:ea typeface="Menlo" panose="020B0609030804020204" pitchFamily="49" charset="0"/>
+                <a:cs typeface="Menlo" panose="020B0609030804020204" pitchFamily="49" charset="0"/>
               </a:rPr>
               <a:t>MessagePage</a:t>
             </a:r>
             <a:r>
               <a:rPr lang="en-GB" sz="1600" b="1" dirty="0">
-                <a:latin typeface="Courier" pitchFamily="2" charset="0"/>
+                <a:latin typeface="Menlo" panose="020B0609030804020204" pitchFamily="49" charset="0"/>
+                <a:ea typeface="Menlo" panose="020B0609030804020204" pitchFamily="49" charset="0"/>
+                <a:cs typeface="Menlo" panose="020B0609030804020204" pitchFamily="49" charset="0"/>
               </a:rPr>
               <a:t>(message: 'Hello!',)));</a:t>
             </a:r>
@@ -15759,7 +16749,9 @@
             </a:pPr>
             <a:r>
               <a:rPr lang="en-GB" sz="1600" dirty="0">
-                <a:latin typeface="Courier" pitchFamily="2" charset="0"/>
+                <a:latin typeface="Menlo" panose="020B0609030804020204" pitchFamily="49" charset="0"/>
+                <a:ea typeface="Menlo" panose="020B0609030804020204" pitchFamily="49" charset="0"/>
+                <a:cs typeface="Menlo" panose="020B0609030804020204" pitchFamily="49" charset="0"/>
               </a:rPr>
               <a:t>},</a:t>
             </a:r>
@@ -15771,7 +16763,9 @@
             </a:pPr>
             <a:r>
               <a:rPr lang="en-GB" sz="1600" dirty="0">
-                <a:latin typeface="Courier" pitchFamily="2" charset="0"/>
+                <a:latin typeface="Menlo" panose="020B0609030804020204" pitchFamily="49" charset="0"/>
+                <a:ea typeface="Menlo" panose="020B0609030804020204" pitchFamily="49" charset="0"/>
+                <a:cs typeface="Menlo" panose="020B0609030804020204" pitchFamily="49" charset="0"/>
               </a:rPr>
               <a:t>...</a:t>
             </a:r>
@@ -15823,8 +16817,8 @@
         </p:nvSpPr>
         <p:spPr>
           <a:xfrm>
-            <a:off x="600891" y="4193767"/>
-            <a:ext cx="11110202" cy="1726007"/>
+            <a:off x="653626" y="4170350"/>
+            <a:ext cx="11110202" cy="1326129"/>
           </a:xfrm>
           <a:prstGeom prst="rect">
             <a:avLst/>
@@ -15832,7 +16826,7 @@
         </p:spPr>
         <p:txBody>
           <a:bodyPr vert="horz" lIns="91440" tIns="45720" rIns="91440" bIns="45720" rtlCol="0">
-            <a:normAutofit/>
+            <a:normAutofit lnSpcReduction="10000"/>
           </a:bodyPr>
           <a:lstStyle>
             <a:lvl1pPr marL="342900" indent="-342900" algn="l" defTabSz="914400" rtl="0" eaLnBrk="1" latinLnBrk="0" hangingPunct="1">
@@ -16020,7 +17014,9 @@
             </a:pPr>
             <a:r>
               <a:rPr lang="en-GB" sz="1600" dirty="0">
-                <a:latin typeface="Courier" pitchFamily="2" charset="0"/>
+                <a:latin typeface="Menlo" panose="020B0609030804020204" pitchFamily="49" charset="0"/>
+                <a:ea typeface="Menlo" panose="020B0609030804020204" pitchFamily="49" charset="0"/>
+                <a:cs typeface="Menlo" panose="020B0609030804020204" pitchFamily="49" charset="0"/>
               </a:rPr>
               <a:t>...</a:t>
             </a:r>
@@ -16032,31 +17028,33 @@
             </a:pPr>
             <a:r>
               <a:rPr lang="en-GB" sz="1600" dirty="0" err="1">
-                <a:latin typeface="Courier" pitchFamily="2" charset="0"/>
+                <a:latin typeface="Menlo" panose="020B0609030804020204" pitchFamily="49" charset="0"/>
+                <a:ea typeface="Menlo" panose="020B0609030804020204" pitchFamily="49" charset="0"/>
+                <a:cs typeface="Menlo" panose="020B0609030804020204" pitchFamily="49" charset="0"/>
               </a:rPr>
               <a:t>MessagePage</a:t>
             </a:r>
             <a:r>
               <a:rPr lang="en-GB" sz="1600" dirty="0">
-                <a:latin typeface="Courier" pitchFamily="2" charset="0"/>
-              </a:rPr>
-              <a:t>({Key? key, </a:t>
-            </a:r>
-            <a:r>
-              <a:rPr lang="en-GB" sz="1600" b="1" dirty="0">
-                <a:latin typeface="Courier" pitchFamily="2" charset="0"/>
-              </a:rPr>
-              <a:t>required </a:t>
-            </a:r>
-            <a:r>
-              <a:rPr lang="en-GB" sz="1600" b="1" dirty="0" err="1">
-                <a:latin typeface="Courier" pitchFamily="2" charset="0"/>
+                <a:latin typeface="Menlo" panose="020B0609030804020204" pitchFamily="49" charset="0"/>
+                <a:ea typeface="Menlo" panose="020B0609030804020204" pitchFamily="49" charset="0"/>
+                <a:cs typeface="Menlo" panose="020B0609030804020204" pitchFamily="49" charset="0"/>
+              </a:rPr>
+              <a:t>({Key? key, required </a:t>
+            </a:r>
+            <a:r>
+              <a:rPr lang="en-GB" sz="1600" dirty="0" err="1">
+                <a:latin typeface="Menlo" panose="020B0609030804020204" pitchFamily="49" charset="0"/>
+                <a:ea typeface="Menlo" panose="020B0609030804020204" pitchFamily="49" charset="0"/>
+                <a:cs typeface="Menlo" panose="020B0609030804020204" pitchFamily="49" charset="0"/>
               </a:rPr>
               <a:t>this.message</a:t>
             </a:r>
             <a:r>
               <a:rPr lang="en-GB" sz="1600" dirty="0">
-                <a:latin typeface="Courier" pitchFamily="2" charset="0"/>
+                <a:latin typeface="Menlo" panose="020B0609030804020204" pitchFamily="49" charset="0"/>
+                <a:ea typeface="Menlo" panose="020B0609030804020204" pitchFamily="49" charset="0"/>
+                <a:cs typeface="Menlo" panose="020B0609030804020204" pitchFamily="49" charset="0"/>
               </a:rPr>
               <a:t>}) : super(key: key);</a:t>
             </a:r>
@@ -16067,8 +17065,10 @@
               <a:buNone/>
             </a:pPr>
             <a:r>
-              <a:rPr lang="en-GB" sz="1600" b="1" dirty="0">
-                <a:latin typeface="Courier" pitchFamily="2" charset="0"/>
+              <a:rPr lang="en-GB" sz="1600" dirty="0">
+                <a:latin typeface="Menlo" panose="020B0609030804020204" pitchFamily="49" charset="0"/>
+                <a:ea typeface="Menlo" panose="020B0609030804020204" pitchFamily="49" charset="0"/>
+                <a:cs typeface="Menlo" panose="020B0609030804020204" pitchFamily="49" charset="0"/>
               </a:rPr>
               <a:t>final String message;</a:t>
             </a:r>
@@ -16080,7 +17080,9 @@
             </a:pPr>
             <a:r>
               <a:rPr lang="en-GB" sz="1600" dirty="0">
-                <a:latin typeface="Courier" pitchFamily="2" charset="0"/>
+                <a:latin typeface="Menlo" panose="020B0609030804020204" pitchFamily="49" charset="0"/>
+                <a:ea typeface="Menlo" panose="020B0609030804020204" pitchFamily="49" charset="0"/>
+                <a:cs typeface="Menlo" panose="020B0609030804020204" pitchFamily="49" charset="0"/>
               </a:rPr>
               <a:t>...</a:t>
             </a:r>
@@ -16319,8 +17321,8 @@
         </p:nvSpPr>
         <p:spPr>
           <a:xfrm>
-            <a:off x="673945" y="5831922"/>
-            <a:ext cx="11110202" cy="1726007"/>
+            <a:off x="653626" y="5806428"/>
+            <a:ext cx="11110202" cy="915047"/>
           </a:xfrm>
           <a:prstGeom prst="rect">
             <a:avLst/>
@@ -16328,10 +17330,13 @@
         </p:spPr>
         <p:txBody>
           <a:bodyPr vert="horz" lIns="91440" tIns="45720" rIns="91440" bIns="45720" rtlCol="0">
-            <a:normAutofit/>
+            <a:normAutofit fontScale="77500" lnSpcReduction="20000"/>
           </a:bodyPr>
           <a:lstStyle>
-            <a:lvl1pPr marL="342900" indent="-342900" algn="l" defTabSz="914400" rtl="0" eaLnBrk="1" latinLnBrk="0" hangingPunct="1">
+            <a:defPPr>
+              <a:defRPr lang="en-US"/>
+            </a:defPPr>
+            <a:lvl1pPr indent="0">
               <a:lnSpc>
                 <a:spcPct val="90000"/>
               </a:lnSpc>
@@ -16342,17 +17347,14 @@
                 <a:srgbClr val="00B050"/>
               </a:buClr>
               <a:buFont typeface="Wingdings" panose="05000000000000000000" pitchFamily="2" charset="2"/>
-              <a:buChar char="Ø"/>
-              <a:defRPr sz="2400" kern="1200">
-                <a:solidFill>
-                  <a:schemeClr val="tx1"/>
-                </a:solidFill>
-                <a:latin typeface="Palatino Linotype" panose="02040502050505030304" pitchFamily="18" charset="0"/>
-                <a:ea typeface="+mn-ea"/>
-                <a:cs typeface="+mn-cs"/>
+              <a:buNone/>
+              <a:defRPr sz="2200">
+                <a:latin typeface="Menlo" panose="020B0609030804020204" pitchFamily="49" charset="0"/>
+                <a:ea typeface="Menlo" panose="020B0609030804020204" pitchFamily="49" charset="0"/>
+                <a:cs typeface="Menlo" panose="020B0609030804020204" pitchFamily="49" charset="0"/>
               </a:defRPr>
             </a:lvl1pPr>
-            <a:lvl2pPr marL="685800" indent="-228600" algn="l" defTabSz="914400" rtl="0" eaLnBrk="1" latinLnBrk="0" hangingPunct="1">
+            <a:lvl2pPr marL="685800" indent="-228600">
               <a:lnSpc>
                 <a:spcPct val="90000"/>
               </a:lnSpc>
@@ -16364,16 +17366,11 @@
               </a:buClr>
               <a:buFont typeface="Wingdings" panose="05000000000000000000" pitchFamily="2" charset="2"/>
               <a:buChar char="§"/>
-              <a:defRPr sz="2000" kern="1200">
-                <a:solidFill>
-                  <a:schemeClr val="tx1"/>
-                </a:solidFill>
+              <a:defRPr sz="2000">
                 <a:latin typeface="Palatino Linotype" panose="02040502050505030304" pitchFamily="18" charset="0"/>
-                <a:ea typeface="+mn-ea"/>
-                <a:cs typeface="+mn-cs"/>
               </a:defRPr>
             </a:lvl2pPr>
-            <a:lvl3pPr marL="1143000" indent="-228600" algn="l" defTabSz="914400" rtl="0" eaLnBrk="1" latinLnBrk="0" hangingPunct="1">
+            <a:lvl3pPr marL="1143000" indent="-228600">
               <a:lnSpc>
                 <a:spcPct val="90000"/>
               </a:lnSpc>
@@ -16385,16 +17382,11 @@
               </a:buClr>
               <a:buFont typeface="Arial" panose="020B0604020202020204" pitchFamily="34" charset="0"/>
               <a:buChar char="•"/>
-              <a:defRPr sz="1800" kern="1200">
-                <a:solidFill>
-                  <a:schemeClr val="tx1"/>
-                </a:solidFill>
+              <a:defRPr>
                 <a:latin typeface="Palatino Linotype" panose="02040502050505030304" pitchFamily="18" charset="0"/>
-                <a:ea typeface="+mn-ea"/>
-                <a:cs typeface="+mn-cs"/>
               </a:defRPr>
             </a:lvl3pPr>
-            <a:lvl4pPr marL="1600200" indent="-228600" algn="l" defTabSz="914400" rtl="0" eaLnBrk="1" latinLnBrk="0" hangingPunct="1">
+            <a:lvl4pPr marL="1600200" indent="-228600">
               <a:lnSpc>
                 <a:spcPct val="90000"/>
               </a:lnSpc>
@@ -16406,16 +17398,11 @@
               </a:buClr>
               <a:buFont typeface="Courier New" panose="02070309020205020404" pitchFamily="49" charset="0"/>
               <a:buChar char="o"/>
-              <a:defRPr sz="1600" kern="1200">
-                <a:solidFill>
-                  <a:schemeClr val="tx1"/>
-                </a:solidFill>
+              <a:defRPr sz="1600">
                 <a:latin typeface="Palatino Linotype" panose="02040502050505030304" pitchFamily="18" charset="0"/>
-                <a:ea typeface="+mn-ea"/>
-                <a:cs typeface="+mn-cs"/>
               </a:defRPr>
             </a:lvl4pPr>
-            <a:lvl5pPr marL="2057400" indent="-228600" algn="l" defTabSz="914400" rtl="0" eaLnBrk="1" latinLnBrk="0" hangingPunct="1">
+            <a:lvl5pPr marL="2057400" indent="-228600">
               <a:lnSpc>
                 <a:spcPct val="90000"/>
               </a:lnSpc>
@@ -16427,16 +17414,11 @@
               </a:buClr>
               <a:buFont typeface="Times New Roman" panose="02020603050405020304" pitchFamily="18" charset="0"/>
               <a:buChar char="̶"/>
-              <a:defRPr sz="1600" kern="1200">
-                <a:solidFill>
-                  <a:schemeClr val="tx1"/>
-                </a:solidFill>
+              <a:defRPr sz="1600">
                 <a:latin typeface="Palatino Linotype" panose="02040502050505030304" pitchFamily="18" charset="0"/>
-                <a:ea typeface="+mn-ea"/>
-                <a:cs typeface="+mn-cs"/>
               </a:defRPr>
             </a:lvl5pPr>
-            <a:lvl6pPr marL="2514600" indent="-228600" algn="l" defTabSz="914400" rtl="0" eaLnBrk="1" latinLnBrk="0" hangingPunct="1">
+            <a:lvl6pPr marL="2514600" indent="-228600">
               <a:lnSpc>
                 <a:spcPct val="90000"/>
               </a:lnSpc>
@@ -16445,16 +17427,8 @@
               </a:spcBef>
               <a:buFont typeface="Arial" panose="020B0604020202020204" pitchFamily="34" charset="0"/>
               <a:buChar char="•"/>
-              <a:defRPr sz="1800" kern="1200">
-                <a:solidFill>
-                  <a:schemeClr val="tx1"/>
-                </a:solidFill>
-                <a:latin typeface="+mn-lt"/>
-                <a:ea typeface="+mn-ea"/>
-                <a:cs typeface="+mn-cs"/>
-              </a:defRPr>
             </a:lvl6pPr>
-            <a:lvl7pPr marL="2971800" indent="-228600" algn="l" defTabSz="914400" rtl="0" eaLnBrk="1" latinLnBrk="0" hangingPunct="1">
+            <a:lvl7pPr marL="2971800" indent="-228600">
               <a:lnSpc>
                 <a:spcPct val="90000"/>
               </a:lnSpc>
@@ -16463,16 +17437,8 @@
               </a:spcBef>
               <a:buFont typeface="Arial" panose="020B0604020202020204" pitchFamily="34" charset="0"/>
               <a:buChar char="•"/>
-              <a:defRPr sz="1800" kern="1200">
-                <a:solidFill>
-                  <a:schemeClr val="tx1"/>
-                </a:solidFill>
-                <a:latin typeface="+mn-lt"/>
-                <a:ea typeface="+mn-ea"/>
-                <a:cs typeface="+mn-cs"/>
-              </a:defRPr>
             </a:lvl7pPr>
-            <a:lvl8pPr marL="3429000" indent="-228600" algn="l" defTabSz="914400" rtl="0" eaLnBrk="1" latinLnBrk="0" hangingPunct="1">
+            <a:lvl8pPr marL="3429000" indent="-228600">
               <a:lnSpc>
                 <a:spcPct val="90000"/>
               </a:lnSpc>
@@ -16481,16 +17447,8 @@
               </a:spcBef>
               <a:buFont typeface="Arial" panose="020B0604020202020204" pitchFamily="34" charset="0"/>
               <a:buChar char="•"/>
-              <a:defRPr sz="1800" kern="1200">
-                <a:solidFill>
-                  <a:schemeClr val="tx1"/>
-                </a:solidFill>
-                <a:latin typeface="+mn-lt"/>
-                <a:ea typeface="+mn-ea"/>
-                <a:cs typeface="+mn-cs"/>
-              </a:defRPr>
             </a:lvl8pPr>
-            <a:lvl9pPr marL="3886200" indent="-228600" algn="l" defTabSz="914400" rtl="0" eaLnBrk="1" latinLnBrk="0" hangingPunct="1">
+            <a:lvl9pPr marL="3886200" indent="-228600">
               <a:lnSpc>
                 <a:spcPct val="90000"/>
               </a:lnSpc>
@@ -16499,49 +17457,31 @@
               </a:spcBef>
               <a:buFont typeface="Arial" panose="020B0604020202020204" pitchFamily="34" charset="0"/>
               <a:buChar char="•"/>
-              <a:defRPr sz="1800" kern="1200">
-                <a:solidFill>
-                  <a:schemeClr val="tx1"/>
-                </a:solidFill>
-                <a:latin typeface="+mn-lt"/>
-                <a:ea typeface="+mn-ea"/>
-                <a:cs typeface="+mn-cs"/>
-              </a:defRPr>
             </a:lvl9pPr>
           </a:lstStyle>
           <a:p>
-            <a:pPr marL="0" indent="0">
-              <a:buFont typeface="Wingdings" panose="05000000000000000000" pitchFamily="2" charset="2"/>
-              <a:buNone/>
-            </a:pPr>
-            <a:r>
-              <a:rPr lang="en-GB" sz="1600" dirty="0">
-                <a:latin typeface="Courier" pitchFamily="2" charset="0"/>
-              </a:rPr>
+            <a:r>
+              <a:rPr lang="en-GB" dirty="0"/>
               <a:t>...</a:t>
             </a:r>
           </a:p>
           <a:p>
-            <a:pPr marL="0" indent="0">
-              <a:buFont typeface="Wingdings" panose="05000000000000000000" pitchFamily="2" charset="2"/>
-              <a:buNone/>
-            </a:pPr>
-            <a:r>
-              <a:rPr lang="en-GB" sz="1600" b="1" dirty="0">
-                <a:latin typeface="Courier" pitchFamily="2" charset="0"/>
-              </a:rPr>
-              <a:t>Text(‘This is the message: $message’),</a:t>
-            </a:r>
-          </a:p>
-          <a:p>
-            <a:pPr marL="0" indent="0">
-              <a:buFont typeface="Wingdings" panose="05000000000000000000" pitchFamily="2" charset="2"/>
-              <a:buNone/>
-            </a:pPr>
-            <a:r>
-              <a:rPr lang="en-GB" sz="1600" dirty="0">
-                <a:latin typeface="Courier" pitchFamily="2" charset="0"/>
-              </a:rPr>
+            <a:r>
+              <a:rPr lang="en-GB" dirty="0"/>
+              <a:t>Text(‘This is the message: </a:t>
+            </a:r>
+            <a:r>
+              <a:rPr lang="en-GB" b="1" dirty="0"/>
+              <a:t>$message</a:t>
+            </a:r>
+            <a:r>
+              <a:rPr lang="en-GB" dirty="0"/>
+              <a:t>’),</a:t>
+            </a:r>
+          </a:p>
+          <a:p>
+            <a:r>
+              <a:rPr lang="en-GB" dirty="0"/>
               <a:t>...</a:t>
             </a:r>
           </a:p>
@@ -16638,8 +17578,20 @@
           </a:p>
           <a:p>
             <a:r>
+              <a:rPr lang="en-IT"/>
+              <a:t>Dart and Flutter </a:t>
+            </a:r>
+            <a:r>
+              <a:rPr lang="en-US" dirty="0"/>
+              <a:t>are</a:t>
+            </a:r>
+            <a:r>
+              <a:rPr lang="en-IT"/>
+              <a:t> </a:t>
+            </a:r>
+            <a:r>
               <a:rPr lang="en-IT" dirty="0"/>
-              <a:t>Dart (and Flutter) is full of asynchronous functions: they return after doing </a:t>
+              <a:t>full of asynchronous functions: they return after doing </a:t>
             </a:r>
             <a:r>
               <a:rPr lang="en-IT" b="1" dirty="0"/>
@@ -16702,18 +17654,24 @@
             <a:pPr lvl="1"/>
             <a:r>
               <a:rPr lang="en-IT" dirty="0">
-                <a:latin typeface="Courier" pitchFamily="2" charset="0"/>
+                <a:latin typeface="Menlo" panose="020B0609030804020204" pitchFamily="49" charset="0"/>
+                <a:ea typeface="Menlo" panose="020B0609030804020204" pitchFamily="49" charset="0"/>
+                <a:cs typeface="Menlo" panose="020B0609030804020204" pitchFamily="49" charset="0"/>
               </a:rPr>
               <a:t>fetchDataFromFacebook(); // &lt;-- asynchronous stuff</a:t>
             </a:r>
             <a:br>
               <a:rPr lang="en-IT" dirty="0">
-                <a:latin typeface="Courier" pitchFamily="2" charset="0"/>
+                <a:latin typeface="Menlo" panose="020B0609030804020204" pitchFamily="49" charset="0"/>
+                <a:ea typeface="Menlo" panose="020B0609030804020204" pitchFamily="49" charset="0"/>
+                <a:cs typeface="Menlo" panose="020B0609030804020204" pitchFamily="49" charset="0"/>
               </a:rPr>
             </a:br>
             <a:r>
               <a:rPr lang="en-IT" dirty="0">
-                <a:latin typeface="Courier" pitchFamily="2" charset="0"/>
+                <a:latin typeface="Menlo" panose="020B0609030804020204" pitchFamily="49" charset="0"/>
+                <a:ea typeface="Menlo" panose="020B0609030804020204" pitchFamily="49" charset="0"/>
+                <a:cs typeface="Menlo" panose="020B0609030804020204" pitchFamily="49" charset="0"/>
               </a:rPr>
               <a:t>print(‘Done’);</a:t>
             </a:r>
@@ -17171,7 +18129,9 @@
             </a:r>
             <a:r>
               <a:rPr lang="en-IT" dirty="0">
-                <a:latin typeface="Courier" pitchFamily="2" charset="0"/>
+                <a:latin typeface="Menlo" panose="020B0609030804020204" pitchFamily="49" charset="0"/>
+                <a:ea typeface="Menlo" panose="020B0609030804020204" pitchFamily="49" charset="0"/>
+                <a:cs typeface="Menlo" panose="020B0609030804020204" pitchFamily="49" charset="0"/>
               </a:rPr>
               <a:t>PickValuePage</a:t>
             </a:r>
@@ -17181,24 +18141,39 @@
             </a:r>
             <a:r>
               <a:rPr lang="en-IT" dirty="0">
-                <a:latin typeface="Courier" pitchFamily="2" charset="0"/>
-              </a:rPr>
-              <a:t>HomePage </a:t>
-            </a:r>
-            <a:r>
-              <a:rPr lang="en-IT" dirty="0"/>
-              <a:t>which will be in charge of showing it via a </a:t>
+                <a:latin typeface="Menlo" panose="020B0609030804020204" pitchFamily="49" charset="0"/>
+                <a:ea typeface="Menlo" panose="020B0609030804020204" pitchFamily="49" charset="0"/>
+                <a:cs typeface="Menlo" panose="020B0609030804020204" pitchFamily="49" charset="0"/>
+              </a:rPr>
+              <a:t>HomePage</a:t>
             </a:r>
             <a:r>
               <a:rPr lang="en-IT" dirty="0">
                 <a:latin typeface="Courier" pitchFamily="2" charset="0"/>
               </a:rPr>
+              <a:t> </a:t>
+            </a:r>
+            <a:r>
+              <a:rPr lang="en-IT" dirty="0"/>
+              <a:t>which will be in charge of showing it via </a:t>
+            </a:r>
+            <a:r>
+              <a:rPr lang="en-IT"/>
+              <a:t>a </a:t>
+            </a:r>
+            <a:r>
+              <a:rPr lang="en-IT" dirty="0">
+                <a:latin typeface="Menlo" panose="020B0609030804020204" pitchFamily="49" charset="0"/>
+                <a:ea typeface="Menlo" panose="020B0609030804020204" pitchFamily="49" charset="0"/>
+                <a:cs typeface="Menlo" panose="020B0609030804020204" pitchFamily="49" charset="0"/>
+              </a:rPr>
               <a:t>ScaffoldMessenger</a:t>
             </a:r>
             <a:r>
-              <a:rPr lang="en-IT" dirty="0"/>
+              <a:rPr lang="en-IT"/>
               <a:t>.</a:t>
             </a:r>
+            <a:endParaRPr lang="en-IT" dirty="0"/>
           </a:p>
         </p:txBody>
       </p:sp>
@@ -17445,31 +18420,41 @@
             </a:pPr>
             <a:r>
               <a:rPr lang="en-GB" sz="1600" dirty="0">
-                <a:latin typeface="Courier" pitchFamily="2" charset="0"/>
+                <a:latin typeface="Menlo" panose="020B0609030804020204" pitchFamily="49" charset="0"/>
+                <a:ea typeface="Menlo" panose="020B0609030804020204" pitchFamily="49" charset="0"/>
+                <a:cs typeface="Menlo" panose="020B0609030804020204" pitchFamily="49" charset="0"/>
               </a:rPr>
               <a:t>import '</a:t>
             </a:r>
             <a:r>
               <a:rPr lang="en-GB" sz="1600" dirty="0" err="1">
-                <a:latin typeface="Courier" pitchFamily="2" charset="0"/>
+                <a:latin typeface="Menlo" panose="020B0609030804020204" pitchFamily="49" charset="0"/>
+                <a:ea typeface="Menlo" panose="020B0609030804020204" pitchFamily="49" charset="0"/>
+                <a:cs typeface="Menlo" panose="020B0609030804020204" pitchFamily="49" charset="0"/>
               </a:rPr>
               <a:t>package:flutter</a:t>
             </a:r>
             <a:r>
               <a:rPr lang="en-GB" sz="1600" dirty="0">
-                <a:latin typeface="Courier" pitchFamily="2" charset="0"/>
+                <a:latin typeface="Menlo" panose="020B0609030804020204" pitchFamily="49" charset="0"/>
+                <a:ea typeface="Menlo" panose="020B0609030804020204" pitchFamily="49" charset="0"/>
+                <a:cs typeface="Menlo" panose="020B0609030804020204" pitchFamily="49" charset="0"/>
               </a:rPr>
               <a:t>/</a:t>
             </a:r>
             <a:r>
               <a:rPr lang="en-GB" sz="1600" dirty="0" err="1">
-                <a:latin typeface="Courier" pitchFamily="2" charset="0"/>
+                <a:latin typeface="Menlo" panose="020B0609030804020204" pitchFamily="49" charset="0"/>
+                <a:ea typeface="Menlo" panose="020B0609030804020204" pitchFamily="49" charset="0"/>
+                <a:cs typeface="Menlo" panose="020B0609030804020204" pitchFamily="49" charset="0"/>
               </a:rPr>
               <a:t>material.dart</a:t>
             </a:r>
             <a:r>
               <a:rPr lang="en-GB" sz="1600" dirty="0">
-                <a:latin typeface="Courier" pitchFamily="2" charset="0"/>
+                <a:latin typeface="Menlo" panose="020B0609030804020204" pitchFamily="49" charset="0"/>
+                <a:ea typeface="Menlo" panose="020B0609030804020204" pitchFamily="49" charset="0"/>
+                <a:cs typeface="Menlo" panose="020B0609030804020204" pitchFamily="49" charset="0"/>
               </a:rPr>
               <a:t>';</a:t>
             </a:r>
@@ -17480,31 +18465,41 @@
             </a:pPr>
             <a:r>
               <a:rPr lang="en-GB" sz="1600" dirty="0">
-                <a:latin typeface="Courier" pitchFamily="2" charset="0"/>
+                <a:latin typeface="Menlo" panose="020B0609030804020204" pitchFamily="49" charset="0"/>
+                <a:ea typeface="Menlo" panose="020B0609030804020204" pitchFamily="49" charset="0"/>
+                <a:cs typeface="Menlo" panose="020B0609030804020204" pitchFamily="49" charset="0"/>
               </a:rPr>
               <a:t>class </a:t>
             </a:r>
             <a:r>
               <a:rPr lang="en-GB" sz="1600" dirty="0" err="1">
-                <a:latin typeface="Courier" pitchFamily="2" charset="0"/>
+                <a:latin typeface="Menlo" panose="020B0609030804020204" pitchFamily="49" charset="0"/>
+                <a:ea typeface="Menlo" panose="020B0609030804020204" pitchFamily="49" charset="0"/>
+                <a:cs typeface="Menlo" panose="020B0609030804020204" pitchFamily="49" charset="0"/>
               </a:rPr>
               <a:t>PickValuePage</a:t>
             </a:r>
             <a:r>
               <a:rPr lang="en-GB" sz="1600" dirty="0">
-                <a:latin typeface="Courier" pitchFamily="2" charset="0"/>
+                <a:latin typeface="Menlo" panose="020B0609030804020204" pitchFamily="49" charset="0"/>
+                <a:ea typeface="Menlo" panose="020B0609030804020204" pitchFamily="49" charset="0"/>
+                <a:cs typeface="Menlo" panose="020B0609030804020204" pitchFamily="49" charset="0"/>
               </a:rPr>
               <a:t> extends </a:t>
             </a:r>
             <a:r>
               <a:rPr lang="en-GB" sz="1600" dirty="0" err="1">
-                <a:latin typeface="Courier" pitchFamily="2" charset="0"/>
+                <a:latin typeface="Menlo" panose="020B0609030804020204" pitchFamily="49" charset="0"/>
+                <a:ea typeface="Menlo" panose="020B0609030804020204" pitchFamily="49" charset="0"/>
+                <a:cs typeface="Menlo" panose="020B0609030804020204" pitchFamily="49" charset="0"/>
               </a:rPr>
               <a:t>StatelessWidget</a:t>
             </a:r>
             <a:r>
               <a:rPr lang="en-GB" sz="1600" dirty="0">
-                <a:latin typeface="Courier" pitchFamily="2" charset="0"/>
+                <a:latin typeface="Menlo" panose="020B0609030804020204" pitchFamily="49" charset="0"/>
+                <a:ea typeface="Menlo" panose="020B0609030804020204" pitchFamily="49" charset="0"/>
+                <a:cs typeface="Menlo" panose="020B0609030804020204" pitchFamily="49" charset="0"/>
               </a:rPr>
               <a:t> {</a:t>
             </a:r>
@@ -17515,19 +18510,25 @@
             </a:pPr>
             <a:r>
               <a:rPr lang="en-GB" sz="1600" dirty="0">
-                <a:latin typeface="Courier" pitchFamily="2" charset="0"/>
+                <a:latin typeface="Menlo" panose="020B0609030804020204" pitchFamily="49" charset="0"/>
+                <a:ea typeface="Menlo" panose="020B0609030804020204" pitchFamily="49" charset="0"/>
+                <a:cs typeface="Menlo" panose="020B0609030804020204" pitchFamily="49" charset="0"/>
               </a:rPr>
               <a:t>   </a:t>
             </a:r>
             <a:r>
               <a:rPr lang="en-GB" sz="1600" dirty="0" err="1">
-                <a:latin typeface="Courier" pitchFamily="2" charset="0"/>
+                <a:latin typeface="Menlo" panose="020B0609030804020204" pitchFamily="49" charset="0"/>
+                <a:ea typeface="Menlo" panose="020B0609030804020204" pitchFamily="49" charset="0"/>
+                <a:cs typeface="Menlo" panose="020B0609030804020204" pitchFamily="49" charset="0"/>
               </a:rPr>
               <a:t>PickValuePage</a:t>
             </a:r>
             <a:r>
               <a:rPr lang="en-GB" sz="1600" dirty="0">
-                <a:latin typeface="Courier" pitchFamily="2" charset="0"/>
+                <a:latin typeface="Menlo" panose="020B0609030804020204" pitchFamily="49" charset="0"/>
+                <a:ea typeface="Menlo" panose="020B0609030804020204" pitchFamily="49" charset="0"/>
+                <a:cs typeface="Menlo" panose="020B0609030804020204" pitchFamily="49" charset="0"/>
               </a:rPr>
               <a:t>({Key? key}) : super(key: key);</a:t>
             </a:r>
@@ -17538,43 +18539,57 @@
             </a:pPr>
             <a:r>
               <a:rPr lang="en-GB" sz="1600" dirty="0">
-                <a:latin typeface="Courier" pitchFamily="2" charset="0"/>
+                <a:latin typeface="Menlo" panose="020B0609030804020204" pitchFamily="49" charset="0"/>
+                <a:ea typeface="Menlo" panose="020B0609030804020204" pitchFamily="49" charset="0"/>
+                <a:cs typeface="Menlo" panose="020B0609030804020204" pitchFamily="49" charset="0"/>
               </a:rPr>
               <a:t>  static </a:t>
             </a:r>
             <a:r>
               <a:rPr lang="en-GB" sz="1600" dirty="0" err="1">
-                <a:latin typeface="Courier" pitchFamily="2" charset="0"/>
+                <a:latin typeface="Menlo" panose="020B0609030804020204" pitchFamily="49" charset="0"/>
+                <a:ea typeface="Menlo" panose="020B0609030804020204" pitchFamily="49" charset="0"/>
+                <a:cs typeface="Menlo" panose="020B0609030804020204" pitchFamily="49" charset="0"/>
               </a:rPr>
               <a:t>const</a:t>
             </a:r>
             <a:r>
               <a:rPr lang="en-GB" sz="1600" dirty="0">
-                <a:latin typeface="Courier" pitchFamily="2" charset="0"/>
+                <a:latin typeface="Menlo" panose="020B0609030804020204" pitchFamily="49" charset="0"/>
+                <a:ea typeface="Menlo" panose="020B0609030804020204" pitchFamily="49" charset="0"/>
+                <a:cs typeface="Menlo" panose="020B0609030804020204" pitchFamily="49" charset="0"/>
               </a:rPr>
               <a:t> </a:t>
             </a:r>
             <a:r>
               <a:rPr lang="en-GB" sz="1600" dirty="0" err="1">
-                <a:latin typeface="Courier" pitchFamily="2" charset="0"/>
+                <a:latin typeface="Menlo" panose="020B0609030804020204" pitchFamily="49" charset="0"/>
+                <a:ea typeface="Menlo" panose="020B0609030804020204" pitchFamily="49" charset="0"/>
+                <a:cs typeface="Menlo" panose="020B0609030804020204" pitchFamily="49" charset="0"/>
               </a:rPr>
               <a:t>routename</a:t>
             </a:r>
             <a:r>
               <a:rPr lang="en-GB" sz="1600" dirty="0">
-                <a:latin typeface="Courier" pitchFamily="2" charset="0"/>
+                <a:latin typeface="Menlo" panose="020B0609030804020204" pitchFamily="49" charset="0"/>
+                <a:ea typeface="Menlo" panose="020B0609030804020204" pitchFamily="49" charset="0"/>
+                <a:cs typeface="Menlo" panose="020B0609030804020204" pitchFamily="49" charset="0"/>
               </a:rPr>
               <a:t> = ‘</a:t>
             </a:r>
             <a:r>
               <a:rPr lang="en-GB" sz="1600" dirty="0" err="1">
-                <a:latin typeface="Courier" pitchFamily="2" charset="0"/>
+                <a:latin typeface="Menlo" panose="020B0609030804020204" pitchFamily="49" charset="0"/>
+                <a:ea typeface="Menlo" panose="020B0609030804020204" pitchFamily="49" charset="0"/>
+                <a:cs typeface="Menlo" panose="020B0609030804020204" pitchFamily="49" charset="0"/>
               </a:rPr>
               <a:t>PickValuePage</a:t>
             </a:r>
             <a:r>
               <a:rPr lang="en-GB" sz="1600" dirty="0">
-                <a:latin typeface="Courier" pitchFamily="2" charset="0"/>
+                <a:latin typeface="Menlo" panose="020B0609030804020204" pitchFamily="49" charset="0"/>
+                <a:ea typeface="Menlo" panose="020B0609030804020204" pitchFamily="49" charset="0"/>
+                <a:cs typeface="Menlo" panose="020B0609030804020204" pitchFamily="49" charset="0"/>
               </a:rPr>
               <a:t>';</a:t>
             </a:r>
@@ -17585,7 +18600,9 @@
             </a:pPr>
             <a:r>
               <a:rPr lang="en-GB" sz="1600" dirty="0">
-                <a:latin typeface="Courier" pitchFamily="2" charset="0"/>
+                <a:latin typeface="Menlo" panose="020B0609030804020204" pitchFamily="49" charset="0"/>
+                <a:ea typeface="Menlo" panose="020B0609030804020204" pitchFamily="49" charset="0"/>
+                <a:cs typeface="Menlo" panose="020B0609030804020204" pitchFamily="49" charset="0"/>
               </a:rPr>
               <a:t>  @override</a:t>
             </a:r>
@@ -17596,19 +18613,25 @@
             </a:pPr>
             <a:r>
               <a:rPr lang="en-GB" sz="1600" dirty="0">
-                <a:latin typeface="Courier" pitchFamily="2" charset="0"/>
+                <a:latin typeface="Menlo" panose="020B0609030804020204" pitchFamily="49" charset="0"/>
+                <a:ea typeface="Menlo" panose="020B0609030804020204" pitchFamily="49" charset="0"/>
+                <a:cs typeface="Menlo" panose="020B0609030804020204" pitchFamily="49" charset="0"/>
               </a:rPr>
               <a:t>  Widget build(</a:t>
             </a:r>
             <a:r>
               <a:rPr lang="en-GB" sz="1600" dirty="0" err="1">
-                <a:latin typeface="Courier" pitchFamily="2" charset="0"/>
+                <a:latin typeface="Menlo" panose="020B0609030804020204" pitchFamily="49" charset="0"/>
+                <a:ea typeface="Menlo" panose="020B0609030804020204" pitchFamily="49" charset="0"/>
+                <a:cs typeface="Menlo" panose="020B0609030804020204" pitchFamily="49" charset="0"/>
               </a:rPr>
               <a:t>BuildContext</a:t>
             </a:r>
             <a:r>
               <a:rPr lang="en-GB" sz="1600" dirty="0">
-                <a:latin typeface="Courier" pitchFamily="2" charset="0"/>
+                <a:latin typeface="Menlo" panose="020B0609030804020204" pitchFamily="49" charset="0"/>
+                <a:ea typeface="Menlo" panose="020B0609030804020204" pitchFamily="49" charset="0"/>
+                <a:cs typeface="Menlo" panose="020B0609030804020204" pitchFamily="49" charset="0"/>
               </a:rPr>
               <a:t> context) {</a:t>
             </a:r>
@@ -17619,7 +18642,9 @@
             </a:pPr>
             <a:r>
               <a:rPr lang="en-GB" sz="1600" dirty="0">
-                <a:latin typeface="Courier" pitchFamily="2" charset="0"/>
+                <a:latin typeface="Menlo" panose="020B0609030804020204" pitchFamily="49" charset="0"/>
+                <a:ea typeface="Menlo" panose="020B0609030804020204" pitchFamily="49" charset="0"/>
+                <a:cs typeface="Menlo" panose="020B0609030804020204" pitchFamily="49" charset="0"/>
               </a:rPr>
               <a:t>    return Scaffold(</a:t>
             </a:r>
@@ -17630,31 +18655,41 @@
             </a:pPr>
             <a:r>
               <a:rPr lang="en-GB" sz="1600" dirty="0">
-                <a:latin typeface="Courier" pitchFamily="2" charset="0"/>
+                <a:latin typeface="Menlo" panose="020B0609030804020204" pitchFamily="49" charset="0"/>
+                <a:ea typeface="Menlo" panose="020B0609030804020204" pitchFamily="49" charset="0"/>
+                <a:cs typeface="Menlo" panose="020B0609030804020204" pitchFamily="49" charset="0"/>
               </a:rPr>
               <a:t>      </a:t>
             </a:r>
             <a:r>
               <a:rPr lang="en-GB" sz="1600" dirty="0" err="1">
-                <a:latin typeface="Courier" pitchFamily="2" charset="0"/>
+                <a:latin typeface="Menlo" panose="020B0609030804020204" pitchFamily="49" charset="0"/>
+                <a:ea typeface="Menlo" panose="020B0609030804020204" pitchFamily="49" charset="0"/>
+                <a:cs typeface="Menlo" panose="020B0609030804020204" pitchFamily="49" charset="0"/>
               </a:rPr>
               <a:t>appBar</a:t>
             </a:r>
             <a:r>
               <a:rPr lang="en-GB" sz="1600" dirty="0">
-                <a:latin typeface="Courier" pitchFamily="2" charset="0"/>
+                <a:latin typeface="Menlo" panose="020B0609030804020204" pitchFamily="49" charset="0"/>
+                <a:ea typeface="Menlo" panose="020B0609030804020204" pitchFamily="49" charset="0"/>
+                <a:cs typeface="Menlo" panose="020B0609030804020204" pitchFamily="49" charset="0"/>
               </a:rPr>
               <a:t>: </a:t>
             </a:r>
             <a:r>
               <a:rPr lang="en-GB" sz="1600" dirty="0" err="1">
-                <a:latin typeface="Courier" pitchFamily="2" charset="0"/>
+                <a:latin typeface="Menlo" panose="020B0609030804020204" pitchFamily="49" charset="0"/>
+                <a:ea typeface="Menlo" panose="020B0609030804020204" pitchFamily="49" charset="0"/>
+                <a:cs typeface="Menlo" panose="020B0609030804020204" pitchFamily="49" charset="0"/>
               </a:rPr>
               <a:t>AppBar</a:t>
             </a:r>
             <a:r>
               <a:rPr lang="en-GB" sz="1600" dirty="0">
-                <a:latin typeface="Courier" pitchFamily="2" charset="0"/>
+                <a:latin typeface="Menlo" panose="020B0609030804020204" pitchFamily="49" charset="0"/>
+                <a:ea typeface="Menlo" panose="020B0609030804020204" pitchFamily="49" charset="0"/>
+                <a:cs typeface="Menlo" panose="020B0609030804020204" pitchFamily="49" charset="0"/>
               </a:rPr>
               <a:t>(</a:t>
             </a:r>
@@ -17665,19 +18700,25 @@
             </a:pPr>
             <a:r>
               <a:rPr lang="en-GB" sz="1600" dirty="0">
-                <a:latin typeface="Courier" pitchFamily="2" charset="0"/>
+                <a:latin typeface="Menlo" panose="020B0609030804020204" pitchFamily="49" charset="0"/>
+                <a:ea typeface="Menlo" panose="020B0609030804020204" pitchFamily="49" charset="0"/>
+                <a:cs typeface="Menlo" panose="020B0609030804020204" pitchFamily="49" charset="0"/>
               </a:rPr>
               <a:t>        title: Text(</a:t>
             </a:r>
             <a:r>
               <a:rPr lang="en-GB" sz="1600" dirty="0" err="1">
-                <a:latin typeface="Courier" pitchFamily="2" charset="0"/>
+                <a:latin typeface="Menlo" panose="020B0609030804020204" pitchFamily="49" charset="0"/>
+                <a:ea typeface="Menlo" panose="020B0609030804020204" pitchFamily="49" charset="0"/>
+                <a:cs typeface="Menlo" panose="020B0609030804020204" pitchFamily="49" charset="0"/>
               </a:rPr>
               <a:t>PickValuePage.routename</a:t>
             </a:r>
             <a:r>
               <a:rPr lang="en-GB" sz="1600" dirty="0">
-                <a:latin typeface="Courier" pitchFamily="2" charset="0"/>
+                <a:latin typeface="Menlo" panose="020B0609030804020204" pitchFamily="49" charset="0"/>
+                <a:ea typeface="Menlo" panose="020B0609030804020204" pitchFamily="49" charset="0"/>
+                <a:cs typeface="Menlo" panose="020B0609030804020204" pitchFamily="49" charset="0"/>
               </a:rPr>
               <a:t>),</a:t>
             </a:r>
@@ -17688,7 +18729,9 @@
             </a:pPr>
             <a:r>
               <a:rPr lang="en-GB" sz="1600" dirty="0">
-                <a:latin typeface="Courier" pitchFamily="2" charset="0"/>
+                <a:latin typeface="Menlo" panose="020B0609030804020204" pitchFamily="49" charset="0"/>
+                <a:ea typeface="Menlo" panose="020B0609030804020204" pitchFamily="49" charset="0"/>
+                <a:cs typeface="Menlo" panose="020B0609030804020204" pitchFamily="49" charset="0"/>
               </a:rPr>
               <a:t>      ),</a:t>
             </a:r>
@@ -17699,12 +18742,16 @@
             </a:pPr>
             <a:r>
               <a:rPr lang="en-GB" sz="1600" dirty="0">
-                <a:latin typeface="Courier" pitchFamily="2" charset="0"/>
+                <a:latin typeface="Menlo" panose="020B0609030804020204" pitchFamily="49" charset="0"/>
+                <a:ea typeface="Menlo" panose="020B0609030804020204" pitchFamily="49" charset="0"/>
+                <a:cs typeface="Menlo" panose="020B0609030804020204" pitchFamily="49" charset="0"/>
               </a:rPr>
               <a:t>      ...</a:t>
             </a:r>
             <a:endParaRPr lang="en-IT" sz="1600" dirty="0">
-              <a:latin typeface="Courier" pitchFamily="2" charset="0"/>
+              <a:latin typeface="Menlo" panose="020B0609030804020204" pitchFamily="49" charset="0"/>
+              <a:ea typeface="Menlo" panose="020B0609030804020204" pitchFamily="49" charset="0"/>
+              <a:cs typeface="Menlo" panose="020B0609030804020204" pitchFamily="49" charset="0"/>
             </a:endParaRPr>
           </a:p>
         </p:txBody>
@@ -17922,7 +18969,9 @@
             </a:pPr>
             <a:r>
               <a:rPr lang="en-GB" sz="1600" dirty="0">
-                <a:latin typeface="Courier" pitchFamily="2" charset="0"/>
+                <a:latin typeface="Menlo" panose="020B0609030804020204" pitchFamily="49" charset="0"/>
+                <a:ea typeface="Menlo" panose="020B0609030804020204" pitchFamily="49" charset="0"/>
+                <a:cs typeface="Menlo" panose="020B0609030804020204" pitchFamily="49" charset="0"/>
               </a:rPr>
               <a:t>...</a:t>
             </a:r>
@@ -17934,19 +18983,25 @@
             </a:pPr>
             <a:r>
               <a:rPr lang="en-GB" sz="1600" dirty="0">
-                <a:latin typeface="Courier" pitchFamily="2" charset="0"/>
+                <a:latin typeface="Menlo" panose="020B0609030804020204" pitchFamily="49" charset="0"/>
+                <a:ea typeface="Menlo" panose="020B0609030804020204" pitchFamily="49" charset="0"/>
+                <a:cs typeface="Menlo" panose="020B0609030804020204" pitchFamily="49" charset="0"/>
               </a:rPr>
               <a:t>body: </a:t>
             </a:r>
             <a:r>
               <a:rPr lang="en-GB" sz="1600" dirty="0" err="1">
-                <a:latin typeface="Courier" pitchFamily="2" charset="0"/>
+                <a:latin typeface="Menlo" panose="020B0609030804020204" pitchFamily="49" charset="0"/>
+                <a:ea typeface="Menlo" panose="020B0609030804020204" pitchFamily="49" charset="0"/>
+                <a:cs typeface="Menlo" panose="020B0609030804020204" pitchFamily="49" charset="0"/>
               </a:rPr>
               <a:t>Center</a:t>
             </a:r>
             <a:r>
               <a:rPr lang="en-GB" sz="1600" dirty="0">
-                <a:latin typeface="Courier" pitchFamily="2" charset="0"/>
+                <a:latin typeface="Menlo" panose="020B0609030804020204" pitchFamily="49" charset="0"/>
+                <a:ea typeface="Menlo" panose="020B0609030804020204" pitchFamily="49" charset="0"/>
+                <a:cs typeface="Menlo" panose="020B0609030804020204" pitchFamily="49" charset="0"/>
               </a:rPr>
               <a:t>(</a:t>
             </a:r>
@@ -17958,19 +19013,25 @@
             </a:pPr>
             <a:r>
               <a:rPr lang="en-GB" sz="1600" dirty="0">
-                <a:latin typeface="Courier" pitchFamily="2" charset="0"/>
+                <a:latin typeface="Menlo" panose="020B0609030804020204" pitchFamily="49" charset="0"/>
+                <a:ea typeface="Menlo" panose="020B0609030804020204" pitchFamily="49" charset="0"/>
+                <a:cs typeface="Menlo" panose="020B0609030804020204" pitchFamily="49" charset="0"/>
               </a:rPr>
               <a:t>        child: </a:t>
             </a:r>
             <a:r>
               <a:rPr lang="en-GB" sz="1600" dirty="0" err="1">
-                <a:latin typeface="Courier" pitchFamily="2" charset="0"/>
+                <a:latin typeface="Menlo" panose="020B0609030804020204" pitchFamily="49" charset="0"/>
+                <a:ea typeface="Menlo" panose="020B0609030804020204" pitchFamily="49" charset="0"/>
+                <a:cs typeface="Menlo" panose="020B0609030804020204" pitchFamily="49" charset="0"/>
               </a:rPr>
               <a:t>ElevatedButton</a:t>
             </a:r>
             <a:r>
               <a:rPr lang="en-GB" sz="1600" dirty="0">
-                <a:latin typeface="Courier" pitchFamily="2" charset="0"/>
+                <a:latin typeface="Menlo" panose="020B0609030804020204" pitchFamily="49" charset="0"/>
+                <a:ea typeface="Menlo" panose="020B0609030804020204" pitchFamily="49" charset="0"/>
+                <a:cs typeface="Menlo" panose="020B0609030804020204" pitchFamily="49" charset="0"/>
               </a:rPr>
               <a:t>(</a:t>
             </a:r>
@@ -17982,7 +19043,9 @@
             </a:pPr>
             <a:r>
               <a:rPr lang="en-GB" sz="1600" dirty="0">
-                <a:latin typeface="Courier" pitchFamily="2" charset="0"/>
+                <a:latin typeface="Menlo" panose="020B0609030804020204" pitchFamily="49" charset="0"/>
+                <a:ea typeface="Menlo" panose="020B0609030804020204" pitchFamily="49" charset="0"/>
+                <a:cs typeface="Menlo" panose="020B0609030804020204" pitchFamily="49" charset="0"/>
               </a:rPr>
               <a:t>          child: Text('To the home'),</a:t>
             </a:r>
@@ -17994,19 +19057,25 @@
             </a:pPr>
             <a:r>
               <a:rPr lang="en-GB" sz="1600" dirty="0">
-                <a:latin typeface="Courier" pitchFamily="2" charset="0"/>
+                <a:latin typeface="Menlo" panose="020B0609030804020204" pitchFamily="49" charset="0"/>
+                <a:ea typeface="Menlo" panose="020B0609030804020204" pitchFamily="49" charset="0"/>
+                <a:cs typeface="Menlo" panose="020B0609030804020204" pitchFamily="49" charset="0"/>
               </a:rPr>
               <a:t>          </a:t>
             </a:r>
             <a:r>
               <a:rPr lang="en-GB" sz="1600" dirty="0" err="1">
-                <a:latin typeface="Courier" pitchFamily="2" charset="0"/>
+                <a:latin typeface="Menlo" panose="020B0609030804020204" pitchFamily="49" charset="0"/>
+                <a:ea typeface="Menlo" panose="020B0609030804020204" pitchFamily="49" charset="0"/>
+                <a:cs typeface="Menlo" panose="020B0609030804020204" pitchFamily="49" charset="0"/>
               </a:rPr>
               <a:t>onPressed</a:t>
             </a:r>
             <a:r>
               <a:rPr lang="en-GB" sz="1600" dirty="0">
-                <a:latin typeface="Courier" pitchFamily="2" charset="0"/>
+                <a:latin typeface="Menlo" panose="020B0609030804020204" pitchFamily="49" charset="0"/>
+                <a:ea typeface="Menlo" panose="020B0609030804020204" pitchFamily="49" charset="0"/>
+                <a:cs typeface="Menlo" panose="020B0609030804020204" pitchFamily="49" charset="0"/>
               </a:rPr>
               <a:t>: () {</a:t>
             </a:r>
@@ -18018,7 +19087,9 @@
             </a:pPr>
             <a:r>
               <a:rPr lang="en-GB" sz="1600" dirty="0">
-                <a:latin typeface="Courier" pitchFamily="2" charset="0"/>
+                <a:latin typeface="Menlo" panose="020B0609030804020204" pitchFamily="49" charset="0"/>
+                <a:ea typeface="Menlo" panose="020B0609030804020204" pitchFamily="49" charset="0"/>
+                <a:cs typeface="Menlo" panose="020B0609030804020204" pitchFamily="49" charset="0"/>
               </a:rPr>
               <a:t>            </a:t>
             </a:r>
@@ -18027,7 +19098,9 @@
                 <a:highlight>
                   <a:srgbClr val="FFFF00"/>
                 </a:highlight>
-                <a:latin typeface="Courier" pitchFamily="2" charset="0"/>
+                <a:latin typeface="Menlo" panose="020B0609030804020204" pitchFamily="49" charset="0"/>
+                <a:ea typeface="Menlo" panose="020B0609030804020204" pitchFamily="49" charset="0"/>
+                <a:cs typeface="Menlo" panose="020B0609030804020204" pitchFamily="49" charset="0"/>
               </a:rPr>
               <a:t>//TODO: implement the navigation + return the data</a:t>
             </a:r>
@@ -18039,7 +19112,9 @@
             </a:pPr>
             <a:r>
               <a:rPr lang="en-GB" sz="1600" dirty="0">
-                <a:latin typeface="Courier" pitchFamily="2" charset="0"/>
+                <a:latin typeface="Menlo" panose="020B0609030804020204" pitchFamily="49" charset="0"/>
+                <a:ea typeface="Menlo" panose="020B0609030804020204" pitchFamily="49" charset="0"/>
+                <a:cs typeface="Menlo" panose="020B0609030804020204" pitchFamily="49" charset="0"/>
               </a:rPr>
               <a:t>          },</a:t>
             </a:r>
@@ -18051,7 +19126,9 @@
             </a:pPr>
             <a:r>
               <a:rPr lang="en-GB" sz="1600" dirty="0">
-                <a:latin typeface="Courier" pitchFamily="2" charset="0"/>
+                <a:latin typeface="Menlo" panose="020B0609030804020204" pitchFamily="49" charset="0"/>
+                <a:ea typeface="Menlo" panose="020B0609030804020204" pitchFamily="49" charset="0"/>
+                <a:cs typeface="Menlo" panose="020B0609030804020204" pitchFamily="49" charset="0"/>
               </a:rPr>
               <a:t>        ),</a:t>
             </a:r>
@@ -18063,7 +19140,9 @@
             </a:pPr>
             <a:r>
               <a:rPr lang="en-GB" sz="1600" dirty="0">
-                <a:latin typeface="Courier" pitchFamily="2" charset="0"/>
+                <a:latin typeface="Menlo" panose="020B0609030804020204" pitchFamily="49" charset="0"/>
+                <a:ea typeface="Menlo" panose="020B0609030804020204" pitchFamily="49" charset="0"/>
+                <a:cs typeface="Menlo" panose="020B0609030804020204" pitchFamily="49" charset="0"/>
               </a:rPr>
               <a:t>      ),</a:t>
             </a:r>
@@ -18075,7 +19154,9 @@
             </a:pPr>
             <a:r>
               <a:rPr lang="en-GB" sz="1600" dirty="0">
-                <a:latin typeface="Courier" pitchFamily="2" charset="0"/>
+                <a:latin typeface="Menlo" panose="020B0609030804020204" pitchFamily="49" charset="0"/>
+                <a:ea typeface="Menlo" panose="020B0609030804020204" pitchFamily="49" charset="0"/>
+                <a:cs typeface="Menlo" panose="020B0609030804020204" pitchFamily="49" charset="0"/>
               </a:rPr>
               <a:t>    );</a:t>
             </a:r>
@@ -18087,7 +19168,9 @@
             </a:pPr>
             <a:r>
               <a:rPr lang="en-GB" sz="1600" dirty="0">
-                <a:latin typeface="Courier" pitchFamily="2" charset="0"/>
+                <a:latin typeface="Menlo" panose="020B0609030804020204" pitchFamily="49" charset="0"/>
+                <a:ea typeface="Menlo" panose="020B0609030804020204" pitchFamily="49" charset="0"/>
+                <a:cs typeface="Menlo" panose="020B0609030804020204" pitchFamily="49" charset="0"/>
               </a:rPr>
               <a:t>  } //build</a:t>
             </a:r>
@@ -18098,18 +19181,24 @@
             </a:pPr>
             <a:r>
               <a:rPr lang="en-GB" sz="1600" dirty="0">
-                <a:latin typeface="Courier" pitchFamily="2" charset="0"/>
+                <a:latin typeface="Menlo" panose="020B0609030804020204" pitchFamily="49" charset="0"/>
+                <a:ea typeface="Menlo" panose="020B0609030804020204" pitchFamily="49" charset="0"/>
+                <a:cs typeface="Menlo" panose="020B0609030804020204" pitchFamily="49" charset="0"/>
               </a:rPr>
               <a:t>} //</a:t>
             </a:r>
             <a:r>
               <a:rPr lang="en-GB" sz="1600" dirty="0" err="1">
-                <a:latin typeface="Courier" pitchFamily="2" charset="0"/>
+                <a:latin typeface="Menlo" panose="020B0609030804020204" pitchFamily="49" charset="0"/>
+                <a:ea typeface="Menlo" panose="020B0609030804020204" pitchFamily="49" charset="0"/>
+                <a:cs typeface="Menlo" panose="020B0609030804020204" pitchFamily="49" charset="0"/>
               </a:rPr>
               <a:t>PickValuePage</a:t>
             </a:r>
             <a:endParaRPr lang="en-IT" sz="1600" dirty="0">
-              <a:latin typeface="Courier" pitchFamily="2" charset="0"/>
+              <a:latin typeface="Menlo" panose="020B0609030804020204" pitchFamily="49" charset="0"/>
+              <a:ea typeface="Menlo" panose="020B0609030804020204" pitchFamily="49" charset="0"/>
+              <a:cs typeface="Menlo" panose="020B0609030804020204" pitchFamily="49" charset="0"/>
             </a:endParaRPr>
           </a:p>
         </p:txBody>
@@ -18235,23 +19324,51 @@
             </a:r>
             <a:r>
               <a:rPr lang="en-IT" dirty="0">
-                <a:latin typeface="Courier" pitchFamily="2" charset="0"/>
+                <a:latin typeface="Menlo" panose="020B0609030804020204" pitchFamily="49" charset="0"/>
+                <a:ea typeface="Menlo" panose="020B0609030804020204" pitchFamily="49" charset="0"/>
+                <a:cs typeface="Menlo" panose="020B0609030804020204" pitchFamily="49" charset="0"/>
               </a:rPr>
               <a:t>HomePage</a:t>
             </a:r>
             <a:r>
               <a:rPr lang="en-IT" dirty="0"/>
-              <a:t> route, you can invoke </a:t>
+              <a:t> route, you can </a:t>
+            </a:r>
+            <a:r>
+              <a:rPr lang="en-IT"/>
+              <a:t>invoke </a:t>
             </a:r>
             <a:r>
               <a:rPr lang="en-IT" dirty="0">
-                <a:latin typeface="Courier" pitchFamily="2" charset="0"/>
-              </a:rPr>
-              <a:t>Navigator.pop()</a:t>
+                <a:latin typeface="Menlo" panose="020B0609030804020204" pitchFamily="49" charset="0"/>
+                <a:ea typeface="Menlo" panose="020B0609030804020204" pitchFamily="49" charset="0"/>
+                <a:cs typeface="Menlo" panose="020B0609030804020204" pitchFamily="49" charset="0"/>
+              </a:rPr>
+              <a:t>Navigator.</a:t>
+            </a:r>
+            <a:r>
+              <a:rPr lang="en-IT">
+                <a:latin typeface="Menlo" panose="020B0609030804020204" pitchFamily="49" charset="0"/>
+                <a:ea typeface="Menlo" panose="020B0609030804020204" pitchFamily="49" charset="0"/>
+                <a:cs typeface="Menlo" panose="020B0609030804020204" pitchFamily="49" charset="0"/>
+              </a:rPr>
+              <a:t>pop()</a:t>
+            </a:r>
+            <a:r>
+              <a:rPr lang="en-IT" dirty="0">
+                <a:latin typeface="Menlo" panose="020B0609030804020204" pitchFamily="49" charset="0"/>
+                <a:ea typeface="Menlo" panose="020B0609030804020204" pitchFamily="49" charset="0"/>
+                <a:cs typeface="Menlo" panose="020B0609030804020204" pitchFamily="49" charset="0"/>
+              </a:rPr>
+              <a:t> </a:t>
+            </a:r>
+            <a:r>
+              <a:rPr lang="en-IT"/>
+              <a:t>as</a:t>
             </a:r>
             <a:r>
               <a:rPr lang="en-IT" dirty="0"/>
-              <a:t> as:</a:t>
+              <a:t>:</a:t>
             </a:r>
           </a:p>
         </p:txBody>
@@ -18344,7 +19461,9 @@
             </a:r>
             <a:r>
               <a:rPr lang="en-IT">
-                <a:latin typeface="Courier" pitchFamily="2" charset="0"/>
+                <a:latin typeface="Menlo" panose="020B0609030804020204" pitchFamily="49" charset="0"/>
+                <a:ea typeface="Menlo" panose="020B0609030804020204" pitchFamily="49" charset="0"/>
+                <a:cs typeface="Menlo" panose="020B0609030804020204" pitchFamily="49" charset="0"/>
               </a:rPr>
               <a:t>HomePage</a:t>
             </a:r>
@@ -18355,7 +19474,7 @@
               <a:t> </a:t>
             </a:r>
             <a:r>
-              <a:rPr lang="en-IT" dirty="0">
+              <a:rPr lang="en-IT">
                 <a:latin typeface="Aptos" panose="020B0004020202020204" pitchFamily="34" charset="0"/>
               </a:rPr>
               <a:t>once</a:t>
@@ -18368,21 +19487,17 @@
             </a:r>
             <a:r>
               <a:rPr lang="en-IT" dirty="0">
-                <a:latin typeface="Courier" pitchFamily="2" charset="0"/>
+                <a:latin typeface="Menlo" panose="020B0609030804020204" pitchFamily="49" charset="0"/>
+                <a:ea typeface="Menlo" panose="020B0609030804020204" pitchFamily="49" charset="0"/>
+                <a:cs typeface="Menlo" panose="020B0609030804020204" pitchFamily="49" charset="0"/>
               </a:rPr>
               <a:t>PickValuePage</a:t>
-            </a:r>
-            <a:r>
-              <a:rPr lang="en-IT" dirty="0">
-                <a:latin typeface="Palatino Linotype" panose="02040502050505030304" pitchFamily="18" charset="0"/>
-              </a:rPr>
-              <a:t> </a:t>
             </a:r>
             <a:r>
               <a:rPr lang="en-IT">
                 <a:latin typeface="Palatino Linotype" panose="02040502050505030304" pitchFamily="18" charset="0"/>
               </a:rPr>
-              <a:t>is </a:t>
+              <a:t> is </a:t>
             </a:r>
             <a:r>
               <a:rPr lang="en-IT" dirty="0">
@@ -18606,7 +19721,9 @@
             </a:pPr>
             <a:r>
               <a:rPr lang="en-GB" sz="1600" dirty="0">
-                <a:latin typeface="Courier" pitchFamily="2" charset="0"/>
+                <a:latin typeface="Menlo" panose="020B0609030804020204" pitchFamily="49" charset="0"/>
+                <a:ea typeface="Menlo" panose="020B0609030804020204" pitchFamily="49" charset="0"/>
+                <a:cs typeface="Menlo" panose="020B0609030804020204" pitchFamily="49" charset="0"/>
               </a:rPr>
               <a:t>...</a:t>
             </a:r>
@@ -18617,13 +19734,17 @@
             </a:pPr>
             <a:r>
               <a:rPr lang="en-GB" sz="1600" dirty="0" err="1">
-                <a:latin typeface="Courier" pitchFamily="2" charset="0"/>
+                <a:latin typeface="Menlo" panose="020B0609030804020204" pitchFamily="49" charset="0"/>
+                <a:ea typeface="Menlo" panose="020B0609030804020204" pitchFamily="49" charset="0"/>
+                <a:cs typeface="Menlo" panose="020B0609030804020204" pitchFamily="49" charset="0"/>
               </a:rPr>
               <a:t>onPressed</a:t>
             </a:r>
             <a:r>
               <a:rPr lang="en-GB" sz="1600" dirty="0">
-                <a:latin typeface="Courier" pitchFamily="2" charset="0"/>
+                <a:latin typeface="Menlo" panose="020B0609030804020204" pitchFamily="49" charset="0"/>
+                <a:ea typeface="Menlo" panose="020B0609030804020204" pitchFamily="49" charset="0"/>
+                <a:cs typeface="Menlo" panose="020B0609030804020204" pitchFamily="49" charset="0"/>
               </a:rPr>
               <a:t>: () {</a:t>
             </a:r>
@@ -18634,19 +19755,25 @@
             </a:pPr>
             <a:r>
               <a:rPr lang="en-GB" sz="1600" dirty="0">
-                <a:latin typeface="Courier" pitchFamily="2" charset="0"/>
+                <a:latin typeface="Menlo" panose="020B0609030804020204" pitchFamily="49" charset="0"/>
+                <a:ea typeface="Menlo" panose="020B0609030804020204" pitchFamily="49" charset="0"/>
+                <a:cs typeface="Menlo" panose="020B0609030804020204" pitchFamily="49" charset="0"/>
               </a:rPr>
               <a:t>  </a:t>
             </a:r>
             <a:r>
               <a:rPr lang="en-GB" sz="1600" dirty="0" err="1">
-                <a:latin typeface="Courier" pitchFamily="2" charset="0"/>
+                <a:latin typeface="Menlo" panose="020B0609030804020204" pitchFamily="49" charset="0"/>
+                <a:ea typeface="Menlo" panose="020B0609030804020204" pitchFamily="49" charset="0"/>
+                <a:cs typeface="Menlo" panose="020B0609030804020204" pitchFamily="49" charset="0"/>
               </a:rPr>
               <a:t>Navigator.pop</a:t>
             </a:r>
             <a:r>
               <a:rPr lang="en-GB" sz="1600" dirty="0">
-                <a:latin typeface="Courier" pitchFamily="2" charset="0"/>
+                <a:latin typeface="Menlo" panose="020B0609030804020204" pitchFamily="49" charset="0"/>
+                <a:ea typeface="Menlo" panose="020B0609030804020204" pitchFamily="49" charset="0"/>
+                <a:cs typeface="Menlo" panose="020B0609030804020204" pitchFamily="49" charset="0"/>
               </a:rPr>
               <a:t>(context, 'This is the value');</a:t>
             </a:r>
@@ -18657,7 +19784,9 @@
             </a:pPr>
             <a:r>
               <a:rPr lang="en-GB" sz="1600" dirty="0">
-                <a:latin typeface="Courier" pitchFamily="2" charset="0"/>
+                <a:latin typeface="Menlo" panose="020B0609030804020204" pitchFamily="49" charset="0"/>
+                <a:ea typeface="Menlo" panose="020B0609030804020204" pitchFamily="49" charset="0"/>
+                <a:cs typeface="Menlo" panose="020B0609030804020204" pitchFamily="49" charset="0"/>
               </a:rPr>
               <a:t>},</a:t>
             </a:r>
@@ -18668,7 +19797,9 @@
             </a:pPr>
             <a:r>
               <a:rPr lang="en-GB" sz="1600" dirty="0">
-                <a:latin typeface="Courier" pitchFamily="2" charset="0"/>
+                <a:latin typeface="Menlo" panose="020B0609030804020204" pitchFamily="49" charset="0"/>
+                <a:ea typeface="Menlo" panose="020B0609030804020204" pitchFamily="49" charset="0"/>
+                <a:cs typeface="Menlo" panose="020B0609030804020204" pitchFamily="49" charset="0"/>
               </a:rPr>
               <a:t>...</a:t>
             </a:r>
@@ -18886,18 +20017,27 @@
               <a:rPr lang="en-IT" sz="2000" dirty="0">
                 <a:latin typeface="Aptos" panose="020B0004020202020204" pitchFamily="34" charset="0"/>
               </a:rPr>
-              <a:t>Note that you can return ANYTHING, not just a </a:t>
-            </a:r>
-            <a:r>
-              <a:rPr lang="en-IT">
-                <a:latin typeface="Courier" pitchFamily="2" charset="0"/>
+              <a:t>Note that you can return ANYTHING, not just </a:t>
+            </a:r>
+            <a:r>
+              <a:rPr lang="en-IT" sz="2000">
+                <a:latin typeface="Aptos" panose="020B0004020202020204" pitchFamily="34" charset="0"/>
+              </a:rPr>
+              <a:t>a </a:t>
+            </a:r>
+            <a:r>
+              <a:rPr lang="en-IT" sz="2200">
+                <a:latin typeface="Menlo" panose="020B0609030804020204" pitchFamily="49" charset="0"/>
+                <a:ea typeface="Menlo" panose="020B0609030804020204" pitchFamily="49" charset="0"/>
+                <a:cs typeface="Menlo" panose="020B0609030804020204" pitchFamily="49" charset="0"/>
               </a:rPr>
               <a:t>String</a:t>
             </a:r>
             <a:r>
-              <a:rPr lang="en-IT" dirty="0"/>
+              <a:rPr lang="en-IT"/>
               <a:t>. </a:t>
             </a:r>
+            <a:endParaRPr lang="en-IT" dirty="0"/>
           </a:p>
         </p:txBody>
       </p:sp>
@@ -19022,7 +20162,9 @@
             </a:r>
             <a:r>
               <a:rPr lang="en-IT" dirty="0">
-                <a:latin typeface="Courier" pitchFamily="2" charset="0"/>
+                <a:latin typeface="Menlo" panose="020B0609030804020204" pitchFamily="49" charset="0"/>
+                <a:ea typeface="Menlo" panose="020B0609030804020204" pitchFamily="49" charset="0"/>
+                <a:cs typeface="Menlo" panose="020B0609030804020204" pitchFamily="49" charset="0"/>
               </a:rPr>
               <a:t>HomePage</a:t>
             </a:r>
@@ -19117,7 +20259,9 @@
             </a:r>
             <a:r>
               <a:rPr lang="en-IT">
-                <a:latin typeface="Courier" pitchFamily="2" charset="0"/>
+                <a:latin typeface="Menlo" panose="020B0609030804020204" pitchFamily="49" charset="0"/>
+                <a:ea typeface="Menlo" panose="020B0609030804020204" pitchFamily="49" charset="0"/>
+                <a:cs typeface="Menlo" panose="020B0609030804020204" pitchFamily="49" charset="0"/>
               </a:rPr>
               <a:t>onPressed</a:t>
             </a:r>
@@ -19349,7 +20493,9 @@
             </a:pPr>
             <a:r>
               <a:rPr lang="en-GB" sz="1600" dirty="0">
-                <a:latin typeface="Courier" pitchFamily="2" charset="0"/>
+                <a:latin typeface="Menlo" panose="020B0609030804020204" pitchFamily="49" charset="0"/>
+                <a:ea typeface="Menlo" panose="020B0609030804020204" pitchFamily="49" charset="0"/>
+                <a:cs typeface="Menlo" panose="020B0609030804020204" pitchFamily="49" charset="0"/>
               </a:rPr>
               <a:t>...</a:t>
             </a:r>
@@ -19360,25 +20506,33 @@
             </a:pPr>
             <a:r>
               <a:rPr lang="en-GB" sz="1600" dirty="0" err="1">
-                <a:latin typeface="Courier" pitchFamily="2" charset="0"/>
+                <a:latin typeface="Menlo" panose="020B0609030804020204" pitchFamily="49" charset="0"/>
+                <a:ea typeface="Menlo" panose="020B0609030804020204" pitchFamily="49" charset="0"/>
+                <a:cs typeface="Menlo" panose="020B0609030804020204" pitchFamily="49" charset="0"/>
               </a:rPr>
               <a:t>onPressed</a:t>
             </a:r>
             <a:r>
               <a:rPr lang="en-GB" sz="1600" dirty="0">
-                <a:latin typeface="Courier" pitchFamily="2" charset="0"/>
+                <a:latin typeface="Menlo" panose="020B0609030804020204" pitchFamily="49" charset="0"/>
+                <a:ea typeface="Menlo" panose="020B0609030804020204" pitchFamily="49" charset="0"/>
+                <a:cs typeface="Menlo" panose="020B0609030804020204" pitchFamily="49" charset="0"/>
               </a:rPr>
               <a:t>: () </a:t>
             </a:r>
             <a:r>
               <a:rPr lang="en-GB" sz="1600" b="1" dirty="0">
-                <a:latin typeface="Courier" pitchFamily="2" charset="0"/>
+                <a:latin typeface="Menlo" panose="020B0609030804020204" pitchFamily="49" charset="0"/>
+                <a:ea typeface="Menlo" panose="020B0609030804020204" pitchFamily="49" charset="0"/>
+                <a:cs typeface="Menlo" panose="020B0609030804020204" pitchFamily="49" charset="0"/>
               </a:rPr>
               <a:t>async</a:t>
             </a:r>
             <a:r>
               <a:rPr lang="en-GB" sz="1600" dirty="0">
-                <a:latin typeface="Courier" pitchFamily="2" charset="0"/>
+                <a:latin typeface="Menlo" panose="020B0609030804020204" pitchFamily="49" charset="0"/>
+                <a:ea typeface="Menlo" panose="020B0609030804020204" pitchFamily="49" charset="0"/>
+                <a:cs typeface="Menlo" panose="020B0609030804020204" pitchFamily="49" charset="0"/>
               </a:rPr>
               <a:t> {</a:t>
             </a:r>
@@ -19389,55 +20543,73 @@
             </a:pPr>
             <a:r>
               <a:rPr lang="en-GB" sz="1600" dirty="0">
-                <a:latin typeface="Courier" pitchFamily="2" charset="0"/>
+                <a:latin typeface="Menlo" panose="020B0609030804020204" pitchFamily="49" charset="0"/>
+                <a:ea typeface="Menlo" panose="020B0609030804020204" pitchFamily="49" charset="0"/>
+                <a:cs typeface="Menlo" panose="020B0609030804020204" pitchFamily="49" charset="0"/>
               </a:rPr>
               <a:t>  </a:t>
             </a:r>
             <a:r>
               <a:rPr lang="en-GB" sz="1600" b="1" dirty="0">
-                <a:latin typeface="Courier" pitchFamily="2" charset="0"/>
+                <a:latin typeface="Menlo" panose="020B0609030804020204" pitchFamily="49" charset="0"/>
+                <a:ea typeface="Menlo" panose="020B0609030804020204" pitchFamily="49" charset="0"/>
+                <a:cs typeface="Menlo" panose="020B0609030804020204" pitchFamily="49" charset="0"/>
               </a:rPr>
               <a:t>final result = await</a:t>
             </a:r>
             <a:r>
               <a:rPr lang="en-GB" sz="1600" dirty="0">
-                <a:latin typeface="Courier" pitchFamily="2" charset="0"/>
+                <a:latin typeface="Menlo" panose="020B0609030804020204" pitchFamily="49" charset="0"/>
+                <a:ea typeface="Menlo" panose="020B0609030804020204" pitchFamily="49" charset="0"/>
+                <a:cs typeface="Menlo" panose="020B0609030804020204" pitchFamily="49" charset="0"/>
               </a:rPr>
               <a:t> </a:t>
             </a:r>
             <a:r>
               <a:rPr lang="en-GB" sz="1600" dirty="0" err="1">
-                <a:latin typeface="Courier" pitchFamily="2" charset="0"/>
+                <a:latin typeface="Menlo" panose="020B0609030804020204" pitchFamily="49" charset="0"/>
+                <a:ea typeface="Menlo" panose="020B0609030804020204" pitchFamily="49" charset="0"/>
+                <a:cs typeface="Menlo" panose="020B0609030804020204" pitchFamily="49" charset="0"/>
               </a:rPr>
               <a:t>Navigator.push</a:t>
             </a:r>
             <a:r>
               <a:rPr lang="en-GB" sz="1600" dirty="0">
-                <a:latin typeface="Courier" pitchFamily="2" charset="0"/>
+                <a:latin typeface="Menlo" panose="020B0609030804020204" pitchFamily="49" charset="0"/>
+                <a:ea typeface="Menlo" panose="020B0609030804020204" pitchFamily="49" charset="0"/>
+                <a:cs typeface="Menlo" panose="020B0609030804020204" pitchFamily="49" charset="0"/>
               </a:rPr>
               <a:t>(context, </a:t>
             </a:r>
             <a:r>
               <a:rPr lang="en-GB" sz="1600" dirty="0" err="1">
-                <a:latin typeface="Courier" pitchFamily="2" charset="0"/>
+                <a:latin typeface="Menlo" panose="020B0609030804020204" pitchFamily="49" charset="0"/>
+                <a:ea typeface="Menlo" panose="020B0609030804020204" pitchFamily="49" charset="0"/>
+                <a:cs typeface="Menlo" panose="020B0609030804020204" pitchFamily="49" charset="0"/>
               </a:rPr>
               <a:t>MaterialPageRoute</a:t>
             </a:r>
             <a:r>
               <a:rPr lang="en-GB" sz="1600" dirty="0">
-                <a:latin typeface="Courier" pitchFamily="2" charset="0"/>
+                <a:latin typeface="Menlo" panose="020B0609030804020204" pitchFamily="49" charset="0"/>
+                <a:ea typeface="Menlo" panose="020B0609030804020204" pitchFamily="49" charset="0"/>
+                <a:cs typeface="Menlo" panose="020B0609030804020204" pitchFamily="49" charset="0"/>
               </a:rPr>
               <a:t>(builder: (context) =&gt; </a:t>
             </a:r>
             <a:r>
               <a:rPr lang="en-GB" sz="1600" dirty="0" err="1">
-                <a:latin typeface="Courier" pitchFamily="2" charset="0"/>
+                <a:latin typeface="Menlo" panose="020B0609030804020204" pitchFamily="49" charset="0"/>
+                <a:ea typeface="Menlo" panose="020B0609030804020204" pitchFamily="49" charset="0"/>
+                <a:cs typeface="Menlo" panose="020B0609030804020204" pitchFamily="49" charset="0"/>
               </a:rPr>
               <a:t>PickValuePage</a:t>
             </a:r>
             <a:r>
               <a:rPr lang="en-GB" sz="1600" dirty="0">
-                <a:latin typeface="Courier" pitchFamily="2" charset="0"/>
+                <a:latin typeface="Menlo" panose="020B0609030804020204" pitchFamily="49" charset="0"/>
+                <a:ea typeface="Menlo" panose="020B0609030804020204" pitchFamily="49" charset="0"/>
+                <a:cs typeface="Menlo" panose="020B0609030804020204" pitchFamily="49" charset="0"/>
               </a:rPr>
               <a:t>()));</a:t>
             </a:r>
@@ -19448,19 +20620,25 @@
             </a:pPr>
             <a:r>
               <a:rPr lang="en-GB" sz="1600" dirty="0">
-                <a:latin typeface="Courier" pitchFamily="2" charset="0"/>
+                <a:latin typeface="Menlo" panose="020B0609030804020204" pitchFamily="49" charset="0"/>
+                <a:ea typeface="Menlo" panose="020B0609030804020204" pitchFamily="49" charset="0"/>
+                <a:cs typeface="Menlo" panose="020B0609030804020204" pitchFamily="49" charset="0"/>
               </a:rPr>
               <a:t>    </a:t>
             </a:r>
             <a:r>
               <a:rPr lang="en-GB" sz="1600" dirty="0" err="1">
-                <a:latin typeface="Courier" pitchFamily="2" charset="0"/>
+                <a:latin typeface="Menlo" panose="020B0609030804020204" pitchFamily="49" charset="0"/>
+                <a:ea typeface="Menlo" panose="020B0609030804020204" pitchFamily="49" charset="0"/>
+                <a:cs typeface="Menlo" panose="020B0609030804020204" pitchFamily="49" charset="0"/>
               </a:rPr>
               <a:t>ScaffoldMessenger.of</a:t>
             </a:r>
             <a:r>
               <a:rPr lang="en-GB" sz="1600" dirty="0">
-                <a:latin typeface="Courier" pitchFamily="2" charset="0"/>
+                <a:latin typeface="Menlo" panose="020B0609030804020204" pitchFamily="49" charset="0"/>
+                <a:ea typeface="Menlo" panose="020B0609030804020204" pitchFamily="49" charset="0"/>
+                <a:cs typeface="Menlo" panose="020B0609030804020204" pitchFamily="49" charset="0"/>
               </a:rPr>
               <a:t>(context)</a:t>
             </a:r>
@@ -19471,19 +20649,25 @@
             </a:pPr>
             <a:r>
               <a:rPr lang="en-GB" sz="1600" dirty="0">
-                <a:latin typeface="Courier" pitchFamily="2" charset="0"/>
+                <a:latin typeface="Menlo" panose="020B0609030804020204" pitchFamily="49" charset="0"/>
+                <a:ea typeface="Menlo" panose="020B0609030804020204" pitchFamily="49" charset="0"/>
+                <a:cs typeface="Menlo" panose="020B0609030804020204" pitchFamily="49" charset="0"/>
               </a:rPr>
               <a:t>    ..</a:t>
             </a:r>
             <a:r>
               <a:rPr lang="en-GB" sz="1600" dirty="0" err="1">
-                <a:latin typeface="Courier" pitchFamily="2" charset="0"/>
+                <a:latin typeface="Menlo" panose="020B0609030804020204" pitchFamily="49" charset="0"/>
+                <a:ea typeface="Menlo" panose="020B0609030804020204" pitchFamily="49" charset="0"/>
+                <a:cs typeface="Menlo" panose="020B0609030804020204" pitchFamily="49" charset="0"/>
               </a:rPr>
               <a:t>removeCurrentSnackBar</a:t>
             </a:r>
             <a:r>
               <a:rPr lang="en-GB" sz="1600" dirty="0">
-                <a:latin typeface="Courier" pitchFamily="2" charset="0"/>
+                <a:latin typeface="Menlo" panose="020B0609030804020204" pitchFamily="49" charset="0"/>
+                <a:ea typeface="Menlo" panose="020B0609030804020204" pitchFamily="49" charset="0"/>
+                <a:cs typeface="Menlo" panose="020B0609030804020204" pitchFamily="49" charset="0"/>
               </a:rPr>
               <a:t>()</a:t>
             </a:r>
@@ -19494,31 +20678,41 @@
             </a:pPr>
             <a:r>
               <a:rPr lang="en-GB" sz="1600" dirty="0">
-                <a:latin typeface="Courier" pitchFamily="2" charset="0"/>
+                <a:latin typeface="Menlo" panose="020B0609030804020204" pitchFamily="49" charset="0"/>
+                <a:ea typeface="Menlo" panose="020B0609030804020204" pitchFamily="49" charset="0"/>
+                <a:cs typeface="Menlo" panose="020B0609030804020204" pitchFamily="49" charset="0"/>
               </a:rPr>
               <a:t>    ..</a:t>
             </a:r>
             <a:r>
               <a:rPr lang="en-GB" sz="1600" dirty="0" err="1">
-                <a:latin typeface="Courier" pitchFamily="2" charset="0"/>
+                <a:latin typeface="Menlo" panose="020B0609030804020204" pitchFamily="49" charset="0"/>
+                <a:ea typeface="Menlo" panose="020B0609030804020204" pitchFamily="49" charset="0"/>
+                <a:cs typeface="Menlo" panose="020B0609030804020204" pitchFamily="49" charset="0"/>
               </a:rPr>
               <a:t>showSnackBar</a:t>
             </a:r>
             <a:r>
               <a:rPr lang="en-GB" sz="1600" dirty="0">
-                <a:latin typeface="Courier" pitchFamily="2" charset="0"/>
+                <a:latin typeface="Menlo" panose="020B0609030804020204" pitchFamily="49" charset="0"/>
+                <a:ea typeface="Menlo" panose="020B0609030804020204" pitchFamily="49" charset="0"/>
+                <a:cs typeface="Menlo" panose="020B0609030804020204" pitchFamily="49" charset="0"/>
               </a:rPr>
               <a:t>(</a:t>
             </a:r>
             <a:r>
               <a:rPr lang="en-GB" sz="1600" dirty="0" err="1">
-                <a:latin typeface="Courier" pitchFamily="2" charset="0"/>
+                <a:latin typeface="Menlo" panose="020B0609030804020204" pitchFamily="49" charset="0"/>
+                <a:ea typeface="Menlo" panose="020B0609030804020204" pitchFamily="49" charset="0"/>
+                <a:cs typeface="Menlo" panose="020B0609030804020204" pitchFamily="49" charset="0"/>
               </a:rPr>
               <a:t>SnackBar</a:t>
             </a:r>
             <a:r>
               <a:rPr lang="en-GB" sz="1600" dirty="0">
-                <a:latin typeface="Courier" pitchFamily="2" charset="0"/>
+                <a:latin typeface="Menlo" panose="020B0609030804020204" pitchFamily="49" charset="0"/>
+                <a:ea typeface="Menlo" panose="020B0609030804020204" pitchFamily="49" charset="0"/>
+                <a:cs typeface="Menlo" panose="020B0609030804020204" pitchFamily="49" charset="0"/>
               </a:rPr>
               <a:t>(content: Text('$result')));</a:t>
             </a:r>
@@ -19529,7 +20723,9 @@
             </a:pPr>
             <a:r>
               <a:rPr lang="en-GB" sz="1600" dirty="0">
-                <a:latin typeface="Courier" pitchFamily="2" charset="0"/>
+                <a:latin typeface="Menlo" panose="020B0609030804020204" pitchFamily="49" charset="0"/>
+                <a:ea typeface="Menlo" panose="020B0609030804020204" pitchFamily="49" charset="0"/>
+                <a:cs typeface="Menlo" panose="020B0609030804020204" pitchFamily="49" charset="0"/>
               </a:rPr>
               <a:t>},</a:t>
             </a:r>
@@ -19540,7 +20736,9 @@
             </a:pPr>
             <a:r>
               <a:rPr lang="en-GB" sz="1600" dirty="0">
-                <a:latin typeface="Courier" pitchFamily="2" charset="0"/>
+                <a:latin typeface="Menlo" panose="020B0609030804020204" pitchFamily="49" charset="0"/>
+                <a:ea typeface="Menlo" panose="020B0609030804020204" pitchFamily="49" charset="0"/>
+                <a:cs typeface="Menlo" panose="020B0609030804020204" pitchFamily="49" charset="0"/>
               </a:rPr>
               <a:t>...</a:t>
             </a:r>
@@ -19987,35 +21185,39 @@
             </a:r>
             <a:r>
               <a:rPr lang="en-GB" dirty="0" err="1">
-                <a:latin typeface="Courier" pitchFamily="2" charset="0"/>
+                <a:latin typeface="Menlo" panose="020B0609030804020204" pitchFamily="49" charset="0"/>
+                <a:ea typeface="Menlo" panose="020B0609030804020204" pitchFamily="49" charset="0"/>
+                <a:cs typeface="Menlo" panose="020B0609030804020204" pitchFamily="49" charset="0"/>
               </a:rPr>
               <a:t>Navigator.pushReplacement</a:t>
             </a:r>
             <a:r>
               <a:rPr lang="en-GB" dirty="0">
-                <a:latin typeface="Courier" pitchFamily="2" charset="0"/>
-              </a:rPr>
-              <a:t>()</a:t>
+                <a:latin typeface="Menlo" panose="020B0609030804020204" pitchFamily="49" charset="0"/>
+                <a:ea typeface="Menlo" panose="020B0609030804020204" pitchFamily="49" charset="0"/>
+                <a:cs typeface="Menlo" panose="020B0609030804020204" pitchFamily="49" charset="0"/>
+              </a:rPr>
+              <a:t>() </a:t>
             </a:r>
             <a:r>
               <a:rPr lang="en-GB" dirty="0"/>
-              <a:t> / </a:t>
+              <a:t>/ </a:t>
             </a:r>
             <a:r>
               <a:rPr lang="en-GB" dirty="0" err="1">
-                <a:latin typeface="Courier" pitchFamily="2" charset="0"/>
+                <a:latin typeface="Menlo" panose="020B0609030804020204" pitchFamily="49" charset="0"/>
+                <a:ea typeface="Menlo" panose="020B0609030804020204" pitchFamily="49" charset="0"/>
+                <a:cs typeface="Menlo" panose="020B0609030804020204" pitchFamily="49" charset="0"/>
               </a:rPr>
               <a:t>Navigator.pushReplacementNamed</a:t>
             </a:r>
             <a:r>
               <a:rPr lang="en-GB" dirty="0">
-                <a:latin typeface="Courier" pitchFamily="2" charset="0"/>
-              </a:rPr>
-              <a:t>()</a:t>
-            </a:r>
-            <a:r>
-              <a:rPr lang="en-GB" dirty="0"/>
-              <a:t> </a:t>
+                <a:latin typeface="Menlo" panose="020B0609030804020204" pitchFamily="49" charset="0"/>
+                <a:ea typeface="Menlo" panose="020B0609030804020204" pitchFamily="49" charset="0"/>
+                <a:cs typeface="Menlo" panose="020B0609030804020204" pitchFamily="49" charset="0"/>
+              </a:rPr>
+              <a:t>() </a:t>
             </a:r>
           </a:p>
           <a:p>
@@ -20030,7 +21232,9 @@
             </a:r>
             <a:r>
               <a:rPr lang="en-GB" dirty="0">
-                <a:latin typeface="Courier" pitchFamily="2" charset="0"/>
+                <a:latin typeface="Menlo" panose="020B0609030804020204" pitchFamily="49" charset="0"/>
+                <a:ea typeface="Menlo" panose="020B0609030804020204" pitchFamily="49" charset="0"/>
+                <a:cs typeface="Menlo" panose="020B0609030804020204" pitchFamily="49" charset="0"/>
               </a:rPr>
               <a:t>Navigator</a:t>
             </a:r>
@@ -20109,60 +21313,6 @@
               <a:t>35</a:t>
             </a:fld>
             <a:endParaRPr lang="en-GB"/>
-          </a:p>
-        </p:txBody>
-      </p:sp>
-      <p:sp>
-        <p:nvSpPr>
-          <p:cNvPr id="5" name="TextBox 4">
-            <a:extLst>
-              <a:ext uri="{FF2B5EF4-FFF2-40B4-BE49-F238E27FC236}">
-                <a16:creationId xmlns:a16="http://schemas.microsoft.com/office/drawing/2014/main" id="{C257E6DC-34C5-B2FE-E557-83E00BCD9190}"/>
-              </a:ext>
-            </a:extLst>
-          </p:cNvPr>
-          <p:cNvSpPr txBox="1"/>
-          <p:nvPr/>
-        </p:nvSpPr>
-        <p:spPr>
-          <a:xfrm>
-            <a:off x="10381670" y="407381"/>
-            <a:ext cx="1265382" cy="369332"/>
-          </a:xfrm>
-          <a:prstGeom prst="rect">
-            <a:avLst/>
-          </a:prstGeom>
-        </p:spPr>
-        <p:style>
-          <a:lnRef idx="2">
-            <a:schemeClr val="accent6">
-              <a:shade val="50000"/>
-            </a:schemeClr>
-          </a:lnRef>
-          <a:fillRef idx="1">
-            <a:schemeClr val="accent6"/>
-          </a:fillRef>
-          <a:effectRef idx="0">
-            <a:schemeClr val="accent6"/>
-          </a:effectRef>
-          <a:fontRef idx="minor">
-            <a:schemeClr val="lt1"/>
-          </a:fontRef>
-        </p:style>
-        <p:txBody>
-          <a:bodyPr wrap="square" rtlCol="0" anchor="ctr">
-            <a:spAutoFit/>
-          </a:bodyPr>
-          <a:lstStyle/>
-          <a:p>
-            <a:pPr algn="ctr"/>
-            <a:r>
-              <a:rPr lang="en-IT" dirty="0">
-                <a:latin typeface="Aptos" panose="020B0004020202020204" pitchFamily="34" charset="0"/>
-                <a:ea typeface="Palatino" pitchFamily="2" charset="77"/>
-              </a:rPr>
-              <a:t>BONUS</a:t>
-            </a:r>
           </a:p>
         </p:txBody>
       </p:sp>
@@ -20184,7 +21334,13 @@
   <p:cSld>
     <p:spTree>
       <p:nvGrpSpPr>
-        <p:cNvPr id="1" name=""/>
+        <p:cNvPr id="1" name="">
+          <a:extLst>
+            <a:ext uri="{FF2B5EF4-FFF2-40B4-BE49-F238E27FC236}">
+              <a16:creationId xmlns:a16="http://schemas.microsoft.com/office/drawing/2014/main" id="{B2226765-CB02-4AEA-6F58-A32885F18F0C}"/>
+            </a:ext>
+          </a:extLst>
+        </p:cNvPr>
         <p:cNvGrpSpPr/>
         <p:nvPr/>
       </p:nvGrpSpPr>
@@ -20201,7 +21357,7 @@
           <p:cNvPr id="2" name="Title 1">
             <a:extLst>
               <a:ext uri="{FF2B5EF4-FFF2-40B4-BE49-F238E27FC236}">
-                <a16:creationId xmlns:a16="http://schemas.microsoft.com/office/drawing/2014/main" id="{122C1E14-0610-FB4E-BCD3-3BA8CADF9D02}"/>
+                <a16:creationId xmlns:a16="http://schemas.microsoft.com/office/drawing/2014/main" id="{F060CA8D-D8A7-2AF1-9B11-6957DEADE37A}"/>
               </a:ext>
             </a:extLst>
           </p:cNvPr>
@@ -20219,7 +21375,7 @@
           <a:p>
             <a:r>
               <a:rPr lang="en-IT" dirty="0"/>
-              <a:t>Outline</a:t>
+              <a:t>A final note</a:t>
             </a:r>
           </a:p>
         </p:txBody>
@@ -20229,7 +21385,7 @@
           <p:cNvPr id="3" name="Content Placeholder 2">
             <a:extLst>
               <a:ext uri="{FF2B5EF4-FFF2-40B4-BE49-F238E27FC236}">
-                <a16:creationId xmlns:a16="http://schemas.microsoft.com/office/drawing/2014/main" id="{8962CCAC-9D70-C543-BBE0-822B6CB5F5CB}"/>
+                <a16:creationId xmlns:a16="http://schemas.microsoft.com/office/drawing/2014/main" id="{BF313E5C-0B53-3176-C1EB-B5EB2907FC82}"/>
               </a:ext>
             </a:extLst>
           </p:cNvPr>
@@ -20242,8 +21398,8 @@
         </p:nvSpPr>
         <p:spPr>
           <a:xfrm>
-            <a:off x="428172" y="1361167"/>
-            <a:ext cx="11213368" cy="5334907"/>
+            <a:off x="428171" y="1361167"/>
+            <a:ext cx="10336811" cy="5334907"/>
           </a:xfrm>
         </p:spPr>
         <p:txBody>
@@ -20253,118 +21409,27 @@
           <a:lstStyle/>
           <a:p>
             <a:r>
-              <a:rPr lang="en-GB" dirty="0">
-                <a:solidFill>
-                  <a:schemeClr val="bg2">
-                    <a:lumMod val="90000"/>
-                  </a:schemeClr>
-                </a:solidFill>
-              </a:rPr>
-              <a:t>Asynchrony</a:t>
-            </a:r>
-          </a:p>
-          <a:p>
-            <a:r>
-              <a:rPr lang="en-GB" dirty="0">
-                <a:solidFill>
-                  <a:schemeClr val="bg2">
-                    <a:lumMod val="90000"/>
-                  </a:schemeClr>
-                </a:solidFill>
-              </a:rPr>
-              <a:t>Navigator</a:t>
-            </a:r>
-          </a:p>
-          <a:p>
-            <a:r>
-              <a:rPr lang="en-GB" dirty="0">
-                <a:solidFill>
-                  <a:schemeClr val="bg2">
-                    <a:lumMod val="90000"/>
-                  </a:schemeClr>
-                </a:solidFill>
-              </a:rPr>
-              <a:t>Navigate to a new screen and back</a:t>
-            </a:r>
-          </a:p>
-          <a:p>
-            <a:r>
-              <a:rPr lang="en-GB" dirty="0">
-                <a:solidFill>
-                  <a:schemeClr val="bg2">
-                    <a:lumMod val="90000"/>
-                  </a:schemeClr>
-                </a:solidFill>
-              </a:rPr>
-              <a:t>Named routes </a:t>
-            </a:r>
-          </a:p>
-          <a:p>
-            <a:r>
-              <a:rPr lang="en-GB" dirty="0">
-                <a:solidFill>
-                  <a:schemeClr val="bg2">
-                    <a:lumMod val="90000"/>
-                  </a:schemeClr>
-                </a:solidFill>
-              </a:rPr>
-              <a:t>Passing argument to a named routes</a:t>
-            </a:r>
-          </a:p>
-          <a:p>
-            <a:r>
-              <a:rPr lang="en-GB" dirty="0">
-                <a:solidFill>
-                  <a:schemeClr val="bg2">
-                    <a:lumMod val="90000"/>
-                  </a:schemeClr>
-                </a:solidFill>
-              </a:rPr>
-              <a:t>Returning an argument from a named route</a:t>
-            </a:r>
-          </a:p>
-          <a:p>
-            <a:endParaRPr lang="en-GB" dirty="0">
-              <a:solidFill>
-                <a:schemeClr val="bg2">
-                  <a:lumMod val="90000"/>
-                </a:schemeClr>
-              </a:solidFill>
-            </a:endParaRPr>
-          </a:p>
-          <a:p>
-            <a:r>
-              <a:rPr lang="en-GB" b="1" dirty="0"/>
-              <a:t>Exercise</a:t>
-            </a:r>
-          </a:p>
-          <a:p>
-            <a:r>
-              <a:rPr lang="en-GB" dirty="0">
-                <a:solidFill>
-                  <a:schemeClr val="bg2">
-                    <a:lumMod val="90000"/>
-                  </a:schemeClr>
-                </a:solidFill>
-              </a:rPr>
-              <a:t>Homework</a:t>
-            </a:r>
-          </a:p>
-          <a:p>
-            <a:r>
-              <a:rPr lang="en-GB" dirty="0">
-                <a:solidFill>
-                  <a:schemeClr val="bg2">
-                    <a:lumMod val="90000"/>
-                  </a:schemeClr>
-                </a:solidFill>
-              </a:rPr>
-              <a:t>Resources</a:t>
+              <a:rPr lang="en-GB" dirty="0"/>
+              <a:t>Passing argument with Navigator is ok only with SIMPLE stuff!</a:t>
             </a:r>
           </a:p>
           <a:p>
             <a:endParaRPr lang="en-GB" dirty="0"/>
           </a:p>
+          <a:p>
+            <a:r>
+              <a:rPr lang="en-GB" dirty="0"/>
+              <a:t>We will learn how to manage more complex data (aka </a:t>
+            </a:r>
+            <a:r>
+              <a:rPr lang="en-GB" i="1" dirty="0"/>
+              <a:t>state</a:t>
+            </a:r>
+            <a:r>
+              <a:rPr lang="en-GB" dirty="0"/>
+              <a:t>) in lesson 11 and 12!</a:t>
+            </a:r>
+          </a:p>
         </p:txBody>
       </p:sp>
       <p:sp>
@@ -20372,7 +21437,7 @@
           <p:cNvPr id="4" name="Slide Number Placeholder 3">
             <a:extLst>
               <a:ext uri="{FF2B5EF4-FFF2-40B4-BE49-F238E27FC236}">
-                <a16:creationId xmlns:a16="http://schemas.microsoft.com/office/drawing/2014/main" id="{7B92D939-F8DA-2243-8E3D-55072F9F7FE4}"/>
+                <a16:creationId xmlns:a16="http://schemas.microsoft.com/office/drawing/2014/main" id="{8FFA519E-4E8A-08C6-CDA5-AB16718DAFFE}"/>
               </a:ext>
             </a:extLst>
           </p:cNvPr>
@@ -20399,7 +21464,7 @@
     </p:spTree>
     <p:extLst>
       <p:ext uri="{BB962C8B-B14F-4D97-AF65-F5344CB8AC3E}">
-        <p14:creationId xmlns:p14="http://schemas.microsoft.com/office/powerpoint/2010/main" val="1374369101"/>
+        <p14:creationId xmlns:p14="http://schemas.microsoft.com/office/powerpoint/2010/main" val="918546699"/>
       </p:ext>
     </p:extLst>
   </p:cSld>
@@ -20449,7 +21514,7 @@
           <a:p>
             <a:r>
               <a:rPr lang="en-IT" dirty="0"/>
-              <a:t>Exercises</a:t>
+              <a:t>Outline</a:t>
             </a:r>
           </a:p>
         </p:txBody>
@@ -20483,102 +21548,117 @@
           <a:lstStyle/>
           <a:p>
             <a:r>
-              <a:rPr lang="en-IT" dirty="0"/>
-              <a:t>Exercise 06.01</a:t>
-            </a:r>
-          </a:p>
-          <a:p>
-            <a:pPr lvl="1"/>
-            <a:r>
-              <a:rPr lang="en-IT" dirty="0"/>
-              <a:t>Write an asynchronous function fetchUserRole() that after 3 seconds returns the String ‘admin’. Then, use that function in the main function to print the provided and properly produce the following output:</a:t>
-            </a:r>
-          </a:p>
-          <a:p>
-            <a:pPr marL="914400" lvl="2" indent="0">
-              <a:buNone/>
-            </a:pPr>
-            <a:r>
-              <a:rPr lang="en-IT" dirty="0">
-                <a:latin typeface="Courier" pitchFamily="2" charset="0"/>
-              </a:rPr>
-              <a:t>Fetching user role…</a:t>
-            </a:r>
-            <a:br>
-              <a:rPr lang="en-IT" dirty="0">
-                <a:latin typeface="Courier" pitchFamily="2" charset="0"/>
-              </a:rPr>
-            </a:br>
-            <a:r>
-              <a:rPr lang="en-IT" dirty="0">
-                <a:latin typeface="Courier" pitchFamily="2" charset="0"/>
-              </a:rPr>
-              <a:t>The user is an admin.</a:t>
-            </a:r>
-          </a:p>
-          <a:p>
-            <a:pPr lvl="1"/>
-            <a:endParaRPr lang="en-IT" dirty="0"/>
-          </a:p>
-          <a:p>
-            <a:r>
-              <a:rPr lang="en-IT" dirty="0"/>
-              <a:t>Exercise 06.02</a:t>
-            </a:r>
-          </a:p>
-          <a:p>
-            <a:pPr lvl="1"/>
-            <a:r>
-              <a:rPr lang="en-IT" dirty="0"/>
-              <a:t>Use the fetchUserRole() function developed in 06.01 to create a new function isAdminUser() that checks if the string provided by fetchUserRole() is ‘admin’ and returns the respective boolean. Use t</a:t>
-            </a:r>
-            <a:r>
-              <a:rPr lang="en-GB" dirty="0"/>
-              <a:t>he</a:t>
-            </a:r>
-            <a:r>
-              <a:rPr lang="en-IT" dirty="0"/>
-              <a:t> new function in the main to produce the following output:</a:t>
-            </a:r>
-          </a:p>
-          <a:p>
-            <a:pPr marL="914400" lvl="2" indent="0">
-              <a:buNone/>
-            </a:pPr>
-            <a:r>
-              <a:rPr lang="en-IT" dirty="0">
-                <a:latin typeface="Courier" pitchFamily="2" charset="0"/>
-              </a:rPr>
-              <a:t>Checking if user is an admin…</a:t>
-            </a:r>
-            <a:br>
-              <a:rPr lang="en-IT" dirty="0">
-                <a:latin typeface="Courier" pitchFamily="2" charset="0"/>
-              </a:rPr>
-            </a:br>
-            <a:r>
-              <a:rPr lang="en-IT" dirty="0">
-                <a:latin typeface="Courier" pitchFamily="2" charset="0"/>
-              </a:rPr>
-              <a:t>Ok, access granted! </a:t>
-            </a:r>
-            <a:r>
-              <a:rPr lang="en-IT" dirty="0"/>
-              <a:t>(if the user is an admin)</a:t>
-            </a:r>
-            <a:br>
-              <a:rPr lang="en-IT" dirty="0"/>
-            </a:br>
-            <a:r>
-              <a:rPr lang="en-IT" dirty="0">
-                <a:latin typeface="Courier" pitchFamily="2" charset="0"/>
-              </a:rPr>
-              <a:t>Access denied! </a:t>
-            </a:r>
-            <a:r>
-              <a:rPr lang="en-IT" dirty="0"/>
-              <a:t>(if the user is not an admin)</a:t>
-            </a:r>
+              <a:rPr lang="en-GB" dirty="0">
+                <a:solidFill>
+                  <a:schemeClr val="bg2">
+                    <a:lumMod val="90000"/>
+                  </a:schemeClr>
+                </a:solidFill>
+              </a:rPr>
+              <a:t>Asynchrony</a:t>
+            </a:r>
+          </a:p>
+          <a:p>
+            <a:r>
+              <a:rPr lang="en-GB" dirty="0">
+                <a:solidFill>
+                  <a:schemeClr val="bg2">
+                    <a:lumMod val="90000"/>
+                  </a:schemeClr>
+                </a:solidFill>
+              </a:rPr>
+              <a:t>Navigator</a:t>
+            </a:r>
+          </a:p>
+          <a:p>
+            <a:r>
+              <a:rPr lang="en-GB" dirty="0">
+                <a:solidFill>
+                  <a:schemeClr val="bg2">
+                    <a:lumMod val="90000"/>
+                  </a:schemeClr>
+                </a:solidFill>
+              </a:rPr>
+              <a:t>Navigate to a new screen and back</a:t>
+            </a:r>
+          </a:p>
+          <a:p>
+            <a:r>
+              <a:rPr lang="en-GB" dirty="0">
+                <a:solidFill>
+                  <a:schemeClr val="bg2">
+                    <a:lumMod val="90000"/>
+                  </a:schemeClr>
+                </a:solidFill>
+              </a:rPr>
+              <a:t>Named routes </a:t>
+            </a:r>
+          </a:p>
+          <a:p>
+            <a:r>
+              <a:rPr lang="en-GB" dirty="0">
+                <a:solidFill>
+                  <a:schemeClr val="bg2">
+                    <a:lumMod val="90000"/>
+                  </a:schemeClr>
+                </a:solidFill>
+              </a:rPr>
+              <a:t>Passing argument to a named routes</a:t>
+            </a:r>
+          </a:p>
+          <a:p>
+            <a:r>
+              <a:rPr lang="en-GB" dirty="0">
+                <a:solidFill>
+                  <a:schemeClr val="bg2">
+                    <a:lumMod val="90000"/>
+                  </a:schemeClr>
+                </a:solidFill>
+              </a:rPr>
+              <a:t>Returning an argument from a named route</a:t>
+            </a:r>
+          </a:p>
+          <a:p>
+            <a:endParaRPr lang="en-GB" dirty="0">
+              <a:solidFill>
+                <a:schemeClr val="bg2">
+                  <a:lumMod val="90000"/>
+                </a:schemeClr>
+              </a:solidFill>
+            </a:endParaRPr>
+          </a:p>
+          <a:p>
+            <a:r>
+              <a:rPr lang="en-GB" b="1" dirty="0"/>
+              <a:t>Exercise</a:t>
+            </a:r>
+          </a:p>
+          <a:p>
+            <a:r>
+              <a:rPr lang="en-GB" dirty="0">
+                <a:solidFill>
+                  <a:schemeClr val="bg2">
+                    <a:lumMod val="90000"/>
+                  </a:schemeClr>
+                </a:solidFill>
+              </a:rPr>
+              <a:t>Homework</a:t>
+            </a:r>
+          </a:p>
+          <a:p>
+            <a:r>
+              <a:rPr lang="en-GB" dirty="0">
+                <a:solidFill>
+                  <a:schemeClr val="bg2">
+                    <a:lumMod val="90000"/>
+                  </a:schemeClr>
+                </a:solidFill>
+              </a:rPr>
+              <a:t>Resources</a:t>
+            </a:r>
+          </a:p>
+          <a:p>
+            <a:endParaRPr lang="en-GB" dirty="0"/>
           </a:p>
         </p:txBody>
       </p:sp>
@@ -20587,7 +21667,7 @@
           <p:cNvPr id="4" name="Slide Number Placeholder 3">
             <a:extLst>
               <a:ext uri="{FF2B5EF4-FFF2-40B4-BE49-F238E27FC236}">
-                <a16:creationId xmlns:a16="http://schemas.microsoft.com/office/drawing/2014/main" id="{28CFD9F2-A816-7349-8A40-B768E58EEE8E}"/>
+                <a16:creationId xmlns:a16="http://schemas.microsoft.com/office/drawing/2014/main" id="{7B92D939-F8DA-2243-8E3D-55072F9F7FE4}"/>
               </a:ext>
             </a:extLst>
           </p:cNvPr>
@@ -20614,7 +21694,7 @@
     </p:spTree>
     <p:extLst>
       <p:ext uri="{BB962C8B-B14F-4D97-AF65-F5344CB8AC3E}">
-        <p14:creationId xmlns:p14="http://schemas.microsoft.com/office/powerpoint/2010/main" val="2925809359"/>
+        <p14:creationId xmlns:p14="http://schemas.microsoft.com/office/powerpoint/2010/main" val="1374369101"/>
       </p:ext>
     </p:extLst>
   </p:cSld>
@@ -20664,6 +21744,345 @@
           <a:p>
             <a:r>
               <a:rPr lang="en-IT" dirty="0"/>
+              <a:t>Exercises</a:t>
+            </a:r>
+          </a:p>
+        </p:txBody>
+      </p:sp>
+      <p:sp>
+        <p:nvSpPr>
+          <p:cNvPr id="3" name="Content Placeholder 2">
+            <a:extLst>
+              <a:ext uri="{FF2B5EF4-FFF2-40B4-BE49-F238E27FC236}">
+                <a16:creationId xmlns:a16="http://schemas.microsoft.com/office/drawing/2014/main" id="{8962CCAC-9D70-C543-BBE0-822B6CB5F5CB}"/>
+              </a:ext>
+            </a:extLst>
+          </p:cNvPr>
+          <p:cNvSpPr>
+            <a:spLocks noGrp="1"/>
+          </p:cNvSpPr>
+          <p:nvPr>
+            <p:ph idx="1"/>
+          </p:nvPr>
+        </p:nvSpPr>
+        <p:spPr>
+          <a:xfrm>
+            <a:off x="428172" y="1361167"/>
+            <a:ext cx="11213368" cy="5334907"/>
+          </a:xfrm>
+        </p:spPr>
+        <p:txBody>
+          <a:bodyPr>
+            <a:normAutofit/>
+          </a:bodyPr>
+          <a:lstStyle/>
+          <a:p>
+            <a:r>
+              <a:rPr lang="en-IT"/>
+              <a:t>Exercise 01</a:t>
+            </a:r>
+            <a:endParaRPr lang="en-IT" dirty="0"/>
+          </a:p>
+          <a:p>
+            <a:pPr lvl="1"/>
+            <a:r>
+              <a:rPr lang="en-IT" dirty="0"/>
+              <a:t>Write an asynchronous </a:t>
+            </a:r>
+            <a:r>
+              <a:rPr lang="en-IT"/>
+              <a:t>function </a:t>
+            </a:r>
+            <a:r>
+              <a:rPr lang="en-IT" dirty="0">
+                <a:latin typeface="Menlo" panose="020B0609030804020204" pitchFamily="49" charset="0"/>
+                <a:ea typeface="Menlo" panose="020B0609030804020204" pitchFamily="49" charset="0"/>
+                <a:cs typeface="Menlo" panose="020B0609030804020204" pitchFamily="49" charset="0"/>
+              </a:rPr>
+              <a:t>fetchUserRole()</a:t>
+            </a:r>
+            <a:r>
+              <a:rPr lang="en-IT"/>
+              <a:t> </a:t>
+            </a:r>
+            <a:r>
+              <a:rPr lang="en-IT" dirty="0"/>
+              <a:t>that after 3 seconds returns the </a:t>
+            </a:r>
+            <a:r>
+              <a:rPr lang="en-IT" dirty="0">
+                <a:latin typeface="Menlo" panose="020B0609030804020204" pitchFamily="49" charset="0"/>
+                <a:ea typeface="Menlo" panose="020B0609030804020204" pitchFamily="49" charset="0"/>
+                <a:cs typeface="Menlo" panose="020B0609030804020204" pitchFamily="49" charset="0"/>
+              </a:rPr>
+              <a:t>String</a:t>
+            </a:r>
+            <a:r>
+              <a:rPr lang="en-IT" dirty="0"/>
+              <a:t> ‘admin’. Then, use that function in the main function to print the provided and properly produce the following output:</a:t>
+            </a:r>
+          </a:p>
+          <a:p>
+            <a:pPr marL="914400" lvl="2" indent="0">
+              <a:buNone/>
+            </a:pPr>
+            <a:r>
+              <a:rPr lang="en-IT" dirty="0">
+                <a:latin typeface="Menlo" panose="020B0609030804020204" pitchFamily="49" charset="0"/>
+                <a:ea typeface="Menlo" panose="020B0609030804020204" pitchFamily="49" charset="0"/>
+                <a:cs typeface="Menlo" panose="020B0609030804020204" pitchFamily="49" charset="0"/>
+              </a:rPr>
+              <a:t>Fetching user role…</a:t>
+            </a:r>
+            <a:br>
+              <a:rPr lang="en-IT" dirty="0">
+                <a:latin typeface="Menlo" panose="020B0609030804020204" pitchFamily="49" charset="0"/>
+                <a:ea typeface="Menlo" panose="020B0609030804020204" pitchFamily="49" charset="0"/>
+                <a:cs typeface="Menlo" panose="020B0609030804020204" pitchFamily="49" charset="0"/>
+              </a:rPr>
+            </a:br>
+            <a:r>
+              <a:rPr lang="en-IT" dirty="0">
+                <a:latin typeface="Menlo" panose="020B0609030804020204" pitchFamily="49" charset="0"/>
+                <a:ea typeface="Menlo" panose="020B0609030804020204" pitchFamily="49" charset="0"/>
+                <a:cs typeface="Menlo" panose="020B0609030804020204" pitchFamily="49" charset="0"/>
+              </a:rPr>
+              <a:t>The user is an admin.</a:t>
+            </a:r>
+          </a:p>
+          <a:p>
+            <a:pPr lvl="1"/>
+            <a:endParaRPr lang="en-IT" dirty="0"/>
+          </a:p>
+          <a:p>
+            <a:r>
+              <a:rPr lang="en-IT"/>
+              <a:t>Exercise 02</a:t>
+            </a:r>
+            <a:endParaRPr lang="en-IT" dirty="0"/>
+          </a:p>
+          <a:p>
+            <a:pPr lvl="1"/>
+            <a:r>
+              <a:rPr lang="en-IT" dirty="0"/>
+              <a:t>Use </a:t>
+            </a:r>
+            <a:r>
+              <a:rPr lang="en-IT"/>
+              <a:t>the </a:t>
+            </a:r>
+            <a:r>
+              <a:rPr lang="en-IT" dirty="0">
+                <a:latin typeface="Menlo" panose="020B0609030804020204" pitchFamily="49" charset="0"/>
+                <a:ea typeface="Menlo" panose="020B0609030804020204" pitchFamily="49" charset="0"/>
+                <a:cs typeface="Menlo" panose="020B0609030804020204" pitchFamily="49" charset="0"/>
+              </a:rPr>
+              <a:t>fetchUserRole()</a:t>
+            </a:r>
+            <a:r>
+              <a:rPr lang="en-IT"/>
+              <a:t> </a:t>
+            </a:r>
+            <a:r>
+              <a:rPr lang="en-IT" dirty="0"/>
+              <a:t>function developed </a:t>
+            </a:r>
+            <a:r>
+              <a:rPr lang="en-IT"/>
+              <a:t>in </a:t>
+            </a:r>
+            <a:r>
+              <a:rPr lang="en-US" dirty="0"/>
+              <a:t>exercise </a:t>
+            </a:r>
+            <a:r>
+              <a:rPr lang="en-IT"/>
+              <a:t>01 </a:t>
+            </a:r>
+            <a:r>
+              <a:rPr lang="en-IT" dirty="0"/>
+              <a:t>to create a new </a:t>
+            </a:r>
+            <a:r>
+              <a:rPr lang="en-IT"/>
+              <a:t>function </a:t>
+            </a:r>
+            <a:r>
+              <a:rPr lang="en-IT" dirty="0">
+                <a:latin typeface="Menlo" panose="020B0609030804020204" pitchFamily="49" charset="0"/>
+                <a:ea typeface="Menlo" panose="020B0609030804020204" pitchFamily="49" charset="0"/>
+                <a:cs typeface="Menlo" panose="020B0609030804020204" pitchFamily="49" charset="0"/>
+              </a:rPr>
+              <a:t>isAdminUser() </a:t>
+            </a:r>
+            <a:r>
+              <a:rPr lang="en-IT"/>
+              <a:t>that </a:t>
+            </a:r>
+            <a:r>
+              <a:rPr lang="en-IT" dirty="0"/>
+              <a:t>checks if the string provided </a:t>
+            </a:r>
+            <a:r>
+              <a:rPr lang="en-IT"/>
+              <a:t>by </a:t>
+            </a:r>
+            <a:r>
+              <a:rPr lang="en-IT" dirty="0">
+                <a:latin typeface="Menlo" panose="020B0609030804020204" pitchFamily="49" charset="0"/>
+                <a:ea typeface="Menlo" panose="020B0609030804020204" pitchFamily="49" charset="0"/>
+                <a:cs typeface="Menlo" panose="020B0609030804020204" pitchFamily="49" charset="0"/>
+              </a:rPr>
+              <a:t>fetchUserRole() </a:t>
+            </a:r>
+            <a:r>
+              <a:rPr lang="en-IT"/>
+              <a:t>is </a:t>
+            </a:r>
+            <a:r>
+              <a:rPr lang="en-IT" dirty="0"/>
+              <a:t>‘admin’ and returns the respective boolean. Use t</a:t>
+            </a:r>
+            <a:r>
+              <a:rPr lang="en-GB" dirty="0"/>
+              <a:t>he</a:t>
+            </a:r>
+            <a:r>
+              <a:rPr lang="en-IT" dirty="0"/>
+              <a:t> new function in the main to produce the following output:</a:t>
+            </a:r>
+          </a:p>
+          <a:p>
+            <a:pPr marL="914400" lvl="2" indent="0">
+              <a:buNone/>
+            </a:pPr>
+            <a:r>
+              <a:rPr lang="en-IT" dirty="0">
+                <a:latin typeface="Menlo" panose="020B0609030804020204" pitchFamily="49" charset="0"/>
+                <a:ea typeface="Menlo" panose="020B0609030804020204" pitchFamily="49" charset="0"/>
+                <a:cs typeface="Menlo" panose="020B0609030804020204" pitchFamily="49" charset="0"/>
+              </a:rPr>
+              <a:t>Checking if user is an admin…</a:t>
+            </a:r>
+            <a:br>
+              <a:rPr lang="en-IT" dirty="0">
+                <a:latin typeface="Menlo" panose="020B0609030804020204" pitchFamily="49" charset="0"/>
+                <a:ea typeface="Menlo" panose="020B0609030804020204" pitchFamily="49" charset="0"/>
+                <a:cs typeface="Menlo" panose="020B0609030804020204" pitchFamily="49" charset="0"/>
+              </a:rPr>
+            </a:br>
+            <a:r>
+              <a:rPr lang="en-IT" dirty="0">
+                <a:latin typeface="Menlo" panose="020B0609030804020204" pitchFamily="49" charset="0"/>
+                <a:ea typeface="Menlo" panose="020B0609030804020204" pitchFamily="49" charset="0"/>
+                <a:cs typeface="Menlo" panose="020B0609030804020204" pitchFamily="49" charset="0"/>
+              </a:rPr>
+              <a:t>Ok, access granted! </a:t>
+            </a:r>
+            <a:r>
+              <a:rPr lang="en-IT" dirty="0"/>
+              <a:t>(if the user is an admin)</a:t>
+            </a:r>
+            <a:br>
+              <a:rPr lang="en-IT" dirty="0"/>
+            </a:br>
+            <a:r>
+              <a:rPr lang="en-IT" dirty="0">
+                <a:latin typeface="Menlo" panose="020B0609030804020204" pitchFamily="49" charset="0"/>
+                <a:ea typeface="Menlo" panose="020B0609030804020204" pitchFamily="49" charset="0"/>
+                <a:cs typeface="Menlo" panose="020B0609030804020204" pitchFamily="49" charset="0"/>
+              </a:rPr>
+              <a:t>Access denied! </a:t>
+            </a:r>
+            <a:r>
+              <a:rPr lang="en-IT" dirty="0"/>
+              <a:t>(if the user is not an admin)</a:t>
+            </a:r>
+          </a:p>
+        </p:txBody>
+      </p:sp>
+      <p:sp>
+        <p:nvSpPr>
+          <p:cNvPr id="4" name="Slide Number Placeholder 3">
+            <a:extLst>
+              <a:ext uri="{FF2B5EF4-FFF2-40B4-BE49-F238E27FC236}">
+                <a16:creationId xmlns:a16="http://schemas.microsoft.com/office/drawing/2014/main" id="{28CFD9F2-A816-7349-8A40-B768E58EEE8E}"/>
+              </a:ext>
+            </a:extLst>
+          </p:cNvPr>
+          <p:cNvSpPr>
+            <a:spLocks noGrp="1"/>
+          </p:cNvSpPr>
+          <p:nvPr>
+            <p:ph type="sldNum" sz="quarter" idx="12"/>
+          </p:nvPr>
+        </p:nvSpPr>
+        <p:spPr/>
+        <p:txBody>
+          <a:bodyPr/>
+          <a:lstStyle/>
+          <a:p>
+            <a:fld id="{31DE2C5B-556E-47B8-A792-024C2FCA4ACC}" type="slidenum">
+              <a:rPr lang="en-GB" smtClean="0"/>
+              <a:t>38</a:t>
+            </a:fld>
+            <a:endParaRPr lang="en-GB"/>
+          </a:p>
+        </p:txBody>
+      </p:sp>
+    </p:spTree>
+    <p:extLst>
+      <p:ext uri="{BB962C8B-B14F-4D97-AF65-F5344CB8AC3E}">
+        <p14:creationId xmlns:p14="http://schemas.microsoft.com/office/powerpoint/2010/main" val="2925809359"/>
+      </p:ext>
+    </p:extLst>
+  </p:cSld>
+  <p:clrMapOvr>
+    <a:masterClrMapping/>
+  </p:clrMapOvr>
+</p:sld>
+</file>
+
+<file path=ppt/slides/slide39.xml><?xml version="1.0" encoding="utf-8"?>
+<p:sld xmlns:a="http://schemas.openxmlformats.org/drawingml/2006/main" xmlns:r="http://schemas.openxmlformats.org/officeDocument/2006/relationships" xmlns:p="http://schemas.openxmlformats.org/presentationml/2006/main">
+  <p:cSld>
+    <p:spTree>
+      <p:nvGrpSpPr>
+        <p:cNvPr id="1" name=""/>
+        <p:cNvGrpSpPr/>
+        <p:nvPr/>
+      </p:nvGrpSpPr>
+      <p:grpSpPr>
+        <a:xfrm>
+          <a:off x="0" y="0"/>
+          <a:ext cx="0" cy="0"/>
+          <a:chOff x="0" y="0"/>
+          <a:chExt cx="0" cy="0"/>
+        </a:xfrm>
+      </p:grpSpPr>
+      <p:sp>
+        <p:nvSpPr>
+          <p:cNvPr id="2" name="Title 1">
+            <a:extLst>
+              <a:ext uri="{FF2B5EF4-FFF2-40B4-BE49-F238E27FC236}">
+                <a16:creationId xmlns:a16="http://schemas.microsoft.com/office/drawing/2014/main" id="{122C1E14-0610-FB4E-BCD3-3BA8CADF9D02}"/>
+              </a:ext>
+            </a:extLst>
+          </p:cNvPr>
+          <p:cNvSpPr>
+            <a:spLocks noGrp="1"/>
+          </p:cNvSpPr>
+          <p:nvPr>
+            <p:ph type="title"/>
+          </p:nvPr>
+        </p:nvSpPr>
+        <p:spPr/>
+        <p:txBody>
+          <a:bodyPr/>
+          <a:lstStyle/>
+          <a:p>
+            <a:r>
+              <a:rPr lang="en-IT" dirty="0"/>
               <a:t>Exercise</a:t>
             </a:r>
           </a:p>
@@ -20699,7 +22118,7 @@
           <a:p>
             <a:r>
               <a:rPr lang="en-GB" dirty="0"/>
-              <a:t>Exercise 06.03 (easy)</a:t>
+              <a:t>Exercise 03</a:t>
             </a:r>
           </a:p>
           <a:p>
@@ -20776,7 +22195,9 @@
             <a:pPr algn="ctr"/>
             <a:r>
               <a:rPr lang="en-IT" dirty="0">
-                <a:latin typeface="Courier" pitchFamily="2" charset="0"/>
+                <a:latin typeface="Menlo" panose="020B0609030804020204" pitchFamily="49" charset="0"/>
+                <a:ea typeface="Menlo" panose="020B0609030804020204" pitchFamily="49" charset="0"/>
+                <a:cs typeface="Menlo" panose="020B0609030804020204" pitchFamily="49" charset="0"/>
               </a:rPr>
               <a:t>LoginPage</a:t>
             </a:r>
@@ -20826,7 +22247,9 @@
             <a:pPr algn="ctr"/>
             <a:r>
               <a:rPr lang="en-IT" dirty="0">
-                <a:latin typeface="Courier" pitchFamily="2" charset="0"/>
+                <a:latin typeface="Menlo" panose="020B0609030804020204" pitchFamily="49" charset="0"/>
+                <a:ea typeface="Menlo" panose="020B0609030804020204" pitchFamily="49" charset="0"/>
+                <a:cs typeface="Menlo" panose="020B0609030804020204" pitchFamily="49" charset="0"/>
               </a:rPr>
               <a:t>HomePage</a:t>
             </a:r>
@@ -20876,7 +22299,9 @@
             <a:pPr algn="ctr"/>
             <a:r>
               <a:rPr lang="en-IT" dirty="0">
-                <a:latin typeface="Courier" pitchFamily="2" charset="0"/>
+                <a:latin typeface="Menlo" panose="020B0609030804020204" pitchFamily="49" charset="0"/>
+                <a:ea typeface="Menlo" panose="020B0609030804020204" pitchFamily="49" charset="0"/>
+                <a:cs typeface="Menlo" panose="020B0609030804020204" pitchFamily="49" charset="0"/>
               </a:rPr>
               <a:t>ProfilePage</a:t>
             </a:r>
@@ -20926,7 +22351,9 @@
             <a:pPr algn="ctr"/>
             <a:r>
               <a:rPr lang="en-IT" dirty="0">
-                <a:latin typeface="Courier" pitchFamily="2" charset="0"/>
+                <a:latin typeface="Menlo" panose="020B0609030804020204" pitchFamily="49" charset="0"/>
+                <a:ea typeface="Menlo" panose="020B0609030804020204" pitchFamily="49" charset="0"/>
+                <a:cs typeface="Menlo" panose="020B0609030804020204" pitchFamily="49" charset="0"/>
               </a:rPr>
               <a:t>EditEventPage</a:t>
             </a:r>
@@ -20976,7 +22403,9 @@
             <a:pPr algn="ctr"/>
             <a:r>
               <a:rPr lang="en-IT" dirty="0">
-                <a:latin typeface="Courier" pitchFamily="2" charset="0"/>
+                <a:latin typeface="Menlo" panose="020B0609030804020204" pitchFamily="49" charset="0"/>
+                <a:ea typeface="Menlo" panose="020B0609030804020204" pitchFamily="49" charset="0"/>
+                <a:cs typeface="Menlo" panose="020B0609030804020204" pitchFamily="49" charset="0"/>
               </a:rPr>
               <a:t>CalendarPage</a:t>
             </a:r>
@@ -21026,7 +22455,9 @@
             <a:pPr algn="ctr"/>
             <a:r>
               <a:rPr lang="en-IT" dirty="0">
-                <a:latin typeface="Courier" pitchFamily="2" charset="0"/>
+                <a:latin typeface="Menlo" panose="020B0609030804020204" pitchFamily="49" charset="0"/>
+                <a:ea typeface="Menlo" panose="020B0609030804020204" pitchFamily="49" charset="0"/>
+                <a:cs typeface="Menlo" panose="020B0609030804020204" pitchFamily="49" charset="0"/>
               </a:rPr>
               <a:t>EditProfilePage</a:t>
             </a:r>
@@ -21466,7 +22897,7 @@
           <a:p>
             <a:fld id="{31DE2C5B-556E-47B8-A792-024C2FCA4ACC}" type="slidenum">
               <a:rPr lang="en-GB" smtClean="0"/>
-              <a:t>38</a:t>
+              <a:t>39</a:t>
             </a:fld>
             <a:endParaRPr lang="en-GB"/>
           </a:p>
@@ -21485,7 +22916,7 @@
 </p:sld>
 </file>
 
-<file path=ppt/slides/slide39.xml><?xml version="1.0" encoding="utf-8"?>
+<file path=ppt/slides/slide4.xml><?xml version="1.0" encoding="utf-8"?>
 <p:sld xmlns:a="http://schemas.openxmlformats.org/drawingml/2006/main" xmlns:r="http://schemas.openxmlformats.org/officeDocument/2006/relationships" xmlns:p="http://schemas.openxmlformats.org/presentationml/2006/main">
   <p:cSld>
     <p:spTree>
@@ -21525,6 +22956,167 @@
           <a:p>
             <a:r>
               <a:rPr lang="en-IT" dirty="0"/>
+              <a:t>Key terms</a:t>
+            </a:r>
+          </a:p>
+        </p:txBody>
+      </p:sp>
+      <p:sp>
+        <p:nvSpPr>
+          <p:cNvPr id="6" name="Content Placeholder 5">
+            <a:extLst>
+              <a:ext uri="{FF2B5EF4-FFF2-40B4-BE49-F238E27FC236}">
+                <a16:creationId xmlns:a16="http://schemas.microsoft.com/office/drawing/2014/main" id="{0EDA931C-E473-FE49-BB53-C08AAD603E18}"/>
+              </a:ext>
+            </a:extLst>
+          </p:cNvPr>
+          <p:cNvSpPr>
+            <a:spLocks noGrp="1"/>
+          </p:cNvSpPr>
+          <p:nvPr>
+            <p:ph idx="1"/>
+          </p:nvPr>
+        </p:nvSpPr>
+        <p:spPr/>
+        <p:txBody>
+          <a:bodyPr>
+            <a:normAutofit/>
+          </a:bodyPr>
+          <a:lstStyle/>
+          <a:p>
+            <a:r>
+              <a:rPr lang="en-GB" b="1" dirty="0"/>
+              <a:t>synchronous operation</a:t>
+            </a:r>
+            <a:r>
+              <a:rPr lang="en-GB" dirty="0"/>
+              <a:t>: A synchronous operation blocks other operations from executing until it completes.</a:t>
+            </a:r>
+          </a:p>
+          <a:p>
+            <a:endParaRPr lang="en-GB" dirty="0"/>
+          </a:p>
+          <a:p>
+            <a:r>
+              <a:rPr lang="en-GB" b="1" dirty="0"/>
+              <a:t>synchronous function</a:t>
+            </a:r>
+            <a:r>
+              <a:rPr lang="en-GB" dirty="0"/>
+              <a:t>: A synchronous function only performs synchronous operations.</a:t>
+            </a:r>
+          </a:p>
+          <a:p>
+            <a:endParaRPr lang="en-GB" dirty="0"/>
+          </a:p>
+          <a:p>
+            <a:r>
+              <a:rPr lang="en-GB" b="1" dirty="0"/>
+              <a:t>asynchronous operation</a:t>
+            </a:r>
+            <a:r>
+              <a:rPr lang="en-GB" dirty="0"/>
+              <a:t>: Once initiated, an asynchronous operation allows other operations to execute before it completes.</a:t>
+            </a:r>
+          </a:p>
+          <a:p>
+            <a:endParaRPr lang="en-GB" dirty="0"/>
+          </a:p>
+          <a:p>
+            <a:r>
+              <a:rPr lang="en-GB" b="1" dirty="0"/>
+              <a:t>asynchronous function</a:t>
+            </a:r>
+            <a:r>
+              <a:rPr lang="en-GB" dirty="0"/>
+              <a:t>: An asynchronous function performs at least one asynchronous operation and can also perform synchronous operations.</a:t>
+            </a:r>
+            <a:endParaRPr lang="en-IT" dirty="0"/>
+          </a:p>
+        </p:txBody>
+      </p:sp>
+      <p:sp>
+        <p:nvSpPr>
+          <p:cNvPr id="3" name="Slide Number Placeholder 2">
+            <a:extLst>
+              <a:ext uri="{FF2B5EF4-FFF2-40B4-BE49-F238E27FC236}">
+                <a16:creationId xmlns:a16="http://schemas.microsoft.com/office/drawing/2014/main" id="{8CCB4CCE-1D86-464D-84CA-9A1992A47F18}"/>
+              </a:ext>
+            </a:extLst>
+          </p:cNvPr>
+          <p:cNvSpPr>
+            <a:spLocks noGrp="1"/>
+          </p:cNvSpPr>
+          <p:nvPr>
+            <p:ph type="sldNum" sz="quarter" idx="12"/>
+          </p:nvPr>
+        </p:nvSpPr>
+        <p:spPr/>
+        <p:txBody>
+          <a:bodyPr/>
+          <a:lstStyle/>
+          <a:p>
+            <a:fld id="{31DE2C5B-556E-47B8-A792-024C2FCA4ACC}" type="slidenum">
+              <a:rPr lang="en-GB" smtClean="0"/>
+              <a:t>4</a:t>
+            </a:fld>
+            <a:endParaRPr lang="en-GB"/>
+          </a:p>
+        </p:txBody>
+      </p:sp>
+    </p:spTree>
+    <p:extLst>
+      <p:ext uri="{BB962C8B-B14F-4D97-AF65-F5344CB8AC3E}">
+        <p14:creationId xmlns:p14="http://schemas.microsoft.com/office/powerpoint/2010/main" val="3425253548"/>
+      </p:ext>
+    </p:extLst>
+  </p:cSld>
+  <p:clrMapOvr>
+    <a:masterClrMapping/>
+  </p:clrMapOvr>
+</p:sld>
+</file>
+
+<file path=ppt/slides/slide40.xml><?xml version="1.0" encoding="utf-8"?>
+<p:sld xmlns:a="http://schemas.openxmlformats.org/drawingml/2006/main" xmlns:r="http://schemas.openxmlformats.org/officeDocument/2006/relationships" xmlns:p="http://schemas.openxmlformats.org/presentationml/2006/main">
+  <p:cSld>
+    <p:spTree>
+      <p:nvGrpSpPr>
+        <p:cNvPr id="1" name=""/>
+        <p:cNvGrpSpPr/>
+        <p:nvPr/>
+      </p:nvGrpSpPr>
+      <p:grpSpPr>
+        <a:xfrm>
+          <a:off x="0" y="0"/>
+          <a:ext cx="0" cy="0"/>
+          <a:chOff x="0" y="0"/>
+          <a:chExt cx="0" cy="0"/>
+        </a:xfrm>
+      </p:grpSpPr>
+      <p:sp>
+        <p:nvSpPr>
+          <p:cNvPr id="2" name="Title 1">
+            <a:extLst>
+              <a:ext uri="{FF2B5EF4-FFF2-40B4-BE49-F238E27FC236}">
+                <a16:creationId xmlns:a16="http://schemas.microsoft.com/office/drawing/2014/main" id="{122C1E14-0610-FB4E-BCD3-3BA8CADF9D02}"/>
+              </a:ext>
+            </a:extLst>
+          </p:cNvPr>
+          <p:cNvSpPr>
+            <a:spLocks noGrp="1"/>
+          </p:cNvSpPr>
+          <p:nvPr>
+            <p:ph type="title"/>
+          </p:nvPr>
+        </p:nvSpPr>
+        <p:spPr/>
+        <p:txBody>
+          <a:bodyPr/>
+          <a:lstStyle/>
+          <a:p>
+            <a:r>
+              <a:rPr lang="en-IT" dirty="0"/>
               <a:t>Exercise</a:t>
             </a:r>
           </a:p>
@@ -21560,7 +23152,7 @@
           <a:p>
             <a:r>
               <a:rPr lang="en-GB" sz="1800" dirty="0"/>
-              <a:t>Exercise 06.04 (medium)</a:t>
+              <a:t>Exercise 04</a:t>
             </a:r>
           </a:p>
           <a:p>
@@ -21611,7 +23203,9 @@
             </a:r>
             <a:r>
               <a:rPr lang="en-US" sz="1600" dirty="0" err="1">
-                <a:latin typeface="Courier" pitchFamily="2" charset="0"/>
+                <a:latin typeface="Menlo" panose="020B0609030804020204" pitchFamily="49" charset="0"/>
+                <a:ea typeface="Menlo" panose="020B0609030804020204" pitchFamily="49" charset="0"/>
+                <a:cs typeface="Menlo" panose="020B0609030804020204" pitchFamily="49" charset="0"/>
               </a:rPr>
               <a:t>ScaffoldMessenger</a:t>
             </a:r>
@@ -21635,7 +23229,11 @@
               <a:t>: you need to instantiate a </a:t>
             </a:r>
             <a:r>
-              <a:rPr lang="en-US" sz="1600" dirty="0" err="1"/>
+              <a:rPr lang="en-US" sz="1600" dirty="0" err="1">
+                <a:latin typeface="Menlo" panose="020B0609030804020204" pitchFamily="49" charset="0"/>
+                <a:ea typeface="Menlo" panose="020B0609030804020204" pitchFamily="49" charset="0"/>
+                <a:cs typeface="Menlo" panose="020B0609030804020204" pitchFamily="49" charset="0"/>
+              </a:rPr>
               <a:t>TextEditingController</a:t>
             </a:r>
             <a:r>
@@ -21654,7 +23252,11 @@
               <a:t>: you need to use a </a:t>
             </a:r>
             <a:r>
-              <a:rPr lang="en-US" sz="1600" dirty="0" err="1"/>
+              <a:rPr lang="en-US" sz="1600" dirty="0" err="1">
+                <a:latin typeface="Menlo" panose="020B0609030804020204" pitchFamily="49" charset="0"/>
+                <a:ea typeface="Menlo" panose="020B0609030804020204" pitchFamily="49" charset="0"/>
+                <a:cs typeface="Menlo" panose="020B0609030804020204" pitchFamily="49" charset="0"/>
+              </a:rPr>
               <a:t>TextField</a:t>
             </a:r>
             <a:r>
@@ -21719,7 +23321,9 @@
             <a:pPr algn="ctr"/>
             <a:r>
               <a:rPr lang="en-IT" dirty="0">
-                <a:latin typeface="Courier" pitchFamily="2" charset="0"/>
+                <a:latin typeface="Menlo" panose="020B0609030804020204" pitchFamily="49" charset="0"/>
+                <a:ea typeface="Menlo" panose="020B0609030804020204" pitchFamily="49" charset="0"/>
+                <a:cs typeface="Menlo" panose="020B0609030804020204" pitchFamily="49" charset="0"/>
               </a:rPr>
               <a:t>LoginPage</a:t>
             </a:r>
@@ -21769,7 +23373,9 @@
             <a:pPr algn="ctr"/>
             <a:r>
               <a:rPr lang="en-IT" dirty="0">
-                <a:latin typeface="Courier" pitchFamily="2" charset="0"/>
+                <a:latin typeface="Menlo" panose="020B0609030804020204" pitchFamily="49" charset="0"/>
+                <a:ea typeface="Menlo" panose="020B0609030804020204" pitchFamily="49" charset="0"/>
+                <a:cs typeface="Menlo" panose="020B0609030804020204" pitchFamily="49" charset="0"/>
               </a:rPr>
               <a:t>HomePage</a:t>
             </a:r>
@@ -21881,7 +23487,7 @@
           <a:p>
             <a:fld id="{31DE2C5B-556E-47B8-A792-024C2FCA4ACC}" type="slidenum">
               <a:rPr lang="en-GB" smtClean="0"/>
-              <a:t>39</a:t>
+              <a:t>40</a:t>
             </a:fld>
             <a:endParaRPr lang="en-GB"/>
           </a:p>
@@ -22376,168 +23982,7 @@
 </p:sld>
 </file>
 
-<file path=ppt/slides/slide4.xml><?xml version="1.0" encoding="utf-8"?>
-<p:sld xmlns:a="http://schemas.openxmlformats.org/drawingml/2006/main" xmlns:r="http://schemas.openxmlformats.org/officeDocument/2006/relationships" xmlns:p="http://schemas.openxmlformats.org/presentationml/2006/main">
-  <p:cSld>
-    <p:spTree>
-      <p:nvGrpSpPr>
-        <p:cNvPr id="1" name=""/>
-        <p:cNvGrpSpPr/>
-        <p:nvPr/>
-      </p:nvGrpSpPr>
-      <p:grpSpPr>
-        <a:xfrm>
-          <a:off x="0" y="0"/>
-          <a:ext cx="0" cy="0"/>
-          <a:chOff x="0" y="0"/>
-          <a:chExt cx="0" cy="0"/>
-        </a:xfrm>
-      </p:grpSpPr>
-      <p:sp>
-        <p:nvSpPr>
-          <p:cNvPr id="2" name="Title 1">
-            <a:extLst>
-              <a:ext uri="{FF2B5EF4-FFF2-40B4-BE49-F238E27FC236}">
-                <a16:creationId xmlns:a16="http://schemas.microsoft.com/office/drawing/2014/main" id="{122C1E14-0610-FB4E-BCD3-3BA8CADF9D02}"/>
-              </a:ext>
-            </a:extLst>
-          </p:cNvPr>
-          <p:cNvSpPr>
-            <a:spLocks noGrp="1"/>
-          </p:cNvSpPr>
-          <p:nvPr>
-            <p:ph type="title"/>
-          </p:nvPr>
-        </p:nvSpPr>
-        <p:spPr/>
-        <p:txBody>
-          <a:bodyPr/>
-          <a:lstStyle/>
-          <a:p>
-            <a:r>
-              <a:rPr lang="en-IT" dirty="0"/>
-              <a:t>Key terms</a:t>
-            </a:r>
-          </a:p>
-        </p:txBody>
-      </p:sp>
-      <p:sp>
-        <p:nvSpPr>
-          <p:cNvPr id="6" name="Content Placeholder 5">
-            <a:extLst>
-              <a:ext uri="{FF2B5EF4-FFF2-40B4-BE49-F238E27FC236}">
-                <a16:creationId xmlns:a16="http://schemas.microsoft.com/office/drawing/2014/main" id="{0EDA931C-E473-FE49-BB53-C08AAD603E18}"/>
-              </a:ext>
-            </a:extLst>
-          </p:cNvPr>
-          <p:cNvSpPr>
-            <a:spLocks noGrp="1"/>
-          </p:cNvSpPr>
-          <p:nvPr>
-            <p:ph idx="1"/>
-          </p:nvPr>
-        </p:nvSpPr>
-        <p:spPr/>
-        <p:txBody>
-          <a:bodyPr>
-            <a:normAutofit/>
-          </a:bodyPr>
-          <a:lstStyle/>
-          <a:p>
-            <a:r>
-              <a:rPr lang="en-GB" b="1" dirty="0"/>
-              <a:t>synchronous operation</a:t>
-            </a:r>
-            <a:r>
-              <a:rPr lang="en-GB" dirty="0"/>
-              <a:t>: A synchronous operation blocks other operations from executing until it completes.</a:t>
-            </a:r>
-          </a:p>
-          <a:p>
-            <a:endParaRPr lang="en-GB" dirty="0"/>
-          </a:p>
-          <a:p>
-            <a:r>
-              <a:rPr lang="en-GB" b="1" dirty="0"/>
-              <a:t>synchronous function</a:t>
-            </a:r>
-            <a:r>
-              <a:rPr lang="en-GB" dirty="0"/>
-              <a:t>: A synchronous function only performs synchronous operations.</a:t>
-            </a:r>
-          </a:p>
-          <a:p>
-            <a:endParaRPr lang="en-GB" dirty="0"/>
-          </a:p>
-          <a:p>
-            <a:r>
-              <a:rPr lang="en-GB" b="1" dirty="0"/>
-              <a:t>asynchronous operation</a:t>
-            </a:r>
-            <a:r>
-              <a:rPr lang="en-GB" dirty="0"/>
-              <a:t>: Once initiated, an asynchronous operation allows other operations to execute before it completes.</a:t>
-            </a:r>
-          </a:p>
-          <a:p>
-            <a:endParaRPr lang="en-GB" dirty="0"/>
-          </a:p>
-          <a:p>
-            <a:r>
-              <a:rPr lang="en-GB" b="1" dirty="0"/>
-              <a:t>asynchronous function</a:t>
-            </a:r>
-            <a:r>
-              <a:rPr lang="en-GB" dirty="0"/>
-              <a:t>: An asynchronous function performs at least one asynchronous operation and can also perform synchronous operations.</a:t>
-            </a:r>
-            <a:endParaRPr lang="en-IT" dirty="0"/>
-          </a:p>
-        </p:txBody>
-      </p:sp>
-      <p:sp>
-        <p:nvSpPr>
-          <p:cNvPr id="3" name="Slide Number Placeholder 2">
-            <a:extLst>
-              <a:ext uri="{FF2B5EF4-FFF2-40B4-BE49-F238E27FC236}">
-                <a16:creationId xmlns:a16="http://schemas.microsoft.com/office/drawing/2014/main" id="{8CCB4CCE-1D86-464D-84CA-9A1992A47F18}"/>
-              </a:ext>
-            </a:extLst>
-          </p:cNvPr>
-          <p:cNvSpPr>
-            <a:spLocks noGrp="1"/>
-          </p:cNvSpPr>
-          <p:nvPr>
-            <p:ph type="sldNum" sz="quarter" idx="12"/>
-          </p:nvPr>
-        </p:nvSpPr>
-        <p:spPr/>
-        <p:txBody>
-          <a:bodyPr/>
-          <a:lstStyle/>
-          <a:p>
-            <a:fld id="{31DE2C5B-556E-47B8-A792-024C2FCA4ACC}" type="slidenum">
-              <a:rPr lang="en-GB" smtClean="0"/>
-              <a:t>4</a:t>
-            </a:fld>
-            <a:endParaRPr lang="en-GB"/>
-          </a:p>
-        </p:txBody>
-      </p:sp>
-    </p:spTree>
-    <p:extLst>
-      <p:ext uri="{BB962C8B-B14F-4D97-AF65-F5344CB8AC3E}">
-        <p14:creationId xmlns:p14="http://schemas.microsoft.com/office/powerpoint/2010/main" val="3425253548"/>
-      </p:ext>
-    </p:extLst>
-  </p:cSld>
-  <p:clrMapOvr>
-    <a:masterClrMapping/>
-  </p:clrMapOvr>
-</p:sld>
-</file>
-
-<file path=ppt/slides/slide40.xml><?xml version="1.0" encoding="utf-8"?>
+<file path=ppt/slides/slide41.xml><?xml version="1.0" encoding="utf-8"?>
 <p:sld xmlns:a="http://schemas.openxmlformats.org/drawingml/2006/main" xmlns:r="http://schemas.openxmlformats.org/officeDocument/2006/relationships" xmlns:p="http://schemas.openxmlformats.org/presentationml/2006/main">
   <p:cSld>
     <p:spTree>
@@ -22684,7 +24129,7 @@
           <a:p>
             <a:r>
               <a:rPr lang="en-GB" dirty="0"/>
-              <a:t>Exercise 06.05 (medium) </a:t>
+              <a:t>Exercise 05</a:t>
             </a:r>
           </a:p>
           <a:p>
@@ -22829,7 +24274,7 @@
           <a:p>
             <a:fld id="{31DE2C5B-556E-47B8-A792-024C2FCA4ACC}" type="slidenum">
               <a:rPr lang="en-GB" smtClean="0"/>
-              <a:t>40</a:t>
+              <a:t>41</a:t>
             </a:fld>
             <a:endParaRPr lang="en-GB"/>
           </a:p>
@@ -22839,236 +24284,6 @@
     <p:extLst>
       <p:ext uri="{BB962C8B-B14F-4D97-AF65-F5344CB8AC3E}">
         <p14:creationId xmlns:p14="http://schemas.microsoft.com/office/powerpoint/2010/main" val="1053411705"/>
-      </p:ext>
-    </p:extLst>
-  </p:cSld>
-  <p:clrMapOvr>
-    <a:masterClrMapping/>
-  </p:clrMapOvr>
-</p:sld>
-</file>
-
-<file path=ppt/slides/slide41.xml><?xml version="1.0" encoding="utf-8"?>
-<p:sld xmlns:a="http://schemas.openxmlformats.org/drawingml/2006/main" xmlns:r="http://schemas.openxmlformats.org/officeDocument/2006/relationships" xmlns:p="http://schemas.openxmlformats.org/presentationml/2006/main">
-  <p:cSld>
-    <p:spTree>
-      <p:nvGrpSpPr>
-        <p:cNvPr id="1" name=""/>
-        <p:cNvGrpSpPr/>
-        <p:nvPr/>
-      </p:nvGrpSpPr>
-      <p:grpSpPr>
-        <a:xfrm>
-          <a:off x="0" y="0"/>
-          <a:ext cx="0" cy="0"/>
-          <a:chOff x="0" y="0"/>
-          <a:chExt cx="0" cy="0"/>
-        </a:xfrm>
-      </p:grpSpPr>
-      <p:sp>
-        <p:nvSpPr>
-          <p:cNvPr id="2" name="Title 1">
-            <a:extLst>
-              <a:ext uri="{FF2B5EF4-FFF2-40B4-BE49-F238E27FC236}">
-                <a16:creationId xmlns:a16="http://schemas.microsoft.com/office/drawing/2014/main" id="{122C1E14-0610-FB4E-BCD3-3BA8CADF9D02}"/>
-              </a:ext>
-            </a:extLst>
-          </p:cNvPr>
-          <p:cNvSpPr>
-            <a:spLocks noGrp="1"/>
-          </p:cNvSpPr>
-          <p:nvPr>
-            <p:ph type="title"/>
-          </p:nvPr>
-        </p:nvSpPr>
-        <p:spPr/>
-        <p:txBody>
-          <a:bodyPr/>
-          <a:lstStyle/>
-          <a:p>
-            <a:r>
-              <a:rPr lang="en-IT" dirty="0"/>
-              <a:t>Outline</a:t>
-            </a:r>
-          </a:p>
-        </p:txBody>
-      </p:sp>
-      <p:sp>
-        <p:nvSpPr>
-          <p:cNvPr id="3" name="Content Placeholder 2">
-            <a:extLst>
-              <a:ext uri="{FF2B5EF4-FFF2-40B4-BE49-F238E27FC236}">
-                <a16:creationId xmlns:a16="http://schemas.microsoft.com/office/drawing/2014/main" id="{8962CCAC-9D70-C543-BBE0-822B6CB5F5CB}"/>
-              </a:ext>
-            </a:extLst>
-          </p:cNvPr>
-          <p:cNvSpPr>
-            <a:spLocks noGrp="1"/>
-          </p:cNvSpPr>
-          <p:nvPr>
-            <p:ph idx="1"/>
-          </p:nvPr>
-        </p:nvSpPr>
-        <p:spPr>
-          <a:xfrm>
-            <a:off x="428172" y="1361167"/>
-            <a:ext cx="11213368" cy="5334907"/>
-          </a:xfrm>
-        </p:spPr>
-        <p:txBody>
-          <a:bodyPr>
-            <a:normAutofit/>
-          </a:bodyPr>
-          <a:lstStyle/>
-          <a:p>
-            <a:r>
-              <a:rPr lang="en-GB" dirty="0">
-                <a:solidFill>
-                  <a:schemeClr val="bg2">
-                    <a:lumMod val="90000"/>
-                  </a:schemeClr>
-                </a:solidFill>
-              </a:rPr>
-              <a:t>Recap</a:t>
-            </a:r>
-          </a:p>
-          <a:p>
-            <a:r>
-              <a:rPr lang="en-GB" dirty="0">
-                <a:solidFill>
-                  <a:schemeClr val="bg2">
-                    <a:lumMod val="90000"/>
-                  </a:schemeClr>
-                </a:solidFill>
-              </a:rPr>
-              <a:t>Navigator</a:t>
-            </a:r>
-          </a:p>
-          <a:p>
-            <a:r>
-              <a:rPr lang="en-GB" dirty="0">
-                <a:solidFill>
-                  <a:schemeClr val="bg2">
-                    <a:lumMod val="90000"/>
-                  </a:schemeClr>
-                </a:solidFill>
-              </a:rPr>
-              <a:t>Navigate to a new screen and back</a:t>
-            </a:r>
-          </a:p>
-          <a:p>
-            <a:r>
-              <a:rPr lang="en-GB" dirty="0">
-                <a:solidFill>
-                  <a:schemeClr val="bg2">
-                    <a:lumMod val="90000"/>
-                  </a:schemeClr>
-                </a:solidFill>
-              </a:rPr>
-              <a:t>Named routes </a:t>
-            </a:r>
-          </a:p>
-          <a:p>
-            <a:r>
-              <a:rPr lang="en-GB" dirty="0">
-                <a:solidFill>
-                  <a:schemeClr val="bg2">
-                    <a:lumMod val="90000"/>
-                  </a:schemeClr>
-                </a:solidFill>
-              </a:rPr>
-              <a:t>Passing argument to a named routes</a:t>
-            </a:r>
-          </a:p>
-          <a:p>
-            <a:r>
-              <a:rPr lang="en-GB" dirty="0">
-                <a:solidFill>
-                  <a:schemeClr val="bg2">
-                    <a:lumMod val="90000"/>
-                  </a:schemeClr>
-                </a:solidFill>
-              </a:rPr>
-              <a:t>Returning an argument from a named route</a:t>
-            </a:r>
-          </a:p>
-          <a:p>
-            <a:endParaRPr lang="en-GB" dirty="0">
-              <a:solidFill>
-                <a:schemeClr val="bg2">
-                  <a:lumMod val="90000"/>
-                </a:schemeClr>
-              </a:solidFill>
-            </a:endParaRPr>
-          </a:p>
-          <a:p>
-            <a:r>
-              <a:rPr lang="en-GB" dirty="0">
-                <a:solidFill>
-                  <a:schemeClr val="bg2">
-                    <a:lumMod val="90000"/>
-                  </a:schemeClr>
-                </a:solidFill>
-              </a:rPr>
-              <a:t>Exercise</a:t>
-            </a:r>
-          </a:p>
-          <a:p>
-            <a:r>
-              <a:rPr lang="en-GB" b="1" dirty="0"/>
-              <a:t>Homework</a:t>
-            </a:r>
-          </a:p>
-          <a:p>
-            <a:r>
-              <a:rPr lang="en-GB" dirty="0">
-                <a:solidFill>
-                  <a:schemeClr val="bg2">
-                    <a:lumMod val="90000"/>
-                  </a:schemeClr>
-                </a:solidFill>
-              </a:rPr>
-              <a:t>Resources</a:t>
-            </a:r>
-          </a:p>
-          <a:p>
-            <a:endParaRPr lang="en-GB" dirty="0"/>
-          </a:p>
-        </p:txBody>
-      </p:sp>
-      <p:sp>
-        <p:nvSpPr>
-          <p:cNvPr id="4" name="Slide Number Placeholder 3">
-            <a:extLst>
-              <a:ext uri="{FF2B5EF4-FFF2-40B4-BE49-F238E27FC236}">
-                <a16:creationId xmlns:a16="http://schemas.microsoft.com/office/drawing/2014/main" id="{A685D3AB-7ADF-DE4E-B760-7D6C21C93E9A}"/>
-              </a:ext>
-            </a:extLst>
-          </p:cNvPr>
-          <p:cNvSpPr>
-            <a:spLocks noGrp="1"/>
-          </p:cNvSpPr>
-          <p:nvPr>
-            <p:ph type="sldNum" sz="quarter" idx="12"/>
-          </p:nvPr>
-        </p:nvSpPr>
-        <p:spPr/>
-        <p:txBody>
-          <a:bodyPr/>
-          <a:lstStyle/>
-          <a:p>
-            <a:fld id="{31DE2C5B-556E-47B8-A792-024C2FCA4ACC}" type="slidenum">
-              <a:rPr lang="en-GB" smtClean="0"/>
-              <a:t>41</a:t>
-            </a:fld>
-            <a:endParaRPr lang="en-GB"/>
-          </a:p>
-        </p:txBody>
-      </p:sp>
-    </p:spTree>
-    <p:extLst>
-      <p:ext uri="{BB962C8B-B14F-4D97-AF65-F5344CB8AC3E}">
-        <p14:creationId xmlns:p14="http://schemas.microsoft.com/office/powerpoint/2010/main" val="1279224021"/>
       </p:ext>
     </p:extLst>
   </p:cSld>
@@ -23118,7 +24333,7 @@
           <a:p>
             <a:r>
               <a:rPr lang="en-IT" dirty="0"/>
-              <a:t>Homework </a:t>
+              <a:t>Outline</a:t>
             </a:r>
           </a:p>
         </p:txBody>
@@ -23152,13 +24367,117 @@
           <a:lstStyle/>
           <a:p>
             <a:r>
-              <a:rPr lang="en-GB" dirty="0"/>
-              <a:t>Get familiar with Asynchrony and Navigator</a:t>
-            </a:r>
-            <a:br>
-              <a:rPr lang="en-GB" dirty="0"/>
-            </a:br>
-            <a:endParaRPr lang="en-IT" dirty="0"/>
+              <a:rPr lang="en-GB" dirty="0">
+                <a:solidFill>
+                  <a:schemeClr val="bg2">
+                    <a:lumMod val="90000"/>
+                  </a:schemeClr>
+                </a:solidFill>
+              </a:rPr>
+              <a:t>Recap</a:t>
+            </a:r>
+          </a:p>
+          <a:p>
+            <a:r>
+              <a:rPr lang="en-GB" dirty="0">
+                <a:solidFill>
+                  <a:schemeClr val="bg2">
+                    <a:lumMod val="90000"/>
+                  </a:schemeClr>
+                </a:solidFill>
+              </a:rPr>
+              <a:t>Navigator</a:t>
+            </a:r>
+          </a:p>
+          <a:p>
+            <a:r>
+              <a:rPr lang="en-GB" dirty="0">
+                <a:solidFill>
+                  <a:schemeClr val="bg2">
+                    <a:lumMod val="90000"/>
+                  </a:schemeClr>
+                </a:solidFill>
+              </a:rPr>
+              <a:t>Navigate to a new screen and back</a:t>
+            </a:r>
+          </a:p>
+          <a:p>
+            <a:r>
+              <a:rPr lang="en-GB" dirty="0">
+                <a:solidFill>
+                  <a:schemeClr val="bg2">
+                    <a:lumMod val="90000"/>
+                  </a:schemeClr>
+                </a:solidFill>
+              </a:rPr>
+              <a:t>Named routes </a:t>
+            </a:r>
+          </a:p>
+          <a:p>
+            <a:r>
+              <a:rPr lang="en-GB" dirty="0">
+                <a:solidFill>
+                  <a:schemeClr val="bg2">
+                    <a:lumMod val="90000"/>
+                  </a:schemeClr>
+                </a:solidFill>
+              </a:rPr>
+              <a:t>Passing argument to a named routes</a:t>
+            </a:r>
+          </a:p>
+          <a:p>
+            <a:r>
+              <a:rPr lang="en-GB" dirty="0">
+                <a:solidFill>
+                  <a:schemeClr val="bg2">
+                    <a:lumMod val="90000"/>
+                  </a:schemeClr>
+                </a:solidFill>
+              </a:rPr>
+              <a:t>Returning an argument from a named route</a:t>
+            </a:r>
+          </a:p>
+          <a:p>
+            <a:endParaRPr lang="en-GB" dirty="0">
+              <a:solidFill>
+                <a:schemeClr val="bg2">
+                  <a:lumMod val="90000"/>
+                </a:schemeClr>
+              </a:solidFill>
+            </a:endParaRPr>
+          </a:p>
+          <a:p>
+            <a:r>
+              <a:rPr lang="en-GB" dirty="0">
+                <a:solidFill>
+                  <a:schemeClr val="bg2">
+                    <a:lumMod val="90000"/>
+                  </a:schemeClr>
+                </a:solidFill>
+              </a:rPr>
+              <a:t>Exercise</a:t>
+            </a:r>
+          </a:p>
+          <a:p>
+            <a:r>
+              <a:rPr lang="en-GB" b="1" dirty="0"/>
+              <a:t>Homework</a:t>
+            </a:r>
+          </a:p>
+          <a:p>
+            <a:r>
+              <a:rPr lang="en-GB" dirty="0">
+                <a:solidFill>
+                  <a:schemeClr val="bg2">
+                    <a:lumMod val="90000"/>
+                  </a:schemeClr>
+                </a:solidFill>
+              </a:rPr>
+              <a:t>Resources</a:t>
+            </a:r>
+          </a:p>
+          <a:p>
+            <a:endParaRPr lang="en-GB" dirty="0"/>
           </a:p>
         </p:txBody>
       </p:sp>
@@ -23167,7 +24486,7 @@
           <p:cNvPr id="4" name="Slide Number Placeholder 3">
             <a:extLst>
               <a:ext uri="{FF2B5EF4-FFF2-40B4-BE49-F238E27FC236}">
-                <a16:creationId xmlns:a16="http://schemas.microsoft.com/office/drawing/2014/main" id="{DA9F2601-12EC-1B4E-8F13-1A6587DF4C6A}"/>
+                <a16:creationId xmlns:a16="http://schemas.microsoft.com/office/drawing/2014/main" id="{A685D3AB-7ADF-DE4E-B760-7D6C21C93E9A}"/>
               </a:ext>
             </a:extLst>
           </p:cNvPr>
@@ -23194,7 +24513,7 @@
     </p:spTree>
     <p:extLst>
       <p:ext uri="{BB962C8B-B14F-4D97-AF65-F5344CB8AC3E}">
-        <p14:creationId xmlns:p14="http://schemas.microsoft.com/office/powerpoint/2010/main" val="895378464"/>
+        <p14:creationId xmlns:p14="http://schemas.microsoft.com/office/powerpoint/2010/main" val="1279224021"/>
       </p:ext>
     </p:extLst>
   </p:cSld>
@@ -23244,7 +24563,7 @@
           <a:p>
             <a:r>
               <a:rPr lang="en-IT" dirty="0"/>
-              <a:t>Outline</a:t>
+              <a:t>Homework </a:t>
             </a:r>
           </a:p>
         </p:txBody>
@@ -23278,117 +24597,13 @@
           <a:lstStyle/>
           <a:p>
             <a:r>
-              <a:rPr lang="en-GB" dirty="0">
-                <a:solidFill>
-                  <a:schemeClr val="bg2">
-                    <a:lumMod val="90000"/>
-                  </a:schemeClr>
-                </a:solidFill>
-              </a:rPr>
-              <a:t>Recap</a:t>
-            </a:r>
-          </a:p>
-          <a:p>
-            <a:r>
-              <a:rPr lang="en-GB" dirty="0">
-                <a:solidFill>
-                  <a:schemeClr val="bg2">
-                    <a:lumMod val="90000"/>
-                  </a:schemeClr>
-                </a:solidFill>
-              </a:rPr>
-              <a:t>Navigator</a:t>
-            </a:r>
-          </a:p>
-          <a:p>
-            <a:r>
-              <a:rPr lang="en-GB" dirty="0">
-                <a:solidFill>
-                  <a:schemeClr val="bg2">
-                    <a:lumMod val="90000"/>
-                  </a:schemeClr>
-                </a:solidFill>
-              </a:rPr>
-              <a:t>Navigate to a new screen and back</a:t>
-            </a:r>
-          </a:p>
-          <a:p>
-            <a:r>
-              <a:rPr lang="en-GB" dirty="0">
-                <a:solidFill>
-                  <a:schemeClr val="bg2">
-                    <a:lumMod val="90000"/>
-                  </a:schemeClr>
-                </a:solidFill>
-              </a:rPr>
-              <a:t>Named routes </a:t>
-            </a:r>
-          </a:p>
-          <a:p>
-            <a:r>
-              <a:rPr lang="en-GB" dirty="0">
-                <a:solidFill>
-                  <a:schemeClr val="bg2">
-                    <a:lumMod val="90000"/>
-                  </a:schemeClr>
-                </a:solidFill>
-              </a:rPr>
-              <a:t>Passing argument to a named routes</a:t>
-            </a:r>
-          </a:p>
-          <a:p>
-            <a:r>
-              <a:rPr lang="en-GB" dirty="0">
-                <a:solidFill>
-                  <a:schemeClr val="bg2">
-                    <a:lumMod val="90000"/>
-                  </a:schemeClr>
-                </a:solidFill>
-              </a:rPr>
-              <a:t>Returning an argument from a named route</a:t>
-            </a:r>
-          </a:p>
-          <a:p>
-            <a:endParaRPr lang="en-GB" dirty="0">
-              <a:solidFill>
-                <a:schemeClr val="bg2">
-                  <a:lumMod val="90000"/>
-                </a:schemeClr>
-              </a:solidFill>
-            </a:endParaRPr>
-          </a:p>
-          <a:p>
-            <a:r>
-              <a:rPr lang="en-GB" dirty="0">
-                <a:solidFill>
-                  <a:schemeClr val="bg2">
-                    <a:lumMod val="90000"/>
-                  </a:schemeClr>
-                </a:solidFill>
-              </a:rPr>
-              <a:t>Exercise</a:t>
-            </a:r>
-          </a:p>
-          <a:p>
-            <a:r>
-              <a:rPr lang="en-GB" dirty="0">
-                <a:solidFill>
-                  <a:schemeClr val="bg2">
-                    <a:lumMod val="90000"/>
-                  </a:schemeClr>
-                </a:solidFill>
-              </a:rPr>
-              <a:t>Homework</a:t>
-            </a:r>
-          </a:p>
-          <a:p>
-            <a:r>
-              <a:rPr lang="en-GB" b="1" dirty="0"/>
-              <a:t>Resources</a:t>
-            </a:r>
-          </a:p>
-          <a:p>
-            <a:endParaRPr lang="en-GB" dirty="0"/>
+              <a:rPr lang="en-GB" dirty="0"/>
+              <a:t>Get familiar with Asynchrony and Navigator</a:t>
+            </a:r>
+            <a:br>
+              <a:rPr lang="en-GB" dirty="0"/>
+            </a:br>
+            <a:endParaRPr lang="en-IT" dirty="0"/>
           </a:p>
         </p:txBody>
       </p:sp>
@@ -23397,7 +24612,7 @@
           <p:cNvPr id="4" name="Slide Number Placeholder 3">
             <a:extLst>
               <a:ext uri="{FF2B5EF4-FFF2-40B4-BE49-F238E27FC236}">
-                <a16:creationId xmlns:a16="http://schemas.microsoft.com/office/drawing/2014/main" id="{452EC4BD-0471-3748-9E2B-909E0D4B10DB}"/>
+                <a16:creationId xmlns:a16="http://schemas.microsoft.com/office/drawing/2014/main" id="{DA9F2601-12EC-1B4E-8F13-1A6587DF4C6A}"/>
               </a:ext>
             </a:extLst>
           </p:cNvPr>
@@ -23424,7 +24639,7 @@
     </p:spTree>
     <p:extLst>
       <p:ext uri="{BB962C8B-B14F-4D97-AF65-F5344CB8AC3E}">
-        <p14:creationId xmlns:p14="http://schemas.microsoft.com/office/powerpoint/2010/main" val="1415450225"/>
+        <p14:creationId xmlns:p14="http://schemas.microsoft.com/office/powerpoint/2010/main" val="895378464"/>
       </p:ext>
     </p:extLst>
   </p:cSld>
@@ -23474,6 +24689,236 @@
           <a:p>
             <a:r>
               <a:rPr lang="en-IT" dirty="0"/>
+              <a:t>Outline</a:t>
+            </a:r>
+          </a:p>
+        </p:txBody>
+      </p:sp>
+      <p:sp>
+        <p:nvSpPr>
+          <p:cNvPr id="3" name="Content Placeholder 2">
+            <a:extLst>
+              <a:ext uri="{FF2B5EF4-FFF2-40B4-BE49-F238E27FC236}">
+                <a16:creationId xmlns:a16="http://schemas.microsoft.com/office/drawing/2014/main" id="{8962CCAC-9D70-C543-BBE0-822B6CB5F5CB}"/>
+              </a:ext>
+            </a:extLst>
+          </p:cNvPr>
+          <p:cNvSpPr>
+            <a:spLocks noGrp="1"/>
+          </p:cNvSpPr>
+          <p:nvPr>
+            <p:ph idx="1"/>
+          </p:nvPr>
+        </p:nvSpPr>
+        <p:spPr>
+          <a:xfrm>
+            <a:off x="428172" y="1361167"/>
+            <a:ext cx="11213368" cy="5334907"/>
+          </a:xfrm>
+        </p:spPr>
+        <p:txBody>
+          <a:bodyPr>
+            <a:normAutofit/>
+          </a:bodyPr>
+          <a:lstStyle/>
+          <a:p>
+            <a:r>
+              <a:rPr lang="en-GB" dirty="0">
+                <a:solidFill>
+                  <a:schemeClr val="bg2">
+                    <a:lumMod val="90000"/>
+                  </a:schemeClr>
+                </a:solidFill>
+              </a:rPr>
+              <a:t>Recap</a:t>
+            </a:r>
+          </a:p>
+          <a:p>
+            <a:r>
+              <a:rPr lang="en-GB" dirty="0">
+                <a:solidFill>
+                  <a:schemeClr val="bg2">
+                    <a:lumMod val="90000"/>
+                  </a:schemeClr>
+                </a:solidFill>
+              </a:rPr>
+              <a:t>Navigator</a:t>
+            </a:r>
+          </a:p>
+          <a:p>
+            <a:r>
+              <a:rPr lang="en-GB" dirty="0">
+                <a:solidFill>
+                  <a:schemeClr val="bg2">
+                    <a:lumMod val="90000"/>
+                  </a:schemeClr>
+                </a:solidFill>
+              </a:rPr>
+              <a:t>Navigate to a new screen and back</a:t>
+            </a:r>
+          </a:p>
+          <a:p>
+            <a:r>
+              <a:rPr lang="en-GB" dirty="0">
+                <a:solidFill>
+                  <a:schemeClr val="bg2">
+                    <a:lumMod val="90000"/>
+                  </a:schemeClr>
+                </a:solidFill>
+              </a:rPr>
+              <a:t>Named routes </a:t>
+            </a:r>
+          </a:p>
+          <a:p>
+            <a:r>
+              <a:rPr lang="en-GB" dirty="0">
+                <a:solidFill>
+                  <a:schemeClr val="bg2">
+                    <a:lumMod val="90000"/>
+                  </a:schemeClr>
+                </a:solidFill>
+              </a:rPr>
+              <a:t>Passing argument to a named routes</a:t>
+            </a:r>
+          </a:p>
+          <a:p>
+            <a:r>
+              <a:rPr lang="en-GB" dirty="0">
+                <a:solidFill>
+                  <a:schemeClr val="bg2">
+                    <a:lumMod val="90000"/>
+                  </a:schemeClr>
+                </a:solidFill>
+              </a:rPr>
+              <a:t>Returning an argument from a named route</a:t>
+            </a:r>
+          </a:p>
+          <a:p>
+            <a:endParaRPr lang="en-GB" dirty="0">
+              <a:solidFill>
+                <a:schemeClr val="bg2">
+                  <a:lumMod val="90000"/>
+                </a:schemeClr>
+              </a:solidFill>
+            </a:endParaRPr>
+          </a:p>
+          <a:p>
+            <a:r>
+              <a:rPr lang="en-GB" dirty="0">
+                <a:solidFill>
+                  <a:schemeClr val="bg2">
+                    <a:lumMod val="90000"/>
+                  </a:schemeClr>
+                </a:solidFill>
+              </a:rPr>
+              <a:t>Exercise</a:t>
+            </a:r>
+          </a:p>
+          <a:p>
+            <a:r>
+              <a:rPr lang="en-GB" dirty="0">
+                <a:solidFill>
+                  <a:schemeClr val="bg2">
+                    <a:lumMod val="90000"/>
+                  </a:schemeClr>
+                </a:solidFill>
+              </a:rPr>
+              <a:t>Homework</a:t>
+            </a:r>
+          </a:p>
+          <a:p>
+            <a:r>
+              <a:rPr lang="en-GB" b="1" dirty="0"/>
+              <a:t>Resources</a:t>
+            </a:r>
+          </a:p>
+          <a:p>
+            <a:endParaRPr lang="en-GB" dirty="0"/>
+          </a:p>
+        </p:txBody>
+      </p:sp>
+      <p:sp>
+        <p:nvSpPr>
+          <p:cNvPr id="4" name="Slide Number Placeholder 3">
+            <a:extLst>
+              <a:ext uri="{FF2B5EF4-FFF2-40B4-BE49-F238E27FC236}">
+                <a16:creationId xmlns:a16="http://schemas.microsoft.com/office/drawing/2014/main" id="{452EC4BD-0471-3748-9E2B-909E0D4B10DB}"/>
+              </a:ext>
+            </a:extLst>
+          </p:cNvPr>
+          <p:cNvSpPr>
+            <a:spLocks noGrp="1"/>
+          </p:cNvSpPr>
+          <p:nvPr>
+            <p:ph type="sldNum" sz="quarter" idx="12"/>
+          </p:nvPr>
+        </p:nvSpPr>
+        <p:spPr/>
+        <p:txBody>
+          <a:bodyPr/>
+          <a:lstStyle/>
+          <a:p>
+            <a:fld id="{31DE2C5B-556E-47B8-A792-024C2FCA4ACC}" type="slidenum">
+              <a:rPr lang="en-GB" smtClean="0"/>
+              <a:t>44</a:t>
+            </a:fld>
+            <a:endParaRPr lang="en-GB"/>
+          </a:p>
+        </p:txBody>
+      </p:sp>
+    </p:spTree>
+    <p:extLst>
+      <p:ext uri="{BB962C8B-B14F-4D97-AF65-F5344CB8AC3E}">
+        <p14:creationId xmlns:p14="http://schemas.microsoft.com/office/powerpoint/2010/main" val="1415450225"/>
+      </p:ext>
+    </p:extLst>
+  </p:cSld>
+  <p:clrMapOvr>
+    <a:masterClrMapping/>
+  </p:clrMapOvr>
+</p:sld>
+</file>
+
+<file path=ppt/slides/slide45.xml><?xml version="1.0" encoding="utf-8"?>
+<p:sld xmlns:a="http://schemas.openxmlformats.org/drawingml/2006/main" xmlns:r="http://schemas.openxmlformats.org/officeDocument/2006/relationships" xmlns:p="http://schemas.openxmlformats.org/presentationml/2006/main">
+  <p:cSld>
+    <p:spTree>
+      <p:nvGrpSpPr>
+        <p:cNvPr id="1" name=""/>
+        <p:cNvGrpSpPr/>
+        <p:nvPr/>
+      </p:nvGrpSpPr>
+      <p:grpSpPr>
+        <a:xfrm>
+          <a:off x="0" y="0"/>
+          <a:ext cx="0" cy="0"/>
+          <a:chOff x="0" y="0"/>
+          <a:chExt cx="0" cy="0"/>
+        </a:xfrm>
+      </p:grpSpPr>
+      <p:sp>
+        <p:nvSpPr>
+          <p:cNvPr id="2" name="Title 1">
+            <a:extLst>
+              <a:ext uri="{FF2B5EF4-FFF2-40B4-BE49-F238E27FC236}">
+                <a16:creationId xmlns:a16="http://schemas.microsoft.com/office/drawing/2014/main" id="{122C1E14-0610-FB4E-BCD3-3BA8CADF9D02}"/>
+              </a:ext>
+            </a:extLst>
+          </p:cNvPr>
+          <p:cNvSpPr>
+            <a:spLocks noGrp="1"/>
+          </p:cNvSpPr>
+          <p:nvPr>
+            <p:ph type="title"/>
+          </p:nvPr>
+        </p:nvSpPr>
+        <p:spPr/>
+        <p:txBody>
+          <a:bodyPr/>
+          <a:lstStyle/>
+          <a:p>
+            <a:r>
+              <a:rPr lang="en-IT" dirty="0"/>
               <a:t>Resources</a:t>
             </a:r>
           </a:p>
@@ -23638,7 +25083,7 @@
           <a:p>
             <a:fld id="{31DE2C5B-556E-47B8-A792-024C2FCA4ACC}" type="slidenum">
               <a:rPr lang="en-GB" smtClean="0"/>
-              <a:t>44</a:t>
+              <a:t>45</a:t>
             </a:fld>
             <a:endParaRPr lang="en-GB"/>
           </a:p>
@@ -23744,7 +25189,9 @@
             </a:r>
             <a:r>
               <a:rPr lang="en-IT" b="1" dirty="0">
-                <a:latin typeface="Courier" pitchFamily="2" charset="0"/>
+                <a:latin typeface="Menlo" panose="020B0609030804020204" pitchFamily="49" charset="0"/>
+                <a:ea typeface="Menlo" panose="020B0609030804020204" pitchFamily="49" charset="0"/>
+                <a:cs typeface="Menlo" panose="020B0609030804020204" pitchFamily="49" charset="0"/>
               </a:rPr>
               <a:t>Future</a:t>
             </a:r>
@@ -23763,7 +25210,9 @@
             </a:r>
             <a:r>
               <a:rPr lang="en-GB" dirty="0">
-                <a:latin typeface="Courier" pitchFamily="2" charset="0"/>
+                <a:latin typeface="Menlo" panose="020B0609030804020204" pitchFamily="49" charset="0"/>
+                <a:ea typeface="Menlo" panose="020B0609030804020204" pitchFamily="49" charset="0"/>
+                <a:cs typeface="Menlo" panose="020B0609030804020204" pitchFamily="49" charset="0"/>
               </a:rPr>
               <a:t>Future</a:t>
             </a:r>
@@ -23825,9 +25274,17 @@
             </a:r>
             <a:r>
               <a:rPr lang="en-GB" dirty="0">
+                <a:latin typeface="Menlo" panose="020B0609030804020204" pitchFamily="49" charset="0"/>
+                <a:ea typeface="Menlo" panose="020B0609030804020204" pitchFamily="49" charset="0"/>
+                <a:cs typeface="Menlo" panose="020B0609030804020204" pitchFamily="49" charset="0"/>
+              </a:rPr>
+              <a:t>Future&lt;T&gt;</a:t>
+            </a:r>
+            <a:r>
+              <a:rPr lang="en-GB" dirty="0">
                 <a:latin typeface="Courier" pitchFamily="2" charset="0"/>
               </a:rPr>
-              <a:t>Future&lt;T&gt; </a:t>
+              <a:t> </a:t>
             </a:r>
             <a:r>
               <a:rPr lang="en-GB" dirty="0"/>
@@ -23837,7 +25294,15 @@
               <a:rPr lang="en-GB" dirty="0">
                 <a:latin typeface="Courier" pitchFamily="2" charset="0"/>
               </a:rPr>
-              <a:t> T</a:t>
+              <a:t> </a:t>
+            </a:r>
+            <a:r>
+              <a:rPr lang="en-GB" dirty="0">
+                <a:latin typeface="Menlo" panose="020B0609030804020204" pitchFamily="49" charset="0"/>
+                <a:ea typeface="Menlo" panose="020B0609030804020204" pitchFamily="49" charset="0"/>
+                <a:cs typeface="Menlo" panose="020B0609030804020204" pitchFamily="49" charset="0"/>
+              </a:rPr>
+              <a:t>T</a:t>
             </a:r>
             <a:r>
               <a:rPr lang="en-GB" dirty="0"/>
@@ -23845,7 +25310,9 @@
             </a:r>
             <a:r>
               <a:rPr lang="en-GB" dirty="0">
-                <a:latin typeface="Courier" pitchFamily="2" charset="0"/>
+                <a:latin typeface="Menlo" panose="020B0609030804020204" pitchFamily="49" charset="0"/>
+                <a:ea typeface="Menlo" panose="020B0609030804020204" pitchFamily="49" charset="0"/>
+                <a:cs typeface="Menlo" panose="020B0609030804020204" pitchFamily="49" charset="0"/>
               </a:rPr>
               <a:t>Future&lt;String&gt; </a:t>
             </a:r>
@@ -23855,7 +25322,9 @@
             </a:r>
             <a:r>
               <a:rPr lang="en-GB" dirty="0">
-                <a:latin typeface="Courier" pitchFamily="2" charset="0"/>
+                <a:latin typeface="Menlo" panose="020B0609030804020204" pitchFamily="49" charset="0"/>
+                <a:ea typeface="Menlo" panose="020B0609030804020204" pitchFamily="49" charset="0"/>
+                <a:cs typeface="Menlo" panose="020B0609030804020204" pitchFamily="49" charset="0"/>
               </a:rPr>
               <a:t>Future&lt;void&gt;</a:t>
             </a:r>
@@ -24005,19 +25474,25 @@
             </a:pPr>
             <a:r>
               <a:rPr lang="en-GB" sz="2000" dirty="0">
-                <a:latin typeface="Courier" pitchFamily="2" charset="0"/>
+                <a:latin typeface="Menlo" panose="020B0609030804020204" pitchFamily="49" charset="0"/>
+                <a:ea typeface="Menlo" panose="020B0609030804020204" pitchFamily="49" charset="0"/>
+                <a:cs typeface="Menlo" panose="020B0609030804020204" pitchFamily="49" charset="0"/>
               </a:rPr>
               <a:t>void </a:t>
             </a:r>
             <a:r>
               <a:rPr lang="en-GB" sz="2000" dirty="0" err="1">
-                <a:latin typeface="Courier" pitchFamily="2" charset="0"/>
+                <a:latin typeface="Menlo" panose="020B0609030804020204" pitchFamily="49" charset="0"/>
+                <a:ea typeface="Menlo" panose="020B0609030804020204" pitchFamily="49" charset="0"/>
+                <a:cs typeface="Menlo" panose="020B0609030804020204" pitchFamily="49" charset="0"/>
               </a:rPr>
               <a:t>fetchUserOrder</a:t>
             </a:r>
             <a:r>
               <a:rPr lang="en-GB" sz="2000" dirty="0">
-                <a:latin typeface="Courier" pitchFamily="2" charset="0"/>
+                <a:latin typeface="Menlo" panose="020B0609030804020204" pitchFamily="49" charset="0"/>
+                <a:ea typeface="Menlo" panose="020B0609030804020204" pitchFamily="49" charset="0"/>
+                <a:cs typeface="Menlo" panose="020B0609030804020204" pitchFamily="49" charset="0"/>
               </a:rPr>
               <a:t>() {</a:t>
             </a:r>
@@ -24028,37 +25503,49 @@
             </a:pPr>
             <a:r>
               <a:rPr lang="en-GB" sz="2000" dirty="0">
-                <a:latin typeface="Courier" pitchFamily="2" charset="0"/>
+                <a:latin typeface="Menlo" panose="020B0609030804020204" pitchFamily="49" charset="0"/>
+                <a:ea typeface="Menlo" panose="020B0609030804020204" pitchFamily="49" charset="0"/>
+                <a:cs typeface="Menlo" panose="020B0609030804020204" pitchFamily="49" charset="0"/>
               </a:rPr>
               <a:t>  </a:t>
             </a:r>
             <a:r>
               <a:rPr lang="en-GB" sz="2000" b="1" dirty="0" err="1">
-                <a:latin typeface="Courier" pitchFamily="2" charset="0"/>
+                <a:latin typeface="Menlo" panose="020B0609030804020204" pitchFamily="49" charset="0"/>
+                <a:ea typeface="Menlo" panose="020B0609030804020204" pitchFamily="49" charset="0"/>
+                <a:cs typeface="Menlo" panose="020B0609030804020204" pitchFamily="49" charset="0"/>
               </a:rPr>
               <a:t>Future</a:t>
             </a:r>
             <a:r>
               <a:rPr lang="en-GB" sz="2000" dirty="0" err="1">
-                <a:latin typeface="Courier" pitchFamily="2" charset="0"/>
+                <a:latin typeface="Menlo" panose="020B0609030804020204" pitchFamily="49" charset="0"/>
+                <a:ea typeface="Menlo" panose="020B0609030804020204" pitchFamily="49" charset="0"/>
+                <a:cs typeface="Menlo" panose="020B0609030804020204" pitchFamily="49" charset="0"/>
               </a:rPr>
               <a:t>.delayed</a:t>
             </a:r>
             <a:r>
               <a:rPr lang="en-GB" sz="2000" dirty="0">
-                <a:latin typeface="Courier" pitchFamily="2" charset="0"/>
+                <a:latin typeface="Menlo" panose="020B0609030804020204" pitchFamily="49" charset="0"/>
+                <a:ea typeface="Menlo" panose="020B0609030804020204" pitchFamily="49" charset="0"/>
+                <a:cs typeface="Menlo" panose="020B0609030804020204" pitchFamily="49" charset="0"/>
               </a:rPr>
               <a:t>(</a:t>
             </a:r>
             <a:r>
               <a:rPr lang="en-GB" sz="2000" dirty="0" err="1">
-                <a:latin typeface="Courier" pitchFamily="2" charset="0"/>
+                <a:latin typeface="Menlo" panose="020B0609030804020204" pitchFamily="49" charset="0"/>
+                <a:ea typeface="Menlo" panose="020B0609030804020204" pitchFamily="49" charset="0"/>
+                <a:cs typeface="Menlo" panose="020B0609030804020204" pitchFamily="49" charset="0"/>
               </a:rPr>
               <a:t>const</a:t>
             </a:r>
             <a:r>
               <a:rPr lang="en-GB" sz="2000" dirty="0">
-                <a:latin typeface="Courier" pitchFamily="2" charset="0"/>
+                <a:latin typeface="Menlo" panose="020B0609030804020204" pitchFamily="49" charset="0"/>
+                <a:ea typeface="Menlo" panose="020B0609030804020204" pitchFamily="49" charset="0"/>
+                <a:cs typeface="Menlo" panose="020B0609030804020204" pitchFamily="49" charset="0"/>
               </a:rPr>
               <a:t> 	Duration(seconds: 2), () =&gt; print('Large Latte'));</a:t>
             </a:r>
@@ -24069,18 +25556,24 @@
             </a:pPr>
             <a:r>
               <a:rPr lang="en-GB" sz="2000" dirty="0">
-                <a:latin typeface="Courier" pitchFamily="2" charset="0"/>
+                <a:latin typeface="Menlo" panose="020B0609030804020204" pitchFamily="49" charset="0"/>
+                <a:ea typeface="Menlo" panose="020B0609030804020204" pitchFamily="49" charset="0"/>
+                <a:cs typeface="Menlo" panose="020B0609030804020204" pitchFamily="49" charset="0"/>
               </a:rPr>
               <a:t>}//</a:t>
             </a:r>
             <a:r>
               <a:rPr lang="en-GB" sz="2000" dirty="0" err="1">
-                <a:latin typeface="Courier" pitchFamily="2" charset="0"/>
+                <a:latin typeface="Menlo" panose="020B0609030804020204" pitchFamily="49" charset="0"/>
+                <a:ea typeface="Menlo" panose="020B0609030804020204" pitchFamily="49" charset="0"/>
+                <a:cs typeface="Menlo" panose="020B0609030804020204" pitchFamily="49" charset="0"/>
               </a:rPr>
               <a:t>fetchUserOrder</a:t>
             </a:r>
             <a:endParaRPr lang="en-GB" sz="2000" dirty="0">
-              <a:latin typeface="Courier" pitchFamily="2" charset="0"/>
+              <a:latin typeface="Menlo" panose="020B0609030804020204" pitchFamily="49" charset="0"/>
+              <a:ea typeface="Menlo" panose="020B0609030804020204" pitchFamily="49" charset="0"/>
+              <a:cs typeface="Menlo" panose="020B0609030804020204" pitchFamily="49" charset="0"/>
             </a:endParaRPr>
           </a:p>
           <a:p>
@@ -24089,12 +25582,16 @@
             </a:pPr>
             <a:br>
               <a:rPr lang="en-GB" sz="2000" dirty="0">
-                <a:latin typeface="Courier" pitchFamily="2" charset="0"/>
+                <a:latin typeface="Menlo" panose="020B0609030804020204" pitchFamily="49" charset="0"/>
+                <a:ea typeface="Menlo" panose="020B0609030804020204" pitchFamily="49" charset="0"/>
+                <a:cs typeface="Menlo" panose="020B0609030804020204" pitchFamily="49" charset="0"/>
               </a:rPr>
             </a:br>
             <a:r>
               <a:rPr lang="en-GB" sz="2000" dirty="0">
-                <a:latin typeface="Courier" pitchFamily="2" charset="0"/>
+                <a:latin typeface="Menlo" panose="020B0609030804020204" pitchFamily="49" charset="0"/>
+                <a:ea typeface="Menlo" panose="020B0609030804020204" pitchFamily="49" charset="0"/>
+                <a:cs typeface="Menlo" panose="020B0609030804020204" pitchFamily="49" charset="0"/>
               </a:rPr>
               <a:t>void main() {</a:t>
             </a:r>
@@ -24105,12 +25602,16 @@
             </a:pPr>
             <a:br>
               <a:rPr lang="en-GB" sz="2000" dirty="0">
-                <a:latin typeface="Courier" pitchFamily="2" charset="0"/>
+                <a:latin typeface="Menlo" panose="020B0609030804020204" pitchFamily="49" charset="0"/>
+                <a:ea typeface="Menlo" panose="020B0609030804020204" pitchFamily="49" charset="0"/>
+                <a:cs typeface="Menlo" panose="020B0609030804020204" pitchFamily="49" charset="0"/>
               </a:rPr>
             </a:br>
             <a:r>
               <a:rPr lang="en-GB" sz="2000" dirty="0">
-                <a:latin typeface="Courier" pitchFamily="2" charset="0"/>
+                <a:latin typeface="Menlo" panose="020B0609030804020204" pitchFamily="49" charset="0"/>
+                <a:ea typeface="Menlo" panose="020B0609030804020204" pitchFamily="49" charset="0"/>
+                <a:cs typeface="Menlo" panose="020B0609030804020204" pitchFamily="49" charset="0"/>
               </a:rPr>
               <a:t>  print('Fetching user order...’);</a:t>
             </a:r>
@@ -24121,19 +25622,25 @@
             </a:pPr>
             <a:r>
               <a:rPr lang="en-GB" sz="2000" dirty="0">
-                <a:latin typeface="Courier" pitchFamily="2" charset="0"/>
+                <a:latin typeface="Menlo" panose="020B0609030804020204" pitchFamily="49" charset="0"/>
+                <a:ea typeface="Menlo" panose="020B0609030804020204" pitchFamily="49" charset="0"/>
+                <a:cs typeface="Menlo" panose="020B0609030804020204" pitchFamily="49" charset="0"/>
               </a:rPr>
               <a:t>  </a:t>
             </a:r>
             <a:r>
               <a:rPr lang="en-GB" sz="2000" dirty="0" err="1">
-                <a:latin typeface="Courier" pitchFamily="2" charset="0"/>
+                <a:latin typeface="Menlo" panose="020B0609030804020204" pitchFamily="49" charset="0"/>
+                <a:ea typeface="Menlo" panose="020B0609030804020204" pitchFamily="49" charset="0"/>
+                <a:cs typeface="Menlo" panose="020B0609030804020204" pitchFamily="49" charset="0"/>
               </a:rPr>
               <a:t>fetchUserOrder</a:t>
             </a:r>
             <a:r>
               <a:rPr lang="en-GB" sz="2000" dirty="0">
-                <a:latin typeface="Courier" pitchFamily="2" charset="0"/>
+                <a:latin typeface="Menlo" panose="020B0609030804020204" pitchFamily="49" charset="0"/>
+                <a:ea typeface="Menlo" panose="020B0609030804020204" pitchFamily="49" charset="0"/>
+                <a:cs typeface="Menlo" panose="020B0609030804020204" pitchFamily="49" charset="0"/>
               </a:rPr>
               <a:t>();</a:t>
             </a:r>
@@ -24144,7 +25651,9 @@
             </a:pPr>
             <a:r>
               <a:rPr lang="en-GB" sz="2000" dirty="0">
-                <a:latin typeface="Courier" pitchFamily="2" charset="0"/>
+                <a:latin typeface="Menlo" panose="020B0609030804020204" pitchFamily="49" charset="0"/>
+                <a:ea typeface="Menlo" panose="020B0609030804020204" pitchFamily="49" charset="0"/>
+                <a:cs typeface="Menlo" panose="020B0609030804020204" pitchFamily="49" charset="0"/>
               </a:rPr>
               <a:t>  print('Done');</a:t>
             </a:r>
@@ -24155,12 +25664,16 @@
             </a:pPr>
             <a:br>
               <a:rPr lang="en-GB" sz="2000" dirty="0">
-                <a:latin typeface="Courier" pitchFamily="2" charset="0"/>
+                <a:latin typeface="Menlo" panose="020B0609030804020204" pitchFamily="49" charset="0"/>
+                <a:ea typeface="Menlo" panose="020B0609030804020204" pitchFamily="49" charset="0"/>
+                <a:cs typeface="Menlo" panose="020B0609030804020204" pitchFamily="49" charset="0"/>
               </a:rPr>
             </a:br>
             <a:r>
               <a:rPr lang="en-GB" sz="2000" dirty="0">
-                <a:latin typeface="Courier" pitchFamily="2" charset="0"/>
+                <a:latin typeface="Menlo" panose="020B0609030804020204" pitchFamily="49" charset="0"/>
+                <a:ea typeface="Menlo" panose="020B0609030804020204" pitchFamily="49" charset="0"/>
+                <a:cs typeface="Menlo" panose="020B0609030804020204" pitchFamily="49" charset="0"/>
               </a:rPr>
               <a:t>}//main</a:t>
             </a:r>
@@ -24591,9 +26104,9 @@
           <p:nvPr/>
         </p:nvCxnSpPr>
         <p:spPr>
-          <a:xfrm flipV="1">
-            <a:off x="2407534" y="3424218"/>
-            <a:ext cx="5590572" cy="201056"/>
+          <a:xfrm>
+            <a:off x="2497015" y="3312942"/>
+            <a:ext cx="5501091" cy="111276"/>
           </a:xfrm>
           <a:prstGeom prst="straightConnector1">
             <a:avLst/>
@@ -24662,8 +26175,8 @@
         </p:nvCxnSpPr>
         <p:spPr>
           <a:xfrm flipV="1">
-            <a:off x="2825930" y="4573503"/>
-            <a:ext cx="5253199" cy="521218"/>
+            <a:off x="2876843" y="4573503"/>
+            <a:ext cx="5202286" cy="160275"/>
           </a:xfrm>
           <a:prstGeom prst="straightConnector1">
             <a:avLst/>
@@ -24821,7 +26334,9 @@
             </a:r>
             <a:r>
               <a:rPr lang="en-GB" b="1" dirty="0">
-                <a:latin typeface="Courier" pitchFamily="2" charset="0"/>
+                <a:latin typeface="Menlo" panose="020B0609030804020204" pitchFamily="49" charset="0"/>
+                <a:ea typeface="Menlo" panose="020B0609030804020204" pitchFamily="49" charset="0"/>
+                <a:cs typeface="Menlo" panose="020B0609030804020204" pitchFamily="49" charset="0"/>
               </a:rPr>
               <a:t>async</a:t>
             </a:r>
@@ -24831,7 +26346,9 @@
             </a:r>
             <a:r>
               <a:rPr lang="en-GB" b="1" dirty="0">
-                <a:latin typeface="Courier" pitchFamily="2" charset="0"/>
+                <a:latin typeface="Menlo" panose="020B0609030804020204" pitchFamily="49" charset="0"/>
+                <a:ea typeface="Menlo" panose="020B0609030804020204" pitchFamily="49" charset="0"/>
+                <a:cs typeface="Menlo" panose="020B0609030804020204" pitchFamily="49" charset="0"/>
               </a:rPr>
               <a:t>await</a:t>
             </a:r>
@@ -24841,7 +26358,9 @@
             </a:r>
             <a:r>
               <a:rPr lang="en-GB" dirty="0">
-                <a:latin typeface="Courier" pitchFamily="2" charset="0"/>
+                <a:latin typeface="Menlo" panose="020B0609030804020204" pitchFamily="49" charset="0"/>
+                <a:ea typeface="Menlo" panose="020B0609030804020204" pitchFamily="49" charset="0"/>
+                <a:cs typeface="Menlo" panose="020B0609030804020204" pitchFamily="49" charset="0"/>
               </a:rPr>
               <a:t>async</a:t>
             </a:r>
@@ -24851,7 +26370,9 @@
             </a:r>
             <a:r>
               <a:rPr lang="en-GB" dirty="0">
-                <a:latin typeface="Courier" pitchFamily="2" charset="0"/>
+                <a:latin typeface="Menlo" panose="020B0609030804020204" pitchFamily="49" charset="0"/>
+                <a:ea typeface="Menlo" panose="020B0609030804020204" pitchFamily="49" charset="0"/>
+                <a:cs typeface="Menlo" panose="020B0609030804020204" pitchFamily="49" charset="0"/>
               </a:rPr>
               <a:t>await</a:t>
             </a:r>
@@ -24876,7 +26397,9 @@
             </a:r>
             <a:r>
               <a:rPr lang="en-GB" b="1" dirty="0">
-                <a:latin typeface="Courier" pitchFamily="2" charset="0"/>
+                <a:latin typeface="Menlo" panose="020B0609030804020204" pitchFamily="49" charset="0"/>
+                <a:ea typeface="Menlo" panose="020B0609030804020204" pitchFamily="49" charset="0"/>
+                <a:cs typeface="Menlo" panose="020B0609030804020204" pitchFamily="49" charset="0"/>
               </a:rPr>
               <a:t>async</a:t>
             </a:r>
@@ -24886,7 +26409,9 @@
             </a:r>
             <a:r>
               <a:rPr lang="en-GB" dirty="0">
-                <a:latin typeface="Courier" pitchFamily="2" charset="0"/>
+                <a:latin typeface="Menlo" panose="020B0609030804020204" pitchFamily="49" charset="0"/>
+                <a:ea typeface="Menlo" panose="020B0609030804020204" pitchFamily="49" charset="0"/>
+                <a:cs typeface="Menlo" panose="020B0609030804020204" pitchFamily="49" charset="0"/>
               </a:rPr>
               <a:t>Future</a:t>
             </a:r>
@@ -24911,7 +26436,9 @@
             </a:r>
             <a:r>
               <a:rPr lang="en-GB" b="1" dirty="0">
-                <a:latin typeface="Courier" pitchFamily="2" charset="0"/>
+                <a:latin typeface="Menlo" panose="020B0609030804020204" pitchFamily="49" charset="0"/>
+                <a:ea typeface="Menlo" panose="020B0609030804020204" pitchFamily="49" charset="0"/>
+                <a:cs typeface="Menlo" panose="020B0609030804020204" pitchFamily="49" charset="0"/>
               </a:rPr>
               <a:t>await</a:t>
             </a:r>
@@ -25067,7 +26594,9 @@
             </a:r>
             <a:r>
               <a:rPr lang="en-GB" dirty="0">
-                <a:latin typeface="Courier" pitchFamily="2" charset="0"/>
+                <a:latin typeface="Menlo" panose="020B0609030804020204" pitchFamily="49" charset="0"/>
+                <a:ea typeface="Menlo" panose="020B0609030804020204" pitchFamily="49" charset="0"/>
+                <a:cs typeface="Menlo" panose="020B0609030804020204" pitchFamily="49" charset="0"/>
               </a:rPr>
               <a:t>async</a:t>
             </a:r>
@@ -25087,19 +26616,25 @@
             </a:r>
             <a:r>
               <a:rPr lang="en-GB" dirty="0">
-                <a:latin typeface="Courier" pitchFamily="2" charset="0"/>
+                <a:latin typeface="Menlo" panose="020B0609030804020204" pitchFamily="49" charset="0"/>
+                <a:ea typeface="Menlo" panose="020B0609030804020204" pitchFamily="49" charset="0"/>
+                <a:cs typeface="Menlo" panose="020B0609030804020204" pitchFamily="49" charset="0"/>
               </a:rPr>
               <a:t>void main() </a:t>
             </a:r>
             <a:r>
               <a:rPr lang="en-GB" b="1" dirty="0">
-                <a:latin typeface="Courier" pitchFamily="2" charset="0"/>
+                <a:latin typeface="Menlo" panose="020B0609030804020204" pitchFamily="49" charset="0"/>
+                <a:ea typeface="Menlo" panose="020B0609030804020204" pitchFamily="49" charset="0"/>
+                <a:cs typeface="Menlo" panose="020B0609030804020204" pitchFamily="49" charset="0"/>
               </a:rPr>
               <a:t>async</a:t>
             </a:r>
             <a:r>
               <a:rPr lang="en-GB" dirty="0">
-                <a:latin typeface="Courier" pitchFamily="2" charset="0"/>
+                <a:latin typeface="Menlo" panose="020B0609030804020204" pitchFamily="49" charset="0"/>
+                <a:ea typeface="Menlo" panose="020B0609030804020204" pitchFamily="49" charset="0"/>
+                <a:cs typeface="Menlo" panose="020B0609030804020204" pitchFamily="49" charset="0"/>
               </a:rPr>
               <a:t> {}</a:t>
             </a:r>
@@ -25116,7 +26651,9 @@
             </a:r>
             <a:r>
               <a:rPr lang="en-GB" dirty="0">
-                <a:latin typeface="Courier" pitchFamily="2" charset="0"/>
+                <a:latin typeface="Menlo" panose="020B0609030804020204" pitchFamily="49" charset="0"/>
+                <a:ea typeface="Menlo" panose="020B0609030804020204" pitchFamily="49" charset="0"/>
+                <a:cs typeface="Menlo" panose="020B0609030804020204" pitchFamily="49" charset="0"/>
               </a:rPr>
               <a:t>Future</a:t>
             </a:r>
@@ -25136,13 +26673,17 @@
             </a:r>
             <a:r>
               <a:rPr lang="en-GB" b="1" dirty="0">
-                <a:latin typeface="Courier" pitchFamily="2" charset="0"/>
+                <a:latin typeface="Menlo" panose="020B0609030804020204" pitchFamily="49" charset="0"/>
+                <a:ea typeface="Menlo" panose="020B0609030804020204" pitchFamily="49" charset="0"/>
+                <a:cs typeface="Menlo" panose="020B0609030804020204" pitchFamily="49" charset="0"/>
               </a:rPr>
               <a:t>Future&lt;void&gt; </a:t>
             </a:r>
             <a:r>
               <a:rPr lang="en-GB" dirty="0">
-                <a:latin typeface="Courier" pitchFamily="2" charset="0"/>
+                <a:latin typeface="Menlo" panose="020B0609030804020204" pitchFamily="49" charset="0"/>
+                <a:ea typeface="Menlo" panose="020B0609030804020204" pitchFamily="49" charset="0"/>
+                <a:cs typeface="Menlo" panose="020B0609030804020204" pitchFamily="49" charset="0"/>
               </a:rPr>
               <a:t>main() async {}</a:t>
             </a:r>
@@ -25160,7 +26701,9 @@
             </a:r>
             <a:r>
               <a:rPr lang="en-GB" dirty="0">
-                <a:latin typeface="Courier" pitchFamily="2" charset="0"/>
+                <a:latin typeface="Menlo" panose="020B0609030804020204" pitchFamily="49" charset="0"/>
+                <a:ea typeface="Menlo" panose="020B0609030804020204" pitchFamily="49" charset="0"/>
+                <a:cs typeface="Menlo" panose="020B0609030804020204" pitchFamily="49" charset="0"/>
               </a:rPr>
               <a:t>await</a:t>
             </a:r>
@@ -25180,25 +26723,33 @@
             </a:pPr>
             <a:r>
               <a:rPr lang="en-GB" b="1" dirty="0">
-                <a:latin typeface="Courier" pitchFamily="2" charset="0"/>
+                <a:latin typeface="Menlo" panose="020B0609030804020204" pitchFamily="49" charset="0"/>
+                <a:ea typeface="Menlo" panose="020B0609030804020204" pitchFamily="49" charset="0"/>
+                <a:cs typeface="Menlo" panose="020B0609030804020204" pitchFamily="49" charset="0"/>
               </a:rPr>
               <a:t>await</a:t>
             </a:r>
             <a:r>
               <a:rPr lang="en-GB" dirty="0">
-                <a:latin typeface="Courier" pitchFamily="2" charset="0"/>
+                <a:latin typeface="Menlo" panose="020B0609030804020204" pitchFamily="49" charset="0"/>
+                <a:ea typeface="Menlo" panose="020B0609030804020204" pitchFamily="49" charset="0"/>
+                <a:cs typeface="Menlo" panose="020B0609030804020204" pitchFamily="49" charset="0"/>
               </a:rPr>
               <a:t> </a:t>
             </a:r>
             <a:r>
               <a:rPr lang="en-GB" dirty="0" err="1">
-                <a:latin typeface="Courier" pitchFamily="2" charset="0"/>
+                <a:latin typeface="Menlo" panose="020B0609030804020204" pitchFamily="49" charset="0"/>
+                <a:ea typeface="Menlo" panose="020B0609030804020204" pitchFamily="49" charset="0"/>
+                <a:cs typeface="Menlo" panose="020B0609030804020204" pitchFamily="49" charset="0"/>
               </a:rPr>
               <a:t>fetchUserOrder</a:t>
             </a:r>
             <a:r>
               <a:rPr lang="en-GB" dirty="0">
-                <a:latin typeface="Courier" pitchFamily="2" charset="0"/>
+                <a:latin typeface="Menlo" panose="020B0609030804020204" pitchFamily="49" charset="0"/>
+                <a:ea typeface="Menlo" panose="020B0609030804020204" pitchFamily="49" charset="0"/>
+                <a:cs typeface="Menlo" panose="020B0609030804020204" pitchFamily="49" charset="0"/>
               </a:rPr>
               <a:t>();</a:t>
             </a:r>
@@ -25350,7 +26901,9 @@
             </a:r>
             <a:r>
               <a:rPr lang="en-GB" dirty="0" err="1">
-                <a:latin typeface="Courier" pitchFamily="2" charset="0"/>
+                <a:latin typeface="Menlo" panose="020B0609030804020204" pitchFamily="49" charset="0"/>
+                <a:ea typeface="Menlo" panose="020B0609030804020204" pitchFamily="49" charset="0"/>
+                <a:cs typeface="Menlo" panose="020B0609030804020204" pitchFamily="49" charset="0"/>
               </a:rPr>
               <a:t>fetchUserOrder</a:t>
             </a:r>
@@ -25372,7 +26925,9 @@
             </a:r>
             <a:r>
               <a:rPr lang="en-GB" dirty="0">
-                <a:latin typeface="Courier" pitchFamily="2" charset="0"/>
+                <a:latin typeface="Menlo" panose="020B0609030804020204" pitchFamily="49" charset="0"/>
+                <a:ea typeface="Menlo" panose="020B0609030804020204" pitchFamily="49" charset="0"/>
+                <a:cs typeface="Menlo" panose="020B0609030804020204" pitchFamily="49" charset="0"/>
               </a:rPr>
               <a:t>async</a:t>
             </a:r>
@@ -25392,50 +26947,68 @@
             </a:r>
             <a:r>
               <a:rPr lang="en-GB" dirty="0">
-                <a:latin typeface="Courier" pitchFamily="2" charset="0"/>
+                <a:latin typeface="Menlo" panose="020B0609030804020204" pitchFamily="49" charset="0"/>
+                <a:ea typeface="Menlo" panose="020B0609030804020204" pitchFamily="49" charset="0"/>
+                <a:cs typeface="Menlo" panose="020B0609030804020204" pitchFamily="49" charset="0"/>
               </a:rPr>
               <a:t>void </a:t>
             </a:r>
             <a:r>
               <a:rPr lang="en-GB" dirty="0" err="1">
-                <a:latin typeface="Courier" pitchFamily="2" charset="0"/>
+                <a:latin typeface="Menlo" panose="020B0609030804020204" pitchFamily="49" charset="0"/>
+                <a:ea typeface="Menlo" panose="020B0609030804020204" pitchFamily="49" charset="0"/>
+                <a:cs typeface="Menlo" panose="020B0609030804020204" pitchFamily="49" charset="0"/>
               </a:rPr>
               <a:t>fetchUserOrder</a:t>
+            </a:r>
+            <a:r>
+              <a:rPr lang="en-GB" dirty="0">
+                <a:latin typeface="Menlo" panose="020B0609030804020204" pitchFamily="49" charset="0"/>
+                <a:ea typeface="Menlo" panose="020B0609030804020204" pitchFamily="49" charset="0"/>
+                <a:cs typeface="Menlo" panose="020B0609030804020204" pitchFamily="49" charset="0"/>
+              </a:rPr>
+              <a:t>() </a:t>
+            </a:r>
+            <a:r>
+              <a:rPr lang="en-GB" b="1" dirty="0">
+                <a:latin typeface="Menlo" panose="020B0609030804020204" pitchFamily="49" charset="0"/>
+                <a:ea typeface="Menlo" panose="020B0609030804020204" pitchFamily="49" charset="0"/>
+                <a:cs typeface="Menlo" panose="020B0609030804020204" pitchFamily="49" charset="0"/>
+              </a:rPr>
+              <a:t>async</a:t>
+            </a:r>
+            <a:r>
+              <a:rPr lang="en-GB" dirty="0">
+                <a:latin typeface="Menlo" panose="020B0609030804020204" pitchFamily="49" charset="0"/>
+                <a:ea typeface="Menlo" panose="020B0609030804020204" pitchFamily="49" charset="0"/>
+                <a:cs typeface="Menlo" panose="020B0609030804020204" pitchFamily="49" charset="0"/>
+              </a:rPr>
+              <a:t> {}</a:t>
+            </a:r>
+          </a:p>
+          <a:p>
+            <a:pPr lvl="2"/>
+            <a:endParaRPr lang="en-GB" dirty="0"/>
+          </a:p>
+          <a:p>
+            <a:pPr lvl="1"/>
+            <a:r>
+              <a:rPr lang="en-GB" dirty="0"/>
+              <a:t>Wrap the return type in a </a:t>
+            </a:r>
+            <a:r>
+              <a:rPr lang="en-GB" dirty="0">
+                <a:latin typeface="Menlo" panose="020B0609030804020204" pitchFamily="49" charset="0"/>
+                <a:ea typeface="Menlo" panose="020B0609030804020204" pitchFamily="49" charset="0"/>
+                <a:cs typeface="Menlo" panose="020B0609030804020204" pitchFamily="49" charset="0"/>
+              </a:rPr>
+              <a:t>Future</a:t>
             </a:r>
             <a:r>
               <a:rPr lang="en-GB" dirty="0">
                 <a:latin typeface="Courier" pitchFamily="2" charset="0"/>
               </a:rPr>
-              <a:t>() </a:t>
-            </a:r>
-            <a:r>
-              <a:rPr lang="en-GB" b="1" dirty="0">
-                <a:latin typeface="Courier" pitchFamily="2" charset="0"/>
-              </a:rPr>
-              <a:t>async</a:t>
-            </a:r>
-            <a:r>
-              <a:rPr lang="en-GB" dirty="0">
-                <a:latin typeface="Courier" pitchFamily="2" charset="0"/>
-              </a:rPr>
-              <a:t> {}</a:t>
-            </a:r>
-          </a:p>
-          <a:p>
-            <a:pPr lvl="2"/>
-            <a:endParaRPr lang="en-GB" dirty="0"/>
-          </a:p>
-          <a:p>
-            <a:pPr lvl="1"/>
-            <a:r>
-              <a:rPr lang="en-GB" dirty="0"/>
-              <a:t>Wrap the return type in a </a:t>
-            </a:r>
-            <a:r>
-              <a:rPr lang="en-GB" dirty="0">
-                <a:latin typeface="Courier" pitchFamily="2" charset="0"/>
-              </a:rPr>
-              <a:t>Future:</a:t>
+              <a:t>:</a:t>
             </a:r>
             <a:br>
               <a:rPr lang="en-GB" dirty="0"/>
@@ -25449,19 +27022,25 @@
             </a:r>
             <a:r>
               <a:rPr lang="en-GB" b="1" dirty="0">
-                <a:latin typeface="Courier" pitchFamily="2" charset="0"/>
+                <a:latin typeface="Menlo" panose="020B0609030804020204" pitchFamily="49" charset="0"/>
+                <a:ea typeface="Menlo" panose="020B0609030804020204" pitchFamily="49" charset="0"/>
+                <a:cs typeface="Menlo" panose="020B0609030804020204" pitchFamily="49" charset="0"/>
               </a:rPr>
               <a:t>Future&lt;void&gt; </a:t>
             </a:r>
             <a:r>
               <a:rPr lang="en-GB" dirty="0" err="1">
-                <a:latin typeface="Courier" pitchFamily="2" charset="0"/>
+                <a:latin typeface="Menlo" panose="020B0609030804020204" pitchFamily="49" charset="0"/>
+                <a:ea typeface="Menlo" panose="020B0609030804020204" pitchFamily="49" charset="0"/>
+                <a:cs typeface="Menlo" panose="020B0609030804020204" pitchFamily="49" charset="0"/>
               </a:rPr>
               <a:t>fetchUserOrder</a:t>
             </a:r>
             <a:r>
               <a:rPr lang="en-GB" dirty="0">
-                <a:latin typeface="Courier" pitchFamily="2" charset="0"/>
+                <a:latin typeface="Menlo" panose="020B0609030804020204" pitchFamily="49" charset="0"/>
+                <a:ea typeface="Menlo" panose="020B0609030804020204" pitchFamily="49" charset="0"/>
+                <a:cs typeface="Menlo" panose="020B0609030804020204" pitchFamily="49" charset="0"/>
               </a:rPr>
               <a:t>() async {}</a:t>
             </a:r>
@@ -25480,7 +27059,9 @@
             </a:r>
             <a:r>
               <a:rPr lang="en-GB" dirty="0">
-                <a:latin typeface="Courier" pitchFamily="2" charset="0"/>
+                <a:latin typeface="Menlo" panose="020B0609030804020204" pitchFamily="49" charset="0"/>
+                <a:ea typeface="Menlo" panose="020B0609030804020204" pitchFamily="49" charset="0"/>
+                <a:cs typeface="Menlo" panose="020B0609030804020204" pitchFamily="49" charset="0"/>
               </a:rPr>
               <a:t>await</a:t>
             </a:r>
@@ -25500,24 +27081,32 @@
             </a:r>
             <a:r>
               <a:rPr lang="en-GB" b="1" dirty="0">
-                <a:latin typeface="Courier" pitchFamily="2" charset="0"/>
+                <a:latin typeface="Menlo" panose="020B0609030804020204" pitchFamily="49" charset="0"/>
+                <a:ea typeface="Menlo" panose="020B0609030804020204" pitchFamily="49" charset="0"/>
+                <a:cs typeface="Menlo" panose="020B0609030804020204" pitchFamily="49" charset="0"/>
               </a:rPr>
               <a:t>await </a:t>
             </a:r>
             <a:r>
               <a:rPr lang="en-GB" b="1" dirty="0" err="1">
-                <a:latin typeface="Courier" pitchFamily="2" charset="0"/>
+                <a:latin typeface="Menlo" panose="020B0609030804020204" pitchFamily="49" charset="0"/>
+                <a:ea typeface="Menlo" panose="020B0609030804020204" pitchFamily="49" charset="0"/>
+                <a:cs typeface="Menlo" panose="020B0609030804020204" pitchFamily="49" charset="0"/>
               </a:rPr>
               <a:t>Future.delayed</a:t>
             </a:r>
             <a:r>
               <a:rPr lang="en-GB" b="1" dirty="0">
-                <a:latin typeface="Courier" pitchFamily="2" charset="0"/>
-              </a:rPr>
-              <a:t>...</a:t>
+                <a:latin typeface="Menlo" panose="020B0609030804020204" pitchFamily="49" charset="0"/>
+                <a:ea typeface="Menlo" panose="020B0609030804020204" pitchFamily="49" charset="0"/>
+                <a:cs typeface="Menlo" panose="020B0609030804020204" pitchFamily="49" charset="0"/>
+              </a:rPr>
+              <a:t>(...)</a:t>
             </a:r>
             <a:endParaRPr lang="en-GB" dirty="0">
-              <a:latin typeface="Courier" pitchFamily="2" charset="0"/>
+              <a:latin typeface="Menlo" panose="020B0609030804020204" pitchFamily="49" charset="0"/>
+              <a:ea typeface="Menlo" panose="020B0609030804020204" pitchFamily="49" charset="0"/>
+              <a:cs typeface="Menlo" panose="020B0609030804020204" pitchFamily="49" charset="0"/>
             </a:endParaRPr>
           </a:p>
           <a:p>
